--- a/sinai_billiard.pptx
+++ b/sinai_billiard.pptx
@@ -5,7 +5,7 @@
     <p:sldMasterId id="2147483648" r:id="rId1"/>
   </p:sldMasterIdLst>
   <p:notesMasterIdLst>
-    <p:notesMasterId r:id="rId15"/>
+    <p:notesMasterId r:id="rId18"/>
   </p:notesMasterIdLst>
   <p:sldIdLst>
     <p:sldId id="256" r:id="rId4"/>
@@ -19,6 +19,9 @@
     <p:sldId id="264" r:id="rId12"/>
     <p:sldId id="265" r:id="rId13"/>
     <p:sldId id="266" r:id="rId14"/>
+    <p:sldId id="267" r:id="rId15"/>
+    <p:sldId id="268" r:id="rId16"/>
+    <p:sldId id="269" r:id="rId17"/>
   </p:sldIdLst>
   <p:sldSz cx="9144000" cy="5143500"/>
   <p:notesSz cx="5143500" cy="9144000"/>
@@ -272,7 +275,7 @@
       </p:grpSpPr>
       <p:sp>
         <p:nvSpPr>
-          <p:cNvPr id="11409035" name="Google Shape;3;n"/>
+          <p:cNvPr id="457533653" name="Google Shape;3;n"/>
           <p:cNvSpPr txBox="1"/>
           <p:nvPr>
             <p:ph type="hdr" idx="2"/>
@@ -469,7 +472,7 @@
       </p:sp>
       <p:sp>
         <p:nvSpPr>
-          <p:cNvPr id="770555594" name="Google Shape;4;n"/>
+          <p:cNvPr id="71646854" name="Google Shape;4;n"/>
           <p:cNvSpPr txBox="1"/>
           <p:nvPr>
             <p:ph type="dt" idx="10"/>
@@ -666,7 +669,7 @@
       </p:sp>
       <p:sp>
         <p:nvSpPr>
-          <p:cNvPr id="48858345" name="Google Shape;5;n"/>
+          <p:cNvPr id="212463376" name="Google Shape;5;n"/>
           <p:cNvSpPr/>
           <p:nvPr>
             <p:ph type="sldImg" idx="3"/>
@@ -715,7 +718,7 @@
       </p:sp>
       <p:sp>
         <p:nvSpPr>
-          <p:cNvPr id="720148821" name="Google Shape;6;n"/>
+          <p:cNvPr id="2021270359" name="Google Shape;6;n"/>
           <p:cNvSpPr txBox="1"/>
           <p:nvPr>
             <p:ph type="body" idx="1"/>
@@ -912,7 +915,7 @@
       </p:sp>
       <p:sp>
         <p:nvSpPr>
-          <p:cNvPr id="1649475155" name="Google Shape;7;n"/>
+          <p:cNvPr id="82239593" name="Google Shape;7;n"/>
           <p:cNvSpPr txBox="1"/>
           <p:nvPr>
             <p:ph type="ftr" idx="11"/>
@@ -1109,7 +1112,7 @@
       </p:sp>
       <p:sp>
         <p:nvSpPr>
-          <p:cNvPr id="1175032241" name="Google Shape;8;n"/>
+          <p:cNvPr id="1996432432" name="Google Shape;8;n"/>
           <p:cNvSpPr txBox="1"/>
           <p:nvPr>
             <p:ph type="sldNum" idx="12"/>
@@ -1411,7 +1414,7 @@
       </p:grpSpPr>
       <p:sp>
         <p:nvSpPr>
-          <p:cNvPr id="1637646597" name="Google Shape;37;g3d81e7673dc_0_0:notes"/>
+          <p:cNvPr id="467553153" name="Google Shape;37;g3d81e7673dc_0_0:notes"/>
           <p:cNvSpPr txBox="1"/>
           <p:nvPr>
             <p:ph type="body" idx="1"/>
@@ -1448,7 +1451,7 @@
       </p:sp>
       <p:sp>
         <p:nvSpPr>
-          <p:cNvPr id="1468417821" name="Google Shape;38;g3d81e7673dc_0_0:notes"/>
+          <p:cNvPr id="1051826521" name="Google Shape;38;g3d81e7673dc_0_0:notes"/>
           <p:cNvSpPr/>
           <p:nvPr>
             <p:ph type="sldImg" idx="2"/>
@@ -1494,6 +1497,77 @@
 </file>
 
 <file path=ppt/notesSlides/notesSlide10.xml><?xml version="1.0" encoding="utf-8"?>
+<p:notes xmlns:a="http://schemas.openxmlformats.org/drawingml/2006/main" xmlns:r="http://schemas.openxmlformats.org/officeDocument/2006/relationships" xmlns:p="http://schemas.openxmlformats.org/presentationml/2006/main" xmlns:m="http://schemas.openxmlformats.org/officeDocument/2006/math" xmlns:w="http://schemas.openxmlformats.org/wordprocessingml/2006/main">
+  <p:cSld name="">
+    <p:spTree>
+      <p:nvGrpSpPr>
+        <p:cNvPr id="1" name=""/>
+        <p:cNvGrpSpPr/>
+        <p:nvPr/>
+      </p:nvGrpSpPr>
+      <p:grpSpPr bwMode="auto">
+        <a:xfrm>
+          <a:off x="0" y="0"/>
+          <a:ext cx="0" cy="0"/>
+          <a:chOff x="0" y="0"/>
+          <a:chExt cx="0" cy="0"/>
+        </a:xfrm>
+      </p:grpSpPr>
+      <p:sp>
+        <p:nvSpPr>
+          <p:cNvPr id="989946341" name="Slide Image Placeholder 1"/>
+          <p:cNvSpPr>
+            <a:spLocks noGrp="1"/>
+          </p:cNvSpPr>
+          <p:nvPr>
+            <p:ph type="sldImg" idx="3"/>
+          </p:nvPr>
+        </p:nvSpPr>
+        <p:spPr bwMode="auto"/>
+      </p:sp>
+      <p:sp>
+        <p:nvSpPr>
+          <p:cNvPr id="692455672" name="Notes Placeholder 2"/>
+          <p:cNvSpPr>
+            <a:spLocks noGrp="1"/>
+          </p:cNvSpPr>
+          <p:nvPr>
+            <p:ph type="body" idx="1"/>
+          </p:nvPr>
+        </p:nvSpPr>
+        <p:spPr bwMode="auto"/>
+        <p:txBody>
+          <a:bodyPr/>
+          <a:lstStyle/>
+          <a:p>
+            <a:pPr>
+              <a:defRPr/>
+            </a:pPr>
+            <a:endParaRPr/>
+          </a:p>
+        </p:txBody>
+      </p:sp>
+      <p:sp>
+        <p:nvSpPr>
+          <p:cNvPr id="911514939" name="Slide Number Placeholder 3"/>
+          <p:cNvSpPr>
+            <a:spLocks noGrp="1"/>
+          </p:cNvSpPr>
+          <p:nvPr>
+            <p:ph type="sldNum" idx="12"/>
+          </p:nvPr>
+        </p:nvSpPr>
+        <p:spPr bwMode="auto"/>
+      </p:sp>
+    </p:spTree>
+  </p:cSld>
+  <p:clrMapOvr>
+    <a:masterClrMapping/>
+  </p:clrMapOvr>
+</p:notes>
+</file>
+
+<file path=ppt/notesSlides/notesSlide11.xml><?xml version="1.0" encoding="utf-8"?>
 <p:notes xmlns:a="http://schemas.openxmlformats.org/drawingml/2006/main" xmlns:r="http://schemas.openxmlformats.org/officeDocument/2006/relationships" xmlns:p="http://schemas.openxmlformats.org/presentationml/2006/main" xmlns:m="http://schemas.openxmlformats.org/officeDocument/2006/math" xmlns:w="http://schemas.openxmlformats.org/wordprocessingml/2006/main" showMasterPhAnim="0" showMasterSp="0">
   <p:cSld name="">
     <p:spTree>
@@ -1512,7 +1586,7 @@
       </p:grpSpPr>
       <p:sp>
         <p:nvSpPr>
-          <p:cNvPr id="383180869" name="Google Shape;276;p13:notes"/>
+          <p:cNvPr id="1063788071" name="Google Shape;44;p3:notes"/>
           <p:cNvSpPr/>
           <p:nvPr>
             <p:ph type="sldImg" idx="2"/>
@@ -1561,7 +1635,7 @@
       </p:sp>
       <p:sp>
         <p:nvSpPr>
-          <p:cNvPr id="1919251236" name="Google Shape;277;p13:notes"/>
+          <p:cNvPr id="2688835" name="Google Shape;45;p3:notes"/>
           <p:cNvSpPr txBox="1"/>
           <p:nvPr>
             <p:ph type="body" idx="1"/>
@@ -1602,7 +1676,7 @@
       </p:sp>
       <p:sp>
         <p:nvSpPr>
-          <p:cNvPr id="1984835660" name="Google Shape;278;p13:notes"/>
+          <p:cNvPr id="1414509671" name="Google Shape;46;p3:notes"/>
           <p:cNvSpPr txBox="1"/>
           <p:nvPr>
             <p:ph type="sldNum" idx="12"/>
@@ -1653,7 +1727,7 @@
 </p:notes>
 </file>
 
-<file path=ppt/notesSlides/notesSlide11.xml><?xml version="1.0" encoding="utf-8"?>
+<file path=ppt/notesSlides/notesSlide12.xml><?xml version="1.0" encoding="utf-8"?>
 <p:notes xmlns:a="http://schemas.openxmlformats.org/drawingml/2006/main" xmlns:r="http://schemas.openxmlformats.org/officeDocument/2006/relationships" xmlns:p="http://schemas.openxmlformats.org/presentationml/2006/main" xmlns:m="http://schemas.openxmlformats.org/officeDocument/2006/math" xmlns:w="http://schemas.openxmlformats.org/wordprocessingml/2006/main" showMasterPhAnim="0" showMasterSp="0">
   <p:cSld name="">
     <p:spTree>
@@ -1672,7 +1746,327 @@
       </p:grpSpPr>
       <p:sp>
         <p:nvSpPr>
-          <p:cNvPr id="1791054293" name="Google Shape;306;g3d81e7673dc_0_110:notes"/>
+          <p:cNvPr id="287718923" name="Google Shape;224;p11:notes"/>
+          <p:cNvSpPr/>
+          <p:nvPr>
+            <p:ph type="sldImg" idx="2"/>
+          </p:nvPr>
+        </p:nvSpPr>
+        <p:spPr bwMode="auto">
+          <a:xfrm>
+            <a:off x="685800" y="1143000"/>
+            <a:ext cx="5486400" cy="3086100"/>
+          </a:xfrm>
+          <a:custGeom>
+            <a:avLst/>
+            <a:gdLst/>
+            <a:ahLst/>
+            <a:cxnLst/>
+            <a:rect l="l" t="t" r="r" b="b"/>
+            <a:pathLst>
+              <a:path w="120000" h="120000" fill="norm" stroke="1" extrusionOk="0">
+                <a:moveTo>
+                  <a:pt x="0" y="0"/>
+                </a:moveTo>
+                <a:lnTo>
+                  <a:pt x="120000" y="0"/>
+                </a:lnTo>
+                <a:lnTo>
+                  <a:pt x="120000" y="120000"/>
+                </a:lnTo>
+                <a:lnTo>
+                  <a:pt x="0" y="120000"/>
+                </a:lnTo>
+                <a:close/>
+              </a:path>
+            </a:pathLst>
+          </a:custGeom>
+          <a:noFill/>
+          <a:ln w="12700" cap="flat" cmpd="sng">
+            <a:solidFill>
+              <a:srgbClr val="000000"/>
+            </a:solidFill>
+            <a:prstDash val="solid"/>
+            <a:round/>
+            <a:headEnd type="none" w="sm" len="sm"/>
+            <a:tailEnd type="none" w="sm" len="sm"/>
+          </a:ln>
+        </p:spPr>
+      </p:sp>
+      <p:sp>
+        <p:nvSpPr>
+          <p:cNvPr id="372358961" name="Google Shape;225;p11:notes"/>
+          <p:cNvSpPr txBox="1"/>
+          <p:nvPr>
+            <p:ph type="body" idx="1"/>
+          </p:nvPr>
+        </p:nvSpPr>
+        <p:spPr bwMode="auto">
+          <a:xfrm>
+            <a:off x="685800" y="4400550"/>
+            <a:ext cx="5486400" cy="3600450"/>
+          </a:xfrm>
+          <a:prstGeom prst="rect">
+            <a:avLst/>
+          </a:prstGeom>
+          <a:noFill/>
+          <a:ln>
+            <a:noFill/>
+          </a:ln>
+        </p:spPr>
+        <p:txBody>
+          <a:bodyPr spcFirstLastPara="1" wrap="square" lIns="91425" tIns="45700" rIns="91425" bIns="45700" anchor="t" anchorCtr="0">
+            <a:noAutofit/>
+          </a:bodyPr>
+          <a:lstStyle/>
+          <a:p>
+            <a:pPr marL="0" lvl="0" indent="0" algn="l" rtl="0">
+              <a:spcBef>
+                <a:spcPts val="0"/>
+              </a:spcBef>
+              <a:spcAft>
+                <a:spcPts val="0"/>
+              </a:spcAft>
+              <a:buNone/>
+              <a:defRPr/>
+            </a:pPr>
+            <a:endParaRPr/>
+          </a:p>
+        </p:txBody>
+      </p:sp>
+      <p:sp>
+        <p:nvSpPr>
+          <p:cNvPr id="1477779213" name="Google Shape;226;p11:notes"/>
+          <p:cNvSpPr txBox="1"/>
+          <p:nvPr>
+            <p:ph type="sldNum" idx="12"/>
+          </p:nvPr>
+        </p:nvSpPr>
+        <p:spPr bwMode="auto">
+          <a:xfrm>
+            <a:off x="3884613" y="8685213"/>
+            <a:ext cx="2971800" cy="458787"/>
+          </a:xfrm>
+          <a:prstGeom prst="rect">
+            <a:avLst/>
+          </a:prstGeom>
+          <a:noFill/>
+          <a:ln>
+            <a:noFill/>
+          </a:ln>
+        </p:spPr>
+        <p:txBody>
+          <a:bodyPr spcFirstLastPara="1" wrap="square" lIns="91425" tIns="45700" rIns="91425" bIns="45700" anchor="b" anchorCtr="0">
+            <a:noAutofit/>
+          </a:bodyPr>
+          <a:lstStyle/>
+          <a:p>
+            <a:pPr marL="0" lvl="0" indent="0" algn="r" rtl="0">
+              <a:spcBef>
+                <a:spcPts val="0"/>
+              </a:spcBef>
+              <a:spcAft>
+                <a:spcPts val="0"/>
+              </a:spcAft>
+              <a:buNone/>
+              <a:defRPr/>
+            </a:pPr>
+            <a:fld id="{00000000-1234-1234-1234-123412341234}" type="slidenum">
+              <a:rPr lang="en-US"/>
+              <a:t>‹#›</a:t>
+            </a:fld>
+            <a:endParaRPr/>
+          </a:p>
+        </p:txBody>
+      </p:sp>
+    </p:spTree>
+  </p:cSld>
+  <p:clrMapOvr>
+    <a:masterClrMapping/>
+  </p:clrMapOvr>
+</p:notes>
+</file>
+
+<file path=ppt/notesSlides/notesSlide13.xml><?xml version="1.0" encoding="utf-8"?>
+<p:notes xmlns:a="http://schemas.openxmlformats.org/drawingml/2006/main" xmlns:r="http://schemas.openxmlformats.org/officeDocument/2006/relationships" xmlns:p="http://schemas.openxmlformats.org/presentationml/2006/main" xmlns:m="http://schemas.openxmlformats.org/officeDocument/2006/math" xmlns:w="http://schemas.openxmlformats.org/wordprocessingml/2006/main" showMasterPhAnim="0" showMasterSp="0">
+  <p:cSld name="">
+    <p:spTree>
+      <p:nvGrpSpPr>
+        <p:cNvPr id="1" name=""/>
+        <p:cNvGrpSpPr/>
+        <p:nvPr/>
+      </p:nvGrpSpPr>
+      <p:grpSpPr bwMode="auto">
+        <a:xfrm>
+          <a:off x="0" y="0"/>
+          <a:ext cx="0" cy="0"/>
+          <a:chOff x="0" y="0"/>
+          <a:chExt cx="0" cy="0"/>
+        </a:xfrm>
+      </p:grpSpPr>
+      <p:sp>
+        <p:nvSpPr>
+          <p:cNvPr id="562840682" name="Google Shape;276;p13:notes"/>
+          <p:cNvSpPr/>
+          <p:nvPr>
+            <p:ph type="sldImg" idx="2"/>
+          </p:nvPr>
+        </p:nvSpPr>
+        <p:spPr bwMode="auto">
+          <a:xfrm>
+            <a:off x="685800" y="1143000"/>
+            <a:ext cx="5486400" cy="3086100"/>
+          </a:xfrm>
+          <a:custGeom>
+            <a:avLst/>
+            <a:gdLst/>
+            <a:ahLst/>
+            <a:cxnLst/>
+            <a:rect l="l" t="t" r="r" b="b"/>
+            <a:pathLst>
+              <a:path w="120000" h="120000" fill="norm" stroke="1" extrusionOk="0">
+                <a:moveTo>
+                  <a:pt x="0" y="0"/>
+                </a:moveTo>
+                <a:lnTo>
+                  <a:pt x="120000" y="0"/>
+                </a:lnTo>
+                <a:lnTo>
+                  <a:pt x="120000" y="120000"/>
+                </a:lnTo>
+                <a:lnTo>
+                  <a:pt x="0" y="120000"/>
+                </a:lnTo>
+                <a:close/>
+              </a:path>
+            </a:pathLst>
+          </a:custGeom>
+          <a:noFill/>
+          <a:ln w="12700" cap="flat" cmpd="sng">
+            <a:solidFill>
+              <a:srgbClr val="000000"/>
+            </a:solidFill>
+            <a:prstDash val="solid"/>
+            <a:round/>
+            <a:headEnd type="none" w="sm" len="sm"/>
+            <a:tailEnd type="none" w="sm" len="sm"/>
+          </a:ln>
+        </p:spPr>
+      </p:sp>
+      <p:sp>
+        <p:nvSpPr>
+          <p:cNvPr id="1072463284" name="Google Shape;277;p13:notes"/>
+          <p:cNvSpPr txBox="1"/>
+          <p:nvPr>
+            <p:ph type="body" idx="1"/>
+          </p:nvPr>
+        </p:nvSpPr>
+        <p:spPr bwMode="auto">
+          <a:xfrm>
+            <a:off x="685800" y="4400550"/>
+            <a:ext cx="5486400" cy="3600450"/>
+          </a:xfrm>
+          <a:prstGeom prst="rect">
+            <a:avLst/>
+          </a:prstGeom>
+          <a:noFill/>
+          <a:ln>
+            <a:noFill/>
+          </a:ln>
+        </p:spPr>
+        <p:txBody>
+          <a:bodyPr spcFirstLastPara="1" wrap="square" lIns="91425" tIns="45700" rIns="91425" bIns="45700" anchor="t" anchorCtr="0">
+            <a:noAutofit/>
+          </a:bodyPr>
+          <a:lstStyle/>
+          <a:p>
+            <a:pPr marL="0" lvl="0" indent="0" algn="l" rtl="0">
+              <a:spcBef>
+                <a:spcPts val="0"/>
+              </a:spcBef>
+              <a:spcAft>
+                <a:spcPts val="0"/>
+              </a:spcAft>
+              <a:buNone/>
+              <a:defRPr/>
+            </a:pPr>
+            <a:endParaRPr/>
+          </a:p>
+        </p:txBody>
+      </p:sp>
+      <p:sp>
+        <p:nvSpPr>
+          <p:cNvPr id="1216389466" name="Google Shape;278;p13:notes"/>
+          <p:cNvSpPr txBox="1"/>
+          <p:nvPr>
+            <p:ph type="sldNum" idx="12"/>
+          </p:nvPr>
+        </p:nvSpPr>
+        <p:spPr bwMode="auto">
+          <a:xfrm>
+            <a:off x="3884613" y="8685213"/>
+            <a:ext cx="2971800" cy="458787"/>
+          </a:xfrm>
+          <a:prstGeom prst="rect">
+            <a:avLst/>
+          </a:prstGeom>
+          <a:noFill/>
+          <a:ln>
+            <a:noFill/>
+          </a:ln>
+        </p:spPr>
+        <p:txBody>
+          <a:bodyPr spcFirstLastPara="1" wrap="square" lIns="91425" tIns="45700" rIns="91425" bIns="45700" anchor="b" anchorCtr="0">
+            <a:noAutofit/>
+          </a:bodyPr>
+          <a:lstStyle/>
+          <a:p>
+            <a:pPr marL="0" lvl="0" indent="0" algn="r" rtl="0">
+              <a:spcBef>
+                <a:spcPts val="0"/>
+              </a:spcBef>
+              <a:spcAft>
+                <a:spcPts val="0"/>
+              </a:spcAft>
+              <a:buNone/>
+              <a:defRPr/>
+            </a:pPr>
+            <a:fld id="{00000000-1234-1234-1234-123412341234}" type="slidenum">
+              <a:rPr lang="en-US"/>
+              <a:t>‹#›</a:t>
+            </a:fld>
+            <a:endParaRPr/>
+          </a:p>
+        </p:txBody>
+      </p:sp>
+    </p:spTree>
+  </p:cSld>
+  <p:clrMapOvr>
+    <a:masterClrMapping/>
+  </p:clrMapOvr>
+</p:notes>
+</file>
+
+<file path=ppt/notesSlides/notesSlide14.xml><?xml version="1.0" encoding="utf-8"?>
+<p:notes xmlns:a="http://schemas.openxmlformats.org/drawingml/2006/main" xmlns:r="http://schemas.openxmlformats.org/officeDocument/2006/relationships" xmlns:p="http://schemas.openxmlformats.org/presentationml/2006/main" xmlns:m="http://schemas.openxmlformats.org/officeDocument/2006/math" xmlns:w="http://schemas.openxmlformats.org/wordprocessingml/2006/main" showMasterPhAnim="0" showMasterSp="0">
+  <p:cSld name="">
+    <p:spTree>
+      <p:nvGrpSpPr>
+        <p:cNvPr id="1" name=""/>
+        <p:cNvGrpSpPr/>
+        <p:nvPr/>
+      </p:nvGrpSpPr>
+      <p:grpSpPr bwMode="auto">
+        <a:xfrm>
+          <a:off x="0" y="0"/>
+          <a:ext cx="0" cy="0"/>
+          <a:chOff x="0" y="0"/>
+          <a:chExt cx="0" cy="0"/>
+        </a:xfrm>
+      </p:grpSpPr>
+      <p:sp>
+        <p:nvSpPr>
+          <p:cNvPr id="1592875427" name="Google Shape;306;g3d81e7673dc_0_110:notes"/>
           <p:cNvSpPr txBox="1"/>
           <p:nvPr>
             <p:ph type="body" idx="1"/>
@@ -1709,7 +2103,7 @@
       </p:sp>
       <p:sp>
         <p:nvSpPr>
-          <p:cNvPr id="842025296" name="Google Shape;307;g3d81e7673dc_0_110:notes"/>
+          <p:cNvPr id="1521468991" name="Google Shape;307;g3d81e7673dc_0_110:notes"/>
           <p:cNvSpPr/>
           <p:nvPr>
             <p:ph type="sldImg" idx="2"/>
@@ -1773,7 +2167,7 @@
       </p:grpSpPr>
       <p:sp>
         <p:nvSpPr>
-          <p:cNvPr id="1808577965" name="Slide Image Placeholder 1"/>
+          <p:cNvPr id="1454949636" name="Slide Image Placeholder 1"/>
           <p:cNvSpPr>
             <a:spLocks noGrp="1"/>
           </p:cNvSpPr>
@@ -1785,7 +2179,7 @@
       </p:sp>
       <p:sp>
         <p:nvSpPr>
-          <p:cNvPr id="1619827674" name="Notes Placeholder 2"/>
+          <p:cNvPr id="1345646728" name="Notes Placeholder 2"/>
           <p:cNvSpPr>
             <a:spLocks noGrp="1"/>
           </p:cNvSpPr>
@@ -1807,7 +2201,7 @@
       </p:sp>
       <p:sp>
         <p:nvSpPr>
-          <p:cNvPr id="1406002415" name="Slide Number Placeholder 3"/>
+          <p:cNvPr id="840451870" name="Slide Number Placeholder 3"/>
           <p:cNvSpPr>
             <a:spLocks noGrp="1"/>
           </p:cNvSpPr>
@@ -1844,7 +2238,7 @@
       </p:grpSpPr>
       <p:sp>
         <p:nvSpPr>
-          <p:cNvPr id="466331633" name="Slide Image Placeholder 1"/>
+          <p:cNvPr id="1775101114" name="Slide Image Placeholder 1"/>
           <p:cNvSpPr>
             <a:spLocks noGrp="1"/>
           </p:cNvSpPr>
@@ -1856,7 +2250,7 @@
       </p:sp>
       <p:sp>
         <p:nvSpPr>
-          <p:cNvPr id="826758847" name="Notes Placeholder 2"/>
+          <p:cNvPr id="855969868" name="Notes Placeholder 2"/>
           <p:cNvSpPr>
             <a:spLocks noGrp="1"/>
           </p:cNvSpPr>
@@ -1878,7 +2272,7 @@
       </p:sp>
       <p:sp>
         <p:nvSpPr>
-          <p:cNvPr id="839912140" name="Slide Number Placeholder 3"/>
+          <p:cNvPr id="741193713" name="Slide Number Placeholder 3"/>
           <p:cNvSpPr>
             <a:spLocks noGrp="1"/>
           </p:cNvSpPr>
@@ -1915,7 +2309,7 @@
       </p:grpSpPr>
       <p:sp>
         <p:nvSpPr>
-          <p:cNvPr id="1844878742" name="Slide Image Placeholder 1"/>
+          <p:cNvPr id="535195243" name="Slide Image Placeholder 1"/>
           <p:cNvSpPr>
             <a:spLocks noGrp="1"/>
           </p:cNvSpPr>
@@ -1927,7 +2321,7 @@
       </p:sp>
       <p:sp>
         <p:nvSpPr>
-          <p:cNvPr id="755412954" name="Notes Placeholder 2"/>
+          <p:cNvPr id="233415265" name="Notes Placeholder 2"/>
           <p:cNvSpPr>
             <a:spLocks noGrp="1"/>
           </p:cNvSpPr>
@@ -1949,7 +2343,7 @@
       </p:sp>
       <p:sp>
         <p:nvSpPr>
-          <p:cNvPr id="331456728" name="Slide Number Placeholder 3"/>
+          <p:cNvPr id="715037632" name="Slide Number Placeholder 3"/>
           <p:cNvSpPr>
             <a:spLocks noGrp="1"/>
           </p:cNvSpPr>
@@ -1986,7 +2380,7 @@
       </p:grpSpPr>
       <p:sp>
         <p:nvSpPr>
-          <p:cNvPr id="973111071" name="Slide Image Placeholder 1"/>
+          <p:cNvPr id="1040365857" name="Slide Image Placeholder 1"/>
           <p:cNvSpPr>
             <a:spLocks noGrp="1"/>
           </p:cNvSpPr>
@@ -1998,7 +2392,7 @@
       </p:sp>
       <p:sp>
         <p:nvSpPr>
-          <p:cNvPr id="819583549" name="Notes Placeholder 2"/>
+          <p:cNvPr id="1785640525" name="Notes Placeholder 2"/>
           <p:cNvSpPr>
             <a:spLocks noGrp="1"/>
           </p:cNvSpPr>
@@ -2020,7 +2414,7 @@
       </p:sp>
       <p:sp>
         <p:nvSpPr>
-          <p:cNvPr id="79061711" name="Slide Number Placeholder 3"/>
+          <p:cNvPr id="2035784862" name="Slide Number Placeholder 3"/>
           <p:cNvSpPr>
             <a:spLocks noGrp="1"/>
           </p:cNvSpPr>
@@ -2057,7 +2451,7 @@
       </p:grpSpPr>
       <p:sp>
         <p:nvSpPr>
-          <p:cNvPr id="385339549" name="Slide Image Placeholder 1"/>
+          <p:cNvPr id="1011476833" name="Slide Image Placeholder 1"/>
           <p:cNvSpPr>
             <a:spLocks noGrp="1"/>
           </p:cNvSpPr>
@@ -2069,7 +2463,7 @@
       </p:sp>
       <p:sp>
         <p:nvSpPr>
-          <p:cNvPr id="1325789986" name="Notes Placeholder 2"/>
+          <p:cNvPr id="919508467" name="Notes Placeholder 2"/>
           <p:cNvSpPr>
             <a:spLocks noGrp="1"/>
           </p:cNvSpPr>
@@ -2091,7 +2485,7 @@
       </p:sp>
       <p:sp>
         <p:nvSpPr>
-          <p:cNvPr id="1976033709" name="Slide Number Placeholder 3"/>
+          <p:cNvPr id="1814667540" name="Slide Number Placeholder 3"/>
           <p:cNvSpPr>
             <a:spLocks noGrp="1"/>
           </p:cNvSpPr>
@@ -2128,7 +2522,7 @@
       </p:grpSpPr>
       <p:sp>
         <p:nvSpPr>
-          <p:cNvPr id="1535500017" name="Slide Image Placeholder 1"/>
+          <p:cNvPr id="885102449" name="Slide Image Placeholder 1"/>
           <p:cNvSpPr>
             <a:spLocks noGrp="1"/>
           </p:cNvSpPr>
@@ -2140,7 +2534,7 @@
       </p:sp>
       <p:sp>
         <p:nvSpPr>
-          <p:cNvPr id="1432509691" name="Notes Placeholder 2"/>
+          <p:cNvPr id="1116360654" name="Notes Placeholder 2"/>
           <p:cNvSpPr>
             <a:spLocks noGrp="1"/>
           </p:cNvSpPr>
@@ -2162,7 +2556,7 @@
       </p:sp>
       <p:sp>
         <p:nvSpPr>
-          <p:cNvPr id="1823130915" name="Slide Number Placeholder 3"/>
+          <p:cNvPr id="498570506" name="Slide Number Placeholder 3"/>
           <p:cNvSpPr>
             <a:spLocks noGrp="1"/>
           </p:cNvSpPr>
@@ -2181,7 +2575,7 @@
 </file>
 
 <file path=ppt/notesSlides/notesSlide8.xml><?xml version="1.0" encoding="utf-8"?>
-<p:notes xmlns:a="http://schemas.openxmlformats.org/drawingml/2006/main" xmlns:r="http://schemas.openxmlformats.org/officeDocument/2006/relationships" xmlns:p="http://schemas.openxmlformats.org/presentationml/2006/main" xmlns:m="http://schemas.openxmlformats.org/officeDocument/2006/math" xmlns:w="http://schemas.openxmlformats.org/wordprocessingml/2006/main" showMasterPhAnim="0" showMasterSp="0">
+<p:notes xmlns:a="http://schemas.openxmlformats.org/drawingml/2006/main" xmlns:r="http://schemas.openxmlformats.org/officeDocument/2006/relationships" xmlns:p="http://schemas.openxmlformats.org/presentationml/2006/main" xmlns:m="http://schemas.openxmlformats.org/officeDocument/2006/math" xmlns:w="http://schemas.openxmlformats.org/wordprocessingml/2006/main">
   <p:cSld name="">
     <p:spTree>
       <p:nvGrpSpPr>
@@ -2199,88 +2593,32 @@
       </p:grpSpPr>
       <p:sp>
         <p:nvSpPr>
-          <p:cNvPr id="1667525622" name="Google Shape;44;p3:notes"/>
-          <p:cNvSpPr/>
+          <p:cNvPr id="734393223" name="Slide Image Placeholder 1"/>
+          <p:cNvSpPr>
+            <a:spLocks noGrp="1"/>
+          </p:cNvSpPr>
           <p:nvPr>
-            <p:ph type="sldImg" idx="2"/>
+            <p:ph type="sldImg" idx="3"/>
           </p:nvPr>
         </p:nvSpPr>
-        <p:spPr bwMode="auto">
-          <a:xfrm>
-            <a:off x="685800" y="1143000"/>
-            <a:ext cx="5486400" cy="3086100"/>
-          </a:xfrm>
-          <a:custGeom>
-            <a:avLst/>
-            <a:gdLst/>
-            <a:ahLst/>
-            <a:cxnLst/>
-            <a:rect l="l" t="t" r="r" b="b"/>
-            <a:pathLst>
-              <a:path w="120000" h="120000" fill="norm" stroke="1" extrusionOk="0">
-                <a:moveTo>
-                  <a:pt x="0" y="0"/>
-                </a:moveTo>
-                <a:lnTo>
-                  <a:pt x="120000" y="0"/>
-                </a:lnTo>
-                <a:lnTo>
-                  <a:pt x="120000" y="120000"/>
-                </a:lnTo>
-                <a:lnTo>
-                  <a:pt x="0" y="120000"/>
-                </a:lnTo>
-                <a:close/>
-              </a:path>
-            </a:pathLst>
-          </a:custGeom>
-          <a:noFill/>
-          <a:ln w="12700" cap="flat" cmpd="sng">
-            <a:solidFill>
-              <a:srgbClr val="000000"/>
-            </a:solidFill>
-            <a:prstDash val="solid"/>
-            <a:round/>
-            <a:headEnd type="none" w="sm" len="sm"/>
-            <a:tailEnd type="none" w="sm" len="sm"/>
-          </a:ln>
-        </p:spPr>
+        <p:spPr bwMode="auto"/>
       </p:sp>
       <p:sp>
         <p:nvSpPr>
-          <p:cNvPr id="339869708" name="Google Shape;45;p3:notes"/>
-          <p:cNvSpPr txBox="1"/>
+          <p:cNvPr id="1485599751" name="Notes Placeholder 2"/>
+          <p:cNvSpPr>
+            <a:spLocks noGrp="1"/>
+          </p:cNvSpPr>
           <p:nvPr>
             <p:ph type="body" idx="1"/>
           </p:nvPr>
         </p:nvSpPr>
-        <p:spPr bwMode="auto">
-          <a:xfrm>
-            <a:off x="685800" y="4400550"/>
-            <a:ext cx="5486400" cy="3600450"/>
-          </a:xfrm>
-          <a:prstGeom prst="rect">
-            <a:avLst/>
-          </a:prstGeom>
-          <a:noFill/>
-          <a:ln>
-            <a:noFill/>
-          </a:ln>
-        </p:spPr>
+        <p:spPr bwMode="auto"/>
         <p:txBody>
-          <a:bodyPr spcFirstLastPara="1" wrap="square" lIns="91425" tIns="45700" rIns="91425" bIns="45700" anchor="t" anchorCtr="0">
-            <a:noAutofit/>
-          </a:bodyPr>
+          <a:bodyPr/>
           <a:lstStyle/>
           <a:p>
-            <a:pPr marL="0" lvl="0" indent="0" algn="l" rtl="0">
-              <a:spcBef>
-                <a:spcPts val="0"/>
-              </a:spcBef>
-              <a:spcAft>
-                <a:spcPts val="0"/>
-              </a:spcAft>
-              <a:buNone/>
+            <a:pPr>
               <a:defRPr/>
             </a:pPr>
             <a:endParaRPr/>
@@ -2289,48 +2627,15 @@
       </p:sp>
       <p:sp>
         <p:nvSpPr>
-          <p:cNvPr id="1390659262" name="Google Shape;46;p3:notes"/>
-          <p:cNvSpPr txBox="1"/>
+          <p:cNvPr id="482544607" name="Slide Number Placeholder 3"/>
+          <p:cNvSpPr>
+            <a:spLocks noGrp="1"/>
+          </p:cNvSpPr>
           <p:nvPr>
             <p:ph type="sldNum" idx="12"/>
           </p:nvPr>
         </p:nvSpPr>
-        <p:spPr bwMode="auto">
-          <a:xfrm>
-            <a:off x="3884613" y="8685213"/>
-            <a:ext cx="2971800" cy="458787"/>
-          </a:xfrm>
-          <a:prstGeom prst="rect">
-            <a:avLst/>
-          </a:prstGeom>
-          <a:noFill/>
-          <a:ln>
-            <a:noFill/>
-          </a:ln>
-        </p:spPr>
-        <p:txBody>
-          <a:bodyPr spcFirstLastPara="1" wrap="square" lIns="91425" tIns="45700" rIns="91425" bIns="45700" anchor="b" anchorCtr="0">
-            <a:noAutofit/>
-          </a:bodyPr>
-          <a:lstStyle/>
-          <a:p>
-            <a:pPr marL="0" lvl="0" indent="0" algn="r" rtl="0">
-              <a:spcBef>
-                <a:spcPts val="0"/>
-              </a:spcBef>
-              <a:spcAft>
-                <a:spcPts val="0"/>
-              </a:spcAft>
-              <a:buNone/>
-              <a:defRPr/>
-            </a:pPr>
-            <a:fld id="{00000000-1234-1234-1234-123412341234}" type="slidenum">
-              <a:rPr lang="en-US"/>
-              <a:t>‹#›</a:t>
-            </a:fld>
-            <a:endParaRPr/>
-          </a:p>
-        </p:txBody>
+        <p:spPr bwMode="auto"/>
       </p:sp>
     </p:spTree>
   </p:cSld>
@@ -2341,7 +2646,7 @@
 </file>
 
 <file path=ppt/notesSlides/notesSlide9.xml><?xml version="1.0" encoding="utf-8"?>
-<p:notes xmlns:a="http://schemas.openxmlformats.org/drawingml/2006/main" xmlns:r="http://schemas.openxmlformats.org/officeDocument/2006/relationships" xmlns:p="http://schemas.openxmlformats.org/presentationml/2006/main" xmlns:m="http://schemas.openxmlformats.org/officeDocument/2006/math" xmlns:w="http://schemas.openxmlformats.org/wordprocessingml/2006/main" showMasterPhAnim="0" showMasterSp="0">
+<p:notes xmlns:a="http://schemas.openxmlformats.org/drawingml/2006/main" xmlns:r="http://schemas.openxmlformats.org/officeDocument/2006/relationships" xmlns:p="http://schemas.openxmlformats.org/presentationml/2006/main" xmlns:m="http://schemas.openxmlformats.org/officeDocument/2006/math" xmlns:w="http://schemas.openxmlformats.org/wordprocessingml/2006/main">
   <p:cSld name="">
     <p:spTree>
       <p:nvGrpSpPr>
@@ -2359,88 +2664,32 @@
       </p:grpSpPr>
       <p:sp>
         <p:nvSpPr>
-          <p:cNvPr id="612778713" name="Google Shape;224;p11:notes"/>
-          <p:cNvSpPr/>
+          <p:cNvPr id="56081419" name="Slide Image Placeholder 1"/>
+          <p:cNvSpPr>
+            <a:spLocks noGrp="1"/>
+          </p:cNvSpPr>
           <p:nvPr>
-            <p:ph type="sldImg" idx="2"/>
+            <p:ph type="sldImg" idx="3"/>
           </p:nvPr>
         </p:nvSpPr>
-        <p:spPr bwMode="auto">
-          <a:xfrm>
-            <a:off x="685800" y="1143000"/>
-            <a:ext cx="5486400" cy="3086100"/>
-          </a:xfrm>
-          <a:custGeom>
-            <a:avLst/>
-            <a:gdLst/>
-            <a:ahLst/>
-            <a:cxnLst/>
-            <a:rect l="l" t="t" r="r" b="b"/>
-            <a:pathLst>
-              <a:path w="120000" h="120000" fill="norm" stroke="1" extrusionOk="0">
-                <a:moveTo>
-                  <a:pt x="0" y="0"/>
-                </a:moveTo>
-                <a:lnTo>
-                  <a:pt x="120000" y="0"/>
-                </a:lnTo>
-                <a:lnTo>
-                  <a:pt x="120000" y="120000"/>
-                </a:lnTo>
-                <a:lnTo>
-                  <a:pt x="0" y="120000"/>
-                </a:lnTo>
-                <a:close/>
-              </a:path>
-            </a:pathLst>
-          </a:custGeom>
-          <a:noFill/>
-          <a:ln w="12700" cap="flat" cmpd="sng">
-            <a:solidFill>
-              <a:srgbClr val="000000"/>
-            </a:solidFill>
-            <a:prstDash val="solid"/>
-            <a:round/>
-            <a:headEnd type="none" w="sm" len="sm"/>
-            <a:tailEnd type="none" w="sm" len="sm"/>
-          </a:ln>
-        </p:spPr>
+        <p:spPr bwMode="auto"/>
       </p:sp>
       <p:sp>
         <p:nvSpPr>
-          <p:cNvPr id="1208619574" name="Google Shape;225;p11:notes"/>
-          <p:cNvSpPr txBox="1"/>
+          <p:cNvPr id="1981756883" name="Notes Placeholder 2"/>
+          <p:cNvSpPr>
+            <a:spLocks noGrp="1"/>
+          </p:cNvSpPr>
           <p:nvPr>
             <p:ph type="body" idx="1"/>
           </p:nvPr>
         </p:nvSpPr>
-        <p:spPr bwMode="auto">
-          <a:xfrm>
-            <a:off x="685800" y="4400550"/>
-            <a:ext cx="5486400" cy="3600450"/>
-          </a:xfrm>
-          <a:prstGeom prst="rect">
-            <a:avLst/>
-          </a:prstGeom>
-          <a:noFill/>
-          <a:ln>
-            <a:noFill/>
-          </a:ln>
-        </p:spPr>
+        <p:spPr bwMode="auto"/>
         <p:txBody>
-          <a:bodyPr spcFirstLastPara="1" wrap="square" lIns="91425" tIns="45700" rIns="91425" bIns="45700" anchor="t" anchorCtr="0">
-            <a:noAutofit/>
-          </a:bodyPr>
+          <a:bodyPr/>
           <a:lstStyle/>
           <a:p>
-            <a:pPr marL="0" lvl="0" indent="0" algn="l" rtl="0">
-              <a:spcBef>
-                <a:spcPts val="0"/>
-              </a:spcBef>
-              <a:spcAft>
-                <a:spcPts val="0"/>
-              </a:spcAft>
-              <a:buNone/>
+            <a:pPr>
               <a:defRPr/>
             </a:pPr>
             <a:endParaRPr/>
@@ -2449,48 +2698,15 @@
       </p:sp>
       <p:sp>
         <p:nvSpPr>
-          <p:cNvPr id="1356731228" name="Google Shape;226;p11:notes"/>
-          <p:cNvSpPr txBox="1"/>
+          <p:cNvPr id="1755239241" name="Slide Number Placeholder 3"/>
+          <p:cNvSpPr>
+            <a:spLocks noGrp="1"/>
+          </p:cNvSpPr>
           <p:nvPr>
             <p:ph type="sldNum" idx="12"/>
           </p:nvPr>
         </p:nvSpPr>
-        <p:spPr bwMode="auto">
-          <a:xfrm>
-            <a:off x="3884613" y="8685213"/>
-            <a:ext cx="2971800" cy="458787"/>
-          </a:xfrm>
-          <a:prstGeom prst="rect">
-            <a:avLst/>
-          </a:prstGeom>
-          <a:noFill/>
-          <a:ln>
-            <a:noFill/>
-          </a:ln>
-        </p:spPr>
-        <p:txBody>
-          <a:bodyPr spcFirstLastPara="1" wrap="square" lIns="91425" tIns="45700" rIns="91425" bIns="45700" anchor="b" anchorCtr="0">
-            <a:noAutofit/>
-          </a:bodyPr>
-          <a:lstStyle/>
-          <a:p>
-            <a:pPr marL="0" lvl="0" indent="0" algn="r" rtl="0">
-              <a:spcBef>
-                <a:spcPts val="0"/>
-              </a:spcBef>
-              <a:spcAft>
-                <a:spcPts val="0"/>
-              </a:spcAft>
-              <a:buNone/>
-              <a:defRPr/>
-            </a:pPr>
-            <a:fld id="{00000000-1234-1234-1234-123412341234}" type="slidenum">
-              <a:rPr lang="en-US"/>
-              <a:t>‹#›</a:t>
-            </a:fld>
-            <a:endParaRPr/>
-          </a:p>
-        </p:txBody>
+        <p:spPr bwMode="auto"/>
       </p:sp>
     </p:spTree>
   </p:cSld>
@@ -2561,7 +2777,7 @@
       </p:grpSpPr>
       <p:sp>
         <p:nvSpPr>
-          <p:cNvPr id="19972868" name="Google Shape;12;p3"/>
+          <p:cNvPr id="832290106" name="Google Shape;12;p3"/>
           <p:cNvSpPr txBox="1"/>
           <p:nvPr>
             <p:ph type="ctrTitle"/>
@@ -2706,7 +2922,7 @@
       </p:sp>
       <p:sp>
         <p:nvSpPr>
-          <p:cNvPr id="585490385" name="Google Shape;13;p3"/>
+          <p:cNvPr id="1885294531" name="Google Shape;13;p3"/>
           <p:cNvSpPr txBox="1"/>
           <p:nvPr>
             <p:ph type="subTitle" idx="1"/>
@@ -2898,7 +3114,7 @@
       </p:sp>
       <p:sp>
         <p:nvSpPr>
-          <p:cNvPr id="1245427407" name="Google Shape;14;p3"/>
+          <p:cNvPr id="900233619" name="Google Shape;14;p3"/>
           <p:cNvSpPr txBox="1"/>
           <p:nvPr>
             <p:ph type="body" idx="2"/>
@@ -3106,7 +3322,7 @@
       </p:sp>
       <p:sp>
         <p:nvSpPr>
-          <p:cNvPr id="775561868" name="Google Shape;15;p3"/>
+          <p:cNvPr id="67584568" name="Google Shape;15;p3"/>
           <p:cNvSpPr txBox="1"/>
           <p:nvPr>
             <p:ph type="body" idx="3"/>
@@ -3298,7 +3514,7 @@
       </p:sp>
       <p:pic>
         <p:nvPicPr>
-          <p:cNvPr id="480771223" name="Google Shape;16;p3" descr="\\ad.pu.ru\RECTORAT\УСО\ДИЗАЙНЕРЫ\300 лет СПбГУ\300 лет логотипы все варианты\Logo 300 let classic white.png"/>
+          <p:cNvPr id="1877694212" name="Google Shape;16;p3" descr="\\ad.pu.ru\RECTORAT\УСО\ДИЗАЙНЕРЫ\300 лет СПбГУ\300 лет логотипы все варианты\Logo 300 let classic white.png"/>
           <p:cNvPicPr/>
           <p:nvPr/>
         </p:nvPicPr>
@@ -3350,7 +3566,7 @@
       </p:grpSpPr>
       <p:pic>
         <p:nvPicPr>
-          <p:cNvPr id="12335970" name="Google Shape;18;p4"/>
+          <p:cNvPr id="1422323614" name="Google Shape;18;p4"/>
           <p:cNvPicPr/>
           <p:nvPr/>
         </p:nvPicPr>
@@ -3377,7 +3593,7 @@
       </p:pic>
       <p:sp>
         <p:nvSpPr>
-          <p:cNvPr id="1123535474" name="Google Shape;19;p4"/>
+          <p:cNvPr id="945458401" name="Google Shape;19;p4"/>
           <p:cNvSpPr/>
           <p:nvPr/>
         </p:nvSpPr>
@@ -3425,7 +3641,7 @@
       </p:sp>
       <p:grpSp>
         <p:nvGrpSpPr>
-          <p:cNvPr id="239802344" name="Google Shape;20;p4"/>
+          <p:cNvPr id="926545948" name="Google Shape;20;p4"/>
           <p:cNvGrpSpPr/>
           <p:nvPr/>
         </p:nvGrpSpPr>
@@ -3980,7 +4196,7 @@
       </p:grpSp>
       <p:sp>
         <p:nvSpPr>
-          <p:cNvPr id="704719155" name="Google Shape;31;p4"/>
+          <p:cNvPr id="1567940037" name="Google Shape;31;p4"/>
           <p:cNvSpPr txBox="1"/>
           <p:nvPr>
             <p:ph type="body" idx="1"/>
@@ -4188,7 +4404,7 @@
       </p:sp>
       <p:sp>
         <p:nvSpPr>
-          <p:cNvPr id="192025064" name="Google Shape;32;p4"/>
+          <p:cNvPr id="871918032" name="Google Shape;32;p4"/>
           <p:cNvSpPr txBox="1"/>
           <p:nvPr/>
         </p:nvSpPr>
@@ -4253,7 +4469,7 @@
       </p:sp>
       <p:pic>
         <p:nvPicPr>
-          <p:cNvPr id="1255053431" name="Google Shape;33;p4"/>
+          <p:cNvPr id="648509819" name="Google Shape;33;p4"/>
           <p:cNvPicPr/>
           <p:nvPr/>
         </p:nvPicPr>
@@ -4280,7 +4496,7 @@
       </p:pic>
       <p:sp>
         <p:nvSpPr>
-          <p:cNvPr id="1615351044" name="Google Shape;34;p4"/>
+          <p:cNvPr id="1224308659" name="Google Shape;34;p4"/>
           <p:cNvSpPr txBox="1"/>
           <p:nvPr>
             <p:ph type="body" idx="2"/>
@@ -4488,7 +4704,7 @@
       </p:sp>
       <p:sp>
         <p:nvSpPr>
-          <p:cNvPr id="1197348136" name="Google Shape;35;p4"/>
+          <p:cNvPr id="606277701" name="Google Shape;35;p4"/>
           <p:cNvSpPr/>
           <p:nvPr/>
         </p:nvSpPr>
@@ -5254,7 +5470,7 @@
       </p:grpSpPr>
       <p:sp>
         <p:nvSpPr>
-          <p:cNvPr id="1361488543" name="Google Shape;40;p5"/>
+          <p:cNvPr id="634495206" name="Google Shape;40;p5"/>
           <p:cNvSpPr txBox="1"/>
           <p:nvPr>
             <p:ph type="ctrTitle"/>
@@ -5339,7 +5555,7 @@
       </p:sp>
       <p:sp>
         <p:nvSpPr>
-          <p:cNvPr id="1570775176" name="Google Shape;41;p5"/>
+          <p:cNvPr id="1309950032" name="Google Shape;41;p5"/>
           <p:cNvSpPr txBox="1"/>
           <p:nvPr>
             <p:ph type="body" idx="2"/>
@@ -5462,7 +5678,7 @@
       </p:sp>
       <p:sp>
         <p:nvSpPr>
-          <p:cNvPr id="2111618241" name="Google Shape;42;p5"/>
+          <p:cNvPr id="1070035386" name="Google Shape;42;p5"/>
           <p:cNvSpPr txBox="1"/>
           <p:nvPr>
             <p:ph type="body" idx="3"/>
@@ -5554,7 +5770,356 @@
       </p:grpSpPr>
       <p:pic>
         <p:nvPicPr>
-          <p:cNvPr id="1756690612" name="Google Shape;280;p16" descr="/home/claude/logo_300spbu.png"/>
+          <p:cNvPr id="121966309" name="Picture 1" descr="image12.png"/>
+          <p:cNvPicPr>
+            <a:picLocks noChangeAspect="1"/>
+          </p:cNvPicPr>
+          <p:nvPr/>
+        </p:nvPicPr>
+        <p:blipFill rotWithShape="1">
+          <a:blip r:embed="rId3"/>
+          <a:stretch/>
+        </p:blipFill>
+        <p:spPr bwMode="auto">
+          <a:xfrm>
+            <a:off x="7498080" y="137160"/>
+            <a:ext cx="1463040" cy="475488"/>
+          </a:xfrm>
+          <a:prstGeom prst="rect">
+            <a:avLst/>
+          </a:prstGeom>
+        </p:spPr>
+      </p:pic>
+      <p:sp>
+        <p:nvSpPr>
+          <p:cNvPr id="546475986" name="Rectangle 2"/>
+          <p:cNvSpPr/>
+          <p:nvPr/>
+        </p:nvSpPr>
+        <p:spPr bwMode="auto">
+          <a:xfrm>
+            <a:off x="8686800" y="4846320"/>
+            <a:ext cx="274320" cy="182880"/>
+          </a:xfrm>
+          <a:prstGeom prst="rect">
+            <a:avLst/>
+          </a:prstGeom>
+          <a:solidFill>
+            <a:srgbClr val="C0272D"/>
+          </a:solidFill>
+          <a:ln w="12700">
+            <a:solidFill>
+              <a:srgbClr val="C0272D"/>
+            </a:solidFill>
+            <a:prstDash val="solid"/>
+          </a:ln>
+        </p:spPr>
+        <p:txBody>
+          <a:bodyPr rtlCol="0" anchor="ctr"/>
+          <a:lstStyle/>
+          <a:p>
+            <a:pPr algn="ctr">
+              <a:defRPr/>
+            </a:pPr>
+            <a:endParaRPr/>
+          </a:p>
+        </p:txBody>
+      </p:sp>
+      <p:sp>
+        <p:nvSpPr>
+          <p:cNvPr id="775875140" name="TextBox 3"/>
+          <p:cNvSpPr txBox="1"/>
+          <p:nvPr/>
+        </p:nvSpPr>
+        <p:spPr bwMode="auto">
+          <a:xfrm>
+            <a:off x="8641080" y="4800600"/>
+            <a:ext cx="365760" cy="228600"/>
+          </a:xfrm>
+          <a:prstGeom prst="rect">
+            <a:avLst/>
+          </a:prstGeom>
+          <a:noFill/>
+        </p:spPr>
+        <p:txBody>
+          <a:bodyPr wrap="square" lIns="91422" tIns="45696" rIns="91422" bIns="45696" anchor="ctr">
+            <a:noAutofit/>
+          </a:bodyPr>
+          <a:lstStyle/>
+          <a:p>
+            <a:pPr marL="0" marR="0" indent="0" algn="ctr" rtl="0">
+              <a:spcBef>
+                <a:spcPts val="0"/>
+              </a:spcBef>
+              <a:spcAft>
+                <a:spcPts val="0"/>
+              </a:spcAft>
+              <a:buNone/>
+              <a:defRPr/>
+            </a:pPr>
+            <a:r>
+              <a:rPr sz="1000" b="1" i="0">
+                <a:solidFill>
+                  <a:srgbClr val="FFFFFF"/>
+                </a:solidFill>
+                <a:latin typeface="Calibri"/>
+                <a:ea typeface="Calibri"/>
+                <a:cs typeface="Calibri"/>
+              </a:rPr>
+              <a:t>3</a:t>
+            </a:r>
+            <a:endParaRPr/>
+          </a:p>
+        </p:txBody>
+      </p:sp>
+      <p:sp>
+        <p:nvSpPr>
+          <p:cNvPr id="2013004054" name="TextBox 4"/>
+          <p:cNvSpPr txBox="1"/>
+          <p:nvPr/>
+        </p:nvSpPr>
+        <p:spPr bwMode="auto">
+          <a:xfrm>
+            <a:off x="594360" y="182880"/>
+            <a:ext cx="6858000" cy="502920"/>
+          </a:xfrm>
+          <a:prstGeom prst="rect">
+            <a:avLst/>
+          </a:prstGeom>
+          <a:noFill/>
+        </p:spPr>
+        <p:txBody>
+          <a:bodyPr wrap="square" lIns="91422" tIns="45696" rIns="91422" bIns="45696" anchor="ctr">
+            <a:noAutofit/>
+          </a:bodyPr>
+          <a:lstStyle/>
+          <a:p>
+            <a:pPr marL="0" marR="0" indent="0" algn="l" rtl="0">
+              <a:spcBef>
+                <a:spcPts val="0"/>
+              </a:spcBef>
+              <a:spcAft>
+                <a:spcPts val="0"/>
+              </a:spcAft>
+              <a:buNone/>
+              <a:defRPr/>
+            </a:pPr>
+            <a:r>
+              <a:rPr lang="ru-RU" sz="1800" b="1" i="0" u="none" strike="noStrike" cap="none" spc="0">
+                <a:solidFill>
+                  <a:srgbClr val="C0272D"/>
+                </a:solidFill>
+                <a:latin typeface="Open Sans"/>
+                <a:ea typeface="Open Sans"/>
+                <a:cs typeface="Open Sans"/>
+              </a:rPr>
+              <a:t>Визуализация </a:t>
+            </a:r>
+            <a:r>
+              <a:rPr lang="ru-RU" sz="1800" b="1" i="0" u="none" strike="noStrike" cap="none" spc="0">
+                <a:solidFill>
+                  <a:srgbClr val="C0272D"/>
+                </a:solidFill>
+                <a:latin typeface="Open Sans"/>
+                <a:ea typeface="Open Sans"/>
+                <a:cs typeface="Open Sans"/>
+              </a:rPr>
+              <a:t>эллиптических и гиперболических каустик на эллиптическом бильярде</a:t>
+            </a:r>
+            <a:r>
+              <a:rPr lang="ru-RU" sz="1800" b="1" i="0" u="none" strike="noStrike" cap="none" spc="0">
+                <a:solidFill>
+                  <a:srgbClr val="C0272D"/>
+                </a:solidFill>
+                <a:latin typeface="Open Sans"/>
+                <a:ea typeface="Open Sans"/>
+                <a:cs typeface="Open Sans"/>
+              </a:rPr>
+              <a:t>.</a:t>
+            </a:r>
+            <a:endParaRPr lang="ru-RU" sz="1800" b="1" i="0" u="none" strike="noStrike" cap="none" spc="0">
+              <a:solidFill>
+                <a:srgbClr val="C0272D"/>
+              </a:solidFill>
+              <a:latin typeface="Open Sans"/>
+              <a:ea typeface="Open Sans"/>
+              <a:cs typeface="Open Sans"/>
+            </a:endParaRPr>
+          </a:p>
+        </p:txBody>
+      </p:sp>
+      <p:sp>
+        <p:nvSpPr>
+          <p:cNvPr id="1355156706" name="Rectangle 5"/>
+          <p:cNvSpPr/>
+          <p:nvPr/>
+        </p:nvSpPr>
+        <p:spPr bwMode="auto">
+          <a:xfrm>
+            <a:off x="457200" y="201168"/>
+            <a:ext cx="73152" cy="457200"/>
+          </a:xfrm>
+          <a:prstGeom prst="rect">
+            <a:avLst/>
+          </a:prstGeom>
+          <a:solidFill>
+            <a:srgbClr val="C0272D"/>
+          </a:solidFill>
+          <a:ln w="12700">
+            <a:solidFill>
+              <a:srgbClr val="C0272D"/>
+            </a:solidFill>
+            <a:prstDash val="solid"/>
+          </a:ln>
+        </p:spPr>
+        <p:txBody>
+          <a:bodyPr rtlCol="0" anchor="ctr"/>
+          <a:lstStyle/>
+          <a:p>
+            <a:pPr algn="ctr">
+              <a:defRPr/>
+            </a:pPr>
+            <a:endParaRPr/>
+          </a:p>
+        </p:txBody>
+      </p:sp>
+      <p:pic>
+        <p:nvPicPr>
+          <p:cNvPr id="223958946" name=""/>
+          <p:cNvPicPr>
+            <a:picLocks noChangeAspect="1"/>
+          </p:cNvPicPr>
+          <p:nvPr/>
+        </p:nvPicPr>
+        <p:blipFill rotWithShape="1">
+          <a:blip r:embed="rId4"/>
+          <a:stretch/>
+        </p:blipFill>
+        <p:spPr bwMode="auto">
+          <a:xfrm flipH="0" flipV="0">
+            <a:off x="1019310" y="989504"/>
+            <a:ext cx="7412832" cy="3347730"/>
+          </a:xfrm>
+          <a:prstGeom prst="rect">
+            <a:avLst/>
+          </a:prstGeom>
+        </p:spPr>
+      </p:pic>
+      <p:sp>
+        <p:nvSpPr>
+          <p:cNvPr id="2132413112" name=""/>
+          <p:cNvSpPr txBox="1"/>
+          <p:nvPr/>
+        </p:nvSpPr>
+        <p:spPr bwMode="auto">
+          <a:xfrm rot="0" flipH="0" flipV="0">
+            <a:off x="570430" y="4280775"/>
+            <a:ext cx="8113519" cy="305159"/>
+          </a:xfrm>
+          <a:prstGeom prst="rect">
+            <a:avLst/>
+          </a:prstGeom>
+          <a:noFill/>
+        </p:spPr>
+        <p:txBody>
+          <a:bodyPr vertOverflow="overflow" horzOverflow="overflow" vert="horz" wrap="square" lIns="91440" tIns="45720" rIns="91440" bIns="45720" numCol="1" spcCol="0" rtlCol="0" fromWordArt="0" anchor="t" anchorCtr="0" forceAA="0" upright="0" compatLnSpc="0">
+            <a:spAutoFit/>
+          </a:bodyPr>
+          <a:p>
+            <a:pPr>
+              <a:defRPr/>
+            </a:pPr>
+            <a:r>
+              <a:rPr lang="ru-RU">
+                <a:highlight>
+                  <a:srgbClr val="FFFF00"/>
+                </a:highlight>
+              </a:rPr>
+              <a:t>Что то в этом роде. В первом случае нет пересечения траекторий с </a:t>
+            </a:r>
+            <a:r>
+              <a:rPr lang="en-US">
+                <a:highlight>
+                  <a:srgbClr val="FFFF00"/>
+                </a:highlight>
+              </a:rPr>
+              <a:t>F1F2</a:t>
+            </a:r>
+            <a:r>
+              <a:rPr lang="ru-RU">
+                <a:highlight>
+                  <a:srgbClr val="FFFF00"/>
+                </a:highlight>
+              </a:rPr>
+              <a:t>, во втором —</a:t>
+            </a:r>
+            <a:r>
+              <a:rPr lang="en-US">
+                <a:highlight>
+                  <a:srgbClr val="FFFF00"/>
+                </a:highlight>
+              </a:rPr>
+              <a:t> </a:t>
+            </a:r>
+            <a:r>
+              <a:rPr lang="ru-RU">
+                <a:highlight>
+                  <a:srgbClr val="FFFF00"/>
+                </a:highlight>
+              </a:rPr>
+              <a:t>есть.</a:t>
+            </a:r>
+            <a:endParaRPr>
+              <a:highlight>
+                <a:srgbClr val="FFFF00"/>
+              </a:highlight>
+            </a:endParaRPr>
+          </a:p>
+        </p:txBody>
+      </p:sp>
+    </p:spTree>
+  </p:cSld>
+  <p:clrMapOvr>
+    <a:masterClrMapping/>
+  </p:clrMapOvr>
+  <mc:AlternateContent xmlns:mc="http://schemas.openxmlformats.org/markup-compatibility/2006">
+    <mc:Choice xmlns:p159="http://schemas.microsoft.com/office/powerpoint/2015/09/main" xmlns:p14="http://schemas.microsoft.com/office/powerpoint/2010/main" Requires="p159">
+      <p:transition p14:dur="500" advClick="1"/>
+    </mc:Choice>
+    <mc:Fallback>
+      <p:transition advClick="1"/>
+    </mc:Fallback>
+  </mc:AlternateContent>
+</p:sld>
+</file>
+
+<file path=ppt/slides/slide11.xml><?xml version="1.0" encoding="utf-8"?>
+<p:sld xmlns:a="http://schemas.openxmlformats.org/drawingml/2006/main" xmlns:r="http://schemas.openxmlformats.org/officeDocument/2006/relationships" xmlns:p="http://schemas.openxmlformats.org/presentationml/2006/main" xmlns:m="http://schemas.openxmlformats.org/officeDocument/2006/math" xmlns:w="http://schemas.openxmlformats.org/wordprocessingml/2006/main" xmlns:mc="http://schemas.openxmlformats.org/markup-compatibility/2006" showMasterPhAnim="0" showMasterSp="1" show="1">
+  <p:cSld name="">
+    <p:bg>
+      <p:bgPr shadeToTitle="0">
+        <a:solidFill>
+          <a:srgbClr val="FFFFFF"/>
+        </a:solidFill>
+      </p:bgPr>
+    </p:bg>
+    <p:spTree>
+      <p:nvGrpSpPr>
+        <p:cNvPr id="1" name=""/>
+        <p:cNvGrpSpPr/>
+        <p:nvPr/>
+      </p:nvGrpSpPr>
+      <p:grpSpPr bwMode="auto">
+        <a:xfrm>
+          <a:off x="0" y="0"/>
+          <a:ext cx="0" cy="0"/>
+          <a:chOff x="0" y="0"/>
+          <a:chExt cx="0" cy="0"/>
+        </a:xfrm>
+      </p:grpSpPr>
+      <p:pic>
+        <p:nvPicPr>
+          <p:cNvPr id="494317167" name="Google Shape;48;p6" descr="/home/claude/logo_300spbu.png"/>
           <p:cNvPicPr/>
           <p:nvPr/>
         </p:nvPicPr>
@@ -5581,7 +6146,7 @@
       </p:pic>
       <p:sp>
         <p:nvSpPr>
-          <p:cNvPr id="57112230" name="Google Shape;281;p16"/>
+          <p:cNvPr id="1461693437" name="Google Shape;49;p6"/>
           <p:cNvSpPr/>
           <p:nvPr/>
         </p:nvSpPr>
@@ -5622,16 +6187,13 @@
               <a:buNone/>
               <a:defRPr/>
             </a:pPr>
-            <a:endParaRPr>
-              <a:latin typeface="Open Sans"/>
-              <a:cs typeface="Open Sans"/>
-            </a:endParaRPr>
+            <a:endParaRPr/>
           </a:p>
         </p:txBody>
       </p:sp>
       <p:sp>
         <p:nvSpPr>
-          <p:cNvPr id="325694237" name="Google Shape;282;p16"/>
+          <p:cNvPr id="535328658" name="Google Shape;50;p6"/>
           <p:cNvSpPr/>
           <p:nvPr/>
         </p:nvSpPr>
@@ -5670,47 +6232,37 @@
               <a:defRPr/>
             </a:pPr>
             <a:r>
-              <a:rPr lang="en-US" sz="1000" b="1" i="0" u="none" strike="noStrike" cap="none">
+              <a:rPr lang="ru-RU" sz="1000" b="1" i="0" u="none" strike="noStrike" cap="none">
                 <a:solidFill>
                   <a:srgbClr val="FFFFFF"/>
                 </a:solidFill>
-                <a:latin typeface="Open Sans"/>
-                <a:ea typeface="Open Sans"/>
-                <a:cs typeface="Open Sans"/>
-              </a:rPr>
-              <a:t>1</a:t>
-            </a:r>
-            <a:r>
-              <a:rPr lang="ru-RU" sz="1000" b="1" i="0" u="none" strike="noStrike" cap="none">
-                <a:solidFill>
-                  <a:srgbClr val="FFFFFF"/>
-                </a:solidFill>
-                <a:latin typeface="Open Sans"/>
-                <a:ea typeface="Open Sans"/>
-                <a:cs typeface="Open Sans"/>
-              </a:rPr>
-              <a:t>2</a:t>
+                <a:latin typeface="Calibri"/>
+                <a:ea typeface="Calibri"/>
+                <a:cs typeface="Calibri"/>
+              </a:rPr>
+              <a:t>5</a:t>
             </a:r>
             <a:endParaRPr sz="1000" b="0" i="0" u="none" strike="noStrike" cap="none">
               <a:solidFill>
                 <a:schemeClr val="dk1"/>
               </a:solidFill>
-              <a:latin typeface="Open Sans"/>
-              <a:cs typeface="Open Sans"/>
+              <a:latin typeface="Calibri"/>
+              <a:ea typeface="Calibri"/>
+              <a:cs typeface="Calibri"/>
             </a:endParaRPr>
           </a:p>
         </p:txBody>
       </p:sp>
       <p:sp>
         <p:nvSpPr>
-          <p:cNvPr id="748795615" name="Google Shape;283;p16"/>
+          <p:cNvPr id="651458084" name="Google Shape;51;p6"/>
           <p:cNvSpPr/>
           <p:nvPr/>
         </p:nvSpPr>
         <p:spPr bwMode="auto">
-          <a:xfrm>
-            <a:off x="594360" y="182880"/>
-            <a:ext cx="7315200" cy="502920"/>
+          <a:xfrm flipH="0" flipV="0">
+            <a:off x="530351" y="182880"/>
+            <a:ext cx="6784848" cy="502920"/>
           </a:xfrm>
           <a:prstGeom prst="rect">
             <a:avLst/>
@@ -5721,7 +6273,7 @@
           </a:ln>
         </p:spPr>
         <p:txBody>
-          <a:bodyPr spcFirstLastPara="1" wrap="square" lIns="91425" tIns="45700" rIns="91425" bIns="45700" anchor="ctr" anchorCtr="0">
+          <a:bodyPr spcFirstLastPara="1" wrap="square" lIns="91423" tIns="45699" rIns="91423" bIns="45699" anchor="ctr" anchorCtr="0">
             <a:noAutofit/>
           </a:bodyPr>
           <a:lstStyle/>
@@ -5736,13 +6288,13 @@
               <a:buClr>
                 <a:srgbClr val="C0272D"/>
               </a:buClr>
-              <a:buSzPts val="2600"/>
+              <a:buSzPts val="2800"/>
               <a:buFont typeface="Calibri"/>
               <a:buNone/>
               <a:defRPr/>
             </a:pPr>
             <a:r>
-              <a:rPr lang="ru-RU" sz="2600" b="1" i="0" u="none" strike="noStrike" cap="none">
+              <a:rPr lang="ru-RU" sz="2800" b="1" i="0" u="none" strike="noStrike" cap="none">
                 <a:solidFill>
                   <a:srgbClr val="C0272D"/>
                 </a:solidFill>
@@ -5750,9 +6302,9 @@
                 <a:ea typeface="Open Sans"/>
                 <a:cs typeface="Open Sans"/>
               </a:rPr>
-              <a:t>Выводы.</a:t>
-            </a:r>
-            <a:endParaRPr sz="2600" b="0" i="0" u="none" strike="noStrike" cap="none">
+              <a:t>Постановка задачи.</a:t>
+            </a:r>
+            <a:endParaRPr sz="2800" b="0" i="0" u="none" strike="noStrike" cap="none">
               <a:solidFill>
                 <a:schemeClr val="dk1"/>
               </a:solidFill>
@@ -5764,7 +6316,7 @@
       </p:sp>
       <p:sp>
         <p:nvSpPr>
-          <p:cNvPr id="2115598156" name="Google Shape;284;p16"/>
+          <p:cNvPr id="680640562" name="Google Shape;52;p6"/>
           <p:cNvSpPr/>
           <p:nvPr/>
         </p:nvSpPr>
@@ -5805,6 +6357,1406 @@
               <a:buNone/>
               <a:defRPr/>
             </a:pPr>
+            <a:endParaRPr/>
+          </a:p>
+        </p:txBody>
+      </p:sp>
+      <p:sp>
+        <p:nvSpPr>
+          <p:cNvPr id="1495874177" name="Google Shape;53;p6"/>
+          <p:cNvSpPr/>
+          <p:nvPr/>
+        </p:nvSpPr>
+        <p:spPr bwMode="auto">
+          <a:xfrm flipH="0" flipV="0">
+            <a:off x="457200" y="754760"/>
+            <a:ext cx="8229600" cy="2731970"/>
+          </a:xfrm>
+          <a:prstGeom prst="rect">
+            <a:avLst/>
+          </a:prstGeom>
+          <a:solidFill>
+            <a:srgbClr val="E8D5D5"/>
+          </a:solidFill>
+          <a:ln w="12700" cap="flat" cmpd="sng">
+            <a:solidFill>
+              <a:srgbClr val="D8B8B8"/>
+            </a:solidFill>
+            <a:prstDash val="solid"/>
+            <a:round/>
+            <a:headEnd type="none" w="sm" len="sm"/>
+            <a:tailEnd type="none" w="sm" len="sm"/>
+          </a:ln>
+        </p:spPr>
+        <p:txBody>
+          <a:bodyPr spcFirstLastPara="1" wrap="square" lIns="91423" tIns="91423" rIns="91423" bIns="91423" anchor="ctr" anchorCtr="0">
+            <a:noAutofit/>
+          </a:bodyPr>
+          <a:lstStyle/>
+          <a:p>
+            <a:pPr marL="0" lvl="0" indent="0" algn="l" rtl="0">
+              <a:spcBef>
+                <a:spcPts val="0"/>
+              </a:spcBef>
+              <a:spcAft>
+                <a:spcPts val="0"/>
+              </a:spcAft>
+              <a:buNone/>
+              <a:defRPr/>
+            </a:pPr>
+            <a:endParaRPr/>
+          </a:p>
+        </p:txBody>
+      </p:sp>
+      <p:sp>
+        <p:nvSpPr>
+          <p:cNvPr id="825673187" name="Google Shape;57;p6"/>
+          <p:cNvSpPr/>
+          <p:nvPr/>
+        </p:nvSpPr>
+        <p:spPr bwMode="auto">
+          <a:xfrm>
+            <a:off x="457200" y="3749040"/>
+            <a:ext cx="8229600" cy="960120"/>
+          </a:xfrm>
+          <a:prstGeom prst="rect">
+            <a:avLst/>
+          </a:prstGeom>
+          <a:solidFill>
+            <a:srgbClr val="F5F5F5"/>
+          </a:solidFill>
+          <a:ln w="12700" cap="flat" cmpd="sng">
+            <a:solidFill>
+              <a:srgbClr val="DDDDDD"/>
+            </a:solidFill>
+            <a:prstDash val="solid"/>
+            <a:round/>
+            <a:headEnd type="none" w="sm" len="sm"/>
+            <a:tailEnd type="none" w="sm" len="sm"/>
+          </a:ln>
+        </p:spPr>
+        <p:txBody>
+          <a:bodyPr spcFirstLastPara="1" wrap="square" lIns="91425" tIns="91425" rIns="91425" bIns="91425" anchor="ctr" anchorCtr="0">
+            <a:noAutofit/>
+          </a:bodyPr>
+          <a:lstStyle/>
+          <a:p>
+            <a:pPr marL="0" lvl="0" indent="0" algn="l" rtl="0">
+              <a:spcBef>
+                <a:spcPts val="0"/>
+              </a:spcBef>
+              <a:spcAft>
+                <a:spcPts val="0"/>
+              </a:spcAft>
+              <a:buNone/>
+              <a:defRPr/>
+            </a:pPr>
+            <a:endParaRPr/>
+          </a:p>
+        </p:txBody>
+      </p:sp>
+      <p:sp>
+        <p:nvSpPr>
+          <p:cNvPr id="1136981423" name="Google Shape;58;p6"/>
+          <p:cNvSpPr/>
+          <p:nvPr/>
+        </p:nvSpPr>
+        <p:spPr bwMode="auto">
+          <a:xfrm flipH="0" flipV="0">
+            <a:off x="640080" y="3960394"/>
+            <a:ext cx="7772400" cy="657325"/>
+          </a:xfrm>
+          <a:prstGeom prst="rect">
+            <a:avLst/>
+          </a:prstGeom>
+          <a:noFill/>
+          <a:ln>
+            <a:noFill/>
+          </a:ln>
+        </p:spPr>
+        <p:txBody>
+          <a:bodyPr spcFirstLastPara="1" wrap="square" lIns="91423" tIns="45699" rIns="91423" bIns="45699" anchor="ctr" anchorCtr="0">
+            <a:noAutofit/>
+          </a:bodyPr>
+          <a:lstStyle/>
+          <a:p>
+            <a:pPr>
+              <a:defRPr/>
+            </a:pPr>
+            <a:endParaRPr/>
+          </a:p>
+        </p:txBody>
+      </p:sp>
+      <p:sp>
+        <p:nvSpPr>
+          <p:cNvPr id="8724826" name=""/>
+          <p:cNvSpPr txBox="1"/>
+          <p:nvPr/>
+        </p:nvSpPr>
+        <p:spPr bwMode="auto">
+          <a:xfrm rot="0" flipH="0" flipV="0">
+            <a:off x="457198" y="977563"/>
+            <a:ext cx="8267897" cy="305159"/>
+          </a:xfrm>
+          <a:prstGeom prst="rect">
+            <a:avLst/>
+          </a:prstGeom>
+          <a:noFill/>
+        </p:spPr>
+        <p:txBody>
+          <a:bodyPr vertOverflow="overflow" horzOverflow="overflow" vert="horz" wrap="square" lIns="91440" tIns="45720" rIns="91440" bIns="45720" numCol="1" spcCol="0" rtlCol="0" fromWordArt="0" anchor="t" anchorCtr="0" forceAA="0" upright="0" compatLnSpc="0">
+            <a:spAutoFit/>
+          </a:bodyPr>
+          <a:p>
+            <a:pPr indent="91440">
+              <a:defRPr/>
+            </a:pPr>
+            <a:endParaRPr lang="ru-RU" sz="1400" b="0" i="0" u="none" strike="noStrike" cap="none" spc="0">
+              <a:solidFill>
+                <a:srgbClr val="000000"/>
+              </a:solidFill>
+              <a:latin typeface="Arial"/>
+              <a:cs typeface="Arial"/>
+            </a:endParaRPr>
+          </a:p>
+        </p:txBody>
+      </p:sp>
+    </p:spTree>
+  </p:cSld>
+  <p:clrMapOvr>
+    <a:masterClrMapping/>
+  </p:clrMapOvr>
+  <mc:AlternateContent xmlns:mc="http://schemas.openxmlformats.org/markup-compatibility/2006">
+    <mc:Choice xmlns:p159="http://schemas.microsoft.com/office/powerpoint/2015/09/main" xmlns:p14="http://schemas.microsoft.com/office/powerpoint/2010/main" Requires="p159">
+      <p:transition p14:dur="500" advClick="1"/>
+    </mc:Choice>
+    <mc:Fallback>
+      <p:transition advClick="1"/>
+    </mc:Fallback>
+  </mc:AlternateContent>
+</p:sld>
+</file>
+
+<file path=ppt/slides/slide12.xml><?xml version="1.0" encoding="utf-8"?>
+<p:sld xmlns:a="http://schemas.openxmlformats.org/drawingml/2006/main" xmlns:r="http://schemas.openxmlformats.org/officeDocument/2006/relationships" xmlns:p="http://schemas.openxmlformats.org/presentationml/2006/main" xmlns:m="http://schemas.openxmlformats.org/officeDocument/2006/math" xmlns:w="http://schemas.openxmlformats.org/wordprocessingml/2006/main" xmlns:mc="http://schemas.openxmlformats.org/markup-compatibility/2006" showMasterPhAnim="0" showMasterSp="1" show="1">
+  <p:cSld name="">
+    <p:bg>
+      <p:bgPr shadeToTitle="0">
+        <a:solidFill>
+          <a:srgbClr val="FFFFFF"/>
+        </a:solidFill>
+      </p:bgPr>
+    </p:bg>
+    <p:spTree>
+      <p:nvGrpSpPr>
+        <p:cNvPr id="1" name=""/>
+        <p:cNvGrpSpPr/>
+        <p:nvPr/>
+      </p:nvGrpSpPr>
+      <p:grpSpPr bwMode="auto">
+        <a:xfrm>
+          <a:off x="0" y="0"/>
+          <a:ext cx="0" cy="0"/>
+          <a:chOff x="0" y="0"/>
+          <a:chExt cx="0" cy="0"/>
+        </a:xfrm>
+      </p:grpSpPr>
+      <p:pic>
+        <p:nvPicPr>
+          <p:cNvPr id="1829797135" name="Google Shape;228;p14" descr="/home/claude/logo_300spbu.png"/>
+          <p:cNvPicPr/>
+          <p:nvPr/>
+        </p:nvPicPr>
+        <p:blipFill rotWithShape="1">
+          <a:blip r:embed="rId3">
+            <a:alphaModFix/>
+          </a:blip>
+          <a:srcRect l="0" t="0" r="0" b="0"/>
+          <a:stretch/>
+        </p:blipFill>
+        <p:spPr bwMode="auto">
+          <a:xfrm>
+            <a:off x="7498080" y="137160"/>
+            <a:ext cx="1463040" cy="475488"/>
+          </a:xfrm>
+          <a:prstGeom prst="rect">
+            <a:avLst/>
+          </a:prstGeom>
+          <a:noFill/>
+          <a:ln>
+            <a:noFill/>
+          </a:ln>
+        </p:spPr>
+      </p:pic>
+      <p:sp>
+        <p:nvSpPr>
+          <p:cNvPr id="170478203" name="Google Shape;229;p14"/>
+          <p:cNvSpPr/>
+          <p:nvPr/>
+        </p:nvSpPr>
+        <p:spPr bwMode="auto">
+          <a:xfrm>
+            <a:off x="8686800" y="4846320"/>
+            <a:ext cx="274320" cy="182880"/>
+          </a:xfrm>
+          <a:prstGeom prst="rect">
+            <a:avLst/>
+          </a:prstGeom>
+          <a:solidFill>
+            <a:srgbClr val="C0272D"/>
+          </a:solidFill>
+          <a:ln w="12700" cap="flat" cmpd="sng">
+            <a:solidFill>
+              <a:srgbClr val="C0272D"/>
+            </a:solidFill>
+            <a:prstDash val="solid"/>
+            <a:round/>
+            <a:headEnd type="none" w="sm" len="sm"/>
+            <a:tailEnd type="none" w="sm" len="sm"/>
+          </a:ln>
+        </p:spPr>
+        <p:txBody>
+          <a:bodyPr spcFirstLastPara="1" wrap="square" lIns="91425" tIns="91425" rIns="91425" bIns="91425" anchor="ctr" anchorCtr="0">
+            <a:noAutofit/>
+          </a:bodyPr>
+          <a:lstStyle/>
+          <a:p>
+            <a:pPr marL="0" lvl="0" indent="0" algn="l" rtl="0">
+              <a:spcBef>
+                <a:spcPts val="0"/>
+              </a:spcBef>
+              <a:spcAft>
+                <a:spcPts val="0"/>
+              </a:spcAft>
+              <a:buNone/>
+              <a:defRPr/>
+            </a:pPr>
+            <a:endParaRPr/>
+          </a:p>
+        </p:txBody>
+      </p:sp>
+      <p:sp>
+        <p:nvSpPr>
+          <p:cNvPr id="959816077" name="Google Shape;230;p14"/>
+          <p:cNvSpPr/>
+          <p:nvPr/>
+        </p:nvSpPr>
+        <p:spPr bwMode="auto">
+          <a:xfrm>
+            <a:off x="8641080" y="4800600"/>
+            <a:ext cx="365760" cy="228600"/>
+          </a:xfrm>
+          <a:prstGeom prst="rect">
+            <a:avLst/>
+          </a:prstGeom>
+          <a:noFill/>
+          <a:ln>
+            <a:noFill/>
+          </a:ln>
+        </p:spPr>
+        <p:txBody>
+          <a:bodyPr spcFirstLastPara="1" wrap="square" lIns="0" tIns="0" rIns="0" bIns="0" anchor="ctr" anchorCtr="0">
+            <a:noAutofit/>
+          </a:bodyPr>
+          <a:lstStyle/>
+          <a:p>
+            <a:pPr marL="0" marR="0" lvl="0" indent="0" algn="ctr" rtl="0">
+              <a:spcBef>
+                <a:spcPts val="0"/>
+              </a:spcBef>
+              <a:spcAft>
+                <a:spcPts val="0"/>
+              </a:spcAft>
+              <a:buClr>
+                <a:srgbClr val="FFFFFF"/>
+              </a:buClr>
+              <a:buSzPts val="1000"/>
+              <a:buFont typeface="Calibri"/>
+              <a:buNone/>
+              <a:defRPr/>
+            </a:pPr>
+            <a:r>
+              <a:rPr lang="en-US" sz="1000" b="1" i="0" u="none" strike="noStrike" cap="none">
+                <a:solidFill>
+                  <a:srgbClr val="FFFFFF"/>
+                </a:solidFill>
+                <a:latin typeface="Calibri"/>
+                <a:ea typeface="Calibri"/>
+                <a:cs typeface="Calibri"/>
+              </a:rPr>
+              <a:t>11</a:t>
+            </a:r>
+            <a:endParaRPr sz="1000" b="0" i="0" u="none" strike="noStrike" cap="none">
+              <a:solidFill>
+                <a:schemeClr val="dk1"/>
+              </a:solidFill>
+              <a:latin typeface="Calibri"/>
+              <a:ea typeface="Calibri"/>
+              <a:cs typeface="Calibri"/>
+            </a:endParaRPr>
+          </a:p>
+        </p:txBody>
+      </p:sp>
+      <p:sp>
+        <p:nvSpPr>
+          <p:cNvPr id="40365102" name="Google Shape;231;p14"/>
+          <p:cNvSpPr/>
+          <p:nvPr/>
+        </p:nvSpPr>
+        <p:spPr bwMode="auto">
+          <a:xfrm>
+            <a:off x="594360" y="182880"/>
+            <a:ext cx="7315200" cy="502920"/>
+          </a:xfrm>
+          <a:prstGeom prst="rect">
+            <a:avLst/>
+          </a:prstGeom>
+          <a:noFill/>
+          <a:ln>
+            <a:noFill/>
+          </a:ln>
+        </p:spPr>
+        <p:txBody>
+          <a:bodyPr spcFirstLastPara="1" wrap="square" lIns="91425" tIns="45700" rIns="91425" bIns="45700" anchor="ctr" anchorCtr="0">
+            <a:noAutofit/>
+          </a:bodyPr>
+          <a:lstStyle/>
+          <a:p>
+            <a:pPr marL="0" marR="0" lvl="0" indent="0" algn="l" rtl="0">
+              <a:spcBef>
+                <a:spcPts val="0"/>
+              </a:spcBef>
+              <a:spcAft>
+                <a:spcPts val="0"/>
+              </a:spcAft>
+              <a:buClr>
+                <a:srgbClr val="C0272D"/>
+              </a:buClr>
+              <a:buSzPts val="2600"/>
+              <a:buFont typeface="Calibri"/>
+              <a:buNone/>
+              <a:defRPr/>
+            </a:pPr>
+            <a:r>
+              <a:rPr lang="en-US" sz="2600" b="1" i="0" u="none" strike="noStrike" cap="none">
+                <a:solidFill>
+                  <a:srgbClr val="C0272D"/>
+                </a:solidFill>
+                <a:latin typeface="Calibri"/>
+                <a:ea typeface="Calibri"/>
+                <a:cs typeface="Calibri"/>
+              </a:rPr>
+              <a:t>Обобщения и </a:t>
+            </a:r>
+            <a:r>
+              <a:rPr lang="ru-RU" sz="2600" b="1" i="0" u="none" strike="noStrike" cap="none">
+                <a:solidFill>
+                  <a:srgbClr val="C0272D"/>
+                </a:solidFill>
+                <a:latin typeface="Calibri"/>
+                <a:ea typeface="Calibri"/>
+                <a:cs typeface="Calibri"/>
+              </a:rPr>
+              <a:t>области применения</a:t>
+            </a:r>
+            <a:endParaRPr sz="2600" b="0" i="0" u="none" strike="noStrike" cap="none">
+              <a:solidFill>
+                <a:schemeClr val="dk1"/>
+              </a:solidFill>
+              <a:latin typeface="Calibri"/>
+              <a:ea typeface="Calibri"/>
+              <a:cs typeface="Calibri"/>
+            </a:endParaRPr>
+          </a:p>
+        </p:txBody>
+      </p:sp>
+      <p:sp>
+        <p:nvSpPr>
+          <p:cNvPr id="1834008665" name="Google Shape;232;p14"/>
+          <p:cNvSpPr/>
+          <p:nvPr/>
+        </p:nvSpPr>
+        <p:spPr bwMode="auto">
+          <a:xfrm>
+            <a:off x="457200" y="201168"/>
+            <a:ext cx="73152" cy="457200"/>
+          </a:xfrm>
+          <a:prstGeom prst="rect">
+            <a:avLst/>
+          </a:prstGeom>
+          <a:solidFill>
+            <a:srgbClr val="C0272D"/>
+          </a:solidFill>
+          <a:ln w="12700" cap="flat" cmpd="sng">
+            <a:solidFill>
+              <a:srgbClr val="C0272D"/>
+            </a:solidFill>
+            <a:prstDash val="solid"/>
+            <a:round/>
+            <a:headEnd type="none" w="sm" len="sm"/>
+            <a:tailEnd type="none" w="sm" len="sm"/>
+          </a:ln>
+        </p:spPr>
+        <p:txBody>
+          <a:bodyPr spcFirstLastPara="1" wrap="square" lIns="91425" tIns="91425" rIns="91425" bIns="91425" anchor="ctr" anchorCtr="0">
+            <a:noAutofit/>
+          </a:bodyPr>
+          <a:lstStyle/>
+          <a:p>
+            <a:pPr marL="0" lvl="0" indent="0" algn="l" rtl="0">
+              <a:spcBef>
+                <a:spcPts val="0"/>
+              </a:spcBef>
+              <a:spcAft>
+                <a:spcPts val="0"/>
+              </a:spcAft>
+              <a:buNone/>
+              <a:defRPr/>
+            </a:pPr>
+            <a:endParaRPr/>
+          </a:p>
+        </p:txBody>
+      </p:sp>
+      <p:sp>
+        <p:nvSpPr>
+          <p:cNvPr id="602283876" name="Google Shape;233;p14"/>
+          <p:cNvSpPr/>
+          <p:nvPr/>
+        </p:nvSpPr>
+        <p:spPr bwMode="auto">
+          <a:xfrm>
+            <a:off x="457200" y="804672"/>
+            <a:ext cx="3977640" cy="1325880"/>
+          </a:xfrm>
+          <a:prstGeom prst="rect">
+            <a:avLst/>
+          </a:prstGeom>
+          <a:solidFill>
+            <a:srgbClr val="F5F5F5"/>
+          </a:solidFill>
+          <a:ln w="12700" cap="flat" cmpd="sng">
+            <a:solidFill>
+              <a:srgbClr val="CCCCCC"/>
+            </a:solidFill>
+            <a:prstDash val="solid"/>
+            <a:round/>
+            <a:headEnd type="none" w="sm" len="sm"/>
+            <a:tailEnd type="none" w="sm" len="sm"/>
+          </a:ln>
+        </p:spPr>
+        <p:txBody>
+          <a:bodyPr spcFirstLastPara="1" wrap="square" lIns="91425" tIns="91425" rIns="91425" bIns="91425" anchor="ctr" anchorCtr="0">
+            <a:noAutofit/>
+          </a:bodyPr>
+          <a:lstStyle/>
+          <a:p>
+            <a:pPr marL="0" lvl="0" indent="0" algn="l" rtl="0">
+              <a:spcBef>
+                <a:spcPts val="0"/>
+              </a:spcBef>
+              <a:spcAft>
+                <a:spcPts val="0"/>
+              </a:spcAft>
+              <a:buNone/>
+              <a:defRPr/>
+            </a:pPr>
+            <a:endParaRPr/>
+          </a:p>
+        </p:txBody>
+      </p:sp>
+      <p:sp>
+        <p:nvSpPr>
+          <p:cNvPr id="1976897499" name="Google Shape;234;p14"/>
+          <p:cNvSpPr/>
+          <p:nvPr/>
+        </p:nvSpPr>
+        <p:spPr bwMode="auto">
+          <a:xfrm>
+            <a:off x="457200" y="804672"/>
+            <a:ext cx="54864" cy="1325880"/>
+          </a:xfrm>
+          <a:prstGeom prst="rect">
+            <a:avLst/>
+          </a:prstGeom>
+          <a:solidFill>
+            <a:srgbClr val="C0272D"/>
+          </a:solidFill>
+          <a:ln w="12700" cap="flat" cmpd="sng">
+            <a:solidFill>
+              <a:srgbClr val="C0272D"/>
+            </a:solidFill>
+            <a:prstDash val="solid"/>
+            <a:round/>
+            <a:headEnd type="none" w="sm" len="sm"/>
+            <a:tailEnd type="none" w="sm" len="sm"/>
+          </a:ln>
+        </p:spPr>
+        <p:txBody>
+          <a:bodyPr spcFirstLastPara="1" wrap="square" lIns="91425" tIns="91425" rIns="91425" bIns="91425" anchor="ctr" anchorCtr="0">
+            <a:noAutofit/>
+          </a:bodyPr>
+          <a:lstStyle/>
+          <a:p>
+            <a:pPr marL="0" lvl="0" indent="0" algn="l" rtl="0">
+              <a:spcBef>
+                <a:spcPts val="0"/>
+              </a:spcBef>
+              <a:spcAft>
+                <a:spcPts val="0"/>
+              </a:spcAft>
+              <a:buNone/>
+              <a:defRPr/>
+            </a:pPr>
+            <a:endParaRPr/>
+          </a:p>
+        </p:txBody>
+      </p:sp>
+      <p:sp>
+        <p:nvSpPr>
+          <p:cNvPr id="304236828" name="Google Shape;235;p14"/>
+          <p:cNvSpPr/>
+          <p:nvPr/>
+        </p:nvSpPr>
+        <p:spPr bwMode="auto">
+          <a:xfrm>
+            <a:off x="594360" y="877824"/>
+            <a:ext cx="3657600" cy="320040"/>
+          </a:xfrm>
+          <a:prstGeom prst="rect">
+            <a:avLst/>
+          </a:prstGeom>
+          <a:noFill/>
+          <a:ln>
+            <a:noFill/>
+          </a:ln>
+        </p:spPr>
+        <p:txBody>
+          <a:bodyPr spcFirstLastPara="1" wrap="square" lIns="91425" tIns="45700" rIns="91425" bIns="45700" anchor="ctr" anchorCtr="0">
+            <a:noAutofit/>
+          </a:bodyPr>
+          <a:lstStyle/>
+          <a:p>
+            <a:pPr marL="0" marR="0" lvl="0" indent="0" algn="l" rtl="0">
+              <a:spcBef>
+                <a:spcPts val="0"/>
+              </a:spcBef>
+              <a:spcAft>
+                <a:spcPts val="0"/>
+              </a:spcAft>
+              <a:buClr>
+                <a:srgbClr val="C0272D"/>
+              </a:buClr>
+              <a:buSzPts val="1300"/>
+              <a:buFont typeface="Calibri"/>
+              <a:buNone/>
+              <a:defRPr/>
+            </a:pPr>
+            <a:endParaRPr sz="1300" b="0" i="0" u="none" strike="noStrike" cap="none">
+              <a:solidFill>
+                <a:schemeClr val="dk1"/>
+              </a:solidFill>
+              <a:latin typeface="Calibri"/>
+              <a:ea typeface="Calibri"/>
+              <a:cs typeface="Calibri"/>
+            </a:endParaRPr>
+          </a:p>
+        </p:txBody>
+      </p:sp>
+      <p:sp>
+        <p:nvSpPr>
+          <p:cNvPr id="2010652807" name="Google Shape;236;p14"/>
+          <p:cNvSpPr/>
+          <p:nvPr/>
+        </p:nvSpPr>
+        <p:spPr bwMode="auto">
+          <a:xfrm>
+            <a:off x="594360" y="1216151"/>
+            <a:ext cx="3749040" cy="841248"/>
+          </a:xfrm>
+          <a:prstGeom prst="rect">
+            <a:avLst/>
+          </a:prstGeom>
+          <a:noFill/>
+          <a:ln>
+            <a:noFill/>
+          </a:ln>
+        </p:spPr>
+        <p:txBody>
+          <a:bodyPr spcFirstLastPara="1" wrap="square" lIns="91425" tIns="45700" rIns="91425" bIns="45700" anchor="ctr" anchorCtr="0">
+            <a:noAutofit/>
+          </a:bodyPr>
+          <a:lstStyle/>
+          <a:p>
+            <a:pPr marL="0" marR="0" lvl="0" indent="0" algn="l" rtl="0">
+              <a:spcBef>
+                <a:spcPts val="0"/>
+              </a:spcBef>
+              <a:spcAft>
+                <a:spcPts val="0"/>
+              </a:spcAft>
+              <a:buClr>
+                <a:srgbClr val="1A1A1A"/>
+              </a:buClr>
+              <a:buSzPts val="1200"/>
+              <a:buFont typeface="Calibri"/>
+              <a:buNone/>
+              <a:defRPr/>
+            </a:pPr>
+            <a:endParaRPr sz="1200" b="0" i="0" u="none" strike="noStrike" cap="none">
+              <a:solidFill>
+                <a:schemeClr val="dk1"/>
+              </a:solidFill>
+              <a:latin typeface="Calibri"/>
+              <a:ea typeface="Calibri"/>
+              <a:cs typeface="Calibri"/>
+            </a:endParaRPr>
+          </a:p>
+        </p:txBody>
+      </p:sp>
+      <p:sp>
+        <p:nvSpPr>
+          <p:cNvPr id="276843977" name="Google Shape;237;p14"/>
+          <p:cNvSpPr/>
+          <p:nvPr/>
+        </p:nvSpPr>
+        <p:spPr bwMode="auto">
+          <a:xfrm>
+            <a:off x="4617720" y="804672"/>
+            <a:ext cx="3977640" cy="1325880"/>
+          </a:xfrm>
+          <a:prstGeom prst="rect">
+            <a:avLst/>
+          </a:prstGeom>
+          <a:solidFill>
+            <a:srgbClr val="E8D5D5"/>
+          </a:solidFill>
+          <a:ln w="12700" cap="flat" cmpd="sng">
+            <a:solidFill>
+              <a:srgbClr val="CCCCCC"/>
+            </a:solidFill>
+            <a:prstDash val="solid"/>
+            <a:round/>
+            <a:headEnd type="none" w="sm" len="sm"/>
+            <a:tailEnd type="none" w="sm" len="sm"/>
+          </a:ln>
+        </p:spPr>
+        <p:txBody>
+          <a:bodyPr spcFirstLastPara="1" wrap="square" lIns="91425" tIns="91425" rIns="91425" bIns="91425" anchor="ctr" anchorCtr="0">
+            <a:noAutofit/>
+          </a:bodyPr>
+          <a:lstStyle/>
+          <a:p>
+            <a:pPr marL="0" lvl="0" indent="0" algn="l" rtl="0">
+              <a:spcBef>
+                <a:spcPts val="0"/>
+              </a:spcBef>
+              <a:spcAft>
+                <a:spcPts val="0"/>
+              </a:spcAft>
+              <a:buNone/>
+              <a:defRPr/>
+            </a:pPr>
+            <a:endParaRPr/>
+          </a:p>
+        </p:txBody>
+      </p:sp>
+      <p:sp>
+        <p:nvSpPr>
+          <p:cNvPr id="1882363" name="Google Shape;238;p14"/>
+          <p:cNvSpPr/>
+          <p:nvPr/>
+        </p:nvSpPr>
+        <p:spPr bwMode="auto">
+          <a:xfrm>
+            <a:off x="4617720" y="804672"/>
+            <a:ext cx="54864" cy="1325880"/>
+          </a:xfrm>
+          <a:prstGeom prst="rect">
+            <a:avLst/>
+          </a:prstGeom>
+          <a:solidFill>
+            <a:srgbClr val="C0272D"/>
+          </a:solidFill>
+          <a:ln w="12700" cap="flat" cmpd="sng">
+            <a:solidFill>
+              <a:srgbClr val="C0272D"/>
+            </a:solidFill>
+            <a:prstDash val="solid"/>
+            <a:round/>
+            <a:headEnd type="none" w="sm" len="sm"/>
+            <a:tailEnd type="none" w="sm" len="sm"/>
+          </a:ln>
+        </p:spPr>
+        <p:txBody>
+          <a:bodyPr spcFirstLastPara="1" wrap="square" lIns="91425" tIns="91425" rIns="91425" bIns="91425" anchor="ctr" anchorCtr="0">
+            <a:noAutofit/>
+          </a:bodyPr>
+          <a:lstStyle/>
+          <a:p>
+            <a:pPr marL="0" lvl="0" indent="0" algn="l" rtl="0">
+              <a:spcBef>
+                <a:spcPts val="0"/>
+              </a:spcBef>
+              <a:spcAft>
+                <a:spcPts val="0"/>
+              </a:spcAft>
+              <a:buNone/>
+              <a:defRPr/>
+            </a:pPr>
+            <a:endParaRPr/>
+          </a:p>
+        </p:txBody>
+      </p:sp>
+      <p:sp>
+        <p:nvSpPr>
+          <p:cNvPr id="1031245771" name="Google Shape;239;p14"/>
+          <p:cNvSpPr/>
+          <p:nvPr/>
+        </p:nvSpPr>
+        <p:spPr bwMode="auto">
+          <a:xfrm>
+            <a:off x="4754880" y="877824"/>
+            <a:ext cx="3657600" cy="320040"/>
+          </a:xfrm>
+          <a:prstGeom prst="rect">
+            <a:avLst/>
+          </a:prstGeom>
+          <a:noFill/>
+          <a:ln>
+            <a:noFill/>
+          </a:ln>
+        </p:spPr>
+        <p:txBody>
+          <a:bodyPr spcFirstLastPara="1" wrap="square" lIns="91425" tIns="45700" rIns="91425" bIns="45700" anchor="ctr" anchorCtr="0">
+            <a:noAutofit/>
+          </a:bodyPr>
+          <a:lstStyle/>
+          <a:p>
+            <a:pPr marL="0" marR="0" lvl="0" indent="0" algn="l" rtl="0">
+              <a:spcBef>
+                <a:spcPts val="0"/>
+              </a:spcBef>
+              <a:spcAft>
+                <a:spcPts val="0"/>
+              </a:spcAft>
+              <a:buClr>
+                <a:srgbClr val="C0272D"/>
+              </a:buClr>
+              <a:buSzPts val="1300"/>
+              <a:buFont typeface="Calibri"/>
+              <a:buNone/>
+              <a:defRPr/>
+            </a:pPr>
+            <a:endParaRPr sz="1300" b="0" i="0" u="none" strike="noStrike" cap="none">
+              <a:solidFill>
+                <a:schemeClr val="dk1"/>
+              </a:solidFill>
+              <a:latin typeface="Calibri"/>
+              <a:ea typeface="Calibri"/>
+              <a:cs typeface="Calibri"/>
+            </a:endParaRPr>
+          </a:p>
+        </p:txBody>
+      </p:sp>
+      <p:sp>
+        <p:nvSpPr>
+          <p:cNvPr id="1802674102" name="Google Shape;240;p14"/>
+          <p:cNvSpPr/>
+          <p:nvPr/>
+        </p:nvSpPr>
+        <p:spPr bwMode="auto">
+          <a:xfrm>
+            <a:off x="4754880" y="1216151"/>
+            <a:ext cx="3749040" cy="841248"/>
+          </a:xfrm>
+          <a:prstGeom prst="rect">
+            <a:avLst/>
+          </a:prstGeom>
+          <a:noFill/>
+          <a:ln>
+            <a:noFill/>
+          </a:ln>
+        </p:spPr>
+        <p:txBody>
+          <a:bodyPr spcFirstLastPara="1" wrap="square" lIns="91425" tIns="45700" rIns="91425" bIns="45700" anchor="ctr" anchorCtr="0">
+            <a:noAutofit/>
+          </a:bodyPr>
+          <a:lstStyle/>
+          <a:p>
+            <a:pPr marL="0" marR="0" lvl="0" indent="0" algn="l" rtl="0">
+              <a:spcBef>
+                <a:spcPts val="0"/>
+              </a:spcBef>
+              <a:spcAft>
+                <a:spcPts val="0"/>
+              </a:spcAft>
+              <a:buClr>
+                <a:srgbClr val="1A1A1A"/>
+              </a:buClr>
+              <a:buSzPts val="1200"/>
+              <a:buFont typeface="Calibri"/>
+              <a:buNone/>
+              <a:defRPr/>
+            </a:pPr>
+            <a:endParaRPr sz="1200" b="0" i="0" u="none" strike="noStrike" cap="none">
+              <a:solidFill>
+                <a:schemeClr val="dk1"/>
+              </a:solidFill>
+              <a:latin typeface="Calibri"/>
+              <a:ea typeface="Calibri"/>
+              <a:cs typeface="Calibri"/>
+            </a:endParaRPr>
+          </a:p>
+        </p:txBody>
+      </p:sp>
+      <p:sp>
+        <p:nvSpPr>
+          <p:cNvPr id="1725132202" name="Google Shape;241;p14"/>
+          <p:cNvSpPr/>
+          <p:nvPr/>
+        </p:nvSpPr>
+        <p:spPr bwMode="auto">
+          <a:xfrm>
+            <a:off x="457200" y="2240280"/>
+            <a:ext cx="3977640" cy="1325880"/>
+          </a:xfrm>
+          <a:prstGeom prst="rect">
+            <a:avLst/>
+          </a:prstGeom>
+          <a:solidFill>
+            <a:srgbClr val="F5F5F5"/>
+          </a:solidFill>
+          <a:ln w="12700" cap="flat" cmpd="sng">
+            <a:solidFill>
+              <a:srgbClr val="CCCCCC"/>
+            </a:solidFill>
+            <a:prstDash val="solid"/>
+            <a:round/>
+            <a:headEnd type="none" w="sm" len="sm"/>
+            <a:tailEnd type="none" w="sm" len="sm"/>
+          </a:ln>
+        </p:spPr>
+        <p:txBody>
+          <a:bodyPr spcFirstLastPara="1" wrap="square" lIns="91425" tIns="91425" rIns="91425" bIns="91425" anchor="ctr" anchorCtr="0">
+            <a:noAutofit/>
+          </a:bodyPr>
+          <a:lstStyle/>
+          <a:p>
+            <a:pPr marL="0" lvl="0" indent="0" algn="l" rtl="0">
+              <a:spcBef>
+                <a:spcPts val="0"/>
+              </a:spcBef>
+              <a:spcAft>
+                <a:spcPts val="0"/>
+              </a:spcAft>
+              <a:buNone/>
+              <a:defRPr/>
+            </a:pPr>
+            <a:endParaRPr/>
+          </a:p>
+        </p:txBody>
+      </p:sp>
+      <p:sp>
+        <p:nvSpPr>
+          <p:cNvPr id="2096127599" name="Google Shape;242;p14"/>
+          <p:cNvSpPr/>
+          <p:nvPr/>
+        </p:nvSpPr>
+        <p:spPr bwMode="auto">
+          <a:xfrm>
+            <a:off x="457200" y="2240280"/>
+            <a:ext cx="54864" cy="1325880"/>
+          </a:xfrm>
+          <a:prstGeom prst="rect">
+            <a:avLst/>
+          </a:prstGeom>
+          <a:solidFill>
+            <a:srgbClr val="C0272D"/>
+          </a:solidFill>
+          <a:ln w="12700" cap="flat" cmpd="sng">
+            <a:solidFill>
+              <a:srgbClr val="C0272D"/>
+            </a:solidFill>
+            <a:prstDash val="solid"/>
+            <a:round/>
+            <a:headEnd type="none" w="sm" len="sm"/>
+            <a:tailEnd type="none" w="sm" len="sm"/>
+          </a:ln>
+        </p:spPr>
+        <p:txBody>
+          <a:bodyPr spcFirstLastPara="1" wrap="square" lIns="91425" tIns="91425" rIns="91425" bIns="91425" anchor="ctr" anchorCtr="0">
+            <a:noAutofit/>
+          </a:bodyPr>
+          <a:lstStyle/>
+          <a:p>
+            <a:pPr marL="0" lvl="0" indent="0" algn="l" rtl="0">
+              <a:spcBef>
+                <a:spcPts val="0"/>
+              </a:spcBef>
+              <a:spcAft>
+                <a:spcPts val="0"/>
+              </a:spcAft>
+              <a:buNone/>
+              <a:defRPr/>
+            </a:pPr>
+            <a:endParaRPr/>
+          </a:p>
+        </p:txBody>
+      </p:sp>
+      <p:sp>
+        <p:nvSpPr>
+          <p:cNvPr id="467010423" name="Google Shape;243;p14"/>
+          <p:cNvSpPr/>
+          <p:nvPr/>
+        </p:nvSpPr>
+        <p:spPr bwMode="auto">
+          <a:xfrm>
+            <a:off x="594360" y="2313432"/>
+            <a:ext cx="3657600" cy="320040"/>
+          </a:xfrm>
+          <a:prstGeom prst="rect">
+            <a:avLst/>
+          </a:prstGeom>
+          <a:noFill/>
+          <a:ln>
+            <a:noFill/>
+          </a:ln>
+        </p:spPr>
+        <p:txBody>
+          <a:bodyPr spcFirstLastPara="1" wrap="square" lIns="91425" tIns="45700" rIns="91425" bIns="45700" anchor="ctr" anchorCtr="0">
+            <a:noAutofit/>
+          </a:bodyPr>
+          <a:lstStyle/>
+          <a:p>
+            <a:pPr marL="0" marR="0" lvl="0" indent="0" algn="l" rtl="0">
+              <a:spcBef>
+                <a:spcPts val="0"/>
+              </a:spcBef>
+              <a:spcAft>
+                <a:spcPts val="0"/>
+              </a:spcAft>
+              <a:buClr>
+                <a:srgbClr val="C0272D"/>
+              </a:buClr>
+              <a:buSzPts val="1300"/>
+              <a:buFont typeface="Calibri"/>
+              <a:buNone/>
+              <a:defRPr/>
+            </a:pPr>
+            <a:endParaRPr sz="1300" b="0" i="0" u="none" strike="noStrike" cap="none">
+              <a:solidFill>
+                <a:schemeClr val="dk1"/>
+              </a:solidFill>
+              <a:latin typeface="Calibri"/>
+              <a:ea typeface="Calibri"/>
+              <a:cs typeface="Calibri"/>
+            </a:endParaRPr>
+          </a:p>
+        </p:txBody>
+      </p:sp>
+      <p:sp>
+        <p:nvSpPr>
+          <p:cNvPr id="1386682413" name="Google Shape;244;p14"/>
+          <p:cNvSpPr/>
+          <p:nvPr/>
+        </p:nvSpPr>
+        <p:spPr bwMode="auto">
+          <a:xfrm>
+            <a:off x="594360" y="2651760"/>
+            <a:ext cx="3749040" cy="841248"/>
+          </a:xfrm>
+          <a:prstGeom prst="rect">
+            <a:avLst/>
+          </a:prstGeom>
+          <a:noFill/>
+          <a:ln>
+            <a:noFill/>
+          </a:ln>
+        </p:spPr>
+        <p:txBody>
+          <a:bodyPr spcFirstLastPara="1" wrap="square" lIns="91425" tIns="45700" rIns="91425" bIns="45700" anchor="ctr" anchorCtr="0">
+            <a:noAutofit/>
+          </a:bodyPr>
+          <a:lstStyle/>
+          <a:p>
+            <a:pPr marL="0" marR="0" lvl="0" indent="0" algn="l" rtl="0">
+              <a:spcBef>
+                <a:spcPts val="0"/>
+              </a:spcBef>
+              <a:spcAft>
+                <a:spcPts val="0"/>
+              </a:spcAft>
+              <a:buClr>
+                <a:srgbClr val="1A1A1A"/>
+              </a:buClr>
+              <a:buSzPts val="1200"/>
+              <a:buFont typeface="Calibri"/>
+              <a:buNone/>
+              <a:defRPr/>
+            </a:pPr>
+            <a:endParaRPr sz="1200" b="0" i="0" u="none" strike="noStrike" cap="none">
+              <a:solidFill>
+                <a:schemeClr val="dk1"/>
+              </a:solidFill>
+              <a:latin typeface="Calibri"/>
+              <a:ea typeface="Calibri"/>
+              <a:cs typeface="Calibri"/>
+            </a:endParaRPr>
+          </a:p>
+        </p:txBody>
+      </p:sp>
+      <p:sp>
+        <p:nvSpPr>
+          <p:cNvPr id="581465433" name="Google Shape;245;p14"/>
+          <p:cNvSpPr/>
+          <p:nvPr/>
+        </p:nvSpPr>
+        <p:spPr bwMode="auto">
+          <a:xfrm>
+            <a:off x="4617720" y="2240280"/>
+            <a:ext cx="3977640" cy="1325880"/>
+          </a:xfrm>
+          <a:prstGeom prst="rect">
+            <a:avLst/>
+          </a:prstGeom>
+          <a:solidFill>
+            <a:srgbClr val="E8D5D5"/>
+          </a:solidFill>
+          <a:ln w="12700" cap="flat" cmpd="sng">
+            <a:solidFill>
+              <a:srgbClr val="CCCCCC"/>
+            </a:solidFill>
+            <a:prstDash val="solid"/>
+            <a:round/>
+            <a:headEnd type="none" w="sm" len="sm"/>
+            <a:tailEnd type="none" w="sm" len="sm"/>
+          </a:ln>
+        </p:spPr>
+        <p:txBody>
+          <a:bodyPr spcFirstLastPara="1" wrap="square" lIns="91425" tIns="91425" rIns="91425" bIns="91425" anchor="ctr" anchorCtr="0">
+            <a:noAutofit/>
+          </a:bodyPr>
+          <a:lstStyle/>
+          <a:p>
+            <a:pPr marL="0" lvl="0" indent="0" algn="l" rtl="0">
+              <a:spcBef>
+                <a:spcPts val="0"/>
+              </a:spcBef>
+              <a:spcAft>
+                <a:spcPts val="0"/>
+              </a:spcAft>
+              <a:buNone/>
+              <a:defRPr/>
+            </a:pPr>
+            <a:endParaRPr/>
+          </a:p>
+        </p:txBody>
+      </p:sp>
+      <p:sp>
+        <p:nvSpPr>
+          <p:cNvPr id="1301035326" name="Google Shape;246;p14"/>
+          <p:cNvSpPr/>
+          <p:nvPr/>
+        </p:nvSpPr>
+        <p:spPr bwMode="auto">
+          <a:xfrm>
+            <a:off x="4617720" y="2240280"/>
+            <a:ext cx="54864" cy="1325880"/>
+          </a:xfrm>
+          <a:prstGeom prst="rect">
+            <a:avLst/>
+          </a:prstGeom>
+          <a:solidFill>
+            <a:srgbClr val="C0272D"/>
+          </a:solidFill>
+          <a:ln w="12700" cap="flat" cmpd="sng">
+            <a:solidFill>
+              <a:srgbClr val="C0272D"/>
+            </a:solidFill>
+            <a:prstDash val="solid"/>
+            <a:round/>
+            <a:headEnd type="none" w="sm" len="sm"/>
+            <a:tailEnd type="none" w="sm" len="sm"/>
+          </a:ln>
+        </p:spPr>
+        <p:txBody>
+          <a:bodyPr spcFirstLastPara="1" wrap="square" lIns="91425" tIns="91425" rIns="91425" bIns="91425" anchor="ctr" anchorCtr="0">
+            <a:noAutofit/>
+          </a:bodyPr>
+          <a:lstStyle/>
+          <a:p>
+            <a:pPr marL="0" lvl="0" indent="0" algn="l" rtl="0">
+              <a:spcBef>
+                <a:spcPts val="0"/>
+              </a:spcBef>
+              <a:spcAft>
+                <a:spcPts val="0"/>
+              </a:spcAft>
+              <a:buNone/>
+              <a:defRPr/>
+            </a:pPr>
+            <a:endParaRPr/>
+          </a:p>
+        </p:txBody>
+      </p:sp>
+      <p:sp>
+        <p:nvSpPr>
+          <p:cNvPr id="769338388" name="Google Shape;247;p14"/>
+          <p:cNvSpPr/>
+          <p:nvPr/>
+        </p:nvSpPr>
+        <p:spPr bwMode="auto">
+          <a:xfrm>
+            <a:off x="4754880" y="2313432"/>
+            <a:ext cx="3657600" cy="320040"/>
+          </a:xfrm>
+          <a:prstGeom prst="rect">
+            <a:avLst/>
+          </a:prstGeom>
+          <a:noFill/>
+          <a:ln>
+            <a:noFill/>
+          </a:ln>
+        </p:spPr>
+        <p:txBody>
+          <a:bodyPr spcFirstLastPara="1" wrap="square" lIns="91425" tIns="45700" rIns="91425" bIns="45700" anchor="ctr" anchorCtr="0">
+            <a:noAutofit/>
+          </a:bodyPr>
+          <a:lstStyle/>
+          <a:p>
+            <a:pPr marL="0" marR="0" lvl="0" indent="0" algn="l" rtl="0">
+              <a:spcBef>
+                <a:spcPts val="0"/>
+              </a:spcBef>
+              <a:spcAft>
+                <a:spcPts val="0"/>
+              </a:spcAft>
+              <a:buClr>
+                <a:srgbClr val="C0272D"/>
+              </a:buClr>
+              <a:buSzPts val="1300"/>
+              <a:buFont typeface="Calibri"/>
+              <a:buNone/>
+              <a:defRPr/>
+            </a:pPr>
+            <a:endParaRPr sz="1300" b="0" i="0" u="none" strike="noStrike" cap="none">
+              <a:solidFill>
+                <a:schemeClr val="dk1"/>
+              </a:solidFill>
+              <a:latin typeface="Calibri"/>
+              <a:ea typeface="Calibri"/>
+              <a:cs typeface="Calibri"/>
+            </a:endParaRPr>
+          </a:p>
+        </p:txBody>
+      </p:sp>
+      <p:sp>
+        <p:nvSpPr>
+          <p:cNvPr id="430051126" name="Google Shape;248;p14"/>
+          <p:cNvSpPr/>
+          <p:nvPr/>
+        </p:nvSpPr>
+        <p:spPr bwMode="auto">
+          <a:xfrm>
+            <a:off x="4754880" y="2651760"/>
+            <a:ext cx="3749040" cy="841248"/>
+          </a:xfrm>
+          <a:prstGeom prst="rect">
+            <a:avLst/>
+          </a:prstGeom>
+          <a:noFill/>
+          <a:ln>
+            <a:noFill/>
+          </a:ln>
+        </p:spPr>
+        <p:txBody>
+          <a:bodyPr spcFirstLastPara="1" wrap="square" lIns="91425" tIns="45700" rIns="91425" bIns="45700" anchor="ctr" anchorCtr="0">
+            <a:noAutofit/>
+          </a:bodyPr>
+          <a:lstStyle/>
+          <a:p>
+            <a:pPr marL="0" marR="0" lvl="0" indent="0" algn="l" rtl="0">
+              <a:spcBef>
+                <a:spcPts val="0"/>
+              </a:spcBef>
+              <a:spcAft>
+                <a:spcPts val="0"/>
+              </a:spcAft>
+              <a:buClr>
+                <a:srgbClr val="1A1A1A"/>
+              </a:buClr>
+              <a:buSzPts val="1200"/>
+              <a:buFont typeface="Calibri"/>
+              <a:buNone/>
+              <a:defRPr/>
+            </a:pPr>
+            <a:endParaRPr sz="1200" b="0" i="0" u="none" strike="noStrike" cap="none">
+              <a:solidFill>
+                <a:schemeClr val="dk1"/>
+              </a:solidFill>
+              <a:latin typeface="Calibri"/>
+              <a:ea typeface="Calibri"/>
+              <a:cs typeface="Calibri"/>
+            </a:endParaRPr>
+          </a:p>
+        </p:txBody>
+      </p:sp>
+      <p:sp>
+        <p:nvSpPr>
+          <p:cNvPr id="46375997" name="Google Shape;200;p13"/>
+          <p:cNvSpPr/>
+          <p:nvPr/>
+        </p:nvSpPr>
+        <p:spPr bwMode="auto">
+          <a:xfrm flipH="0" flipV="0">
+            <a:off x="411479" y="3844847"/>
+            <a:ext cx="8229600" cy="1092912"/>
+          </a:xfrm>
+          <a:prstGeom prst="rect">
+            <a:avLst/>
+          </a:prstGeom>
+          <a:solidFill>
+            <a:srgbClr val="C0272D"/>
+          </a:solidFill>
+          <a:ln w="12700" cap="flat" cmpd="sng">
+            <a:solidFill>
+              <a:srgbClr val="C0272D"/>
+            </a:solidFill>
+            <a:prstDash val="solid"/>
+            <a:round/>
+            <a:headEnd type="none" w="sm" len="sm"/>
+            <a:tailEnd type="none" w="sm" len="sm"/>
+          </a:ln>
+        </p:spPr>
+        <p:txBody>
+          <a:bodyPr spcFirstLastPara="1" wrap="square" lIns="91423" tIns="91423" rIns="91423" bIns="91423" anchor="ctr" anchorCtr="0">
+            <a:noAutofit/>
+          </a:bodyPr>
+          <a:lstStyle/>
+          <a:p>
+            <a:pPr>
+              <a:defRPr/>
+            </a:pPr>
+            <a:endParaRPr lang="ru-RU" sz="1400" b="1" i="0" u="none" strike="noStrike" cap="none" spc="0">
+              <a:solidFill>
+                <a:srgbClr val="FFFFFF"/>
+              </a:solidFill>
+              <a:latin typeface="Calibri"/>
+              <a:cs typeface="Calibri"/>
+            </a:endParaRPr>
+          </a:p>
+        </p:txBody>
+      </p:sp>
+    </p:spTree>
+  </p:cSld>
+  <p:clrMapOvr>
+    <a:masterClrMapping/>
+  </p:clrMapOvr>
+  <mc:AlternateContent xmlns:mc="http://schemas.openxmlformats.org/markup-compatibility/2006">
+    <mc:Choice xmlns:p159="http://schemas.microsoft.com/office/powerpoint/2015/09/main" xmlns:p14="http://schemas.microsoft.com/office/powerpoint/2010/main" Requires="p159">
+      <p:transition p14:dur="500" advClick="1"/>
+    </mc:Choice>
+    <mc:Fallback>
+      <p:transition advClick="1"/>
+    </mc:Fallback>
+  </mc:AlternateContent>
+</p:sld>
+</file>
+
+<file path=ppt/slides/slide13.xml><?xml version="1.0" encoding="utf-8"?>
+<p:sld xmlns:a="http://schemas.openxmlformats.org/drawingml/2006/main" xmlns:r="http://schemas.openxmlformats.org/officeDocument/2006/relationships" xmlns:p="http://schemas.openxmlformats.org/presentationml/2006/main" xmlns:m="http://schemas.openxmlformats.org/officeDocument/2006/math" xmlns:w="http://schemas.openxmlformats.org/wordprocessingml/2006/main" xmlns:mc="http://schemas.openxmlformats.org/markup-compatibility/2006" showMasterPhAnim="0" showMasterSp="1" show="1">
+  <p:cSld name="">
+    <p:bg>
+      <p:bgPr shadeToTitle="0">
+        <a:solidFill>
+          <a:srgbClr val="FFFFFF"/>
+        </a:solidFill>
+      </p:bgPr>
+    </p:bg>
+    <p:spTree>
+      <p:nvGrpSpPr>
+        <p:cNvPr id="1" name=""/>
+        <p:cNvGrpSpPr/>
+        <p:nvPr/>
+      </p:nvGrpSpPr>
+      <p:grpSpPr bwMode="auto">
+        <a:xfrm>
+          <a:off x="0" y="0"/>
+          <a:ext cx="0" cy="0"/>
+          <a:chOff x="0" y="0"/>
+          <a:chExt cx="0" cy="0"/>
+        </a:xfrm>
+      </p:grpSpPr>
+      <p:pic>
+        <p:nvPicPr>
+          <p:cNvPr id="1125489574" name="Google Shape;280;p16" descr="/home/claude/logo_300spbu.png"/>
+          <p:cNvPicPr/>
+          <p:nvPr/>
+        </p:nvPicPr>
+        <p:blipFill rotWithShape="1">
+          <a:blip r:embed="rId3">
+            <a:alphaModFix/>
+          </a:blip>
+          <a:srcRect l="0" t="0" r="0" b="0"/>
+          <a:stretch/>
+        </p:blipFill>
+        <p:spPr bwMode="auto">
+          <a:xfrm>
+            <a:off x="7498080" y="137160"/>
+            <a:ext cx="1463040" cy="475488"/>
+          </a:xfrm>
+          <a:prstGeom prst="rect">
+            <a:avLst/>
+          </a:prstGeom>
+          <a:noFill/>
+          <a:ln>
+            <a:noFill/>
+          </a:ln>
+        </p:spPr>
+      </p:pic>
+      <p:sp>
+        <p:nvSpPr>
+          <p:cNvPr id="62847711" name="Google Shape;281;p16"/>
+          <p:cNvSpPr/>
+          <p:nvPr/>
+        </p:nvSpPr>
+        <p:spPr bwMode="auto">
+          <a:xfrm>
+            <a:off x="8686800" y="4846320"/>
+            <a:ext cx="274320" cy="182880"/>
+          </a:xfrm>
+          <a:prstGeom prst="rect">
+            <a:avLst/>
+          </a:prstGeom>
+          <a:solidFill>
+            <a:srgbClr val="C0272D"/>
+          </a:solidFill>
+          <a:ln w="12700" cap="flat" cmpd="sng">
+            <a:solidFill>
+              <a:srgbClr val="C0272D"/>
+            </a:solidFill>
+            <a:prstDash val="solid"/>
+            <a:round/>
+            <a:headEnd type="none" w="sm" len="sm"/>
+            <a:tailEnd type="none" w="sm" len="sm"/>
+          </a:ln>
+        </p:spPr>
+        <p:txBody>
+          <a:bodyPr spcFirstLastPara="1" wrap="square" lIns="91425" tIns="91425" rIns="91425" bIns="91425" anchor="ctr" anchorCtr="0">
+            <a:noAutofit/>
+          </a:bodyPr>
+          <a:lstStyle/>
+          <a:p>
+            <a:pPr marL="0" lvl="0" indent="0" algn="l" rtl="0">
+              <a:spcBef>
+                <a:spcPts val="0"/>
+              </a:spcBef>
+              <a:spcAft>
+                <a:spcPts val="0"/>
+              </a:spcAft>
+              <a:buNone/>
+              <a:defRPr/>
+            </a:pPr>
             <a:endParaRPr>
               <a:latin typeface="Open Sans"/>
               <a:cs typeface="Open Sans"/>
@@ -5814,7 +7766,190 @@
       </p:sp>
       <p:sp>
         <p:nvSpPr>
-          <p:cNvPr id="317990553" name="Google Shape;285;p16"/>
+          <p:cNvPr id="608598764" name="Google Shape;282;p16"/>
+          <p:cNvSpPr/>
+          <p:nvPr/>
+        </p:nvSpPr>
+        <p:spPr bwMode="auto">
+          <a:xfrm>
+            <a:off x="8641080" y="4800600"/>
+            <a:ext cx="365760" cy="228600"/>
+          </a:xfrm>
+          <a:prstGeom prst="rect">
+            <a:avLst/>
+          </a:prstGeom>
+          <a:noFill/>
+          <a:ln>
+            <a:noFill/>
+          </a:ln>
+        </p:spPr>
+        <p:txBody>
+          <a:bodyPr spcFirstLastPara="1" wrap="square" lIns="0" tIns="0" rIns="0" bIns="0" anchor="ctr" anchorCtr="0">
+            <a:noAutofit/>
+          </a:bodyPr>
+          <a:lstStyle/>
+          <a:p>
+            <a:pPr marL="0" marR="0" lvl="0" indent="0" algn="ctr" rtl="0">
+              <a:spcBef>
+                <a:spcPts val="0"/>
+              </a:spcBef>
+              <a:spcAft>
+                <a:spcPts val="0"/>
+              </a:spcAft>
+              <a:buClr>
+                <a:srgbClr val="FFFFFF"/>
+              </a:buClr>
+              <a:buSzPts val="1000"/>
+              <a:buFont typeface="Calibri"/>
+              <a:buNone/>
+              <a:defRPr/>
+            </a:pPr>
+            <a:r>
+              <a:rPr lang="en-US" sz="1000" b="1" i="0" u="none" strike="noStrike" cap="none">
+                <a:solidFill>
+                  <a:srgbClr val="FFFFFF"/>
+                </a:solidFill>
+                <a:latin typeface="Open Sans"/>
+                <a:ea typeface="Open Sans"/>
+                <a:cs typeface="Open Sans"/>
+              </a:rPr>
+              <a:t>1</a:t>
+            </a:r>
+            <a:r>
+              <a:rPr lang="ru-RU" sz="1000" b="1" i="0" u="none" strike="noStrike" cap="none">
+                <a:solidFill>
+                  <a:srgbClr val="FFFFFF"/>
+                </a:solidFill>
+                <a:latin typeface="Open Sans"/>
+                <a:ea typeface="Open Sans"/>
+                <a:cs typeface="Open Sans"/>
+              </a:rPr>
+              <a:t>2</a:t>
+            </a:r>
+            <a:endParaRPr sz="1000" b="0" i="0" u="none" strike="noStrike" cap="none">
+              <a:solidFill>
+                <a:schemeClr val="dk1"/>
+              </a:solidFill>
+              <a:latin typeface="Open Sans"/>
+              <a:cs typeface="Open Sans"/>
+            </a:endParaRPr>
+          </a:p>
+        </p:txBody>
+      </p:sp>
+      <p:sp>
+        <p:nvSpPr>
+          <p:cNvPr id="98139894" name="Google Shape;283;p16"/>
+          <p:cNvSpPr/>
+          <p:nvPr/>
+        </p:nvSpPr>
+        <p:spPr bwMode="auto">
+          <a:xfrm>
+            <a:off x="594360" y="182880"/>
+            <a:ext cx="7315200" cy="502920"/>
+          </a:xfrm>
+          <a:prstGeom prst="rect">
+            <a:avLst/>
+          </a:prstGeom>
+          <a:noFill/>
+          <a:ln>
+            <a:noFill/>
+          </a:ln>
+        </p:spPr>
+        <p:txBody>
+          <a:bodyPr spcFirstLastPara="1" wrap="square" lIns="91425" tIns="45700" rIns="91425" bIns="45700" anchor="ctr" anchorCtr="0">
+            <a:noAutofit/>
+          </a:bodyPr>
+          <a:lstStyle/>
+          <a:p>
+            <a:pPr marL="0" marR="0" lvl="0" indent="0" algn="l" rtl="0">
+              <a:spcBef>
+                <a:spcPts val="0"/>
+              </a:spcBef>
+              <a:spcAft>
+                <a:spcPts val="0"/>
+              </a:spcAft>
+              <a:buClr>
+                <a:srgbClr val="C0272D"/>
+              </a:buClr>
+              <a:buSzPts val="2600"/>
+              <a:buFont typeface="Calibri"/>
+              <a:buNone/>
+              <a:defRPr/>
+            </a:pPr>
+            <a:r>
+              <a:rPr lang="ru-RU" sz="2600" b="1" i="0" u="none" strike="noStrike" cap="none">
+                <a:solidFill>
+                  <a:srgbClr val="C0272D"/>
+                </a:solidFill>
+                <a:latin typeface="Open Sans"/>
+                <a:ea typeface="Open Sans"/>
+                <a:cs typeface="Open Sans"/>
+              </a:rPr>
+              <a:t>Выводы.</a:t>
+            </a:r>
+            <a:endParaRPr sz="2600" b="0" i="0" u="none" strike="noStrike" cap="none">
+              <a:solidFill>
+                <a:schemeClr val="dk1"/>
+              </a:solidFill>
+              <a:latin typeface="Open Sans"/>
+              <a:cs typeface="Open Sans"/>
+            </a:endParaRPr>
+          </a:p>
+        </p:txBody>
+      </p:sp>
+      <p:sp>
+        <p:nvSpPr>
+          <p:cNvPr id="2099121596" name="Google Shape;284;p16"/>
+          <p:cNvSpPr/>
+          <p:nvPr/>
+        </p:nvSpPr>
+        <p:spPr bwMode="auto">
+          <a:xfrm>
+            <a:off x="457200" y="201168"/>
+            <a:ext cx="73152" cy="457200"/>
+          </a:xfrm>
+          <a:prstGeom prst="rect">
+            <a:avLst/>
+          </a:prstGeom>
+          <a:solidFill>
+            <a:srgbClr val="C0272D"/>
+          </a:solidFill>
+          <a:ln w="12700" cap="flat" cmpd="sng">
+            <a:solidFill>
+              <a:srgbClr val="C0272D"/>
+            </a:solidFill>
+            <a:prstDash val="solid"/>
+            <a:round/>
+            <a:headEnd type="none" w="sm" len="sm"/>
+            <a:tailEnd type="none" w="sm" len="sm"/>
+          </a:ln>
+        </p:spPr>
+        <p:txBody>
+          <a:bodyPr spcFirstLastPara="1" wrap="square" lIns="91425" tIns="91425" rIns="91425" bIns="91425" anchor="ctr" anchorCtr="0">
+            <a:noAutofit/>
+          </a:bodyPr>
+          <a:lstStyle/>
+          <a:p>
+            <a:pPr marL="0" lvl="0" indent="0" algn="l" rtl="0">
+              <a:spcBef>
+                <a:spcPts val="0"/>
+              </a:spcBef>
+              <a:spcAft>
+                <a:spcPts val="0"/>
+              </a:spcAft>
+              <a:buNone/>
+              <a:defRPr/>
+            </a:pPr>
+            <a:endParaRPr>
+              <a:latin typeface="Open Sans"/>
+              <a:cs typeface="Open Sans"/>
+            </a:endParaRPr>
+          </a:p>
+        </p:txBody>
+      </p:sp>
+      <p:sp>
+        <p:nvSpPr>
+          <p:cNvPr id="1623129105" name="Google Shape;285;p16"/>
           <p:cNvSpPr/>
           <p:nvPr/>
         </p:nvSpPr>
@@ -5864,7 +7999,7 @@
       </p:sp>
       <p:sp>
         <p:nvSpPr>
-          <p:cNvPr id="1349704225" name="Google Shape;286;p16"/>
+          <p:cNvPr id="748528525" name="Google Shape;286;p16"/>
           <p:cNvSpPr/>
           <p:nvPr/>
         </p:nvSpPr>
@@ -5914,7 +8049,7 @@
       </p:sp>
       <p:sp>
         <p:nvSpPr>
-          <p:cNvPr id="441119631" name="Google Shape;287;p16"/>
+          <p:cNvPr id="1196671453" name="Google Shape;287;p16"/>
           <p:cNvSpPr/>
           <p:nvPr/>
         </p:nvSpPr>
@@ -5975,7 +8110,7 @@
       </p:sp>
       <p:sp>
         <p:nvSpPr>
-          <p:cNvPr id="1675409096" name="Google Shape;288;p16"/>
+          <p:cNvPr id="937145458" name="Google Shape;288;p16"/>
           <p:cNvSpPr/>
           <p:nvPr/>
         </p:nvSpPr>
@@ -6025,7 +8160,7 @@
       </p:sp>
       <p:sp>
         <p:nvSpPr>
-          <p:cNvPr id="145560423" name="Google Shape;289;p16"/>
+          <p:cNvPr id="2134170547" name="Google Shape;289;p16"/>
           <p:cNvSpPr/>
           <p:nvPr/>
         </p:nvSpPr>
@@ -6075,7 +8210,7 @@
       </p:sp>
       <p:sp>
         <p:nvSpPr>
-          <p:cNvPr id="1917065112" name="Google Shape;290;p16"/>
+          <p:cNvPr id="796931497" name="Google Shape;290;p16"/>
           <p:cNvSpPr/>
           <p:nvPr/>
         </p:nvSpPr>
@@ -6125,7 +8260,7 @@
       </p:sp>
       <p:sp>
         <p:nvSpPr>
-          <p:cNvPr id="452335749" name="Google Shape;291;p16"/>
+          <p:cNvPr id="1569516820" name="Google Shape;291;p16"/>
           <p:cNvSpPr/>
           <p:nvPr/>
         </p:nvSpPr>
@@ -6186,7 +8321,7 @@
       </p:sp>
       <p:sp>
         <p:nvSpPr>
-          <p:cNvPr id="842114771" name="Google Shape;292;p16"/>
+          <p:cNvPr id="796144711" name="Google Shape;292;p16"/>
           <p:cNvSpPr/>
           <p:nvPr/>
         </p:nvSpPr>
@@ -6236,7 +8371,7 @@
       </p:sp>
       <p:sp>
         <p:nvSpPr>
-          <p:cNvPr id="307976337" name="Google Shape;293;p16"/>
+          <p:cNvPr id="657493792" name="Google Shape;293;p16"/>
           <p:cNvSpPr/>
           <p:nvPr/>
         </p:nvSpPr>
@@ -6286,7 +8421,7 @@
       </p:sp>
       <p:sp>
         <p:nvSpPr>
-          <p:cNvPr id="23572600" name="Google Shape;294;p16"/>
+          <p:cNvPr id="1532146978" name="Google Shape;294;p16"/>
           <p:cNvSpPr/>
           <p:nvPr/>
         </p:nvSpPr>
@@ -6336,7 +8471,7 @@
       </p:sp>
       <p:sp>
         <p:nvSpPr>
-          <p:cNvPr id="1669002959" name="Google Shape;295;p16"/>
+          <p:cNvPr id="936128496" name="Google Shape;295;p16"/>
           <p:cNvSpPr/>
           <p:nvPr/>
         </p:nvSpPr>
@@ -6397,7 +8532,7 @@
       </p:sp>
       <p:sp>
         <p:nvSpPr>
-          <p:cNvPr id="1493396515" name="Google Shape;296;p16"/>
+          <p:cNvPr id="967886629" name="Google Shape;296;p16"/>
           <p:cNvSpPr/>
           <p:nvPr/>
         </p:nvSpPr>
@@ -6447,7 +8582,7 @@
       </p:sp>
       <p:sp>
         <p:nvSpPr>
-          <p:cNvPr id="381005300" name="Google Shape;297;p16"/>
+          <p:cNvPr id="1222837095" name="Google Shape;297;p16"/>
           <p:cNvSpPr/>
           <p:nvPr/>
         </p:nvSpPr>
@@ -6497,7 +8632,7 @@
       </p:sp>
       <p:sp>
         <p:nvSpPr>
-          <p:cNvPr id="1755014172" name="Google Shape;298;p16"/>
+          <p:cNvPr id="1090979159" name="Google Shape;298;p16"/>
           <p:cNvSpPr/>
           <p:nvPr/>
         </p:nvSpPr>
@@ -6547,7 +8682,7 @@
       </p:sp>
       <p:sp>
         <p:nvSpPr>
-          <p:cNvPr id="1200624343" name="Google Shape;299;p16"/>
+          <p:cNvPr id="900082329" name="Google Shape;299;p16"/>
           <p:cNvSpPr/>
           <p:nvPr/>
         </p:nvSpPr>
@@ -6608,7 +8743,7 @@
       </p:sp>
       <p:sp>
         <p:nvSpPr>
-          <p:cNvPr id="639493557" name="Google Shape;300;p16"/>
+          <p:cNvPr id="1334602335" name="Google Shape;300;p16"/>
           <p:cNvSpPr/>
           <p:nvPr/>
         </p:nvSpPr>
@@ -6658,7 +8793,7 @@
       </p:sp>
       <p:sp>
         <p:nvSpPr>
-          <p:cNvPr id="1436031429" name="Google Shape;303;p16"/>
+          <p:cNvPr id="70679641" name="Google Shape;303;p16"/>
           <p:cNvSpPr/>
           <p:nvPr/>
         </p:nvSpPr>
@@ -6733,7 +8868,7 @@
 </p:sld>
 </file>
 
-<file path=ppt/slides/slide11.xml><?xml version="1.0" encoding="utf-8"?>
+<file path=ppt/slides/slide14.xml><?xml version="1.0" encoding="utf-8"?>
 <p:sld xmlns:a="http://schemas.openxmlformats.org/drawingml/2006/main" xmlns:r="http://schemas.openxmlformats.org/officeDocument/2006/relationships" xmlns:p="http://schemas.openxmlformats.org/presentationml/2006/main" xmlns:m="http://schemas.openxmlformats.org/officeDocument/2006/math" xmlns:w="http://schemas.openxmlformats.org/wordprocessingml/2006/main" xmlns:mc="http://schemas.openxmlformats.org/markup-compatibility/2006" showMasterPhAnim="0" showMasterSp="1" show="1">
   <p:cSld name="">
     <p:spTree>
@@ -6752,7 +8887,7 @@
       </p:grpSpPr>
       <p:sp>
         <p:nvSpPr>
-          <p:cNvPr id="157554253" name="Google Shape;309;p17"/>
+          <p:cNvPr id="573010339" name="Google Shape;309;p17"/>
           <p:cNvSpPr txBox="1"/>
           <p:nvPr>
             <p:ph type="body" idx="1"/>
@@ -6838,7 +8973,7 @@
       </p:sp>
       <p:sp>
         <p:nvSpPr>
-          <p:cNvPr id="112363930" name="Google Shape;310;p17"/>
+          <p:cNvPr id="863595271" name="Google Shape;310;p17"/>
           <p:cNvSpPr/>
           <p:nvPr/>
         </p:nvSpPr>
@@ -6879,7 +9014,7 @@
       </p:sp>
       <p:pic>
         <p:nvPicPr>
-          <p:cNvPr id="1885620351" name=""/>
+          <p:cNvPr id="828981318" name=""/>
           <p:cNvPicPr>
             <a:picLocks noChangeAspect="1"/>
           </p:cNvPicPr>
@@ -6941,7 +9076,7 @@
       </p:grpSpPr>
       <p:pic>
         <p:nvPicPr>
-          <p:cNvPr id="624804849" name="Picture 1" descr="image12.png"/>
+          <p:cNvPr id="664229349" name="Picture 1" descr="image12.png"/>
           <p:cNvPicPr>
             <a:picLocks noChangeAspect="1"/>
           </p:cNvPicPr>
@@ -6963,42 +9098,7 @@
       </p:pic>
       <p:sp>
         <p:nvSpPr>
-          <p:cNvPr id="1660115670" name="Rectangle 2"/>
-          <p:cNvSpPr/>
-          <p:nvPr/>
-        </p:nvSpPr>
-        <p:spPr bwMode="auto">
-          <a:xfrm>
-            <a:off x="8686800" y="4846320"/>
-            <a:ext cx="274320" cy="182880"/>
-          </a:xfrm>
-          <a:prstGeom prst="rect">
-            <a:avLst/>
-          </a:prstGeom>
-          <a:solidFill>
-            <a:srgbClr val="C0272D"/>
-          </a:solidFill>
-          <a:ln w="12700">
-            <a:solidFill>
-              <a:srgbClr val="C0272D"/>
-            </a:solidFill>
-            <a:prstDash val="solid"/>
-          </a:ln>
-        </p:spPr>
-        <p:txBody>
-          <a:bodyPr rtlCol="0" anchor="ctr"/>
-          <a:lstStyle/>
-          <a:p>
-            <a:pPr algn="ctr">
-              <a:defRPr/>
-            </a:pPr>
-            <a:endParaRPr/>
-          </a:p>
-        </p:txBody>
-      </p:sp>
-      <p:sp>
-        <p:nvSpPr>
-          <p:cNvPr id="497649048" name="TextBox 3"/>
+          <p:cNvPr id="23685616" name="TextBox 3"/>
           <p:cNvSpPr txBox="1"/>
           <p:nvPr/>
         </p:nvSpPr>
@@ -7045,7 +9145,7 @@
       </p:sp>
       <p:sp>
         <p:nvSpPr>
-          <p:cNvPr id="670785614" name="TextBox 4"/>
+          <p:cNvPr id="97326590" name="TextBox 4"/>
           <p:cNvSpPr txBox="1"/>
           <p:nvPr/>
         </p:nvSpPr>
@@ -7095,7 +9195,7 @@
       </p:sp>
       <p:sp>
         <p:nvSpPr>
-          <p:cNvPr id="1948386742" name="Rectangle 5"/>
+          <p:cNvPr id="1788318092" name="Rectangle 5"/>
           <p:cNvSpPr/>
           <p:nvPr/>
         </p:nvSpPr>
@@ -7130,7 +9230,7 @@
       </p:sp>
       <p:sp>
         <p:nvSpPr>
-          <p:cNvPr id="1801669312" name="Rectangle 6"/>
+          <p:cNvPr id="403406501" name="Rectangle 6"/>
           <p:cNvSpPr/>
           <p:nvPr/>
         </p:nvSpPr>
@@ -7165,7 +9265,7 @@
       </p:sp>
       <p:sp>
         <p:nvSpPr>
-          <p:cNvPr id="1606079935" name=""/>
+          <p:cNvPr id="1641838369" name=""/>
           <p:cNvSpPr txBox="1"/>
           <p:nvPr/>
         </p:nvSpPr>
@@ -7517,7 +9617,7 @@
       </p:sp>
       <p:sp>
         <p:nvSpPr>
-          <p:cNvPr id="1150561435" name=""/>
+          <p:cNvPr id="1676317598" name=""/>
           <p:cNvSpPr txBox="1"/>
           <p:nvPr/>
         </p:nvSpPr>
@@ -7545,14 +9645,14 @@
       </p:sp>
       <p:sp>
         <p:nvSpPr>
-          <p:cNvPr id="369336682" name=""/>
+          <p:cNvPr id="1196956379" name=""/>
           <p:cNvSpPr txBox="1"/>
           <p:nvPr/>
         </p:nvSpPr>
         <p:spPr bwMode="auto">
           <a:xfrm rot="0" flipH="0" flipV="0">
-            <a:off x="4571999" y="846666"/>
-            <a:ext cx="4543349" cy="305159"/>
+            <a:off x="4571998" y="846666"/>
+            <a:ext cx="4544428" cy="305159"/>
           </a:xfrm>
           <a:prstGeom prst="rect">
             <a:avLst/>
@@ -7573,7 +9673,7 @@
                   <a:srgbClr val="C00000"/>
                 </a:solidFill>
               </a:rPr>
-              <a:t>Простые примеры бильярда с круглым столом</a:t>
+              <a:t>Простой пример бильярда с круглым столом</a:t>
             </a:r>
             <a:r>
               <a:rPr b="1">
@@ -7591,16 +9691,82 @@
           </a:p>
         </p:txBody>
       </p:sp>
+      <p:pic>
+        <p:nvPicPr>
+          <p:cNvPr id="267243538" name="">
+            <a:hlinkClick r:id="" action="ppaction://media"/>
+          </p:cNvPr>
+          <p:cNvPicPr>
+            <a:picLocks noChangeAspect="1"/>
+          </p:cNvPicPr>
+          <p:nvPr>
+            <a:videoFile r:link="rId6"/>
+            <p:extLst>
+              <p:ext uri="{DAA4B4D4-6D71-4841-9C94-3DE7FCFB9230}">
+                <p14:media xmlns:p14="http://schemas.microsoft.com/office/powerpoint/2010/main" r:embed="rId5"/>
+              </p:ext>
+            </p:extLst>
+          </p:nvPr>
+        </p:nvPicPr>
+        <p:blipFill rotWithShape="1">
+          <a:blip r:embed="rId4"/>
+          <a:stretch/>
+        </p:blipFill>
+        <p:spPr bwMode="auto">
+          <a:xfrm flipH="0" flipV="0">
+            <a:off x="4967911" y="1219828"/>
+            <a:ext cx="3788225" cy="3788225"/>
+          </a:xfrm>
+          <a:prstGeom prst="rect">
+            <a:avLst/>
+          </a:prstGeom>
+        </p:spPr>
+      </p:pic>
       <p:sp>
         <p:nvSpPr>
-          <p:cNvPr id="1122041156" name=""/>
+          <p:cNvPr id="1135675737" name="Rectangle 2"/>
+          <p:cNvSpPr/>
+          <p:nvPr/>
+        </p:nvSpPr>
+        <p:spPr bwMode="auto">
+          <a:xfrm>
+            <a:off x="8839199" y="4952999"/>
+            <a:ext cx="274320" cy="182880"/>
+          </a:xfrm>
+          <a:prstGeom prst="rect">
+            <a:avLst/>
+          </a:prstGeom>
+          <a:solidFill>
+            <a:srgbClr val="C0272D"/>
+          </a:solidFill>
+          <a:ln w="12700">
+            <a:solidFill>
+              <a:srgbClr val="C0272D"/>
+            </a:solidFill>
+            <a:prstDash val="solid"/>
+          </a:ln>
+        </p:spPr>
+        <p:txBody>
+          <a:bodyPr rtlCol="0" anchor="ctr"/>
+          <a:lstStyle/>
+          <a:p>
+            <a:pPr algn="ctr">
+              <a:defRPr/>
+            </a:pPr>
+            <a:endParaRPr/>
+          </a:p>
+        </p:txBody>
+      </p:sp>
+      <p:sp>
+        <p:nvSpPr>
+          <p:cNvPr id="1254392417" name="TextBox 3"/>
           <p:cNvSpPr txBox="1"/>
           <p:nvPr/>
         </p:nvSpPr>
         <p:spPr bwMode="auto">
-          <a:xfrm rot="0" flipH="0" flipV="0">
-            <a:off x="5104721" y="3092685"/>
-            <a:ext cx="3806042" cy="305159"/>
+          <a:xfrm>
+            <a:off x="8793479" y="4907279"/>
+            <a:ext cx="365760" cy="228600"/>
           </a:xfrm>
           <a:prstGeom prst="rect">
             <a:avLst/>
@@ -7608,26 +9774,33 @@
           <a:noFill/>
         </p:spPr>
         <p:txBody>
-          <a:bodyPr vertOverflow="overflow" horzOverflow="overflow" vert="horz" wrap="square" lIns="91440" tIns="45720" rIns="91440" bIns="45720" numCol="1" spcCol="0" rtlCol="0" fromWordArt="0" anchor="t" anchorCtr="0" forceAA="0" upright="0" compatLnSpc="0">
-            <a:spAutoFit/>
+          <a:bodyPr wrap="square" lIns="91422" tIns="45697" rIns="91422" bIns="45697" anchor="ctr">
+            <a:noAutofit/>
           </a:bodyPr>
-          <a:p>
-            <a:pPr algn="ctr">
-              <a:defRPr/>
-            </a:pPr>
-            <a:r>
-              <a:rPr>
-                <a:highlight>
-                  <a:srgbClr val="FFFF00"/>
-                </a:highlight>
-              </a:rPr>
-              <a:t>Анимация бильярда с окружностью</a:t>
-            </a:r>
-            <a:endParaRPr>
-              <a:highlight>
-                <a:srgbClr val="FFFF00"/>
-              </a:highlight>
-            </a:endParaRPr>
+          <a:lstStyle/>
+          <a:p>
+            <a:pPr marL="0" marR="0" indent="0" algn="ctr" rtl="0">
+              <a:spcBef>
+                <a:spcPts val="0"/>
+              </a:spcBef>
+              <a:spcAft>
+                <a:spcPts val="0"/>
+              </a:spcAft>
+              <a:buNone/>
+              <a:defRPr/>
+            </a:pPr>
+            <a:r>
+              <a:rPr sz="1000" b="1" i="0">
+                <a:solidFill>
+                  <a:srgbClr val="FFFFFF"/>
+                </a:solidFill>
+                <a:latin typeface="Calibri"/>
+                <a:ea typeface="Calibri"/>
+                <a:cs typeface="Calibri"/>
+              </a:rPr>
+              <a:t>3</a:t>
+            </a:r>
+            <a:endParaRPr/>
           </a:p>
         </p:txBody>
       </p:sp>
@@ -7673,7 +9846,7 @@
       </p:grpSpPr>
       <p:pic>
         <p:nvPicPr>
-          <p:cNvPr id="349522364" name="Picture 1" descr="image12.png"/>
+          <p:cNvPr id="437258324" name="Picture 1" descr="image12.png"/>
           <p:cNvPicPr>
             <a:picLocks noChangeAspect="1"/>
           </p:cNvPicPr>
@@ -7695,7 +9868,7 @@
       </p:pic>
       <p:sp>
         <p:nvSpPr>
-          <p:cNvPr id="215709837" name="Rectangle 2"/>
+          <p:cNvPr id="46604145" name="Rectangle 2"/>
           <p:cNvSpPr/>
           <p:nvPr/>
         </p:nvSpPr>
@@ -7730,7 +9903,7 @@
       </p:sp>
       <p:sp>
         <p:nvSpPr>
-          <p:cNvPr id="1509527062" name="TextBox 3"/>
+          <p:cNvPr id="367172349" name="TextBox 3"/>
           <p:cNvSpPr txBox="1"/>
           <p:nvPr/>
         </p:nvSpPr>
@@ -7777,7 +9950,7 @@
       </p:sp>
       <p:sp>
         <p:nvSpPr>
-          <p:cNvPr id="981578631" name="TextBox 4"/>
+          <p:cNvPr id="100037290" name="TextBox 4"/>
           <p:cNvSpPr txBox="1"/>
           <p:nvPr/>
         </p:nvSpPr>
@@ -7827,7 +10000,7 @@
       </p:sp>
       <p:sp>
         <p:nvSpPr>
-          <p:cNvPr id="1094531860" name="Rectangle 5"/>
+          <p:cNvPr id="209351681" name="Rectangle 5"/>
           <p:cNvSpPr/>
           <p:nvPr/>
         </p:nvSpPr>
@@ -7862,7 +10035,7 @@
       </p:sp>
       <p:sp>
         <p:nvSpPr>
-          <p:cNvPr id="692605178" name="Rectangle 6"/>
+          <p:cNvPr id="797796972" name="Rectangle 6"/>
           <p:cNvSpPr/>
           <p:nvPr/>
         </p:nvSpPr>
@@ -7897,7 +10070,7 @@
       </p:sp>
       <p:sp>
         <p:nvSpPr>
-          <p:cNvPr id="1168624432" name=""/>
+          <p:cNvPr id="1159864539" name=""/>
           <p:cNvSpPr txBox="1"/>
           <p:nvPr/>
         </p:nvSpPr>
@@ -8869,7 +11042,7 @@
       </p:grpSpPr>
       <p:pic>
         <p:nvPicPr>
-          <p:cNvPr id="1878135189" name="Picture 1" descr="image12.png"/>
+          <p:cNvPr id="1729571170" name="Picture 1" descr="image12.png"/>
           <p:cNvPicPr>
             <a:picLocks noChangeAspect="1"/>
           </p:cNvPicPr>
@@ -8891,7 +11064,7 @@
       </p:pic>
       <p:sp>
         <p:nvSpPr>
-          <p:cNvPr id="1487142385" name="Rectangle 2"/>
+          <p:cNvPr id="2055626685" name="Rectangle 2"/>
           <p:cNvSpPr/>
           <p:nvPr/>
         </p:nvSpPr>
@@ -8926,7 +11099,7 @@
       </p:sp>
       <p:sp>
         <p:nvSpPr>
-          <p:cNvPr id="557992248" name="TextBox 3"/>
+          <p:cNvPr id="444696141" name="TextBox 3"/>
           <p:cNvSpPr txBox="1"/>
           <p:nvPr/>
         </p:nvSpPr>
@@ -8973,7 +11146,7 @@
       </p:sp>
       <p:sp>
         <p:nvSpPr>
-          <p:cNvPr id="838579910" name="TextBox 4"/>
+          <p:cNvPr id="1801016742" name="TextBox 4"/>
           <p:cNvSpPr txBox="1"/>
           <p:nvPr/>
         </p:nvSpPr>
@@ -9058,7 +11231,7 @@
       </p:sp>
       <p:sp>
         <p:nvSpPr>
-          <p:cNvPr id="358258149" name="Rectangle 5"/>
+          <p:cNvPr id="197540814" name="Rectangle 5"/>
           <p:cNvSpPr/>
           <p:nvPr/>
         </p:nvSpPr>
@@ -9091,90 +11264,68 @@
           </a:p>
         </p:txBody>
       </p:sp>
-      <p:sp>
-        <p:nvSpPr>
-          <p:cNvPr id="1861082291" name=""/>
-          <p:cNvSpPr txBox="1"/>
-          <p:nvPr/>
-        </p:nvSpPr>
+      <p:pic>
+        <p:nvPicPr>
+          <p:cNvPr id="1166059753" name="">
+            <a:hlinkClick r:id="" action="ppaction://media"/>
+          </p:cNvPr>
+          <p:cNvPicPr>
+            <a:picLocks noChangeAspect="1"/>
+          </p:cNvPicPr>
+          <p:nvPr>
+            <a:videoFile r:link="rId6"/>
+            <p:extLst>
+              <p:ext uri="{DAA4B4D4-6D71-4841-9C94-3DE7FCFB9230}">
+                <p14:media xmlns:p14="http://schemas.microsoft.com/office/powerpoint/2010/main" r:embed="rId5"/>
+              </p:ext>
+            </p:extLst>
+          </p:nvPr>
+        </p:nvPicPr>
+        <p:blipFill rotWithShape="1">
+          <a:blip r:embed="rId4"/>
+          <a:stretch/>
+        </p:blipFill>
         <p:spPr bwMode="auto">
-          <a:xfrm rot="0" flipH="0" flipV="0">
-            <a:off x="824350" y="2070851"/>
-            <a:ext cx="3014689" cy="1158599"/>
+          <a:xfrm flipH="0" flipV="0">
+            <a:off x="665217" y="810835"/>
+            <a:ext cx="3860336" cy="3860336"/>
           </a:xfrm>
           <a:prstGeom prst="rect">
             <a:avLst/>
           </a:prstGeom>
-          <a:noFill/>
         </p:spPr>
-        <p:txBody>
-          <a:bodyPr vertOverflow="overflow" horzOverflow="overflow" vert="horz" wrap="square" lIns="91440" tIns="45720" rIns="91440" bIns="45720" numCol="1" spcCol="0" rtlCol="0" fromWordArt="0" anchor="t" anchorCtr="0" forceAA="0" upright="0" compatLnSpc="0">
-            <a:spAutoFit/>
-          </a:bodyPr>
-          <a:p>
-            <a:pPr>
-              <a:defRPr/>
-            </a:pPr>
-            <a:r>
-              <a:rPr lang="ru-RU" sz="1400" b="0" i="0" u="none" strike="noStrike" cap="none" spc="0">
-                <a:solidFill>
-                  <a:srgbClr val="000000"/>
-                </a:solidFill>
-                <a:highlight>
-                  <a:srgbClr val="FFFF00"/>
-                </a:highlight>
-                <a:latin typeface="Arial"/>
-                <a:ea typeface="Arial"/>
-                <a:cs typeface="Arial"/>
-              </a:rPr>
-              <a:t>Анимация периодического вращения (частица сталкивается о окружностью, места столкновения помечаются; это конкретное конечное число точек)</a:t>
-            </a:r>
-            <a:endParaRPr/>
-          </a:p>
-        </p:txBody>
-      </p:sp>
-      <p:sp>
-        <p:nvSpPr>
-          <p:cNvPr id="769569198" name=""/>
-          <p:cNvSpPr txBox="1"/>
-          <p:nvPr/>
-        </p:nvSpPr>
+      </p:pic>
+      <p:pic>
+        <p:nvPicPr>
+          <p:cNvPr id="1766268990" name="">
+            <a:hlinkClick r:id="" action="ppaction://media"/>
+          </p:cNvPr>
+          <p:cNvPicPr>
+            <a:picLocks noChangeAspect="1"/>
+          </p:cNvPicPr>
+          <p:nvPr>
+            <a:videoFile r:link="rId9"/>
+            <p:extLst>
+              <p:ext uri="{DAA4B4D4-6D71-4841-9C94-3DE7FCFB9230}">
+                <p14:media xmlns:p14="http://schemas.microsoft.com/office/powerpoint/2010/main" r:embed="rId8"/>
+              </p:ext>
+            </p:extLst>
+          </p:nvPr>
+        </p:nvPicPr>
+        <p:blipFill rotWithShape="1">
+          <a:blip r:embed="rId7"/>
+          <a:stretch/>
+        </p:blipFill>
         <p:spPr bwMode="auto">
-          <a:xfrm rot="0" flipH="0" flipV="0">
-            <a:off x="5280638" y="2070851"/>
-            <a:ext cx="3032328" cy="1371960"/>
+          <a:xfrm flipH="0" flipV="0">
+            <a:off x="4993004" y="810835"/>
+            <a:ext cx="3830954" cy="3830954"/>
           </a:xfrm>
           <a:prstGeom prst="rect">
             <a:avLst/>
           </a:prstGeom>
-          <a:noFill/>
         </p:spPr>
-        <p:txBody>
-          <a:bodyPr vertOverflow="overflow" horzOverflow="overflow" vert="horz" wrap="square" lIns="91440" tIns="45720" rIns="91440" bIns="45720" numCol="1" spcCol="0" rtlCol="0" fromWordArt="0" anchor="t" anchorCtr="0" forceAA="0" upright="0" compatLnSpc="0">
-            <a:spAutoFit/>
-          </a:bodyPr>
-          <a:p>
-            <a:pPr>
-              <a:defRPr/>
-            </a:pPr>
-            <a:r>
-              <a:rPr lang="ru-RU" sz="1400" b="0" i="0" u="none" strike="noStrike" cap="none" spc="0">
-                <a:solidFill>
-                  <a:srgbClr val="000000"/>
-                </a:solidFill>
-                <a:highlight>
-                  <a:srgbClr val="FFFF00"/>
-                </a:highlight>
-                <a:latin typeface="Arial"/>
-                <a:ea typeface="Arial"/>
-                <a:cs typeface="Arial"/>
-              </a:rPr>
-              <a:t>Анимация эргодического вращения (частица сталкивается о окружностью, места столкновения помечаются;  окружность со временем заполняется плотно)</a:t>
-            </a:r>
-            <a:endParaRPr/>
-          </a:p>
-        </p:txBody>
-      </p:sp>
+      </p:pic>
     </p:spTree>
   </p:cSld>
   <p:clrMapOvr>
@@ -9217,7 +11368,7 @@
       </p:grpSpPr>
       <p:pic>
         <p:nvPicPr>
-          <p:cNvPr id="523860232" name="Picture 1" descr="image12.png"/>
+          <p:cNvPr id="2147396203" name="Picture 1" descr="image12.png"/>
           <p:cNvPicPr>
             <a:picLocks noChangeAspect="1"/>
           </p:cNvPicPr>
@@ -9239,7 +11390,7 @@
       </p:pic>
       <p:sp>
         <p:nvSpPr>
-          <p:cNvPr id="2104223596" name="Rectangle 2"/>
+          <p:cNvPr id="390831490" name="Rectangle 2"/>
           <p:cNvSpPr/>
           <p:nvPr/>
         </p:nvSpPr>
@@ -9274,7 +11425,7 @@
       </p:sp>
       <p:sp>
         <p:nvSpPr>
-          <p:cNvPr id="2066145376" name="TextBox 3"/>
+          <p:cNvPr id="780854415" name="TextBox 3"/>
           <p:cNvSpPr txBox="1"/>
           <p:nvPr/>
         </p:nvSpPr>
@@ -9321,7 +11472,7 @@
       </p:sp>
       <p:sp>
         <p:nvSpPr>
-          <p:cNvPr id="1694668090" name="TextBox 4"/>
+          <p:cNvPr id="15899865" name="TextBox 4"/>
           <p:cNvSpPr txBox="1"/>
           <p:nvPr/>
         </p:nvSpPr>
@@ -9371,7 +11522,7 @@
       </p:sp>
       <p:sp>
         <p:nvSpPr>
-          <p:cNvPr id="1388500054" name="Rectangle 5"/>
+          <p:cNvPr id="1471704956" name="Rectangle 5"/>
           <p:cNvSpPr/>
           <p:nvPr/>
         </p:nvSpPr>
@@ -9406,7 +11557,7 @@
       </p:sp>
       <p:sp>
         <p:nvSpPr>
-          <p:cNvPr id="2039427975" name="Rectangle 6"/>
+          <p:cNvPr id="1262614948" name="Rectangle 6"/>
           <p:cNvSpPr/>
           <p:nvPr/>
         </p:nvSpPr>
@@ -9441,14 +11592,14 @@
       </p:sp>
       <p:sp>
         <p:nvSpPr>
-          <p:cNvPr id="957090643" name=""/>
+          <p:cNvPr id="1787413275" name=""/>
           <p:cNvSpPr txBox="1"/>
           <p:nvPr/>
         </p:nvSpPr>
         <p:spPr bwMode="auto">
           <a:xfrm rot="0" flipH="0" flipV="0">
-            <a:off x="422816" y="848356"/>
-            <a:ext cx="8633340" cy="3745422"/>
+            <a:off x="422815" y="848355"/>
+            <a:ext cx="8634779" cy="3745422"/>
           </a:xfrm>
           <a:prstGeom prst="rect">
             <a:avLst/>
@@ -10487,7 +12638,7 @@
                 <a:ea typeface="Open Sans"/>
                 <a:cs typeface="Open Sans"/>
               </a:rPr>
-              <a:t>v</a:t>
+              <a:t>w</a:t>
             </a:r>
             <a:r>
               <a:rPr lang="en-US" sz="1200" b="0" i="1" u="none" strike="noStrike" cap="none" spc="0" baseline="-25000">
@@ -10819,7 +12970,7 @@
       </p:grpSpPr>
       <p:pic>
         <p:nvPicPr>
-          <p:cNvPr id="1546512435" name="Picture 1" descr="image12.png"/>
+          <p:cNvPr id="947206334" name="Picture 1" descr="image12.png"/>
           <p:cNvPicPr>
             <a:picLocks noChangeAspect="1"/>
           </p:cNvPicPr>
@@ -10841,7 +12992,7 @@
       </p:pic>
       <p:sp>
         <p:nvSpPr>
-          <p:cNvPr id="1279053587" name="Rectangle 2"/>
+          <p:cNvPr id="982614563" name="Rectangle 2"/>
           <p:cNvSpPr/>
           <p:nvPr/>
         </p:nvSpPr>
@@ -10876,7 +13027,7 @@
       </p:sp>
       <p:sp>
         <p:nvSpPr>
-          <p:cNvPr id="1108453016" name="TextBox 3"/>
+          <p:cNvPr id="228412901" name="TextBox 3"/>
           <p:cNvSpPr txBox="1"/>
           <p:nvPr/>
         </p:nvSpPr>
@@ -10923,7 +13074,7 @@
       </p:sp>
       <p:sp>
         <p:nvSpPr>
-          <p:cNvPr id="840038304" name="TextBox 4"/>
+          <p:cNvPr id="1633681786" name="TextBox 4"/>
           <p:cNvSpPr txBox="1"/>
           <p:nvPr/>
         </p:nvSpPr>
@@ -10993,7 +13144,7 @@
                 <a:ea typeface="Open Sans"/>
                 <a:cs typeface="Open Sans"/>
               </a:rPr>
-              <a:t>бильярде  и метода развертки.</a:t>
+              <a:t>бильярде и метода развертки.</a:t>
             </a:r>
             <a:endParaRPr sz="1800">
               <a:latin typeface="Open Sans"/>
@@ -11004,7 +13155,7 @@
       </p:sp>
       <p:sp>
         <p:nvSpPr>
-          <p:cNvPr id="1162391143" name="Rectangle 5"/>
+          <p:cNvPr id="1040424614" name="Rectangle 5"/>
           <p:cNvSpPr/>
           <p:nvPr/>
         </p:nvSpPr>
@@ -11037,94 +13188,37 @@
           </a:p>
         </p:txBody>
       </p:sp>
-      <p:sp>
-        <p:nvSpPr>
-          <p:cNvPr id="863643872" name=""/>
-          <p:cNvSpPr txBox="1"/>
-          <p:nvPr/>
-        </p:nvSpPr>
+      <p:pic>
+        <p:nvPicPr>
+          <p:cNvPr id="1408105242" name="">
+            <a:hlinkClick r:id="" action="ppaction://media"/>
+          </p:cNvPr>
+          <p:cNvPicPr>
+            <a:picLocks noChangeAspect="1"/>
+          </p:cNvPicPr>
+          <p:nvPr>
+            <a:videoFile r:link="rId6"/>
+            <p:extLst>
+              <p:ext uri="{DAA4B4D4-6D71-4841-9C94-3DE7FCFB9230}">
+                <p14:media xmlns:p14="http://schemas.microsoft.com/office/powerpoint/2010/main" r:embed="rId5"/>
+              </p:ext>
+            </p:extLst>
+          </p:nvPr>
+        </p:nvPicPr>
+        <p:blipFill rotWithShape="1">
+          <a:blip r:embed="rId4"/>
+          <a:stretch/>
+        </p:blipFill>
         <p:spPr bwMode="auto">
-          <a:xfrm rot="0" flipH="0" flipV="0">
-            <a:off x="824351" y="2611778"/>
-            <a:ext cx="3011450" cy="518519"/>
+          <a:xfrm flipH="0" flipV="0">
+            <a:off x="2716291" y="814139"/>
+            <a:ext cx="4215060" cy="4215060"/>
           </a:xfrm>
           <a:prstGeom prst="rect">
             <a:avLst/>
           </a:prstGeom>
-          <a:noFill/>
         </p:spPr>
-        <p:txBody>
-          <a:bodyPr vertOverflow="overflow" horzOverflow="overflow" vert="horz" wrap="square" lIns="91440" tIns="45720" rIns="91440" bIns="45720" numCol="1" spcCol="0" rtlCol="0" fromWordArt="0" anchor="t" anchorCtr="0" forceAA="0" upright="0" compatLnSpc="0">
-            <a:spAutoFit/>
-          </a:bodyPr>
-          <a:p>
-            <a:pPr>
-              <a:defRPr/>
-            </a:pPr>
-            <a:r>
-              <a:rPr>
-                <a:highlight>
-                  <a:srgbClr val="FFFF00"/>
-                </a:highlight>
-              </a:rPr>
-              <a:t>Анимация квадратного бильярда (рациональный угол наклона</a:t>
-            </a:r>
-            <a:endParaRPr>
-              <a:highlight>
-                <a:srgbClr val="FFFF00"/>
-              </a:highlight>
-            </a:endParaRPr>
-          </a:p>
-        </p:txBody>
-      </p:sp>
-      <p:sp>
-        <p:nvSpPr>
-          <p:cNvPr id="1000252403" name=""/>
-          <p:cNvSpPr txBox="1"/>
-          <p:nvPr/>
-        </p:nvSpPr>
-        <p:spPr bwMode="auto">
-          <a:xfrm rot="0" flipH="0" flipV="0">
-            <a:off x="5280639" y="2398418"/>
-            <a:ext cx="3030169" cy="945239"/>
-          </a:xfrm>
-          <a:prstGeom prst="rect">
-            <a:avLst/>
-          </a:prstGeom>
-          <a:noFill/>
-        </p:spPr>
-        <p:txBody>
-          <a:bodyPr vertOverflow="overflow" horzOverflow="overflow" vert="horz" wrap="square" lIns="91440" tIns="45720" rIns="91440" bIns="45720" numCol="1" spcCol="0" rtlCol="0" fromWordArt="0" anchor="t" anchorCtr="0" forceAA="0" upright="0" compatLnSpc="0">
-            <a:spAutoFit/>
-          </a:bodyPr>
-          <a:p>
-            <a:pPr>
-              <a:defRPr/>
-            </a:pPr>
-            <a:r>
-              <a:rPr>
-                <a:highlight>
-                  <a:srgbClr val="FFFF00"/>
-                </a:highlight>
-              </a:rPr>
-              <a:t>Анимация развертки квадратного бильярда (тот же рациональный угол наклона</a:t>
-            </a:r>
-            <a:r>
-              <a:rPr>
-                <a:highlight>
-                  <a:srgbClr val="FFFF00"/>
-                </a:highlight>
-              </a:rPr>
-              <a:t>, что и слева) и свёртки обратно</a:t>
-            </a:r>
-            <a:endParaRPr>
-              <a:highlight>
-                <a:srgbClr val="FFFF00"/>
-              </a:highlight>
-            </a:endParaRPr>
-          </a:p>
-        </p:txBody>
-      </p:sp>
+      </p:pic>
     </p:spTree>
   </p:cSld>
   <p:clrMapOvr>
@@ -11167,7 +13261,7 @@
       </p:grpSpPr>
       <p:pic>
         <p:nvPicPr>
-          <p:cNvPr id="854785790" name="Picture 1" descr="image12.png"/>
+          <p:cNvPr id="945263057" name="Picture 1" descr="image12.png"/>
           <p:cNvPicPr>
             <a:picLocks noChangeAspect="1"/>
           </p:cNvPicPr>
@@ -11189,13 +13283,13 @@
       </p:pic>
       <p:sp>
         <p:nvSpPr>
-          <p:cNvPr id="1981981302" name="Rectangle 2"/>
+          <p:cNvPr id="113082008" name="Rectangle 2"/>
           <p:cNvSpPr/>
           <p:nvPr/>
         </p:nvSpPr>
         <p:spPr bwMode="auto">
           <a:xfrm>
-            <a:off x="8686800" y="4846320"/>
+            <a:off x="8732520" y="4892039"/>
             <a:ext cx="274320" cy="182880"/>
           </a:xfrm>
           <a:prstGeom prst="rect">
@@ -11224,13 +13318,13 @@
       </p:sp>
       <p:sp>
         <p:nvSpPr>
-          <p:cNvPr id="473044855" name="TextBox 3"/>
+          <p:cNvPr id="1926905726" name="TextBox 3"/>
           <p:cNvSpPr txBox="1"/>
           <p:nvPr/>
         </p:nvSpPr>
         <p:spPr bwMode="auto">
           <a:xfrm>
-            <a:off x="8641080" y="4800600"/>
+            <a:off x="8686800" y="4846320"/>
             <a:ext cx="365760" cy="228600"/>
           </a:xfrm>
           <a:prstGeom prst="rect">
@@ -11239,7 +13333,7 @@
           <a:noFill/>
         </p:spPr>
         <p:txBody>
-          <a:bodyPr wrap="square" lIns="91422" tIns="45697" rIns="91422" bIns="45697" anchor="ctr">
+          <a:bodyPr wrap="square" lIns="91422" tIns="45696" rIns="91422" bIns="45696" anchor="ctr">
             <a:noAutofit/>
           </a:bodyPr>
           <a:lstStyle/>
@@ -11271,7 +13365,7 @@
       </p:sp>
       <p:sp>
         <p:nvSpPr>
-          <p:cNvPr id="137552910" name="TextBox 4"/>
+          <p:cNvPr id="2115938319" name="TextBox 4"/>
           <p:cNvSpPr txBox="1"/>
           <p:nvPr/>
         </p:nvSpPr>
@@ -11286,7 +13380,7 @@
           <a:noFill/>
         </p:spPr>
         <p:txBody>
-          <a:bodyPr wrap="square" lIns="91422" tIns="45697" rIns="91422" bIns="45697" anchor="ctr">
+          <a:bodyPr wrap="square" lIns="91422" tIns="45696" rIns="91422" bIns="45696" anchor="ctr">
             <a:noAutofit/>
           </a:bodyPr>
           <a:lstStyle/>
@@ -11302,7 +13396,7 @@
               <a:defRPr/>
             </a:pPr>
             <a:r>
-              <a:rPr sz="2400" b="1" i="0">
+              <a:rPr lang="ru-RU" sz="1800" b="1" i="0" u="none" strike="noStrike" cap="none" spc="0">
                 <a:solidFill>
                   <a:srgbClr val="C0272D"/>
                 </a:solidFill>
@@ -11310,9 +13404,31 @@
                 <a:ea typeface="Open Sans"/>
                 <a:cs typeface="Open Sans"/>
               </a:rPr>
-              <a:t>Обобщение на эллипс.</a:t>
-            </a:r>
-            <a:endParaRPr sz="1200">
+              <a:t>Периодическая структура и </a:t>
+            </a:r>
+            <a:r>
+              <a:rPr lang="ru-RU" sz="1800" b="1" i="0" u="none" strike="noStrike" cap="none" spc="0">
+                <a:solidFill>
+                  <a:srgbClr val="C0272D"/>
+                </a:solidFill>
+                <a:latin typeface="Open Sans"/>
+                <a:ea typeface="Open Sans"/>
+                <a:cs typeface="Open Sans"/>
+              </a:rPr>
+              <a:t>связь с Тором</a:t>
+            </a:r>
+            <a:r>
+              <a:rPr sz="1800" b="1" i="0">
+                <a:solidFill>
+                  <a:srgbClr val="C0272D"/>
+                </a:solidFill>
+                <a:latin typeface="Open Sans"/>
+                <a:ea typeface="Open Sans"/>
+                <a:cs typeface="Open Sans"/>
+              </a:rPr>
+              <a:t>.</a:t>
+            </a:r>
+            <a:endParaRPr sz="900">
               <a:latin typeface="Open Sans"/>
               <a:cs typeface="Open Sans"/>
             </a:endParaRPr>
@@ -11321,7 +13437,7 @@
       </p:sp>
       <p:sp>
         <p:nvSpPr>
-          <p:cNvPr id="1624093272" name="Rectangle 5"/>
+          <p:cNvPr id="981376346" name="Rectangle 5"/>
           <p:cNvSpPr/>
           <p:nvPr/>
         </p:nvSpPr>
@@ -11356,14 +13472,14 @@
       </p:sp>
       <p:sp>
         <p:nvSpPr>
-          <p:cNvPr id="1097593844" name="Rectangle 6"/>
+          <p:cNvPr id="334713314" name="Rectangle 6"/>
           <p:cNvSpPr/>
           <p:nvPr/>
         </p:nvSpPr>
         <p:spPr bwMode="auto">
           <a:xfrm flipH="0" flipV="0">
-            <a:off x="459356" y="848356"/>
-            <a:ext cx="8503920" cy="2326642"/>
+            <a:off x="459355" y="755430"/>
+            <a:ext cx="8503920" cy="4045168"/>
           </a:xfrm>
           <a:prstGeom prst="rect">
             <a:avLst/>
@@ -11391,14 +13507,14 @@
       </p:sp>
       <p:sp>
         <p:nvSpPr>
-          <p:cNvPr id="995741541" name=""/>
+          <p:cNvPr id="872421013" name=""/>
           <p:cNvSpPr txBox="1"/>
           <p:nvPr/>
         </p:nvSpPr>
         <p:spPr bwMode="auto">
           <a:xfrm rot="0" flipH="0" flipV="0">
-            <a:off x="422815" y="848355"/>
-            <a:ext cx="8542979" cy="305159"/>
+            <a:off x="422815" y="755430"/>
+            <a:ext cx="8540463" cy="4365399"/>
           </a:xfrm>
           <a:prstGeom prst="rect">
             <a:avLst/>
@@ -11410,10 +13526,988 @@
             <a:spAutoFit/>
           </a:bodyPr>
           <a:p>
+            <a:pPr indent="274319">
+              <a:defRPr/>
+            </a:pPr>
+            <a:r>
+              <a:rPr lang="ru-RU" sz="1200" b="0" i="0" u="none" strike="noStrike" cap="none" spc="0">
+                <a:solidFill>
+                  <a:srgbClr val="000000"/>
+                </a:solidFill>
+                <a:latin typeface="Open Sans"/>
+                <a:ea typeface="Open Sans"/>
+                <a:cs typeface="Open Sans"/>
+              </a:rPr>
+              <a:t>В результате последовательного отражения квадрата </a:t>
+            </a:r>
+            <a:r>
+              <a:rPr lang="ru-RU" sz="1200" b="0" i="1" u="none" strike="noStrike" cap="none" spc="0">
+                <a:solidFill>
+                  <a:srgbClr val="000000"/>
+                </a:solidFill>
+                <a:latin typeface="Open Sans"/>
+                <a:ea typeface="Open Sans"/>
+                <a:cs typeface="Open Sans"/>
+              </a:rPr>
+              <a:t>D</a:t>
+            </a:r>
+            <a:r>
+              <a:rPr lang="ru-RU" sz="1200" b="0" i="0" u="none" strike="noStrike" cap="none" spc="0">
+                <a:solidFill>
+                  <a:srgbClr val="000000"/>
+                </a:solidFill>
+                <a:latin typeface="Open Sans"/>
+                <a:ea typeface="Open Sans"/>
+                <a:cs typeface="Open Sans"/>
+              </a:rPr>
+              <a:t> возникает бесконечная периодическая структура, состоящая из его зеркальных копий. Каждая копия получается отражением исходного квадрата относительно одной из сторон соседней копии.</a:t>
+            </a:r>
+            <a:endParaRPr sz="1200" b="0" i="0" u="none" strike="noStrike" cap="none" spc="0">
+              <a:solidFill>
+                <a:srgbClr val="000000"/>
+              </a:solidFill>
+              <a:latin typeface="Open Sans"/>
+              <a:cs typeface="Open Sans"/>
+            </a:endParaRPr>
+          </a:p>
+          <a:p>
+            <a:pPr indent="274319">
+              <a:defRPr/>
+            </a:pPr>
+            <a:r>
+              <a:rPr lang="ru-RU" sz="1200" b="0" i="0" u="none" strike="noStrike" cap="none" spc="0">
+                <a:solidFill>
+                  <a:srgbClr val="000000"/>
+                </a:solidFill>
+                <a:latin typeface="Open Sans"/>
+                <a:ea typeface="Open Sans"/>
+                <a:cs typeface="Open Sans"/>
+              </a:rPr>
+              <a:t>Хотя эта структура распространяется на всю плоскость, она обладает периодичностью. В частности, квадрат со стороной </a:t>
+            </a:r>
+            <a:r>
+              <a:rPr lang="ru-RU" sz="1200" b="0" i="0" u="none" strike="noStrike" cap="none" spc="0">
+                <a:solidFill>
+                  <a:srgbClr val="000000"/>
+                </a:solidFill>
+                <a:latin typeface="Open Sans"/>
+                <a:ea typeface="Open Sans"/>
+                <a:cs typeface="Open Sans"/>
+              </a:rPr>
+              <a:t>2</a:t>
+            </a:r>
+            <a:r>
+              <a:rPr lang="ru-RU" sz="1200" b="0" i="0" u="none" strike="noStrike" cap="none" spc="0">
+                <a:solidFill>
+                  <a:srgbClr val="000000"/>
+                </a:solidFill>
+                <a:latin typeface="Open Sans"/>
+                <a:ea typeface="Open Sans"/>
+                <a:cs typeface="Open Sans"/>
+              </a:rPr>
+              <a:t>:</a:t>
+            </a:r>
+            <a:endParaRPr sz="1200" b="0" i="0" u="none" strike="noStrike" cap="none" spc="0">
+              <a:solidFill>
+                <a:srgbClr val="000000"/>
+              </a:solidFill>
+              <a:latin typeface="Open Sans"/>
+              <a:cs typeface="Open Sans"/>
+            </a:endParaRPr>
+          </a:p>
+          <a:p>
+            <a:pPr indent="274319">
+              <a:defRPr/>
+            </a:pPr>
+            <a:endParaRPr sz="800" b="0" i="0" u="none" strike="noStrike" cap="none" spc="0">
+              <a:solidFill>
+                <a:srgbClr val="000000"/>
+              </a:solidFill>
+              <a:latin typeface="Open Sans"/>
+              <a:cs typeface="Open Sans"/>
+            </a:endParaRPr>
+          </a:p>
+          <a:p>
+            <a:pPr indent="274319">
+              <a:defRPr/>
+            </a:pPr>
+            <mc:AlternateContent xmlns:mc="http://schemas.openxmlformats.org/markup-compatibility/2006" xmlns:m="http://schemas.openxmlformats.org/officeDocument/2006/math">
+              <mc:Choice xmlns:a14="http://schemas.microsoft.com/office/drawing/2010/main" Requires="a14">
+                <a14:m>
+                  <m:oMathPara>
+                    <m:oMathParaPr/>
+                    <m:oMath>
+                      <m:sSub>
+                        <m:sSubPr>
+                          <m:ctrlPr>
+                            <a:rPr lang="ru-RU" sz="1200" u="none" strike="noStrike" cap="none" spc="0">
+                              <a:solidFill>
+                                <a:srgbClr val="000000"/>
+                              </a:solidFill>
+                              <a:latin typeface="Cambria Math"/>
+                              <a:ea typeface="Cambria Math"/>
+                              <a:cs typeface="Cambria Math"/>
+                            </a:rPr>
+                          </m:ctrlPr>
+                        </m:sSubPr>
+                        <m:e>
+                          <m:r>
+                            <m:rPr/>
+                            <a:rPr>
+                              <a:latin typeface="Cambria Math"/>
+                              <a:ea typeface="Cambria Math"/>
+                              <a:cs typeface="Cambria Math"/>
+                            </a:rPr>
+                            <m:t>𝕂</m:t>
+                          </m:r>
+                        </m:e>
+                        <m:sub>
+                          <m:r>
+                            <m:rPr>
+                              <m:sty m:val="p"/>
+                            </m:rPr>
+                            <a:rPr lang="ru-RU" sz="1200" u="none" strike="noStrike" cap="none" spc="0">
+                              <a:solidFill>
+                                <a:srgbClr val="000000"/>
+                              </a:solidFill>
+                              <a:latin typeface="Cambria Math"/>
+                              <a:ea typeface="Cambria Math"/>
+                              <a:cs typeface="Cambria Math"/>
+                            </a:rPr>
+                            <m:t>2</m:t>
+                          </m:r>
+                        </m:sub>
+                      </m:sSub>
+                      <m:r>
+                        <m:rPr>
+                          <m:sty m:val="p"/>
+                        </m:rPr>
+                        <a:rPr lang="ru-RU" sz="1200" u="none" strike="noStrike" cap="none" spc="0">
+                          <a:solidFill>
+                            <a:srgbClr val="000000"/>
+                          </a:solidFill>
+                          <a:latin typeface="Cambria Math"/>
+                          <a:ea typeface="Cambria Math"/>
+                          <a:cs typeface="Cambria Math"/>
+                        </a:rPr>
+                        <m:t>=</m:t>
+                      </m:r>
+                      <m:d>
+                        <m:dPr>
+                          <m:begChr m:val="{"/>
+                          <m:endChr m:val="}"/>
+                          <m:ctrlPr>
+                            <a:rPr lang="ru-RU" sz="1200" u="none" strike="noStrike" cap="none" spc="0">
+                              <a:solidFill>
+                                <a:srgbClr val="000000"/>
+                              </a:solidFill>
+                              <a:latin typeface="Cambria Math"/>
+                              <a:ea typeface="Cambria Math"/>
+                              <a:cs typeface="Cambria Math"/>
+                            </a:rPr>
+                          </m:ctrlPr>
+                        </m:dPr>
+                        <m:e>
+                          <m:d>
+                            <m:dPr>
+                              <m:begChr m:val="("/>
+                              <m:endChr m:val=")"/>
+                              <m:ctrlPr>
+                                <a:rPr lang="ru-RU" sz="1200" u="none" strike="noStrike" cap="none" spc="0">
+                                  <a:solidFill>
+                                    <a:srgbClr val="000000"/>
+                                  </a:solidFill>
+                                  <a:latin typeface="Cambria Math"/>
+                                  <a:ea typeface="Cambria Math"/>
+                                  <a:cs typeface="Cambria Math"/>
+                                </a:rPr>
+                              </m:ctrlPr>
+                            </m:dPr>
+                            <m:e>
+                              <m:r>
+                                <m:rPr>
+                                  <m:sty m:val="p"/>
+                                </m:rPr>
+                                <a:rPr lang="ru-RU" sz="1200" u="none" strike="noStrike" cap="none" spc="0">
+                                  <a:solidFill>
+                                    <a:srgbClr val="000000"/>
+                                  </a:solidFill>
+                                  <a:latin typeface="Cambria Math"/>
+                                  <a:ea typeface="Cambria Math"/>
+                                  <a:cs typeface="Cambria Math"/>
+                                </a:rPr>
+                                <m:t>x,y</m:t>
+                              </m:r>
+                            </m:e>
+                          </m:d>
+                          <m:r>
+                            <m:rPr>
+                              <m:sty m:val="p"/>
+                            </m:rPr>
+                            <a:rPr lang="ru-RU" sz="1200" u="none" strike="noStrike" cap="none" spc="0">
+                              <a:solidFill>
+                                <a:srgbClr val="000000"/>
+                              </a:solidFill>
+                              <a:latin typeface="Cambria Math"/>
+                              <a:ea typeface="Cambria Math"/>
+                              <a:cs typeface="Cambria Math"/>
+                            </a:rPr>
+                            <m:t>: 0≤x, y≤2</m:t>
+                          </m:r>
+                        </m:e>
+                      </m:d>
+                      <m:r>
+                        <m:rPr>
+                          <m:sty m:val="p"/>
+                        </m:rPr>
+                        <a:rPr lang="ru-RU" sz="1200" u="none" strike="noStrike" cap="none" spc="0">
+                          <a:solidFill>
+                            <a:srgbClr val="000000"/>
+                          </a:solidFill>
+                          <a:latin typeface="Cambria Math"/>
+                          <a:ea typeface="Cambria Math"/>
+                          <a:cs typeface="Cambria Math"/>
+                        </a:rPr>
+                        <m:t>,</m:t>
+                      </m:r>
+                    </m:oMath>
+                  </m:oMathPara>
+                </a14:m>
+              </mc:Choice>
+              <mc:Fallback/>
+            </mc:AlternateContent>
+            <a:endParaRPr sz="1200" b="0" i="0" u="none" strike="noStrike" cap="none" spc="0">
+              <a:solidFill>
+                <a:srgbClr val="000000"/>
+              </a:solidFill>
+              <a:latin typeface="Open Sans"/>
+              <a:cs typeface="Open Sans"/>
+            </a:endParaRPr>
+          </a:p>
+          <a:p>
+            <a:pPr indent="274319">
+              <a:defRPr/>
+            </a:pPr>
+            <a:endParaRPr sz="400" b="0" i="0" u="none" strike="noStrike" cap="none" spc="0">
+              <a:solidFill>
+                <a:srgbClr val="000000"/>
+              </a:solidFill>
+              <a:latin typeface="Open Sans"/>
+              <a:cs typeface="Open Sans"/>
+            </a:endParaRPr>
+          </a:p>
+          <a:p>
+            <a:pPr indent="274319">
+              <a:defRPr/>
+            </a:pPr>
+            <a:r>
+              <a:rPr lang="ru-RU" sz="1200" b="0" i="0" u="none" strike="noStrike" cap="none" spc="0">
+                <a:solidFill>
+                  <a:srgbClr val="000000"/>
+                </a:solidFill>
+                <a:latin typeface="Open Sans"/>
+                <a:ea typeface="Open Sans"/>
+                <a:cs typeface="Open Sans"/>
+              </a:rPr>
+              <a:t>служит фундаментальной областью: вся плоскость покрывается его параллельными переносами.</a:t>
+            </a:r>
+            <a:endParaRPr sz="1200" b="0" i="0" u="none" strike="noStrike" cap="none" spc="0">
+              <a:solidFill>
+                <a:srgbClr val="000000"/>
+              </a:solidFill>
+              <a:latin typeface="Open Sans"/>
+              <a:cs typeface="Open Sans"/>
+            </a:endParaRPr>
+          </a:p>
+          <a:p>
+            <a:pPr indent="274319">
+              <a:defRPr/>
+            </a:pPr>
+            <a:r>
+              <a:rPr lang="ru-RU" sz="1200" b="0" i="0" u="none" strike="noStrike" cap="none" spc="0">
+                <a:solidFill>
+                  <a:srgbClr val="000000"/>
+                </a:solidFill>
+                <a:latin typeface="Open Sans"/>
+                <a:ea typeface="Open Sans"/>
+                <a:cs typeface="Open Sans"/>
+              </a:rPr>
+              <a:t>Это означает, что для описания движения достаточно рассмотреть квадрат 2 </a:t>
+            </a:r>
+            <a:r>
+              <a:rPr sz="1200" b="0" i="0" u="none">
+                <a:solidFill>
+                  <a:srgbClr val="000000"/>
+                </a:solidFill>
+                <a:latin typeface="Open Sans"/>
+                <a:ea typeface="Open Sans"/>
+                <a:cs typeface="Open Sans"/>
+              </a:rPr>
+              <a:t>× 2</a:t>
+            </a:r>
+            <a:r>
+              <a:rPr lang="ru-RU" sz="1200" b="0" i="0" u="none" strike="noStrike" cap="none" spc="0">
+                <a:solidFill>
+                  <a:srgbClr val="000000"/>
+                </a:solidFill>
+                <a:latin typeface="Open Sans"/>
+                <a:ea typeface="Open Sans"/>
+                <a:cs typeface="Open Sans"/>
+              </a:rPr>
+              <a:t>, а затем отождествить его противоположные стороны. Полученная поверхность называется </a:t>
+            </a:r>
+            <a:r>
+              <a:rPr lang="ru-RU" sz="1200" b="1" i="0" u="none" strike="noStrike" cap="none" spc="0">
+                <a:solidFill>
+                  <a:srgbClr val="000000"/>
+                </a:solidFill>
+                <a:latin typeface="Open Sans"/>
+                <a:ea typeface="Open Sans"/>
+                <a:cs typeface="Open Sans"/>
+              </a:rPr>
+              <a:t>двумерным плоским тором</a:t>
+            </a:r>
+            <a:r>
+              <a:rPr lang="ru-RU" sz="1200" b="0" i="0" u="none" strike="noStrike" cap="none" spc="0">
+                <a:solidFill>
+                  <a:srgbClr val="000000"/>
+                </a:solidFill>
+                <a:latin typeface="Open Sans"/>
+                <a:ea typeface="Open Sans"/>
+                <a:cs typeface="Open Sans"/>
+              </a:rPr>
+              <a:t> и обозначается </a:t>
+            </a:r>
+            <a:r>
+              <a:rPr lang="en-US" sz="1200" b="1" i="1" u="none" strike="noStrike" cap="none" spc="0">
+                <a:solidFill>
+                  <a:srgbClr val="000000"/>
+                </a:solidFill>
+                <a:latin typeface="Open Sans"/>
+                <a:ea typeface="Open Sans"/>
+                <a:cs typeface="Open Sans"/>
+              </a:rPr>
+              <a:t>Tor</a:t>
+            </a:r>
+            <a:r>
+              <a:rPr lang="en-US" sz="1200" b="1" i="1" u="none" strike="noStrike" cap="none" spc="0" baseline="30000">
+                <a:solidFill>
+                  <a:srgbClr val="000000"/>
+                </a:solidFill>
+                <a:latin typeface="Open Sans"/>
+                <a:ea typeface="Open Sans"/>
+                <a:cs typeface="Open Sans"/>
+              </a:rPr>
+              <a:t>2</a:t>
+            </a:r>
+            <a:r>
+              <a:rPr lang="ru-RU" sz="1200" b="0" i="0" u="none" strike="noStrike" cap="none" spc="0">
+                <a:solidFill>
+                  <a:srgbClr val="000000"/>
+                </a:solidFill>
+                <a:latin typeface="Open Sans"/>
+                <a:ea typeface="Open Sans"/>
+                <a:cs typeface="Open Sans"/>
+              </a:rPr>
+              <a:t>.</a:t>
+            </a:r>
+            <a:endParaRPr sz="1200" b="0" i="0" u="none" strike="noStrike" cap="none" spc="0">
+              <a:solidFill>
+                <a:srgbClr val="000000"/>
+              </a:solidFill>
+              <a:latin typeface="Open Sans"/>
+              <a:cs typeface="Open Sans"/>
+            </a:endParaRPr>
+          </a:p>
+          <a:p>
+            <a:pPr indent="274319">
+              <a:defRPr/>
+            </a:pPr>
+            <a:r>
+              <a:rPr lang="ru-RU" sz="1200" b="0" i="0" u="none" strike="noStrike" cap="none" spc="0">
+                <a:solidFill>
+                  <a:srgbClr val="000000"/>
+                </a:solidFill>
+                <a:latin typeface="Open Sans"/>
+                <a:ea typeface="Open Sans"/>
+                <a:cs typeface="Open Sans"/>
+              </a:rPr>
+              <a:t>На торе прямая, по которой движется частица в развёрнутом пространстве, превращается в траекторию линейного потока. При этом частица движется с постоянной скоростью и не испытывает отражений.</a:t>
+            </a:r>
+            <a:endParaRPr sz="1200" b="0" i="0" u="none" strike="noStrike" cap="none" spc="0">
+              <a:solidFill>
+                <a:srgbClr val="000000"/>
+              </a:solidFill>
+              <a:latin typeface="Open Sans"/>
+              <a:cs typeface="Open Sans"/>
+            </a:endParaRPr>
+          </a:p>
+          <a:p>
+            <a:pPr indent="274319">
+              <a:defRPr/>
+            </a:pPr>
+            <a:r>
+              <a:rPr lang="ru-RU" sz="1200" b="0" i="0" u="none" strike="noStrike" cap="none" spc="0">
+                <a:solidFill>
+                  <a:srgbClr val="000000"/>
+                </a:solidFill>
+                <a:latin typeface="Open Sans"/>
+                <a:ea typeface="Open Sans"/>
+                <a:cs typeface="Open Sans"/>
+              </a:rPr>
+              <a:t>Линейный поток на плоском торе —</a:t>
+            </a:r>
+            <a:r>
+              <a:rPr lang="en-US" sz="1200" b="0" i="0" u="none" strike="noStrike" cap="none" spc="0">
+                <a:solidFill>
+                  <a:srgbClr val="000000"/>
+                </a:solidFill>
+                <a:latin typeface="Open Sans"/>
+                <a:ea typeface="Open Sans"/>
+                <a:cs typeface="Open Sans"/>
+              </a:rPr>
+              <a:t> </a:t>
+            </a:r>
+            <a:r>
+              <a:rPr lang="ru-RU" sz="1200" b="0" i="0" u="none" strike="noStrike" cap="none" spc="0">
+                <a:solidFill>
+                  <a:srgbClr val="000000"/>
+                </a:solidFill>
+                <a:latin typeface="Open Sans"/>
+                <a:ea typeface="Open Sans"/>
+                <a:cs typeface="Open Sans"/>
+              </a:rPr>
+              <a:t>один из </a:t>
+            </a:r>
+            <a:r>
+              <a:rPr lang="ru-RU" sz="1200" b="0" i="0" u="none" strike="noStrike" cap="none" spc="0">
+                <a:solidFill>
+                  <a:srgbClr val="000000"/>
+                </a:solidFill>
+                <a:latin typeface="Open Sans"/>
+                <a:ea typeface="Open Sans"/>
+                <a:cs typeface="Open Sans"/>
+              </a:rPr>
+              <a:t>стандартных примеров эргодической теории. Его основные свойства:</a:t>
+            </a:r>
+            <a:endParaRPr lang="ru-RU" sz="1200" b="0" i="0" u="none" strike="noStrike" cap="none" spc="0">
+              <a:solidFill>
+                <a:srgbClr val="000000"/>
+              </a:solidFill>
+              <a:latin typeface="Open Sans"/>
+              <a:ea typeface="Open Sans"/>
+              <a:cs typeface="Open Sans"/>
+            </a:endParaRPr>
+          </a:p>
+          <a:p>
+            <a:pPr marL="217793" indent="-217793">
+              <a:buFont typeface="Arial"/>
+              <a:buChar char="•"/>
+              <a:defRPr/>
+            </a:pPr>
+            <a:r>
+              <a:rPr lang="ru-RU" sz="1200" b="0" i="0" u="none" strike="noStrike" cap="none" spc="0">
+                <a:solidFill>
+                  <a:srgbClr val="000000"/>
+                </a:solidFill>
+                <a:latin typeface="Open Sans"/>
+                <a:ea typeface="Open Sans"/>
+                <a:cs typeface="Open Sans"/>
+              </a:rPr>
+              <a:t>если траектория имеет рациональный наклон</a:t>
+            </a:r>
+            <a:r>
+              <a:rPr lang="ru-RU" sz="1600" b="0" i="0" u="none" strike="noStrike" cap="none" spc="0">
+                <a:solidFill>
+                  <a:srgbClr val="000000"/>
+                </a:solidFill>
+                <a:latin typeface="Open Sans"/>
+                <a:ea typeface="Open Sans"/>
+                <a:cs typeface="Open Sans"/>
+              </a:rPr>
+              <a:t> </a:t>
+            </a:r>
+            <mc:AlternateContent xmlns:mc="http://schemas.openxmlformats.org/markup-compatibility/2006" xmlns:m="http://schemas.openxmlformats.org/officeDocument/2006/math">
+              <mc:Choice xmlns:a14="http://schemas.microsoft.com/office/drawing/2010/main" Requires="a14">
+                <a14:m>
+                  <m:oMathPara>
+                    <m:oMathParaPr/>
+                    <m:oMath>
+                      <m:f>
+                        <m:fPr>
+                          <m:ctrlPr>
+                            <a:rPr lang="ru-RU" sz="1400" b="0" i="1" u="none" strike="noStrike" cap="none" spc="0">
+                              <a:solidFill>
+                                <a:srgbClr val="000000"/>
+                              </a:solidFill>
+                              <a:latin typeface="Cambria Math"/>
+                              <a:ea typeface="Cambria Math"/>
+                              <a:cs typeface="Cambria Math"/>
+                            </a:rPr>
+                          </m:ctrlPr>
+                        </m:fPr>
+                        <m:num>
+                          <m:r>
+                            <m:rPr>
+                              <m:sty m:val="i"/>
+                            </m:rPr>
+                            <a:rPr lang="ru-RU" sz="1400" u="none" strike="noStrike" cap="none" spc="0">
+                              <a:solidFill>
+                                <a:srgbClr val="000000"/>
+                              </a:solidFill>
+                              <a:latin typeface="Cambria Math"/>
+                              <a:ea typeface="Cambria Math"/>
+                              <a:cs typeface="Cambria Math"/>
+                            </a:rPr>
+                            <m:t>dy</m:t>
+                          </m:r>
+                        </m:num>
+                        <m:den>
+                          <m:r>
+                            <m:rPr>
+                              <m:sty m:val="i"/>
+                            </m:rPr>
+                            <a:rPr lang="ru-RU" sz="1400" u="none" strike="noStrike" cap="none" spc="0">
+                              <a:solidFill>
+                                <a:srgbClr val="000000"/>
+                              </a:solidFill>
+                              <a:latin typeface="Cambria Math"/>
+                              <a:ea typeface="Cambria Math"/>
+                              <a:cs typeface="Cambria Math"/>
+                            </a:rPr>
+                            <m:t>dx</m:t>
+                          </m:r>
+                        </m:den>
+                      </m:f>
+                      <m:r>
+                        <m:rPr>
+                          <m:sty m:val="p"/>
+                        </m:rPr>
+                        <a:rPr lang="ru-RU" sz="1400" u="none" strike="noStrike" cap="none" spc="0">
+                          <a:solidFill>
+                            <a:srgbClr val="000000"/>
+                          </a:solidFill>
+                          <a:latin typeface="Cambria Math"/>
+                          <a:ea typeface="Cambria Math"/>
+                          <a:cs typeface="Cambria Math"/>
+                        </a:rPr>
+                        <m:t> ∈ ℚ,</m:t>
+                      </m:r>
+                    </m:oMath>
+                  </m:oMathPara>
+                </a14:m>
+              </mc:Choice>
+              <mc:Fallback/>
+            </mc:AlternateContent>
+            <a:r>
+              <a:rPr lang="ru-RU" sz="1200" b="0" i="0" u="none" strike="noStrike" cap="none" spc="0">
+                <a:solidFill>
+                  <a:srgbClr val="000000"/>
+                </a:solidFill>
+                <a:latin typeface="Open Sans"/>
+                <a:ea typeface="Open Sans"/>
+                <a:cs typeface="Open Sans"/>
+              </a:rPr>
+              <a:t> то она </a:t>
+            </a:r>
+            <a:r>
+              <a:rPr lang="ru-RU" sz="1200" b="1" i="0" u="none" strike="noStrike" cap="none" spc="0">
+                <a:solidFill>
+                  <a:srgbClr val="000000"/>
+                </a:solidFill>
+                <a:latin typeface="Open Sans"/>
+                <a:ea typeface="Open Sans"/>
+                <a:cs typeface="Open Sans"/>
+              </a:rPr>
+              <a:t>периодична </a:t>
+            </a:r>
+            <a:r>
+              <a:rPr lang="ru-RU" sz="1200" b="0" i="0" u="none" strike="noStrike" cap="none" spc="0">
+                <a:solidFill>
+                  <a:srgbClr val="000000"/>
+                </a:solidFill>
+                <a:latin typeface="Open Sans"/>
+                <a:ea typeface="Open Sans"/>
+                <a:cs typeface="Open Sans"/>
+              </a:rPr>
+              <a:t>(она движется вдоль замкнутой геодезической</a:t>
+            </a:r>
+            <a:r>
+              <a:rPr lang="en-US" sz="1200" b="0" i="0" u="none" strike="noStrike" cap="none" spc="0">
+                <a:solidFill>
+                  <a:srgbClr val="000000"/>
+                </a:solidFill>
+                <a:latin typeface="Open Sans"/>
+                <a:ea typeface="Open Sans"/>
+                <a:cs typeface="Open Sans"/>
+              </a:rPr>
+              <a:t> </a:t>
+            </a:r>
+            <a:r>
+              <a:rPr lang="ru-RU" sz="1200" b="0" i="0" u="none" strike="noStrike" cap="none" spc="0">
+                <a:solidFill>
+                  <a:srgbClr val="000000"/>
+                </a:solidFill>
+                <a:latin typeface="Open Sans"/>
+                <a:ea typeface="Open Sans"/>
+                <a:cs typeface="Open Sans"/>
+              </a:rPr>
+              <a:t>линии</a:t>
+            </a:r>
+            <a:r>
+              <a:rPr lang="ru-RU" sz="1200" b="0" i="0" u="none" strike="noStrike" cap="none" spc="0">
+                <a:solidFill>
+                  <a:srgbClr val="000000"/>
+                </a:solidFill>
+                <a:latin typeface="Open Sans"/>
+                <a:ea typeface="Open Sans"/>
+                <a:cs typeface="Open Sans"/>
+              </a:rPr>
+              <a:t>);</a:t>
+            </a:r>
+            <a:endParaRPr lang="ru-RU" sz="1200" b="0" i="0" u="none" strike="noStrike" cap="none" spc="0">
+              <a:solidFill>
+                <a:srgbClr val="000000"/>
+              </a:solidFill>
+              <a:latin typeface="Open Sans"/>
+              <a:cs typeface="Open Sans"/>
+            </a:endParaRPr>
+          </a:p>
+          <a:p>
+            <a:pPr marL="217793" indent="-217793">
+              <a:buFont typeface="Arial"/>
+              <a:buChar char="•"/>
+              <a:defRPr/>
+            </a:pPr>
+            <a:r>
+              <a:rPr lang="ru-RU" sz="1200" b="0" i="0" u="none" strike="noStrike" cap="none" spc="0">
+                <a:solidFill>
+                  <a:srgbClr val="000000"/>
+                </a:solidFill>
+                <a:latin typeface="Open Sans"/>
+                <a:ea typeface="Open Sans"/>
+                <a:cs typeface="Open Sans"/>
+              </a:rPr>
+              <a:t>если траектория имеет иррациональный наклон </a:t>
+            </a:r>
+            <mc:AlternateContent xmlns:mc="http://schemas.openxmlformats.org/markup-compatibility/2006" xmlns:m="http://schemas.openxmlformats.org/officeDocument/2006/math">
+              <mc:Choice xmlns:a14="http://schemas.microsoft.com/office/drawing/2010/main" Requires="a14">
+                <a14:m>
+                  <m:oMathPara>
+                    <m:oMathParaPr/>
+                    <m:oMath>
+                      <m:f>
+                        <m:fPr>
+                          <m:ctrlPr>
+                            <a:rPr lang="ru-RU" sz="1400" u="none" strike="noStrike" cap="none" spc="0">
+                              <a:solidFill>
+                                <a:srgbClr val="000000"/>
+                              </a:solidFill>
+                              <a:latin typeface="Cambria Math"/>
+                              <a:ea typeface="Cambria Math"/>
+                              <a:cs typeface="Cambria Math"/>
+                            </a:rPr>
+                          </m:ctrlPr>
+                        </m:fPr>
+                        <m:num>
+                          <m:r>
+                            <m:rPr>
+                              <m:sty m:val="i"/>
+                            </m:rPr>
+                            <a:rPr lang="ru-RU" sz="1400" u="none" strike="noStrike" cap="none" spc="0">
+                              <a:solidFill>
+                                <a:srgbClr val="000000"/>
+                              </a:solidFill>
+                              <a:latin typeface="Cambria Math"/>
+                              <a:ea typeface="Cambria Math"/>
+                              <a:cs typeface="Cambria Math"/>
+                            </a:rPr>
+                            <m:t>dy</m:t>
+                          </m:r>
+                        </m:num>
+                        <m:den>
+                          <m:r>
+                            <m:rPr>
+                              <m:sty m:val="i"/>
+                            </m:rPr>
+                            <a:rPr lang="ru-RU" sz="1400" u="none" strike="noStrike" cap="none" spc="0">
+                              <a:solidFill>
+                                <a:srgbClr val="000000"/>
+                              </a:solidFill>
+                              <a:latin typeface="Cambria Math"/>
+                              <a:ea typeface="Cambria Math"/>
+                              <a:cs typeface="Cambria Math"/>
+                            </a:rPr>
+                            <m:t>dx</m:t>
+                          </m:r>
+                        </m:den>
+                      </m:f>
+                      <m:r>
+                        <m:rPr>
+                          <m:sty m:val="p"/>
+                        </m:rPr>
+                        <a:rPr lang="ru-RU" sz="1400" u="none" strike="noStrike" cap="none" spc="0">
+                          <a:solidFill>
+                            <a:srgbClr val="000000"/>
+                          </a:solidFill>
+                          <a:latin typeface="Cambria Math"/>
+                          <a:ea typeface="Cambria Math"/>
+                          <a:cs typeface="Cambria Math"/>
+                        </a:rPr>
+                        <m:t> ∉ ℚ</m:t>
+                      </m:r>
+                    </m:oMath>
+                  </m:oMathPara>
+                </a14:m>
+              </mc:Choice>
+              <mc:Fallback/>
+            </mc:AlternateContent>
+            <a:r>
+              <a:rPr lang="ru-RU" sz="1200" b="0" i="0" u="none" strike="noStrike" cap="none" spc="0">
+                <a:solidFill>
+                  <a:srgbClr val="000000"/>
+                </a:solidFill>
+                <a:latin typeface="Open Sans"/>
+                <a:ea typeface="Open Sans"/>
+                <a:cs typeface="Open Sans"/>
+              </a:rPr>
+              <a:t>, то она </a:t>
+            </a:r>
+            <a:r>
+              <a:rPr lang="ru-RU" sz="1200" b="1" i="0" u="none" strike="noStrike" cap="none" spc="0">
+                <a:solidFill>
+                  <a:srgbClr val="000000"/>
+                </a:solidFill>
+                <a:latin typeface="Open Sans"/>
+                <a:ea typeface="Open Sans"/>
+                <a:cs typeface="Open Sans"/>
+              </a:rPr>
+              <a:t>плотна </a:t>
+            </a:r>
+            <a:r>
+              <a:rPr lang="ru-RU" sz="1200" b="0" i="0" u="none" strike="noStrike" cap="none" spc="0">
+                <a:solidFill>
+                  <a:srgbClr val="000000"/>
+                </a:solidFill>
+                <a:latin typeface="Open Sans"/>
+                <a:ea typeface="Open Sans"/>
+                <a:cs typeface="Open Sans"/>
+              </a:rPr>
+              <a:t>(ее </a:t>
+            </a:r>
+            <a:r>
+              <a:rPr lang="ru-RU" sz="1200" b="0" i="0" u="sng" strike="noStrike" cap="none" spc="0">
+                <a:solidFill>
+                  <a:srgbClr val="000000"/>
+                </a:solidFill>
+                <a:latin typeface="Open Sans"/>
+                <a:ea typeface="Open Sans"/>
+                <a:cs typeface="Open Sans"/>
+              </a:rPr>
+              <a:t>замыкание </a:t>
+            </a:r>
+            <a:r>
+              <a:rPr lang="ru-RU" sz="1200" b="0" i="0" u="none" strike="noStrike" cap="none" spc="0">
+                <a:solidFill>
+                  <a:srgbClr val="000000"/>
+                </a:solidFill>
+                <a:latin typeface="Open Sans"/>
+                <a:ea typeface="Open Sans"/>
+                <a:cs typeface="Open Sans"/>
+              </a:rPr>
+              <a:t>— весь тор).</a:t>
+            </a:r>
+            <a:endParaRPr lang="ru-RU" sz="1200" b="0" i="0" u="none" strike="noStrike" cap="none" spc="0">
+              <a:solidFill>
+                <a:srgbClr val="000000"/>
+              </a:solidFill>
+              <a:latin typeface="Open Sans"/>
+              <a:ea typeface="Open Sans"/>
+              <a:cs typeface="Open Sans"/>
+            </a:endParaRPr>
+          </a:p>
+          <a:p>
+            <a:pPr indent="274320" algn="just">
+              <a:defRPr/>
+            </a:pPr>
+            <a:r>
+              <a:rPr lang="ru-RU" sz="1200" b="0" i="0" u="none" strike="noStrike" cap="none" spc="0">
+                <a:solidFill>
+                  <a:srgbClr val="000000"/>
+                </a:solidFill>
+                <a:latin typeface="Open Sans"/>
+                <a:ea typeface="Open Sans"/>
+                <a:cs typeface="Open Sans"/>
+              </a:rPr>
+              <a:t>Заметим, что теория легко обобщается на </a:t>
+            </a:r>
+            <a:r>
+              <a:rPr lang="ru-RU" sz="1200" b="1" i="0" u="none" strike="noStrike" cap="none" spc="0">
+                <a:solidFill>
+                  <a:srgbClr val="000000"/>
+                </a:solidFill>
+                <a:latin typeface="Open Sans"/>
+                <a:ea typeface="Open Sans"/>
+                <a:cs typeface="Open Sans"/>
+              </a:rPr>
+              <a:t>прямоугольные </a:t>
+            </a:r>
+            <a:r>
+              <a:rPr lang="ru-RU" sz="1200" b="0" i="0" u="none" strike="noStrike" cap="none" spc="0">
+                <a:solidFill>
+                  <a:srgbClr val="000000"/>
+                </a:solidFill>
+                <a:latin typeface="Open Sans"/>
+                <a:ea typeface="Open Sans"/>
+                <a:cs typeface="Open Sans"/>
+              </a:rPr>
+              <a:t>бильярды, так как </a:t>
+            </a:r>
+            <a:r>
+              <a:rPr lang="ru-RU" sz="1200" b="0" i="0" u="none" strike="noStrike" cap="none" spc="0">
+                <a:solidFill>
+                  <a:srgbClr val="000000"/>
+                </a:solidFill>
+                <a:latin typeface="Open Sans"/>
+                <a:ea typeface="Open Sans"/>
+                <a:cs typeface="Open Sans"/>
+              </a:rPr>
+              <a:t>прямоугольник со сторонами</a:t>
+            </a:r>
+            <a:r>
+              <a:rPr lang="ru-RU" sz="1200" b="0" i="0" u="none" strike="noStrike" cap="none" spc="0">
+                <a:solidFill>
+                  <a:srgbClr val="000000"/>
+                </a:solidFill>
+                <a:latin typeface="Open Sans"/>
+                <a:ea typeface="Open Sans"/>
+                <a:cs typeface="Open Sans"/>
+              </a:rPr>
+              <a:t> </a:t>
+            </a:r>
+            <a:r>
+              <a:rPr lang="en-US" sz="1200" b="0" i="0" u="none" strike="noStrike" cap="none" spc="0">
+                <a:solidFill>
+                  <a:srgbClr val="000000"/>
+                </a:solidFill>
+                <a:latin typeface="Open Sans"/>
+                <a:ea typeface="Open Sans"/>
+                <a:cs typeface="Open Sans"/>
+              </a:rPr>
+              <a:t>a </a:t>
+            </a:r>
+            <a:r>
+              <a:rPr lang="ru-RU" sz="1200" b="0" i="0" u="none" strike="noStrike" cap="none" spc="0">
+                <a:solidFill>
+                  <a:srgbClr val="000000"/>
+                </a:solidFill>
+                <a:latin typeface="Open Sans"/>
+                <a:ea typeface="Open Sans"/>
+                <a:cs typeface="Open Sans"/>
+              </a:rPr>
+              <a:t>и </a:t>
+            </a:r>
+            <a:r>
+              <a:rPr lang="en-US" sz="1200" b="0" i="0" u="none" strike="noStrike" cap="none" spc="0">
+                <a:solidFill>
+                  <a:srgbClr val="000000"/>
+                </a:solidFill>
+                <a:latin typeface="Open Sans"/>
+                <a:ea typeface="Open Sans"/>
+                <a:cs typeface="Open Sans"/>
+              </a:rPr>
+              <a:t>b</a:t>
+            </a:r>
+            <a:r>
+              <a:rPr lang="ru-RU" sz="1200" b="0" i="0" u="none" strike="noStrike" cap="none" spc="0">
+                <a:solidFill>
+                  <a:srgbClr val="000000"/>
+                </a:solidFill>
+                <a:latin typeface="Open Sans"/>
+                <a:ea typeface="Open Sans"/>
+                <a:cs typeface="Open Sans"/>
+              </a:rPr>
+              <a:t> можно преобразовать в единичный квадрат с помощью масштабирования координат:</a:t>
+            </a:r>
+            <a:r>
+              <a:rPr lang="en-US" sz="1200" b="0" i="0" u="none" strike="noStrike" cap="none" spc="0">
+                <a:solidFill>
+                  <a:srgbClr val="000000"/>
+                </a:solidFill>
+                <a:latin typeface="Open Sans"/>
+                <a:ea typeface="Open Sans"/>
+                <a:cs typeface="Open Sans"/>
+              </a:rPr>
+              <a:t> </a:t>
+            </a:r>
+            <a:r>
+              <a:rPr lang="en-US" sz="1200" b="0" i="1" u="none" strike="noStrike" cap="none" spc="0">
+                <a:solidFill>
+                  <a:srgbClr val="000000"/>
+                </a:solidFill>
+                <a:latin typeface="Open Sans"/>
+                <a:ea typeface="Open Sans"/>
+                <a:cs typeface="Open Sans"/>
+              </a:rPr>
+              <a:t>(</a:t>
+            </a:r>
+            <a:r>
+              <a:rPr lang="en-US" sz="1200" b="0" i="1" u="none" strike="noStrike" cap="none" spc="0">
+                <a:solidFill>
+                  <a:srgbClr val="000000"/>
+                </a:solidFill>
+                <a:latin typeface="Open Sans"/>
+                <a:ea typeface="Open Sans"/>
+                <a:cs typeface="Open Sans"/>
+              </a:rPr>
+              <a:t>x, y) </a:t>
+            </a:r>
+            <a:r>
+              <a:rPr lang="en-US" sz="1200" b="0" i="1" u="none" strike="noStrike" cap="none" spc="0">
+                <a:solidFill>
+                  <a:srgbClr val="000000"/>
+                </a:solidFill>
+                <a:latin typeface="Open Sans"/>
+                <a:ea typeface="Open Sans"/>
+                <a:cs typeface="Open Sans"/>
+              </a:rPr>
+              <a:t>→</a:t>
+            </a:r>
+            <a:r>
+              <a:rPr lang="ru-RU" sz="1200" b="0" i="1" u="none" strike="noStrike" cap="none" spc="0">
+                <a:solidFill>
+                  <a:srgbClr val="000000"/>
+                </a:solidFill>
+                <a:latin typeface="Open Sans"/>
+                <a:ea typeface="Open Sans"/>
+                <a:cs typeface="Open Sans"/>
+              </a:rPr>
+              <a:t> (</a:t>
+            </a:r>
+            <a:r>
+              <a:rPr lang="en-US" sz="1200" b="0" i="1" u="none" strike="noStrike" cap="none" spc="0">
+                <a:solidFill>
+                  <a:srgbClr val="000000"/>
+                </a:solidFill>
+                <a:latin typeface="Open Sans"/>
+                <a:ea typeface="Open Sans"/>
+                <a:cs typeface="Open Sans"/>
+              </a:rPr>
+              <a:t>x/a, y/b)</a:t>
+            </a:r>
+            <a:endParaRPr sz="1200">
+              <a:latin typeface="Open Sans"/>
+              <a:cs typeface="Open Sans"/>
+            </a:endParaRPr>
+          </a:p>
+          <a:p>
             <a:pPr>
               <a:defRPr/>
             </a:pPr>
-            <a:endParaRPr/>
+            <a:endParaRPr sz="1200">
+              <a:latin typeface="Open Sans"/>
+              <a:cs typeface="Open Sans"/>
+            </a:endParaRPr>
           </a:p>
         </p:txBody>
       </p:sp>
@@ -11459,15 +14553,14 @@
       </p:grpSpPr>
       <p:pic>
         <p:nvPicPr>
-          <p:cNvPr id="1392673584" name="Google Shape;48;p6" descr="/home/claude/logo_300spbu.png"/>
-          <p:cNvPicPr/>
+          <p:cNvPr id="258086538" name="Picture 1" descr="image12.png"/>
+          <p:cNvPicPr>
+            <a:picLocks noChangeAspect="1"/>
+          </p:cNvPicPr>
           <p:nvPr/>
         </p:nvPicPr>
         <p:blipFill rotWithShape="1">
-          <a:blip r:embed="rId3">
-            <a:alphaModFix/>
-          </a:blip>
-          <a:srcRect l="0" t="0" r="0" b="0"/>
+          <a:blip r:embed="rId3"/>
           <a:stretch/>
         </p:blipFill>
         <p:spPr bwMode="auto">
@@ -11478,15 +14571,11 @@
           <a:prstGeom prst="rect">
             <a:avLst/>
           </a:prstGeom>
-          <a:noFill/>
-          <a:ln>
-            <a:noFill/>
-          </a:ln>
         </p:spPr>
       </p:pic>
       <p:sp>
         <p:nvSpPr>
-          <p:cNvPr id="636148423" name="Google Shape;49;p6"/>
+          <p:cNvPr id="1425321247" name="Rectangle 2"/>
           <p:cNvSpPr/>
           <p:nvPr/>
         </p:nvSpPr>
@@ -11501,30 +14590,18 @@
           <a:solidFill>
             <a:srgbClr val="C0272D"/>
           </a:solidFill>
-          <a:ln w="12700" cap="flat" cmpd="sng">
+          <a:ln w="12700">
             <a:solidFill>
               <a:srgbClr val="C0272D"/>
             </a:solidFill>
             <a:prstDash val="solid"/>
-            <a:round/>
-            <a:headEnd type="none" w="sm" len="sm"/>
-            <a:tailEnd type="none" w="sm" len="sm"/>
           </a:ln>
         </p:spPr>
         <p:txBody>
-          <a:bodyPr spcFirstLastPara="1" wrap="square" lIns="91425" tIns="91425" rIns="91425" bIns="91425" anchor="ctr" anchorCtr="0">
-            <a:noAutofit/>
-          </a:bodyPr>
+          <a:bodyPr rtlCol="0" anchor="ctr"/>
           <a:lstStyle/>
           <a:p>
-            <a:pPr marL="0" lvl="0" indent="0" algn="l" rtl="0">
-              <a:spcBef>
-                <a:spcPts val="0"/>
-              </a:spcBef>
-              <a:spcAft>
-                <a:spcPts val="0"/>
-              </a:spcAft>
-              <a:buNone/>
+            <a:pPr algn="ctr">
               <a:defRPr/>
             </a:pPr>
             <a:endParaRPr/>
@@ -11533,8 +14610,8 @@
       </p:sp>
       <p:sp>
         <p:nvSpPr>
-          <p:cNvPr id="1177558690" name="Google Shape;50;p6"/>
-          <p:cNvSpPr/>
+          <p:cNvPr id="1741492031" name="TextBox 3"/>
+          <p:cNvSpPr txBox="1"/>
           <p:nvPr/>
         </p:nvSpPr>
         <p:spPr bwMode="auto">
@@ -11546,33 +14623,25 @@
             <a:avLst/>
           </a:prstGeom>
           <a:noFill/>
-          <a:ln>
-            <a:noFill/>
-          </a:ln>
         </p:spPr>
         <p:txBody>
-          <a:bodyPr spcFirstLastPara="1" wrap="square" lIns="0" tIns="0" rIns="0" bIns="0" anchor="ctr" anchorCtr="0">
+          <a:bodyPr wrap="square" lIns="91422" tIns="45696" rIns="91422" bIns="45696" anchor="ctr">
             <a:noAutofit/>
           </a:bodyPr>
           <a:lstStyle/>
           <a:p>
-            <a:pPr marL="0" marR="0" lvl="0" indent="0" algn="ctr" rtl="0">
-              <a:spcBef>
-                <a:spcPts val="0"/>
-              </a:spcBef>
-              <a:spcAft>
-                <a:spcPts val="0"/>
-              </a:spcAft>
-              <a:buClr>
-                <a:srgbClr val="FFFFFF"/>
-              </a:buClr>
-              <a:buSzPts val="1000"/>
-              <a:buFont typeface="Calibri"/>
+            <a:pPr marL="0" marR="0" indent="0" algn="ctr" rtl="0">
+              <a:spcBef>
+                <a:spcPts val="0"/>
+              </a:spcBef>
+              <a:spcAft>
+                <a:spcPts val="0"/>
+              </a:spcAft>
               <a:buNone/>
               <a:defRPr/>
             </a:pPr>
             <a:r>
-              <a:rPr lang="ru-RU" sz="1000" b="1" i="0" u="none" strike="noStrike" cap="none">
+              <a:rPr sz="1000" b="1" i="0">
                 <a:solidFill>
                   <a:srgbClr val="FFFFFF"/>
                 </a:solidFill>
@@ -11580,75 +14649,105 @@
                 <a:ea typeface="Calibri"/>
                 <a:cs typeface="Calibri"/>
               </a:rPr>
-              <a:t>5</a:t>
-            </a:r>
-            <a:endParaRPr sz="1000" b="0" i="0" u="none" strike="noStrike" cap="none">
-              <a:solidFill>
-                <a:schemeClr val="dk1"/>
-              </a:solidFill>
-              <a:latin typeface="Calibri"/>
-              <a:ea typeface="Calibri"/>
-              <a:cs typeface="Calibri"/>
-            </a:endParaRPr>
+              <a:t>3</a:t>
+            </a:r>
+            <a:endParaRPr/>
           </a:p>
         </p:txBody>
       </p:sp>
       <p:sp>
         <p:nvSpPr>
-          <p:cNvPr id="24982599" name="Google Shape;51;p6"/>
-          <p:cNvSpPr/>
+          <p:cNvPr id="2112748510" name="TextBox 4"/>
+          <p:cNvSpPr txBox="1"/>
           <p:nvPr/>
         </p:nvSpPr>
         <p:spPr bwMode="auto">
-          <a:xfrm flipH="0" flipV="0">
-            <a:off x="530351" y="182880"/>
-            <a:ext cx="6784848" cy="502920"/>
+          <a:xfrm>
+            <a:off x="594360" y="182880"/>
+            <a:ext cx="6858000" cy="502920"/>
           </a:xfrm>
           <a:prstGeom prst="rect">
             <a:avLst/>
           </a:prstGeom>
           <a:noFill/>
-          <a:ln>
-            <a:noFill/>
-          </a:ln>
         </p:spPr>
         <p:txBody>
-          <a:bodyPr spcFirstLastPara="1" wrap="square" lIns="91423" tIns="45699" rIns="91423" bIns="45699" anchor="ctr" anchorCtr="0">
+          <a:bodyPr wrap="square" lIns="91422" tIns="45696" rIns="91422" bIns="45696" anchor="ctr">
             <a:noAutofit/>
           </a:bodyPr>
           <a:lstStyle/>
           <a:p>
-            <a:pPr marL="0" marR="0" lvl="0" indent="0" algn="l" rtl="0">
-              <a:spcBef>
-                <a:spcPts val="0"/>
-              </a:spcBef>
-              <a:spcAft>
-                <a:spcPts val="0"/>
-              </a:spcAft>
-              <a:buClr>
+            <a:pPr marL="0" marR="0" indent="0" algn="l" rtl="0">
+              <a:spcBef>
+                <a:spcPts val="0"/>
+              </a:spcBef>
+              <a:spcAft>
+                <a:spcPts val="0"/>
+              </a:spcAft>
+              <a:buNone/>
+              <a:defRPr/>
+            </a:pPr>
+            <a:r>
+              <a:rPr lang="ru-RU" sz="1800" b="1" i="0" u="none" strike="noStrike" cap="none" spc="0">
+                <a:solidFill>
+                  <a:srgbClr val="C0272D"/>
+                </a:solidFill>
+                <a:latin typeface="Open Sans"/>
+                <a:ea typeface="Open Sans"/>
+                <a:cs typeface="Open Sans"/>
+              </a:rPr>
+              <a:t>Визуализация </a:t>
+            </a:r>
+            <a:r>
+              <a:rPr lang="ru-RU" sz="1800" b="1" i="0" u="none" strike="noStrike" cap="none" spc="0">
+                <a:solidFill>
+                  <a:srgbClr val="C0272D"/>
+                </a:solidFill>
+                <a:latin typeface="Open Sans"/>
+                <a:ea typeface="Open Sans"/>
+                <a:cs typeface="Open Sans"/>
+              </a:rPr>
+              <a:t>периодической и непериодической траекторий на </a:t>
+            </a:r>
+            <a:r>
+              <a:rPr lang="en-US" sz="1800" b="1" i="1" u="none" strike="noStrike" cap="none" spc="0">
+                <a:solidFill>
+                  <a:srgbClr val="C0272D"/>
+                </a:solidFill>
+                <a:latin typeface="Open Sans"/>
+                <a:ea typeface="Open Sans"/>
+                <a:cs typeface="Open Sans"/>
+              </a:rPr>
+              <a:t>Tor</a:t>
+            </a:r>
+            <a:r>
+              <a:rPr lang="en-US" sz="1800" b="1" i="1" u="none" strike="noStrike" cap="none" spc="0" baseline="30000">
+                <a:solidFill>
+                  <a:srgbClr val="C0272D"/>
+                </a:solidFill>
+                <a:latin typeface="Open Sans"/>
+                <a:ea typeface="Open Sans"/>
+                <a:cs typeface="Open Sans"/>
+              </a:rPr>
+              <a:t>2</a:t>
+            </a:r>
+            <a:r>
+              <a:rPr lang="ru-RU" sz="1800" b="1" i="0" u="none" strike="noStrike" cap="none" spc="0">
+                <a:solidFill>
+                  <a:srgbClr val="C0272D"/>
+                </a:solidFill>
+                <a:latin typeface="Open Sans"/>
+                <a:ea typeface="Open Sans"/>
+                <a:cs typeface="Open Sans"/>
+              </a:rPr>
+              <a:t>.</a:t>
+            </a:r>
+            <a:endParaRPr lang="ru-RU" sz="1800" b="1" i="0" u="none" strike="noStrike" cap="none" spc="0">
+              <a:solidFill>
                 <a:srgbClr val="C0272D"/>
-              </a:buClr>
-              <a:buSzPts val="2800"/>
-              <a:buFont typeface="Calibri"/>
-              <a:buNone/>
-              <a:defRPr/>
-            </a:pPr>
-            <a:r>
-              <a:rPr lang="ru-RU" sz="2800" b="1" i="0" u="none" strike="noStrike" cap="none">
-                <a:solidFill>
-                  <a:srgbClr val="C0272D"/>
-                </a:solidFill>
-                <a:latin typeface="Open Sans"/>
-                <a:ea typeface="Open Sans"/>
-                <a:cs typeface="Open Sans"/>
-              </a:rPr>
-              <a:t>Постановка задачи.</a:t>
-            </a:r>
-            <a:endParaRPr sz="2800" b="0" i="0" u="none" strike="noStrike" cap="none">
-              <a:solidFill>
-                <a:schemeClr val="dk1"/>
               </a:solidFill>
               <a:latin typeface="Open Sans"/>
+              <a:ea typeface="Open Sans"/>
               <a:cs typeface="Open Sans"/>
             </a:endParaRPr>
           </a:p>
@@ -11656,7 +14755,7 @@
       </p:sp>
       <p:sp>
         <p:nvSpPr>
-          <p:cNvPr id="875834847" name="Google Shape;52;p6"/>
+          <p:cNvPr id="343663942" name="Rectangle 5"/>
           <p:cNvSpPr/>
           <p:nvPr/>
         </p:nvSpPr>
@@ -11671,193 +14770,21 @@
           <a:solidFill>
             <a:srgbClr val="C0272D"/>
           </a:solidFill>
-          <a:ln w="12700" cap="flat" cmpd="sng">
+          <a:ln w="12700">
             <a:solidFill>
               <a:srgbClr val="C0272D"/>
             </a:solidFill>
             <a:prstDash val="solid"/>
-            <a:round/>
-            <a:headEnd type="none" w="sm" len="sm"/>
-            <a:tailEnd type="none" w="sm" len="sm"/>
           </a:ln>
         </p:spPr>
         <p:txBody>
-          <a:bodyPr spcFirstLastPara="1" wrap="square" lIns="91425" tIns="91425" rIns="91425" bIns="91425" anchor="ctr" anchorCtr="0">
-            <a:noAutofit/>
-          </a:bodyPr>
+          <a:bodyPr rtlCol="0" anchor="ctr"/>
           <a:lstStyle/>
           <a:p>
-            <a:pPr marL="0" lvl="0" indent="0" algn="l" rtl="0">
-              <a:spcBef>
-                <a:spcPts val="0"/>
-              </a:spcBef>
-              <a:spcAft>
-                <a:spcPts val="0"/>
-              </a:spcAft>
-              <a:buNone/>
+            <a:pPr algn="ctr">
               <a:defRPr/>
             </a:pPr>
             <a:endParaRPr/>
-          </a:p>
-        </p:txBody>
-      </p:sp>
-      <p:sp>
-        <p:nvSpPr>
-          <p:cNvPr id="1664993560" name="Google Shape;53;p6"/>
-          <p:cNvSpPr/>
-          <p:nvPr/>
-        </p:nvSpPr>
-        <p:spPr bwMode="auto">
-          <a:xfrm flipH="0" flipV="0">
-            <a:off x="457200" y="754760"/>
-            <a:ext cx="8229600" cy="2731970"/>
-          </a:xfrm>
-          <a:prstGeom prst="rect">
-            <a:avLst/>
-          </a:prstGeom>
-          <a:solidFill>
-            <a:srgbClr val="E8D5D5"/>
-          </a:solidFill>
-          <a:ln w="12700" cap="flat" cmpd="sng">
-            <a:solidFill>
-              <a:srgbClr val="D8B8B8"/>
-            </a:solidFill>
-            <a:prstDash val="solid"/>
-            <a:round/>
-            <a:headEnd type="none" w="sm" len="sm"/>
-            <a:tailEnd type="none" w="sm" len="sm"/>
-          </a:ln>
-        </p:spPr>
-        <p:txBody>
-          <a:bodyPr spcFirstLastPara="1" wrap="square" lIns="91423" tIns="91423" rIns="91423" bIns="91423" anchor="ctr" anchorCtr="0">
-            <a:noAutofit/>
-          </a:bodyPr>
-          <a:lstStyle/>
-          <a:p>
-            <a:pPr marL="0" lvl="0" indent="0" algn="l" rtl="0">
-              <a:spcBef>
-                <a:spcPts val="0"/>
-              </a:spcBef>
-              <a:spcAft>
-                <a:spcPts val="0"/>
-              </a:spcAft>
-              <a:buNone/>
-              <a:defRPr/>
-            </a:pPr>
-            <a:endParaRPr/>
-          </a:p>
-        </p:txBody>
-      </p:sp>
-      <p:sp>
-        <p:nvSpPr>
-          <p:cNvPr id="821791664" name="Google Shape;57;p6"/>
-          <p:cNvSpPr/>
-          <p:nvPr/>
-        </p:nvSpPr>
-        <p:spPr bwMode="auto">
-          <a:xfrm>
-            <a:off x="457200" y="3749040"/>
-            <a:ext cx="8229600" cy="960120"/>
-          </a:xfrm>
-          <a:prstGeom prst="rect">
-            <a:avLst/>
-          </a:prstGeom>
-          <a:solidFill>
-            <a:srgbClr val="F5F5F5"/>
-          </a:solidFill>
-          <a:ln w="12700" cap="flat" cmpd="sng">
-            <a:solidFill>
-              <a:srgbClr val="DDDDDD"/>
-            </a:solidFill>
-            <a:prstDash val="solid"/>
-            <a:round/>
-            <a:headEnd type="none" w="sm" len="sm"/>
-            <a:tailEnd type="none" w="sm" len="sm"/>
-          </a:ln>
-        </p:spPr>
-        <p:txBody>
-          <a:bodyPr spcFirstLastPara="1" wrap="square" lIns="91425" tIns="91425" rIns="91425" bIns="91425" anchor="ctr" anchorCtr="0">
-            <a:noAutofit/>
-          </a:bodyPr>
-          <a:lstStyle/>
-          <a:p>
-            <a:pPr marL="0" lvl="0" indent="0" algn="l" rtl="0">
-              <a:spcBef>
-                <a:spcPts val="0"/>
-              </a:spcBef>
-              <a:spcAft>
-                <a:spcPts val="0"/>
-              </a:spcAft>
-              <a:buNone/>
-              <a:defRPr/>
-            </a:pPr>
-            <a:endParaRPr/>
-          </a:p>
-        </p:txBody>
-      </p:sp>
-      <p:sp>
-        <p:nvSpPr>
-          <p:cNvPr id="307852402" name="Google Shape;58;p6"/>
-          <p:cNvSpPr/>
-          <p:nvPr/>
-        </p:nvSpPr>
-        <p:spPr bwMode="auto">
-          <a:xfrm flipH="0" flipV="0">
-            <a:off x="640080" y="3960394"/>
-            <a:ext cx="7772400" cy="657325"/>
-          </a:xfrm>
-          <a:prstGeom prst="rect">
-            <a:avLst/>
-          </a:prstGeom>
-          <a:noFill/>
-          <a:ln>
-            <a:noFill/>
-          </a:ln>
-        </p:spPr>
-        <p:txBody>
-          <a:bodyPr spcFirstLastPara="1" wrap="square" lIns="91423" tIns="45699" rIns="91423" bIns="45699" anchor="ctr" anchorCtr="0">
-            <a:noAutofit/>
-          </a:bodyPr>
-          <a:lstStyle/>
-          <a:p>
-            <a:pPr>
-              <a:defRPr/>
-            </a:pPr>
-            <a:endParaRPr/>
-          </a:p>
-        </p:txBody>
-      </p:sp>
-      <p:sp>
-        <p:nvSpPr>
-          <p:cNvPr id="381220966" name=""/>
-          <p:cNvSpPr txBox="1"/>
-          <p:nvPr/>
-        </p:nvSpPr>
-        <p:spPr bwMode="auto">
-          <a:xfrm rot="0" flipH="0" flipV="0">
-            <a:off x="457198" y="977564"/>
-            <a:ext cx="8267897" cy="305159"/>
-          </a:xfrm>
-          <a:prstGeom prst="rect">
-            <a:avLst/>
-          </a:prstGeom>
-          <a:noFill/>
-        </p:spPr>
-        <p:txBody>
-          <a:bodyPr vertOverflow="overflow" horzOverflow="overflow" vert="horz" wrap="square" lIns="91440" tIns="45720" rIns="91440" bIns="45720" numCol="1" spcCol="0" rtlCol="0" fromWordArt="0" anchor="t" anchorCtr="0" forceAA="0" upright="0" compatLnSpc="0">
-            <a:spAutoFit/>
-          </a:bodyPr>
-          <a:p>
-            <a:pPr indent="91440">
-              <a:defRPr/>
-            </a:pPr>
-            <a:endParaRPr lang="ru-RU" sz="1400" b="0" i="0" u="none" strike="noStrike" cap="none" spc="0">
-              <a:solidFill>
-                <a:srgbClr val="000000"/>
-              </a:solidFill>
-              <a:latin typeface="Arial"/>
-              <a:cs typeface="Arial"/>
-            </a:endParaRPr>
           </a:p>
         </p:txBody>
       </p:sp>
@@ -11903,15 +14830,14 @@
       </p:grpSpPr>
       <p:pic>
         <p:nvPicPr>
-          <p:cNvPr id="1518847520" name="Google Shape;228;p14" descr="/home/claude/logo_300spbu.png"/>
-          <p:cNvPicPr/>
+          <p:cNvPr id="1989238988" name="Picture 1" descr="image12.png"/>
+          <p:cNvPicPr>
+            <a:picLocks noChangeAspect="1"/>
+          </p:cNvPicPr>
           <p:nvPr/>
         </p:nvPicPr>
         <p:blipFill rotWithShape="1">
-          <a:blip r:embed="rId3">
-            <a:alphaModFix/>
-          </a:blip>
-          <a:srcRect l="0" t="0" r="0" b="0"/>
+          <a:blip r:embed="rId3"/>
           <a:stretch/>
         </p:blipFill>
         <p:spPr bwMode="auto">
@@ -11922,15 +14848,11 @@
           <a:prstGeom prst="rect">
             <a:avLst/>
           </a:prstGeom>
-          <a:noFill/>
-          <a:ln>
-            <a:noFill/>
-          </a:ln>
         </p:spPr>
       </p:pic>
       <p:sp>
         <p:nvSpPr>
-          <p:cNvPr id="779426219" name="Google Shape;229;p14"/>
+          <p:cNvPr id="1324793416" name="Rectangle 2"/>
           <p:cNvSpPr/>
           <p:nvPr/>
         </p:nvSpPr>
@@ -11945,30 +14867,18 @@
           <a:solidFill>
             <a:srgbClr val="C0272D"/>
           </a:solidFill>
-          <a:ln w="12700" cap="flat" cmpd="sng">
+          <a:ln w="12700">
             <a:solidFill>
               <a:srgbClr val="C0272D"/>
             </a:solidFill>
             <a:prstDash val="solid"/>
-            <a:round/>
-            <a:headEnd type="none" w="sm" len="sm"/>
-            <a:tailEnd type="none" w="sm" len="sm"/>
           </a:ln>
         </p:spPr>
         <p:txBody>
-          <a:bodyPr spcFirstLastPara="1" wrap="square" lIns="91425" tIns="91425" rIns="91425" bIns="91425" anchor="ctr" anchorCtr="0">
-            <a:noAutofit/>
-          </a:bodyPr>
+          <a:bodyPr rtlCol="0" anchor="ctr"/>
           <a:lstStyle/>
           <a:p>
-            <a:pPr marL="0" lvl="0" indent="0" algn="l" rtl="0">
-              <a:spcBef>
-                <a:spcPts val="0"/>
-              </a:spcBef>
-              <a:spcAft>
-                <a:spcPts val="0"/>
-              </a:spcAft>
-              <a:buNone/>
+            <a:pPr algn="ctr">
               <a:defRPr/>
             </a:pPr>
             <a:endParaRPr/>
@@ -11977,8 +14887,8 @@
       </p:sp>
       <p:sp>
         <p:nvSpPr>
-          <p:cNvPr id="753662583" name="Google Shape;230;p14"/>
-          <p:cNvSpPr/>
+          <p:cNvPr id="340947693" name="TextBox 3"/>
+          <p:cNvSpPr txBox="1"/>
           <p:nvPr/>
         </p:nvSpPr>
         <p:spPr bwMode="auto">
@@ -11990,33 +14900,25 @@
             <a:avLst/>
           </a:prstGeom>
           <a:noFill/>
-          <a:ln>
-            <a:noFill/>
-          </a:ln>
         </p:spPr>
         <p:txBody>
-          <a:bodyPr spcFirstLastPara="1" wrap="square" lIns="0" tIns="0" rIns="0" bIns="0" anchor="ctr" anchorCtr="0">
+          <a:bodyPr wrap="square" lIns="91422" tIns="45697" rIns="91422" bIns="45697" anchor="ctr">
             <a:noAutofit/>
           </a:bodyPr>
           <a:lstStyle/>
           <a:p>
-            <a:pPr marL="0" marR="0" lvl="0" indent="0" algn="ctr" rtl="0">
-              <a:spcBef>
-                <a:spcPts val="0"/>
-              </a:spcBef>
-              <a:spcAft>
-                <a:spcPts val="0"/>
-              </a:spcAft>
-              <a:buClr>
-                <a:srgbClr val="FFFFFF"/>
-              </a:buClr>
-              <a:buSzPts val="1000"/>
-              <a:buFont typeface="Calibri"/>
+            <a:pPr marL="0" marR="0" indent="0" algn="ctr" rtl="0">
+              <a:spcBef>
+                <a:spcPts val="0"/>
+              </a:spcBef>
+              <a:spcAft>
+                <a:spcPts val="0"/>
+              </a:spcAft>
               <a:buNone/>
               <a:defRPr/>
             </a:pPr>
             <a:r>
-              <a:rPr lang="en-US" sz="1000" b="1" i="0" u="none" strike="noStrike" cap="none">
+              <a:rPr sz="1000" b="1" i="0">
                 <a:solidFill>
                   <a:srgbClr val="FFFFFF"/>
                 </a:solidFill>
@@ -12024,95 +14926,65 @@
                 <a:ea typeface="Calibri"/>
                 <a:cs typeface="Calibri"/>
               </a:rPr>
-              <a:t>11</a:t>
-            </a:r>
-            <a:endParaRPr sz="1000" b="0" i="0" u="none" strike="noStrike" cap="none">
-              <a:solidFill>
-                <a:schemeClr val="dk1"/>
-              </a:solidFill>
-              <a:latin typeface="Calibri"/>
-              <a:ea typeface="Calibri"/>
-              <a:cs typeface="Calibri"/>
-            </a:endParaRPr>
+              <a:t>3</a:t>
+            </a:r>
+            <a:endParaRPr/>
           </a:p>
         </p:txBody>
       </p:sp>
       <p:sp>
         <p:nvSpPr>
-          <p:cNvPr id="2068422005" name="Google Shape;231;p14"/>
-          <p:cNvSpPr/>
+          <p:cNvPr id="219443036" name="TextBox 4"/>
+          <p:cNvSpPr txBox="1"/>
           <p:nvPr/>
         </p:nvSpPr>
         <p:spPr bwMode="auto">
           <a:xfrm>
             <a:off x="594360" y="182880"/>
-            <a:ext cx="7315200" cy="502920"/>
+            <a:ext cx="6858000" cy="502920"/>
           </a:xfrm>
           <a:prstGeom prst="rect">
             <a:avLst/>
           </a:prstGeom>
           <a:noFill/>
-          <a:ln>
-            <a:noFill/>
-          </a:ln>
         </p:spPr>
         <p:txBody>
-          <a:bodyPr spcFirstLastPara="1" wrap="square" lIns="91425" tIns="45700" rIns="91425" bIns="45700" anchor="ctr" anchorCtr="0">
+          <a:bodyPr wrap="square" lIns="91422" tIns="45697" rIns="91422" bIns="45697" anchor="ctr">
             <a:noAutofit/>
           </a:bodyPr>
           <a:lstStyle/>
           <a:p>
-            <a:pPr marL="0" marR="0" lvl="0" indent="0" algn="l" rtl="0">
-              <a:spcBef>
-                <a:spcPts val="0"/>
-              </a:spcBef>
-              <a:spcAft>
-                <a:spcPts val="0"/>
-              </a:spcAft>
-              <a:buClr>
-                <a:srgbClr val="C0272D"/>
-              </a:buClr>
-              <a:buSzPts val="2600"/>
-              <a:buFont typeface="Calibri"/>
+            <a:pPr marL="0" marR="0" indent="0" algn="l" rtl="0">
+              <a:spcBef>
+                <a:spcPts val="0"/>
+              </a:spcBef>
+              <a:spcAft>
+                <a:spcPts val="0"/>
+              </a:spcAft>
               <a:buNone/>
               <a:defRPr/>
             </a:pPr>
             <a:r>
-              <a:rPr lang="en-US" sz="2600" b="1" i="0" u="none" strike="noStrike" cap="none">
+              <a:rPr lang="ru-RU" sz="2400" b="1" i="0">
                 <a:solidFill>
                   <a:srgbClr val="C0272D"/>
                 </a:solidFill>
-                <a:latin typeface="Calibri"/>
-                <a:ea typeface="Calibri"/>
-                <a:cs typeface="Calibri"/>
-              </a:rPr>
-              <a:t>Обобщения и </a:t>
-            </a:r>
-            <a:r>
-              <a:rPr lang="ru-RU" sz="2600" b="1" i="0" u="none" strike="noStrike" cap="none">
-                <a:solidFill>
-                  <a:srgbClr val="C0272D"/>
-                </a:solidFill>
-                <a:latin typeface="Calibri"/>
-                <a:ea typeface="Calibri"/>
-                <a:cs typeface="Calibri"/>
-              </a:rPr>
-              <a:t>области применения</a:t>
-            </a:r>
-            <a:endParaRPr sz="2600" b="0" i="0" u="none" strike="noStrike" cap="none">
-              <a:solidFill>
-                <a:schemeClr val="dk1"/>
-              </a:solidFill>
-              <a:latin typeface="Calibri"/>
-              <a:ea typeface="Calibri"/>
-              <a:cs typeface="Calibri"/>
+                <a:latin typeface="Open Sans"/>
+                <a:ea typeface="Open Sans"/>
+                <a:cs typeface="Open Sans"/>
+              </a:rPr>
+              <a:t>Эллиптический бильярд.</a:t>
+            </a:r>
+            <a:endParaRPr sz="1200">
+              <a:latin typeface="Open Sans"/>
+              <a:cs typeface="Open Sans"/>
             </a:endParaRPr>
           </a:p>
         </p:txBody>
       </p:sp>
       <p:sp>
         <p:nvSpPr>
-          <p:cNvPr id="642431757" name="Google Shape;232;p14"/>
+          <p:cNvPr id="1789183496" name="Rectangle 5"/>
           <p:cNvSpPr/>
           <p:nvPr/>
         </p:nvSpPr>
@@ -12127,30 +14999,18 @@
           <a:solidFill>
             <a:srgbClr val="C0272D"/>
           </a:solidFill>
-          <a:ln w="12700" cap="flat" cmpd="sng">
+          <a:ln w="12700">
             <a:solidFill>
               <a:srgbClr val="C0272D"/>
             </a:solidFill>
             <a:prstDash val="solid"/>
-            <a:round/>
-            <a:headEnd type="none" w="sm" len="sm"/>
-            <a:tailEnd type="none" w="sm" len="sm"/>
           </a:ln>
         </p:spPr>
         <p:txBody>
-          <a:bodyPr spcFirstLastPara="1" wrap="square" lIns="91425" tIns="91425" rIns="91425" bIns="91425" anchor="ctr" anchorCtr="0">
-            <a:noAutofit/>
-          </a:bodyPr>
+          <a:bodyPr rtlCol="0" anchor="ctr"/>
           <a:lstStyle/>
           <a:p>
-            <a:pPr marL="0" lvl="0" indent="0" algn="l" rtl="0">
-              <a:spcBef>
-                <a:spcPts val="0"/>
-              </a:spcBef>
-              <a:spcAft>
-                <a:spcPts val="0"/>
-              </a:spcAft>
-              <a:buNone/>
+            <a:pPr algn="ctr">
               <a:defRPr/>
             </a:pPr>
             <a:endParaRPr/>
@@ -12159,210 +15019,14 @@
       </p:sp>
       <p:sp>
         <p:nvSpPr>
-          <p:cNvPr id="607353709" name="Google Shape;233;p14"/>
+          <p:cNvPr id="887908528" name="Rectangle 6"/>
           <p:cNvSpPr/>
           <p:nvPr/>
         </p:nvSpPr>
         <p:spPr bwMode="auto">
-          <a:xfrm>
-            <a:off x="457200" y="804672"/>
-            <a:ext cx="3977640" cy="1325880"/>
-          </a:xfrm>
-          <a:prstGeom prst="rect">
-            <a:avLst/>
-          </a:prstGeom>
-          <a:solidFill>
-            <a:srgbClr val="F5F5F5"/>
-          </a:solidFill>
-          <a:ln w="12700" cap="flat" cmpd="sng">
-            <a:solidFill>
-              <a:srgbClr val="CCCCCC"/>
-            </a:solidFill>
-            <a:prstDash val="solid"/>
-            <a:round/>
-            <a:headEnd type="none" w="sm" len="sm"/>
-            <a:tailEnd type="none" w="sm" len="sm"/>
-          </a:ln>
-        </p:spPr>
-        <p:txBody>
-          <a:bodyPr spcFirstLastPara="1" wrap="square" lIns="91425" tIns="91425" rIns="91425" bIns="91425" anchor="ctr" anchorCtr="0">
-            <a:noAutofit/>
-          </a:bodyPr>
-          <a:lstStyle/>
-          <a:p>
-            <a:pPr marL="0" lvl="0" indent="0" algn="l" rtl="0">
-              <a:spcBef>
-                <a:spcPts val="0"/>
-              </a:spcBef>
-              <a:spcAft>
-                <a:spcPts val="0"/>
-              </a:spcAft>
-              <a:buNone/>
-              <a:defRPr/>
-            </a:pPr>
-            <a:endParaRPr/>
-          </a:p>
-        </p:txBody>
-      </p:sp>
-      <p:sp>
-        <p:nvSpPr>
-          <p:cNvPr id="2045627134" name="Google Shape;234;p14"/>
-          <p:cNvSpPr/>
-          <p:nvPr/>
-        </p:nvSpPr>
-        <p:spPr bwMode="auto">
-          <a:xfrm>
-            <a:off x="457200" y="804672"/>
-            <a:ext cx="54864" cy="1325880"/>
-          </a:xfrm>
-          <a:prstGeom prst="rect">
-            <a:avLst/>
-          </a:prstGeom>
-          <a:solidFill>
-            <a:srgbClr val="C0272D"/>
-          </a:solidFill>
-          <a:ln w="12700" cap="flat" cmpd="sng">
-            <a:solidFill>
-              <a:srgbClr val="C0272D"/>
-            </a:solidFill>
-            <a:prstDash val="solid"/>
-            <a:round/>
-            <a:headEnd type="none" w="sm" len="sm"/>
-            <a:tailEnd type="none" w="sm" len="sm"/>
-          </a:ln>
-        </p:spPr>
-        <p:txBody>
-          <a:bodyPr spcFirstLastPara="1" wrap="square" lIns="91425" tIns="91425" rIns="91425" bIns="91425" anchor="ctr" anchorCtr="0">
-            <a:noAutofit/>
-          </a:bodyPr>
-          <a:lstStyle/>
-          <a:p>
-            <a:pPr marL="0" lvl="0" indent="0" algn="l" rtl="0">
-              <a:spcBef>
-                <a:spcPts val="0"/>
-              </a:spcBef>
-              <a:spcAft>
-                <a:spcPts val="0"/>
-              </a:spcAft>
-              <a:buNone/>
-              <a:defRPr/>
-            </a:pPr>
-            <a:endParaRPr/>
-          </a:p>
-        </p:txBody>
-      </p:sp>
-      <p:sp>
-        <p:nvSpPr>
-          <p:cNvPr id="1638283849" name="Google Shape;235;p14"/>
-          <p:cNvSpPr/>
-          <p:nvPr/>
-        </p:nvSpPr>
-        <p:spPr bwMode="auto">
-          <a:xfrm>
-            <a:off x="594360" y="877824"/>
-            <a:ext cx="3657600" cy="320040"/>
-          </a:xfrm>
-          <a:prstGeom prst="rect">
-            <a:avLst/>
-          </a:prstGeom>
-          <a:noFill/>
-          <a:ln>
-            <a:noFill/>
-          </a:ln>
-        </p:spPr>
-        <p:txBody>
-          <a:bodyPr spcFirstLastPara="1" wrap="square" lIns="91425" tIns="45700" rIns="91425" bIns="45700" anchor="ctr" anchorCtr="0">
-            <a:noAutofit/>
-          </a:bodyPr>
-          <a:lstStyle/>
-          <a:p>
-            <a:pPr marL="0" marR="0" lvl="0" indent="0" algn="l" rtl="0">
-              <a:spcBef>
-                <a:spcPts val="0"/>
-              </a:spcBef>
-              <a:spcAft>
-                <a:spcPts val="0"/>
-              </a:spcAft>
-              <a:buClr>
-                <a:srgbClr val="C0272D"/>
-              </a:buClr>
-              <a:buSzPts val="1300"/>
-              <a:buFont typeface="Calibri"/>
-              <a:buNone/>
-              <a:defRPr/>
-            </a:pPr>
-            <a:endParaRPr sz="1300" b="0" i="0" u="none" strike="noStrike" cap="none">
-              <a:solidFill>
-                <a:schemeClr val="dk1"/>
-              </a:solidFill>
-              <a:latin typeface="Calibri"/>
-              <a:ea typeface="Calibri"/>
-              <a:cs typeface="Calibri"/>
-            </a:endParaRPr>
-          </a:p>
-        </p:txBody>
-      </p:sp>
-      <p:sp>
-        <p:nvSpPr>
-          <p:cNvPr id="408068251" name="Google Shape;236;p14"/>
-          <p:cNvSpPr/>
-          <p:nvPr/>
-        </p:nvSpPr>
-        <p:spPr bwMode="auto">
-          <a:xfrm>
-            <a:off x="594360" y="1216151"/>
-            <a:ext cx="3749040" cy="841248"/>
-          </a:xfrm>
-          <a:prstGeom prst="rect">
-            <a:avLst/>
-          </a:prstGeom>
-          <a:noFill/>
-          <a:ln>
-            <a:noFill/>
-          </a:ln>
-        </p:spPr>
-        <p:txBody>
-          <a:bodyPr spcFirstLastPara="1" wrap="square" lIns="91425" tIns="45700" rIns="91425" bIns="45700" anchor="ctr" anchorCtr="0">
-            <a:noAutofit/>
-          </a:bodyPr>
-          <a:lstStyle/>
-          <a:p>
-            <a:pPr marL="0" marR="0" lvl="0" indent="0" algn="l" rtl="0">
-              <a:spcBef>
-                <a:spcPts val="0"/>
-              </a:spcBef>
-              <a:spcAft>
-                <a:spcPts val="0"/>
-              </a:spcAft>
-              <a:buClr>
-                <a:srgbClr val="1A1A1A"/>
-              </a:buClr>
-              <a:buSzPts val="1200"/>
-              <a:buFont typeface="Calibri"/>
-              <a:buNone/>
-              <a:defRPr/>
-            </a:pPr>
-            <a:endParaRPr sz="1200" b="0" i="0" u="none" strike="noStrike" cap="none">
-              <a:solidFill>
-                <a:schemeClr val="dk1"/>
-              </a:solidFill>
-              <a:latin typeface="Calibri"/>
-              <a:ea typeface="Calibri"/>
-              <a:cs typeface="Calibri"/>
-            </a:endParaRPr>
-          </a:p>
-        </p:txBody>
-      </p:sp>
-      <p:sp>
-        <p:nvSpPr>
-          <p:cNvPr id="385907942" name="Google Shape;237;p14"/>
-          <p:cNvSpPr/>
-          <p:nvPr/>
-        </p:nvSpPr>
-        <p:spPr bwMode="auto">
-          <a:xfrm>
-            <a:off x="4617720" y="804672"/>
-            <a:ext cx="3977640" cy="1325880"/>
+          <a:xfrm flipH="0" flipV="0">
+            <a:off x="459355" y="848354"/>
+            <a:ext cx="8503920" cy="3695179"/>
           </a:xfrm>
           <a:prstGeom prst="rect">
             <a:avLst/>
@@ -12370,30 +15034,18 @@
           <a:solidFill>
             <a:srgbClr val="E8D5D5"/>
           </a:solidFill>
-          <a:ln w="12700" cap="flat" cmpd="sng">
+          <a:ln w="12700">
             <a:solidFill>
-              <a:srgbClr val="CCCCCC"/>
+              <a:srgbClr val="D8B8B8"/>
             </a:solidFill>
             <a:prstDash val="solid"/>
-            <a:round/>
-            <a:headEnd type="none" w="sm" len="sm"/>
-            <a:tailEnd type="none" w="sm" len="sm"/>
           </a:ln>
         </p:spPr>
         <p:txBody>
-          <a:bodyPr spcFirstLastPara="1" wrap="square" lIns="91425" tIns="91425" rIns="91425" bIns="91425" anchor="ctr" anchorCtr="0">
-            <a:noAutofit/>
-          </a:bodyPr>
+          <a:bodyPr rtlCol="0" anchor="ctr"/>
           <a:lstStyle/>
           <a:p>
-            <a:pPr marL="0" lvl="0" indent="0" algn="l" rtl="0">
-              <a:spcBef>
-                <a:spcPts val="0"/>
-              </a:spcBef>
-              <a:spcAft>
-                <a:spcPts val="0"/>
-              </a:spcAft>
-              <a:buNone/>
+            <a:pPr algn="ctr">
               <a:defRPr/>
             </a:pPr>
             <a:endParaRPr/>
@@ -12402,587 +15054,1056 @@
       </p:sp>
       <p:sp>
         <p:nvSpPr>
-          <p:cNvPr id="2062983779" name="Google Shape;238;p14"/>
-          <p:cNvSpPr/>
+          <p:cNvPr id="977390533" name=""/>
+          <p:cNvSpPr txBox="1"/>
           <p:nvPr/>
         </p:nvSpPr>
         <p:spPr bwMode="auto">
-          <a:xfrm>
-            <a:off x="4617720" y="804672"/>
-            <a:ext cx="54864" cy="1325880"/>
-          </a:xfrm>
-          <a:prstGeom prst="rect">
-            <a:avLst/>
-          </a:prstGeom>
-          <a:solidFill>
-            <a:srgbClr val="C0272D"/>
-          </a:solidFill>
-          <a:ln w="12700" cap="flat" cmpd="sng">
-            <a:solidFill>
-              <a:srgbClr val="C0272D"/>
-            </a:solidFill>
-            <a:prstDash val="solid"/>
-            <a:round/>
-            <a:headEnd type="none" w="sm" len="sm"/>
-            <a:tailEnd type="none" w="sm" len="sm"/>
-          </a:ln>
-        </p:spPr>
-        <p:txBody>
-          <a:bodyPr spcFirstLastPara="1" wrap="square" lIns="91425" tIns="91425" rIns="91425" bIns="91425" anchor="ctr" anchorCtr="0">
-            <a:noAutofit/>
-          </a:bodyPr>
-          <a:lstStyle/>
-          <a:p>
-            <a:pPr marL="0" lvl="0" indent="0" algn="l" rtl="0">
-              <a:spcBef>
-                <a:spcPts val="0"/>
-              </a:spcBef>
-              <a:spcAft>
-                <a:spcPts val="0"/>
-              </a:spcAft>
-              <a:buNone/>
-              <a:defRPr/>
-            </a:pPr>
-            <a:endParaRPr/>
-          </a:p>
-        </p:txBody>
-      </p:sp>
-      <p:sp>
-        <p:nvSpPr>
-          <p:cNvPr id="1140536479" name="Google Shape;239;p14"/>
-          <p:cNvSpPr/>
-          <p:nvPr/>
-        </p:nvSpPr>
-        <p:spPr bwMode="auto">
-          <a:xfrm>
-            <a:off x="4754880" y="877824"/>
-            <a:ext cx="3657600" cy="320040"/>
+          <a:xfrm rot="0" flipH="0" flipV="0">
+            <a:off x="422815" y="848355"/>
+            <a:ext cx="8542979" cy="305159"/>
           </a:xfrm>
           <a:prstGeom prst="rect">
             <a:avLst/>
           </a:prstGeom>
           <a:noFill/>
-          <a:ln>
-            <a:noFill/>
-          </a:ln>
         </p:spPr>
         <p:txBody>
-          <a:bodyPr spcFirstLastPara="1" wrap="square" lIns="91425" tIns="45700" rIns="91425" bIns="45700" anchor="ctr" anchorCtr="0">
-            <a:noAutofit/>
+          <a:bodyPr vertOverflow="overflow" horzOverflow="overflow" vert="horz" wrap="square" lIns="91440" tIns="45720" rIns="91440" bIns="45720" numCol="1" spcCol="0" rtlCol="0" fromWordArt="0" anchor="t" anchorCtr="0" forceAA="0" upright="0" compatLnSpc="0">
+            <a:spAutoFit/>
           </a:bodyPr>
-          <a:lstStyle/>
-          <a:p>
-            <a:pPr marL="0" marR="0" lvl="0" indent="0" algn="l" rtl="0">
-              <a:spcBef>
-                <a:spcPts val="0"/>
-              </a:spcBef>
-              <a:spcAft>
-                <a:spcPts val="0"/>
-              </a:spcAft>
-              <a:buClr>
-                <a:srgbClr val="C0272D"/>
-              </a:buClr>
-              <a:buSzPts val="1300"/>
-              <a:buFont typeface="Calibri"/>
-              <a:buNone/>
-              <a:defRPr/>
-            </a:pPr>
-            <a:endParaRPr sz="1300" b="0" i="0" u="none" strike="noStrike" cap="none">
-              <a:solidFill>
-                <a:schemeClr val="dk1"/>
-              </a:solidFill>
-              <a:latin typeface="Calibri"/>
-              <a:ea typeface="Calibri"/>
-              <a:cs typeface="Calibri"/>
-            </a:endParaRPr>
+          <a:p>
+            <a:pPr>
+              <a:defRPr/>
+            </a:pPr>
+            <a:endParaRPr/>
           </a:p>
         </p:txBody>
       </p:sp>
       <p:sp>
         <p:nvSpPr>
-          <p:cNvPr id="1537865772" name="Google Shape;240;p14"/>
-          <p:cNvSpPr/>
+          <p:cNvPr id="1734859550" name=""/>
+          <p:cNvSpPr txBox="1"/>
           <p:nvPr/>
         </p:nvSpPr>
         <p:spPr bwMode="auto">
-          <a:xfrm>
-            <a:off x="4754880" y="1216151"/>
-            <a:ext cx="3749040" cy="841248"/>
+          <a:xfrm rot="0" flipH="0" flipV="0">
+            <a:off x="474045" y="848353"/>
+            <a:ext cx="8556912" cy="3487219"/>
           </a:xfrm>
           <a:prstGeom prst="rect">
             <a:avLst/>
           </a:prstGeom>
           <a:noFill/>
-          <a:ln>
-            <a:noFill/>
-          </a:ln>
         </p:spPr>
         <p:txBody>
-          <a:bodyPr spcFirstLastPara="1" wrap="square" lIns="91425" tIns="45700" rIns="91425" bIns="45700" anchor="ctr" anchorCtr="0">
-            <a:noAutofit/>
+          <a:bodyPr vertOverflow="overflow" horzOverflow="overflow" vert="horz" wrap="square" lIns="91440" tIns="45720" rIns="91440" bIns="45720" numCol="1" spcCol="0" rtlCol="0" fromWordArt="0" anchor="t" anchorCtr="0" forceAA="0" upright="0" compatLnSpc="0">
+            <a:spAutoFit/>
           </a:bodyPr>
-          <a:lstStyle/>
-          <a:p>
-            <a:pPr marL="0" marR="0" lvl="0" indent="0" algn="l" rtl="0">
-              <a:spcBef>
-                <a:spcPts val="0"/>
-              </a:spcBef>
-              <a:spcAft>
-                <a:spcPts val="0"/>
-              </a:spcAft>
-              <a:buClr>
-                <a:srgbClr val="1A1A1A"/>
-              </a:buClr>
-              <a:buSzPts val="1200"/>
-              <a:buFont typeface="Calibri"/>
-              <a:buNone/>
-              <a:defRPr/>
-            </a:pPr>
-            <a:endParaRPr sz="1200" b="0" i="0" u="none" strike="noStrike" cap="none">
+          <a:p>
+            <a:pPr indent="274319">
+              <a:defRPr/>
+            </a:pPr>
+            <a:r>
+              <a:rPr sz="1200" b="1" i="0" u="none">
+                <a:solidFill>
+                  <a:srgbClr val="000000"/>
+                </a:solidFill>
+                <a:latin typeface="Open Sans"/>
+                <a:ea typeface="Open Sans"/>
+                <a:cs typeface="Open Sans"/>
+              </a:rPr>
+              <a:t>Эллиптический </a:t>
+            </a:r>
+            <a:r>
+              <a:rPr sz="1200" b="0" i="0" u="none">
+                <a:solidFill>
+                  <a:srgbClr val="000000"/>
+                </a:solidFill>
+                <a:latin typeface="Open Sans"/>
+                <a:ea typeface="Open Sans"/>
+                <a:cs typeface="Open Sans"/>
+              </a:rPr>
+              <a:t>бильярд представляет собой движение частицы внутри области, ограниченной эллипсом, заданным уравнением </a:t>
+            </a:r>
+            <mc:AlternateContent xmlns:mc="http://schemas.openxmlformats.org/markup-compatibility/2006" xmlns:m="http://schemas.openxmlformats.org/officeDocument/2006/math">
+              <mc:Choice xmlns:a14="http://schemas.microsoft.com/office/drawing/2010/main" Requires="a14">
+                <a14:m>
+                  <m:oMathPara>
+                    <m:oMathParaPr/>
+                    <m:oMath>
+                      <m:sSup>
+                        <m:sSupPr>
+                          <m:ctrlPr>
+                            <a:rPr i="1">
+                              <a:latin typeface="Cambria Math"/>
+                              <a:ea typeface="Cambria Math"/>
+                              <a:cs typeface="Cambria Math"/>
+                            </a:rPr>
+                          </m:ctrlPr>
+                        </m:sSupPr>
+                        <m:e>
+                          <m:r>
+                            <m:rPr>
+                              <m:sty m:val="i"/>
+                            </m:rPr>
+                            <a:rPr>
+                              <a:latin typeface="Cambria Math"/>
+                              <a:ea typeface="Cambria Math"/>
+                              <a:cs typeface="Cambria Math"/>
+                            </a:rPr>
+                            <m:t>𝑥</m:t>
+                          </m:r>
+                        </m:e>
+                        <m:sup>
+                          <m:r>
+                            <m:rPr>
+                              <m:sty m:val="i"/>
+                            </m:rPr>
+                            <a:rPr>
+                              <a:latin typeface="Cambria Math"/>
+                              <a:ea typeface="Cambria Math"/>
+                              <a:cs typeface="Cambria Math"/>
+                            </a:rPr>
+                            <m:t>2</m:t>
+                          </m:r>
+                        </m:sup>
+                      </m:sSup>
+                      <m:r>
+                        <m:rPr>
+                          <m:sty m:val="i"/>
+                        </m:rPr>
+                        <a:rPr>
+                          <a:latin typeface="Cambria Math"/>
+                          <a:ea typeface="Cambria Math"/>
+                          <a:cs typeface="Cambria Math"/>
+                        </a:rPr>
+                        <m:t>/</m:t>
+                      </m:r>
+                      <m:sSup>
+                        <m:sSupPr>
+                          <m:ctrlPr>
+                            <a:rPr i="1">
+                              <a:latin typeface="Cambria Math"/>
+                              <a:ea typeface="Cambria Math"/>
+                              <a:cs typeface="Cambria Math"/>
+                            </a:rPr>
+                          </m:ctrlPr>
+                        </m:sSupPr>
+                        <m:e>
+                          <m:r>
+                            <m:rPr>
+                              <m:sty m:val="i"/>
+                            </m:rPr>
+                            <a:rPr>
+                              <a:latin typeface="Cambria Math"/>
+                              <a:ea typeface="Cambria Math"/>
+                              <a:cs typeface="Cambria Math"/>
+                            </a:rPr>
+                            <m:t>𝑎</m:t>
+                          </m:r>
+                        </m:e>
+                        <m:sup>
+                          <m:r>
+                            <m:rPr>
+                              <m:sty m:val="i"/>
+                            </m:rPr>
+                            <a:rPr>
+                              <a:latin typeface="Cambria Math"/>
+                              <a:ea typeface="Cambria Math"/>
+                              <a:cs typeface="Cambria Math"/>
+                            </a:rPr>
+                            <m:t>2</m:t>
+                          </m:r>
+                        </m:sup>
+                      </m:sSup>
+                      <m:r>
+                        <m:rPr>
+                          <m:sty m:val="i"/>
+                        </m:rPr>
+                        <a:rPr>
+                          <a:latin typeface="Cambria Math"/>
+                          <a:ea typeface="Cambria Math"/>
+                          <a:cs typeface="Cambria Math"/>
+                        </a:rPr>
+                        <m:t>+</m:t>
+                      </m:r>
+                      <m:sSup>
+                        <m:sSupPr>
+                          <m:ctrlPr>
+                            <a:rPr i="1">
+                              <a:latin typeface="Cambria Math"/>
+                              <a:ea typeface="Cambria Math"/>
+                              <a:cs typeface="Cambria Math"/>
+                            </a:rPr>
+                          </m:ctrlPr>
+                        </m:sSupPr>
+                        <m:e>
+                          <m:r>
+                            <m:rPr>
+                              <m:sty m:val="i"/>
+                            </m:rPr>
+                            <a:rPr>
+                              <a:latin typeface="Cambria Math"/>
+                              <a:ea typeface="Cambria Math"/>
+                              <a:cs typeface="Cambria Math"/>
+                            </a:rPr>
+                            <m:t>𝑦</m:t>
+                          </m:r>
+                        </m:e>
+                        <m:sup>
+                          <m:r>
+                            <m:rPr>
+                              <m:sty m:val="i"/>
+                            </m:rPr>
+                            <a:rPr>
+                              <a:latin typeface="Cambria Math"/>
+                              <a:ea typeface="Cambria Math"/>
+                              <a:cs typeface="Cambria Math"/>
+                            </a:rPr>
+                            <m:t>2</m:t>
+                          </m:r>
+                        </m:sup>
+                      </m:sSup>
+                      <m:r>
+                        <m:rPr>
+                          <m:sty m:val="i"/>
+                        </m:rPr>
+                        <a:rPr>
+                          <a:latin typeface="Cambria Math"/>
+                          <a:ea typeface="Cambria Math"/>
+                          <a:cs typeface="Cambria Math"/>
+                        </a:rPr>
+                        <m:t>/</m:t>
+                      </m:r>
+                      <m:sSup>
+                        <m:sSupPr>
+                          <m:ctrlPr>
+                            <a:rPr i="1">
+                              <a:latin typeface="Cambria Math"/>
+                              <a:ea typeface="Cambria Math"/>
+                              <a:cs typeface="Cambria Math"/>
+                            </a:rPr>
+                          </m:ctrlPr>
+                        </m:sSupPr>
+                        <m:e>
+                          <m:r>
+                            <m:rPr>
+                              <m:sty m:val="i"/>
+                            </m:rPr>
+                            <a:rPr>
+                              <a:latin typeface="Cambria Math"/>
+                              <a:ea typeface="Cambria Math"/>
+                              <a:cs typeface="Cambria Math"/>
+                            </a:rPr>
+                            <m:t>𝑏</m:t>
+                          </m:r>
+                        </m:e>
+                        <m:sup>
+                          <m:r>
+                            <m:rPr>
+                              <m:sty m:val="i"/>
+                            </m:rPr>
+                            <a:rPr>
+                              <a:latin typeface="Cambria Math"/>
+                              <a:ea typeface="Cambria Math"/>
+                              <a:cs typeface="Cambria Math"/>
+                            </a:rPr>
+                            <m:t>2</m:t>
+                          </m:r>
+                        </m:sup>
+                      </m:sSup>
+                      <m:r>
+                        <m:rPr>
+                          <m:sty m:val="i"/>
+                        </m:rPr>
+                        <a:rPr>
+                          <a:latin typeface="Cambria Math"/>
+                          <a:ea typeface="Cambria Math"/>
+                          <a:cs typeface="Cambria Math"/>
+                        </a:rPr>
+                        <m:t>=</m:t>
+                      </m:r>
+                      <m:r>
+                        <m:rPr>
+                          <m:sty m:val="i"/>
+                        </m:rPr>
+                        <a:rPr>
+                          <a:latin typeface="Cambria Math"/>
+                          <a:ea typeface="Cambria Math"/>
+                          <a:cs typeface="Cambria Math"/>
+                        </a:rPr>
+                        <m:t>1</m:t>
+                      </m:r>
+                    </m:oMath>
+                  </m:oMathPara>
+                </a14:m>
+              </mc:Choice>
+              <mc:Fallback/>
+            </mc:AlternateContent>
+            <a:r>
+              <a:rPr sz="1200" b="0" i="0" u="none">
+                <a:solidFill>
+                  <a:srgbClr val="000000"/>
+                </a:solidFill>
+                <a:latin typeface="Open Sans"/>
+                <a:ea typeface="Open Sans"/>
+                <a:cs typeface="Open Sans"/>
+              </a:rPr>
+              <a:t> </a:t>
+            </a:r>
+            <a:r>
+              <a:rPr sz="1200" b="0" i="0" u="none">
+                <a:solidFill>
+                  <a:srgbClr val="000000"/>
+                </a:solidFill>
+                <a:latin typeface="Open Sans"/>
+                <a:ea typeface="Open Sans"/>
+                <a:cs typeface="Open Sans"/>
+              </a:rPr>
+              <a:t>(где </a:t>
+            </a:r>
+            <a:r>
+              <a:rPr sz="1200" b="0" i="1" u="none">
+                <a:solidFill>
+                  <a:srgbClr val="000000"/>
+                </a:solidFill>
+                <a:latin typeface="Open Sans"/>
+                <a:ea typeface="Open Sans"/>
+                <a:cs typeface="Open Sans"/>
+              </a:rPr>
+              <a:t>a </a:t>
+            </a:r>
+            <a:r>
+              <a:rPr sz="1200" b="0" i="1" u="none">
+                <a:solidFill>
+                  <a:srgbClr val="000000"/>
+                </a:solidFill>
+                <a:latin typeface="Open Sans"/>
+                <a:ea typeface="Open Sans"/>
+                <a:cs typeface="Open Sans"/>
+              </a:rPr>
+              <a:t>&gt; </a:t>
+            </a:r>
+            <a:r>
+              <a:rPr sz="1200" b="0" i="1" u="none">
+                <a:solidFill>
+                  <a:srgbClr val="000000"/>
+                </a:solidFill>
+                <a:latin typeface="Open Sans"/>
+                <a:ea typeface="Open Sans"/>
+                <a:cs typeface="Open Sans"/>
+              </a:rPr>
+              <a:t>b </a:t>
+            </a:r>
+            <a:r>
+              <a:rPr sz="1200" b="0" i="1" u="none">
+                <a:solidFill>
+                  <a:srgbClr val="000000"/>
+                </a:solidFill>
+                <a:latin typeface="Open Sans"/>
+                <a:ea typeface="Open Sans"/>
+                <a:cs typeface="Open Sans"/>
+              </a:rPr>
+              <a:t>&gt; </a:t>
+            </a:r>
+            <a:r>
+              <a:rPr sz="1200" b="0" i="1" u="none">
+                <a:solidFill>
+                  <a:srgbClr val="000000"/>
+                </a:solidFill>
+                <a:latin typeface="Open Sans"/>
+                <a:ea typeface="Open Sans"/>
+                <a:cs typeface="Open Sans"/>
+              </a:rPr>
+              <a:t>0</a:t>
+            </a:r>
+            <a:r>
+              <a:rPr sz="1200" b="0" i="0" u="none">
+                <a:solidFill>
+                  <a:srgbClr val="000000"/>
+                </a:solidFill>
+                <a:latin typeface="Open Sans"/>
+                <a:ea typeface="Open Sans"/>
+                <a:cs typeface="Open Sans"/>
+              </a:rPr>
+              <a:t>). Центральную роль играют два </a:t>
+            </a:r>
+            <a:r>
+              <a:rPr sz="1200" b="1" i="0" u="none">
+                <a:solidFill>
+                  <a:srgbClr val="000000"/>
+                </a:solidFill>
+                <a:latin typeface="Open Sans"/>
+                <a:ea typeface="Open Sans"/>
+                <a:cs typeface="Open Sans"/>
+              </a:rPr>
+              <a:t>фокуса</a:t>
+            </a:r>
+            <a:r>
+              <a:rPr sz="1200" b="0" i="0" u="none">
+                <a:solidFill>
+                  <a:srgbClr val="000000"/>
+                </a:solidFill>
+                <a:latin typeface="Open Sans"/>
+                <a:ea typeface="Open Sans"/>
+                <a:cs typeface="Open Sans"/>
+              </a:rPr>
+              <a:t> </a:t>
+            </a:r>
+            <mc:AlternateContent xmlns:mc="http://schemas.openxmlformats.org/markup-compatibility/2006" xmlns:m="http://schemas.openxmlformats.org/officeDocument/2006/math">
+              <mc:Choice xmlns:a14="http://schemas.microsoft.com/office/drawing/2010/main" Requires="a14">
+                <a14:m>
+                  <m:oMathPara>
+                    <m:oMathParaPr/>
+                    <m:oMath>
+                      <m:sSub>
+                        <m:sSubPr>
+                          <m:ctrlPr>
+                            <a:rPr>
+                              <a:latin typeface="Cambria Math"/>
+                              <a:ea typeface="Cambria Math"/>
+                              <a:cs typeface="Cambria Math"/>
+                            </a:rPr>
+                          </m:ctrlPr>
+                        </m:sSubPr>
+                        <m:e>
+                          <m:r>
+                            <m:rPr/>
+                            <a:rPr>
+                              <a:latin typeface="Cambria Math"/>
+                              <a:ea typeface="Cambria Math"/>
+                              <a:cs typeface="Cambria Math"/>
+                            </a:rPr>
+                            <m:t>𝐹</m:t>
+                          </m:r>
+                        </m:e>
+                        <m:sub>
+                          <m:r>
+                            <m:rPr/>
+                            <a:rPr>
+                              <a:latin typeface="Cambria Math"/>
+                              <a:ea typeface="Cambria Math"/>
+                              <a:cs typeface="Cambria Math"/>
+                            </a:rPr>
+                            <m:t>1</m:t>
+                          </m:r>
+                        </m:sub>
+                      </m:sSub>
+                    </m:oMath>
+                  </m:oMathPara>
+                </a14:m>
+              </mc:Choice>
+              <mc:Fallback/>
+            </mc:AlternateContent>
+            <a:r>
+              <a:rPr sz="1200" b="0" i="0" u="none">
+                <a:solidFill>
+                  <a:srgbClr val="000000"/>
+                </a:solidFill>
+                <a:latin typeface="Open Sans"/>
+                <a:ea typeface="Open Sans"/>
+                <a:cs typeface="Open Sans"/>
+              </a:rPr>
+              <a:t>​</a:t>
+            </a:r>
+            <a:r>
+              <a:rPr sz="1200" b="0" i="0" u="none">
+                <a:solidFill>
+                  <a:srgbClr val="000000"/>
+                </a:solidFill>
+                <a:latin typeface="Open Sans"/>
+                <a:ea typeface="Open Sans"/>
+                <a:cs typeface="Open Sans"/>
+              </a:rPr>
+              <a:t> и </a:t>
+            </a:r>
+            <mc:AlternateContent xmlns:mc="http://schemas.openxmlformats.org/markup-compatibility/2006" xmlns:m="http://schemas.openxmlformats.org/officeDocument/2006/math">
+              <mc:Choice xmlns:a14="http://schemas.microsoft.com/office/drawing/2010/main" Requires="a14">
+                <a14:m>
+                  <m:oMathPara>
+                    <m:oMathParaPr/>
+                    <m:oMath>
+                      <m:sSub>
+                        <m:sSubPr>
+                          <m:ctrlPr>
+                            <a:rPr>
+                              <a:latin typeface="Cambria Math"/>
+                              <a:ea typeface="Cambria Math"/>
+                              <a:cs typeface="Cambria Math"/>
+                            </a:rPr>
+                          </m:ctrlPr>
+                        </m:sSubPr>
+                        <m:e>
+                          <m:r>
+                            <m:rPr/>
+                            <a:rPr>
+                              <a:latin typeface="Cambria Math"/>
+                              <a:ea typeface="Cambria Math"/>
+                              <a:cs typeface="Cambria Math"/>
+                            </a:rPr>
+                            <m:t>𝐹</m:t>
+                          </m:r>
+                        </m:e>
+                        <m:sub>
+                          <m:r>
+                            <m:rPr/>
+                            <a:rPr>
+                              <a:latin typeface="Cambria Math"/>
+                              <a:ea typeface="Cambria Math"/>
+                              <a:cs typeface="Cambria Math"/>
+                            </a:rPr>
+                            <m:t>2</m:t>
+                          </m:r>
+                        </m:sub>
+                      </m:sSub>
+                    </m:oMath>
+                  </m:oMathPara>
+                </a14:m>
+              </mc:Choice>
+              <mc:Fallback/>
+            </mc:AlternateContent>
+            <a:r>
+              <a:rPr sz="1200" b="0" i="0" u="none">
+                <a:solidFill>
+                  <a:srgbClr val="000000"/>
+                </a:solidFill>
+                <a:latin typeface="Open Sans"/>
+                <a:ea typeface="Open Sans"/>
+                <a:cs typeface="Open Sans"/>
+              </a:rPr>
+              <a:t>​</a:t>
+            </a:r>
+            <a:r>
+              <a:rPr sz="1200" b="0" i="0" u="none">
+                <a:solidFill>
+                  <a:srgbClr val="000000"/>
+                </a:solidFill>
+                <a:latin typeface="Open Sans"/>
+                <a:ea typeface="Open Sans"/>
+                <a:cs typeface="Open Sans"/>
+              </a:rPr>
+              <a:t>, лежащие на большой оси.</a:t>
+            </a:r>
+            <a:endParaRPr sz="1200" b="0" i="0" u="none">
               <a:solidFill>
-                <a:schemeClr val="dk1"/>
+                <a:srgbClr val="000000"/>
               </a:solidFill>
-              <a:latin typeface="Calibri"/>
-              <a:ea typeface="Calibri"/>
-              <a:cs typeface="Calibri"/>
+              <a:latin typeface="Open Sans"/>
+              <a:ea typeface="Open Sans"/>
+              <a:cs typeface="Open Sans"/>
             </a:endParaRPr>
           </a:p>
-        </p:txBody>
-      </p:sp>
-      <p:sp>
-        <p:nvSpPr>
-          <p:cNvPr id="501843949" name="Google Shape;241;p14"/>
-          <p:cNvSpPr/>
-          <p:nvPr/>
-        </p:nvSpPr>
-        <p:spPr bwMode="auto">
-          <a:xfrm>
-            <a:off x="457200" y="2240280"/>
-            <a:ext cx="3977640" cy="1325880"/>
-          </a:xfrm>
-          <a:prstGeom prst="rect">
-            <a:avLst/>
-          </a:prstGeom>
-          <a:solidFill>
-            <a:srgbClr val="F5F5F5"/>
-          </a:solidFill>
-          <a:ln w="12700" cap="flat" cmpd="sng">
-            <a:solidFill>
-              <a:srgbClr val="CCCCCC"/>
-            </a:solidFill>
-            <a:prstDash val="solid"/>
-            <a:round/>
-            <a:headEnd type="none" w="sm" len="sm"/>
-            <a:tailEnd type="none" w="sm" len="sm"/>
-          </a:ln>
-        </p:spPr>
-        <p:txBody>
-          <a:bodyPr spcFirstLastPara="1" wrap="square" lIns="91425" tIns="91425" rIns="91425" bIns="91425" anchor="ctr" anchorCtr="0">
-            <a:noAutofit/>
-          </a:bodyPr>
-          <a:lstStyle/>
-          <a:p>
-            <a:pPr marL="0" lvl="0" indent="0" algn="l" rtl="0">
-              <a:spcBef>
-                <a:spcPts val="0"/>
-              </a:spcBef>
-              <a:spcAft>
-                <a:spcPts val="0"/>
-              </a:spcAft>
-              <a:buNone/>
-              <a:defRPr/>
-            </a:pPr>
-            <a:endParaRPr/>
-          </a:p>
-        </p:txBody>
-      </p:sp>
-      <p:sp>
-        <p:nvSpPr>
-          <p:cNvPr id="605734303" name="Google Shape;242;p14"/>
-          <p:cNvSpPr/>
-          <p:nvPr/>
-        </p:nvSpPr>
-        <p:spPr bwMode="auto">
-          <a:xfrm>
-            <a:off x="457200" y="2240280"/>
-            <a:ext cx="54864" cy="1325880"/>
-          </a:xfrm>
-          <a:prstGeom prst="rect">
-            <a:avLst/>
-          </a:prstGeom>
-          <a:solidFill>
-            <a:srgbClr val="C0272D"/>
-          </a:solidFill>
-          <a:ln w="12700" cap="flat" cmpd="sng">
-            <a:solidFill>
-              <a:srgbClr val="C0272D"/>
-            </a:solidFill>
-            <a:prstDash val="solid"/>
-            <a:round/>
-            <a:headEnd type="none" w="sm" len="sm"/>
-            <a:tailEnd type="none" w="sm" len="sm"/>
-          </a:ln>
-        </p:spPr>
-        <p:txBody>
-          <a:bodyPr spcFirstLastPara="1" wrap="square" lIns="91425" tIns="91425" rIns="91425" bIns="91425" anchor="ctr" anchorCtr="0">
-            <a:noAutofit/>
-          </a:bodyPr>
-          <a:lstStyle/>
-          <a:p>
-            <a:pPr marL="0" lvl="0" indent="0" algn="l" rtl="0">
-              <a:spcBef>
-                <a:spcPts val="0"/>
-              </a:spcBef>
-              <a:spcAft>
-                <a:spcPts val="0"/>
-              </a:spcAft>
-              <a:buNone/>
-              <a:defRPr/>
-            </a:pPr>
-            <a:endParaRPr/>
-          </a:p>
-        </p:txBody>
-      </p:sp>
-      <p:sp>
-        <p:nvSpPr>
-          <p:cNvPr id="674927636" name="Google Shape;243;p14"/>
-          <p:cNvSpPr/>
-          <p:nvPr/>
-        </p:nvSpPr>
-        <p:spPr bwMode="auto">
-          <a:xfrm>
-            <a:off x="594360" y="2313432"/>
-            <a:ext cx="3657600" cy="320040"/>
-          </a:xfrm>
-          <a:prstGeom prst="rect">
-            <a:avLst/>
-          </a:prstGeom>
-          <a:noFill/>
-          <a:ln>
-            <a:noFill/>
-          </a:ln>
-        </p:spPr>
-        <p:txBody>
-          <a:bodyPr spcFirstLastPara="1" wrap="square" lIns="91425" tIns="45700" rIns="91425" bIns="45700" anchor="ctr" anchorCtr="0">
-            <a:noAutofit/>
-          </a:bodyPr>
-          <a:lstStyle/>
-          <a:p>
-            <a:pPr marL="0" marR="0" lvl="0" indent="0" algn="l" rtl="0">
-              <a:spcBef>
-                <a:spcPts val="0"/>
-              </a:spcBef>
-              <a:spcAft>
-                <a:spcPts val="0"/>
-              </a:spcAft>
-              <a:buClr>
-                <a:srgbClr val="C0272D"/>
-              </a:buClr>
-              <a:buSzPts val="1300"/>
-              <a:buFont typeface="Calibri"/>
-              <a:buNone/>
-              <a:defRPr/>
-            </a:pPr>
-            <a:endParaRPr sz="1300" b="0" i="0" u="none" strike="noStrike" cap="none">
-              <a:solidFill>
-                <a:schemeClr val="dk1"/>
-              </a:solidFill>
-              <a:latin typeface="Calibri"/>
-              <a:ea typeface="Calibri"/>
-              <a:cs typeface="Calibri"/>
+          <a:p>
+            <a:pPr indent="274319">
+              <a:defRPr/>
+            </a:pPr>
+            <a:r>
+              <a:rPr sz="1200" b="0" i="0" u="none">
+                <a:solidFill>
+                  <a:srgbClr val="000000"/>
+                </a:solidFill>
+                <a:latin typeface="Open Sans"/>
+                <a:ea typeface="Open Sans"/>
+                <a:cs typeface="Open Sans"/>
+              </a:rPr>
+              <a:t>Имеет место быть геометрическое свойство границы (</a:t>
+            </a:r>
+            <a:r>
+              <a:rPr sz="1200" b="0" i="0" u="sng">
+                <a:solidFill>
+                  <a:srgbClr val="000000"/>
+                </a:solidFill>
+                <a:latin typeface="Open Sans"/>
+                <a:ea typeface="Open Sans"/>
+                <a:cs typeface="Open Sans"/>
+              </a:rPr>
+              <a:t>теорема Понселе</a:t>
+            </a:r>
+            <a:r>
+              <a:rPr sz="1200" b="0" i="0" u="none">
+                <a:solidFill>
+                  <a:srgbClr val="000000"/>
+                </a:solidFill>
+                <a:latin typeface="Open Sans"/>
+                <a:ea typeface="Open Sans"/>
+                <a:cs typeface="Open Sans"/>
+              </a:rPr>
+              <a:t>): касательная к эллипсу в любой точке образует равные углы с отрезками, соединяющими эту точку с фокусами. </a:t>
+            </a:r>
+            <a:r>
+              <a:rPr sz="1200" b="0" i="0" u="none">
+                <a:solidFill>
+                  <a:srgbClr val="000000"/>
+                </a:solidFill>
+                <a:latin typeface="Open Sans"/>
+                <a:ea typeface="Open Sans"/>
+                <a:cs typeface="Open Sans"/>
+              </a:rPr>
+              <a:t>Отсюда вытекает главная особенность траекторий: если частица пролетает через один фокус, то после отражения от границы она обязательно пройдет через второй фокус. Такие траектории образуют особое </a:t>
+            </a:r>
+            <a:r>
+              <a:rPr sz="1200" b="0" i="0" u="none">
+                <a:solidFill>
+                  <a:srgbClr val="000000"/>
+                </a:solidFill>
+                <a:latin typeface="Open Sans"/>
+                <a:ea typeface="Open Sans"/>
+                <a:cs typeface="Open Sans"/>
+              </a:rPr>
+              <a:t>семейство</a:t>
+            </a:r>
+            <a:r>
+              <a:rPr sz="1200" b="0" i="0" u="none">
+                <a:solidFill>
+                  <a:srgbClr val="000000"/>
+                </a:solidFill>
+                <a:latin typeface="Open Sans"/>
+                <a:ea typeface="Open Sans"/>
+                <a:cs typeface="Open Sans"/>
+              </a:rPr>
+              <a:t>.</a:t>
+            </a:r>
+            <a:endParaRPr>
+              <a:latin typeface="Open Sans"/>
+              <a:cs typeface="Open Sans"/>
             </a:endParaRPr>
           </a:p>
-        </p:txBody>
-      </p:sp>
-      <p:sp>
-        <p:nvSpPr>
-          <p:cNvPr id="83258900" name="Google Shape;244;p14"/>
-          <p:cNvSpPr/>
-          <p:nvPr/>
-        </p:nvSpPr>
-        <p:spPr bwMode="auto">
-          <a:xfrm>
-            <a:off x="594360" y="2651760"/>
-            <a:ext cx="3749040" cy="841248"/>
-          </a:xfrm>
-          <a:prstGeom prst="rect">
-            <a:avLst/>
-          </a:prstGeom>
-          <a:noFill/>
-          <a:ln>
-            <a:noFill/>
-          </a:ln>
-        </p:spPr>
-        <p:txBody>
-          <a:bodyPr spcFirstLastPara="1" wrap="square" lIns="91425" tIns="45700" rIns="91425" bIns="45700" anchor="ctr" anchorCtr="0">
-            <a:noAutofit/>
-          </a:bodyPr>
-          <a:lstStyle/>
-          <a:p>
-            <a:pPr marL="0" marR="0" lvl="0" indent="0" algn="l" rtl="0">
-              <a:spcBef>
-                <a:spcPts val="0"/>
-              </a:spcBef>
-              <a:spcAft>
-                <a:spcPts val="0"/>
-              </a:spcAft>
-              <a:buClr>
-                <a:srgbClr val="1A1A1A"/>
-              </a:buClr>
-              <a:buSzPts val="1200"/>
-              <a:buFont typeface="Calibri"/>
-              <a:buNone/>
-              <a:defRPr/>
-            </a:pPr>
-            <a:endParaRPr sz="1200" b="0" i="0" u="none" strike="noStrike" cap="none">
-              <a:solidFill>
-                <a:schemeClr val="dk1"/>
-              </a:solidFill>
-              <a:latin typeface="Calibri"/>
-              <a:ea typeface="Calibri"/>
-              <a:cs typeface="Calibri"/>
+          <a:p>
+            <a:pPr indent="274319">
+              <a:defRPr/>
+            </a:pPr>
+            <a:r>
+              <a:rPr sz="1200" b="0" i="0" u="none">
+                <a:solidFill>
+                  <a:srgbClr val="000000"/>
+                </a:solidFill>
+                <a:latin typeface="Open Sans"/>
+                <a:ea typeface="Open Sans"/>
+                <a:cs typeface="Open Sans"/>
+              </a:rPr>
+              <a:t>В зависимости от поведения относительно отрезка </a:t>
+            </a:r>
+            <mc:AlternateContent xmlns:mc="http://schemas.openxmlformats.org/markup-compatibility/2006" xmlns:m="http://schemas.openxmlformats.org/officeDocument/2006/math">
+              <mc:Choice xmlns:a14="http://schemas.microsoft.com/office/drawing/2010/main" Requires="a14">
+                <a14:m>
+                  <m:oMathPara>
+                    <m:oMathParaPr/>
+                    <m:oMath>
+                      <m:sSub>
+                        <m:sSubPr>
+                          <m:ctrlPr>
+                            <a:rPr>
+                              <a:latin typeface="Cambria Math"/>
+                              <a:ea typeface="Cambria Math"/>
+                              <a:cs typeface="Cambria Math"/>
+                            </a:rPr>
+                          </m:ctrlPr>
+                        </m:sSubPr>
+                        <m:e>
+                          <m:r>
+                            <m:rPr/>
+                            <a:rPr>
+                              <a:latin typeface="Cambria Math"/>
+                              <a:ea typeface="Cambria Math"/>
+                              <a:cs typeface="Cambria Math"/>
+                            </a:rPr>
+                            <m:t>𝐹</m:t>
+                          </m:r>
+                        </m:e>
+                        <m:sub>
+                          <m:r>
+                            <m:rPr/>
+                            <a:rPr>
+                              <a:latin typeface="Cambria Math"/>
+                              <a:ea typeface="Cambria Math"/>
+                              <a:cs typeface="Cambria Math"/>
+                            </a:rPr>
+                            <m:t>1</m:t>
+                          </m:r>
+                        </m:sub>
+                      </m:sSub>
+                      <m:sSub>
+                        <m:sSubPr>
+                          <m:ctrlPr>
+                            <a:rPr>
+                              <a:latin typeface="Cambria Math"/>
+                              <a:ea typeface="Cambria Math"/>
+                              <a:cs typeface="Cambria Math"/>
+                            </a:rPr>
+                          </m:ctrlPr>
+                        </m:sSubPr>
+                        <m:e>
+                          <m:r>
+                            <m:rPr/>
+                            <a:rPr>
+                              <a:latin typeface="Cambria Math"/>
+                              <a:ea typeface="Cambria Math"/>
+                              <a:cs typeface="Cambria Math"/>
+                            </a:rPr>
+                            <m:t>𝐹</m:t>
+                          </m:r>
+                        </m:e>
+                        <m:sub>
+                          <m:r>
+                            <m:rPr/>
+                            <a:rPr>
+                              <a:latin typeface="Cambria Math"/>
+                              <a:ea typeface="Cambria Math"/>
+                              <a:cs typeface="Cambria Math"/>
+                            </a:rPr>
+                            <m:t>2</m:t>
+                          </m:r>
+                        </m:sub>
+                      </m:sSub>
+                    </m:oMath>
+                  </m:oMathPara>
+                </a14:m>
+              </mc:Choice>
+              <mc:Fallback/>
+            </mc:AlternateContent>
+            <a:r>
+              <a:rPr sz="1200" b="0" i="0" u="none">
+                <a:solidFill>
+                  <a:srgbClr val="000000"/>
+                </a:solidFill>
+                <a:latin typeface="Open Sans"/>
+                <a:ea typeface="Open Sans"/>
+                <a:cs typeface="Open Sans"/>
+              </a:rPr>
+              <a:t>​</a:t>
+            </a:r>
+            <a:r>
+              <a:rPr sz="1200" b="0" i="0" u="none">
+                <a:solidFill>
+                  <a:srgbClr val="000000"/>
+                </a:solidFill>
+                <a:latin typeface="Open Sans"/>
+                <a:ea typeface="Open Sans"/>
+                <a:cs typeface="Open Sans"/>
+              </a:rPr>
+              <a:t>, соединяющего фокусы, все траектории делятся на два типа. </a:t>
+            </a:r>
+            <a:r>
+              <a:rPr sz="1200" b="1" i="0" u="none">
+                <a:solidFill>
+                  <a:srgbClr val="000000"/>
+                </a:solidFill>
+                <a:latin typeface="Open Sans"/>
+                <a:ea typeface="Open Sans"/>
+                <a:cs typeface="Open Sans"/>
+              </a:rPr>
+              <a:t>Внутренние </a:t>
+            </a:r>
+            <a:r>
+              <a:rPr sz="1200" b="0" i="0" u="none">
+                <a:solidFill>
+                  <a:srgbClr val="000000"/>
+                </a:solidFill>
+                <a:latin typeface="Open Sans"/>
+                <a:ea typeface="Open Sans"/>
+                <a:cs typeface="Open Sans"/>
+              </a:rPr>
+              <a:t>траектории при каждом отражении пересекают этот отрезок, а </a:t>
+            </a:r>
+            <a:r>
+              <a:rPr sz="1200" b="1" i="0" u="none">
+                <a:solidFill>
+                  <a:srgbClr val="000000"/>
+                </a:solidFill>
+                <a:latin typeface="Open Sans"/>
+                <a:ea typeface="Open Sans"/>
+                <a:cs typeface="Open Sans"/>
+              </a:rPr>
+              <a:t>внешние </a:t>
+            </a:r>
+            <a:r>
+              <a:rPr sz="1200" b="0" i="0" u="none">
+                <a:solidFill>
+                  <a:srgbClr val="000000"/>
+                </a:solidFill>
+                <a:latin typeface="Open Sans"/>
+                <a:ea typeface="Open Sans"/>
+                <a:cs typeface="Open Sans"/>
+              </a:rPr>
+              <a:t>— огибают.</a:t>
+            </a:r>
+            <a:endParaRPr>
+              <a:latin typeface="Open Sans"/>
+              <a:cs typeface="Open Sans"/>
             </a:endParaRPr>
           </a:p>
-        </p:txBody>
-      </p:sp>
-      <p:sp>
-        <p:nvSpPr>
-          <p:cNvPr id="1523415854" name="Google Shape;245;p14"/>
-          <p:cNvSpPr/>
-          <p:nvPr/>
-        </p:nvSpPr>
-        <p:spPr bwMode="auto">
-          <a:xfrm>
-            <a:off x="4617720" y="2240280"/>
-            <a:ext cx="3977640" cy="1325880"/>
-          </a:xfrm>
-          <a:prstGeom prst="rect">
-            <a:avLst/>
-          </a:prstGeom>
-          <a:solidFill>
-            <a:srgbClr val="E8D5D5"/>
-          </a:solidFill>
-          <a:ln w="12700" cap="flat" cmpd="sng">
-            <a:solidFill>
-              <a:srgbClr val="CCCCCC"/>
-            </a:solidFill>
-            <a:prstDash val="solid"/>
-            <a:round/>
-            <a:headEnd type="none" w="sm" len="sm"/>
-            <a:tailEnd type="none" w="sm" len="sm"/>
-          </a:ln>
-        </p:spPr>
-        <p:txBody>
-          <a:bodyPr spcFirstLastPara="1" wrap="square" lIns="91425" tIns="91425" rIns="91425" bIns="91425" anchor="ctr" anchorCtr="0">
-            <a:noAutofit/>
-          </a:bodyPr>
-          <a:lstStyle/>
-          <a:p>
-            <a:pPr marL="0" lvl="0" indent="0" algn="l" rtl="0">
-              <a:spcBef>
-                <a:spcPts val="0"/>
-              </a:spcBef>
-              <a:spcAft>
-                <a:spcPts val="0"/>
-              </a:spcAft>
-              <a:buNone/>
-              <a:defRPr/>
-            </a:pPr>
-            <a:endParaRPr/>
-          </a:p>
-        </p:txBody>
-      </p:sp>
-      <p:sp>
-        <p:nvSpPr>
-          <p:cNvPr id="1482332564" name="Google Shape;246;p14"/>
-          <p:cNvSpPr/>
-          <p:nvPr/>
-        </p:nvSpPr>
-        <p:spPr bwMode="auto">
-          <a:xfrm>
-            <a:off x="4617720" y="2240280"/>
-            <a:ext cx="54864" cy="1325880"/>
-          </a:xfrm>
-          <a:prstGeom prst="rect">
-            <a:avLst/>
-          </a:prstGeom>
-          <a:solidFill>
-            <a:srgbClr val="C0272D"/>
-          </a:solidFill>
-          <a:ln w="12700" cap="flat" cmpd="sng">
-            <a:solidFill>
-              <a:srgbClr val="C0272D"/>
-            </a:solidFill>
-            <a:prstDash val="solid"/>
-            <a:round/>
-            <a:headEnd type="none" w="sm" len="sm"/>
-            <a:tailEnd type="none" w="sm" len="sm"/>
-          </a:ln>
-        </p:spPr>
-        <p:txBody>
-          <a:bodyPr spcFirstLastPara="1" wrap="square" lIns="91425" tIns="91425" rIns="91425" bIns="91425" anchor="ctr" anchorCtr="0">
-            <a:noAutofit/>
-          </a:bodyPr>
-          <a:lstStyle/>
-          <a:p>
-            <a:pPr marL="0" lvl="0" indent="0" algn="l" rtl="0">
-              <a:spcBef>
-                <a:spcPts val="0"/>
-              </a:spcBef>
-              <a:spcAft>
-                <a:spcPts val="0"/>
-              </a:spcAft>
-              <a:buNone/>
-              <a:defRPr/>
-            </a:pPr>
-            <a:endParaRPr/>
-          </a:p>
-        </p:txBody>
-      </p:sp>
-      <p:sp>
-        <p:nvSpPr>
-          <p:cNvPr id="1306864115" name="Google Shape;247;p14"/>
-          <p:cNvSpPr/>
-          <p:nvPr/>
-        </p:nvSpPr>
-        <p:spPr bwMode="auto">
-          <a:xfrm>
-            <a:off x="4754880" y="2313432"/>
-            <a:ext cx="3657600" cy="320040"/>
-          </a:xfrm>
-          <a:prstGeom prst="rect">
-            <a:avLst/>
-          </a:prstGeom>
-          <a:noFill/>
-          <a:ln>
-            <a:noFill/>
-          </a:ln>
-        </p:spPr>
-        <p:txBody>
-          <a:bodyPr spcFirstLastPara="1" wrap="square" lIns="91425" tIns="45700" rIns="91425" bIns="45700" anchor="ctr" anchorCtr="0">
-            <a:noAutofit/>
-          </a:bodyPr>
-          <a:lstStyle/>
-          <a:p>
-            <a:pPr marL="0" marR="0" lvl="0" indent="0" algn="l" rtl="0">
-              <a:spcBef>
-                <a:spcPts val="0"/>
-              </a:spcBef>
-              <a:spcAft>
-                <a:spcPts val="0"/>
-              </a:spcAft>
-              <a:buClr>
-                <a:srgbClr val="C0272D"/>
-              </a:buClr>
-              <a:buSzPts val="1300"/>
-              <a:buFont typeface="Calibri"/>
-              <a:buNone/>
-              <a:defRPr/>
-            </a:pPr>
-            <a:endParaRPr sz="1300" b="0" i="0" u="none" strike="noStrike" cap="none">
-              <a:solidFill>
-                <a:schemeClr val="dk1"/>
-              </a:solidFill>
-              <a:latin typeface="Calibri"/>
-              <a:ea typeface="Calibri"/>
-              <a:cs typeface="Calibri"/>
+          <a:p>
+            <a:pPr indent="274319">
+              <a:defRPr/>
+            </a:pPr>
+            <a:r>
+              <a:rPr sz="1200" b="0" i="0" u="none">
+                <a:solidFill>
+                  <a:srgbClr val="000000"/>
+                </a:solidFill>
+                <a:latin typeface="Open Sans"/>
+                <a:ea typeface="Open Sans"/>
+                <a:cs typeface="Open Sans"/>
+              </a:rPr>
+              <a:t>Наиболее важным свойством эллиптического бильярда является наличие </a:t>
+            </a:r>
+            <a:r>
+              <a:rPr sz="1200" b="1" i="0" u="none">
+                <a:solidFill>
+                  <a:srgbClr val="000000"/>
+                </a:solidFill>
+                <a:latin typeface="Open Sans"/>
+                <a:ea typeface="Open Sans"/>
+                <a:cs typeface="Open Sans"/>
+              </a:rPr>
+              <a:t>каустик </a:t>
+            </a:r>
+            <a:r>
+              <a:rPr sz="1200" b="0" i="0" u="none">
+                <a:solidFill>
+                  <a:srgbClr val="000000"/>
+                </a:solidFill>
+                <a:latin typeface="Open Sans"/>
+                <a:ea typeface="Open Sans"/>
+                <a:cs typeface="Open Sans"/>
+              </a:rPr>
+              <a:t>(огибающих кривых). Оказывается, что для любого типа траекторий существует некая софокусная (имеющая те же фокусы </a:t>
+            </a:r>
+            <mc:AlternateContent xmlns:mc="http://schemas.openxmlformats.org/markup-compatibility/2006" xmlns:m="http://schemas.openxmlformats.org/officeDocument/2006/math">
+              <mc:Choice xmlns:a14="http://schemas.microsoft.com/office/drawing/2010/main" Requires="a14">
+                <a14:m>
+                  <m:oMathPara>
+                    <m:oMathParaPr/>
+                    <m:oMath>
+                      <m:sSub>
+                        <m:sSubPr>
+                          <m:ctrlPr>
+                            <a:rPr>
+                              <a:latin typeface="Cambria Math"/>
+                              <a:ea typeface="Cambria Math"/>
+                              <a:cs typeface="Cambria Math"/>
+                            </a:rPr>
+                          </m:ctrlPr>
+                        </m:sSubPr>
+                        <m:e>
+                          <m:r>
+                            <m:rPr/>
+                            <a:rPr>
+                              <a:latin typeface="Cambria Math"/>
+                              <a:ea typeface="Cambria Math"/>
+                              <a:cs typeface="Cambria Math"/>
+                            </a:rPr>
+                            <m:t>𝐹</m:t>
+                          </m:r>
+                        </m:e>
+                        <m:sub>
+                          <m:r>
+                            <m:rPr/>
+                            <a:rPr>
+                              <a:latin typeface="Cambria Math"/>
+                              <a:ea typeface="Cambria Math"/>
+                              <a:cs typeface="Cambria Math"/>
+                            </a:rPr>
+                            <m:t>1</m:t>
+                          </m:r>
+                        </m:sub>
+                      </m:sSub>
+                    </m:oMath>
+                  </m:oMathPara>
+                </a14:m>
+              </mc:Choice>
+              <mc:Fallback/>
+            </mc:AlternateContent>
+            <a:r>
+              <a:rPr sz="1200" b="0" i="0" u="none">
+                <a:solidFill>
+                  <a:srgbClr val="000000"/>
+                </a:solidFill>
+                <a:latin typeface="Open Sans"/>
+                <a:ea typeface="Open Sans"/>
+                <a:cs typeface="Open Sans"/>
+              </a:rPr>
+              <a:t> и </a:t>
+            </a:r>
+            <mc:AlternateContent xmlns:mc="http://schemas.openxmlformats.org/markup-compatibility/2006" xmlns:m="http://schemas.openxmlformats.org/officeDocument/2006/math">
+              <mc:Choice xmlns:a14="http://schemas.microsoft.com/office/drawing/2010/main" Requires="a14">
+                <a14:m>
+                  <m:oMathPara>
+                    <m:oMathParaPr/>
+                    <m:oMath>
+                      <m:sSub>
+                        <m:sSubPr>
+                          <m:ctrlPr>
+                            <a:rPr>
+                              <a:latin typeface="Cambria Math"/>
+                              <a:ea typeface="Cambria Math"/>
+                              <a:cs typeface="Cambria Math"/>
+                            </a:rPr>
+                          </m:ctrlPr>
+                        </m:sSubPr>
+                        <m:e>
+                          <m:r>
+                            <m:rPr/>
+                            <a:rPr>
+                              <a:latin typeface="Cambria Math"/>
+                              <a:ea typeface="Cambria Math"/>
+                              <a:cs typeface="Cambria Math"/>
+                            </a:rPr>
+                            <m:t>𝐹</m:t>
+                          </m:r>
+                        </m:e>
+                        <m:sub>
+                          <m:r>
+                            <m:rPr/>
+                            <a:rPr>
+                              <a:latin typeface="Cambria Math"/>
+                              <a:ea typeface="Cambria Math"/>
+                              <a:cs typeface="Cambria Math"/>
+                            </a:rPr>
+                            <m:t>2</m:t>
+                          </m:r>
+                        </m:sub>
+                      </m:sSub>
+                    </m:oMath>
+                  </m:oMathPara>
+                </a14:m>
+              </mc:Choice>
+              <mc:Fallback/>
+            </mc:AlternateContent>
+            <a:r>
+              <a:rPr sz="1200" b="0" i="0" u="none">
+                <a:solidFill>
+                  <a:srgbClr val="000000"/>
+                </a:solidFill>
+                <a:latin typeface="Open Sans"/>
+                <a:ea typeface="Open Sans"/>
+                <a:cs typeface="Open Sans"/>
+              </a:rPr>
+              <a:t>​</a:t>
+            </a:r>
+            <a:r>
+              <a:rPr sz="1200" b="0" i="0" u="none">
+                <a:solidFill>
+                  <a:srgbClr val="000000"/>
+                </a:solidFill>
+                <a:latin typeface="Open Sans"/>
+                <a:ea typeface="Open Sans"/>
+                <a:cs typeface="Open Sans"/>
+              </a:rPr>
+              <a:t>) </a:t>
+            </a:r>
+            <a:r>
+              <a:rPr lang="ru-RU" sz="1200" b="0" i="0" u="none" strike="noStrike" cap="none" spc="0">
+                <a:solidFill>
+                  <a:srgbClr val="000000"/>
+                </a:solidFill>
+                <a:latin typeface="Open Sans"/>
+                <a:ea typeface="Open Sans"/>
+                <a:cs typeface="Open Sans"/>
+              </a:rPr>
+              <a:t>кривая</a:t>
+            </a:r>
+            <a:r>
+              <a:rPr sz="1200" b="0" i="0" u="none">
+                <a:solidFill>
+                  <a:srgbClr val="000000"/>
+                </a:solidFill>
+                <a:latin typeface="Open Sans"/>
+                <a:ea typeface="Open Sans"/>
+                <a:cs typeface="Open Sans"/>
+              </a:rPr>
+              <a:t>, которой траектория касается при каждом отражении. Для внешних траекторий такой каустикой служит меньший эллипс, а для внутренних — софокусная гипербола. Это означает, что </a:t>
+            </a:r>
+            <a:r>
+              <a:rPr sz="1200" b="1" i="0" u="none">
+                <a:solidFill>
+                  <a:srgbClr val="000000"/>
+                </a:solidFill>
+                <a:latin typeface="Open Sans"/>
+                <a:ea typeface="Open Sans"/>
+                <a:cs typeface="Open Sans"/>
+              </a:rPr>
+              <a:t>траектории никогда не пересекают свои каустики</a:t>
+            </a:r>
+            <a:r>
+              <a:rPr sz="1200" b="0" i="0" u="none">
+                <a:solidFill>
+                  <a:srgbClr val="000000"/>
+                </a:solidFill>
+                <a:latin typeface="Open Sans"/>
+                <a:ea typeface="Open Sans"/>
+                <a:cs typeface="Open Sans"/>
+              </a:rPr>
+              <a:t>, а как бы «наматываются» на них.</a:t>
+            </a:r>
+            <a:endParaRPr>
+              <a:latin typeface="Open Sans"/>
+              <a:cs typeface="Open Sans"/>
             </a:endParaRPr>
           </a:p>
-        </p:txBody>
-      </p:sp>
-      <p:sp>
-        <p:nvSpPr>
-          <p:cNvPr id="1035970302" name="Google Shape;248;p14"/>
-          <p:cNvSpPr/>
-          <p:nvPr/>
-        </p:nvSpPr>
-        <p:spPr bwMode="auto">
-          <a:xfrm>
-            <a:off x="4754880" y="2651760"/>
-            <a:ext cx="3749040" cy="841248"/>
-          </a:xfrm>
-          <a:prstGeom prst="rect">
-            <a:avLst/>
-          </a:prstGeom>
-          <a:noFill/>
-          <a:ln>
-            <a:noFill/>
-          </a:ln>
-        </p:spPr>
-        <p:txBody>
-          <a:bodyPr spcFirstLastPara="1" wrap="square" lIns="91425" tIns="45700" rIns="91425" bIns="45700" anchor="ctr" anchorCtr="0">
-            <a:noAutofit/>
-          </a:bodyPr>
-          <a:lstStyle/>
-          <a:p>
-            <a:pPr marL="0" marR="0" lvl="0" indent="0" algn="l" rtl="0">
-              <a:spcBef>
-                <a:spcPts val="0"/>
-              </a:spcBef>
-              <a:spcAft>
-                <a:spcPts val="0"/>
-              </a:spcAft>
-              <a:buClr>
-                <a:srgbClr val="1A1A1A"/>
-              </a:buClr>
-              <a:buSzPts val="1200"/>
-              <a:buFont typeface="Calibri"/>
-              <a:buNone/>
-              <a:defRPr/>
-            </a:pPr>
-            <a:endParaRPr sz="1200" b="0" i="0" u="none" strike="noStrike" cap="none">
-              <a:solidFill>
-                <a:schemeClr val="dk1"/>
-              </a:solidFill>
-              <a:latin typeface="Calibri"/>
-              <a:ea typeface="Calibri"/>
-              <a:cs typeface="Calibri"/>
-            </a:endParaRPr>
-          </a:p>
-        </p:txBody>
-      </p:sp>
-      <p:sp>
-        <p:nvSpPr>
-          <p:cNvPr id="2109713327" name="Google Shape;200;p13"/>
-          <p:cNvSpPr/>
-          <p:nvPr/>
-        </p:nvSpPr>
-        <p:spPr bwMode="auto">
-          <a:xfrm flipH="0" flipV="0">
-            <a:off x="411479" y="3844847"/>
-            <a:ext cx="8229600" cy="1092912"/>
-          </a:xfrm>
-          <a:prstGeom prst="rect">
-            <a:avLst/>
-          </a:prstGeom>
-          <a:solidFill>
-            <a:srgbClr val="C0272D"/>
-          </a:solidFill>
-          <a:ln w="12700" cap="flat" cmpd="sng">
-            <a:solidFill>
-              <a:srgbClr val="C0272D"/>
-            </a:solidFill>
-            <a:prstDash val="solid"/>
-            <a:round/>
-            <a:headEnd type="none" w="sm" len="sm"/>
-            <a:tailEnd type="none" w="sm" len="sm"/>
-          </a:ln>
-        </p:spPr>
-        <p:txBody>
-          <a:bodyPr spcFirstLastPara="1" wrap="square" lIns="91423" tIns="91423" rIns="91423" bIns="91423" anchor="ctr" anchorCtr="0">
-            <a:noAutofit/>
-          </a:bodyPr>
-          <a:lstStyle/>
-          <a:p>
-            <a:pPr>
-              <a:defRPr/>
-            </a:pPr>
-            <a:endParaRPr lang="ru-RU" sz="1400" b="1" i="0" u="none" strike="noStrike" cap="none" spc="0">
-              <a:solidFill>
-                <a:srgbClr val="FFFFFF"/>
-              </a:solidFill>
-              <a:latin typeface="Calibri"/>
-              <a:cs typeface="Calibri"/>
+          <a:p>
+            <a:pPr indent="274319">
+              <a:defRPr/>
+            </a:pPr>
+            <a:r>
+              <a:rPr sz="1200" b="0" i="0" u="none">
+                <a:solidFill>
+                  <a:srgbClr val="000000"/>
+                </a:solidFill>
+                <a:latin typeface="Open Sans"/>
+                <a:ea typeface="Open Sans"/>
+                <a:cs typeface="Open Sans"/>
+              </a:rPr>
+              <a:t>В терминах теории динамических систем это означает, что фазовое пространство (пространство столкновений) полностью расслоено на </a:t>
+            </a:r>
+            <a:r>
+              <a:rPr sz="1200" b="1" i="0" u="none">
+                <a:solidFill>
+                  <a:srgbClr val="000000"/>
+                </a:solidFill>
+                <a:latin typeface="Open Sans"/>
+                <a:ea typeface="Open Sans"/>
+                <a:cs typeface="Open Sans"/>
+              </a:rPr>
+              <a:t>инвариантные кривые</a:t>
+            </a:r>
+            <a:r>
+              <a:rPr sz="1200" b="0" i="0" u="none">
+                <a:solidFill>
+                  <a:srgbClr val="000000"/>
+                </a:solidFill>
+                <a:latin typeface="Open Sans"/>
+                <a:ea typeface="Open Sans"/>
+                <a:cs typeface="Open Sans"/>
+              </a:rPr>
+              <a:t>. В отличие от рассмотренных далее хаотических бильярдов , эллиптический бильярд является полностью </a:t>
+            </a:r>
+            <a:r>
+              <a:rPr sz="1200" b="1" i="0" u="none">
+                <a:solidFill>
+                  <a:srgbClr val="000000"/>
+                </a:solidFill>
+                <a:latin typeface="Open Sans"/>
+                <a:ea typeface="Open Sans"/>
+                <a:cs typeface="Open Sans"/>
+              </a:rPr>
+              <a:t>регулярной </a:t>
+            </a:r>
+            <a:r>
+              <a:rPr sz="1200" b="0" i="0" u="none">
+                <a:solidFill>
+                  <a:srgbClr val="000000"/>
+                </a:solidFill>
+                <a:latin typeface="Open Sans"/>
+                <a:ea typeface="Open Sans"/>
+                <a:cs typeface="Open Sans"/>
+              </a:rPr>
+              <a:t>системой, в которой хаос отсутствует (к этому же классу систем относятся и прямоугольные бильярды). </a:t>
+            </a:r>
+            <a:endParaRPr>
+              <a:latin typeface="Open Sans"/>
+              <a:cs typeface="Open Sans"/>
             </a:endParaRPr>
           </a:p>
         </p:txBody>

--- a/sinai_billiard.pptx
+++ b/sinai_billiard.pptx
@@ -5,7 +5,7 @@
     <p:sldMasterId id="2147483648" r:id="rId1"/>
   </p:sldMasterIdLst>
   <p:notesMasterIdLst>
-    <p:notesMasterId r:id="rId18"/>
+    <p:notesMasterId r:id="rId21"/>
   </p:notesMasterIdLst>
   <p:sldIdLst>
     <p:sldId id="256" r:id="rId4"/>
@@ -22,6 +22,9 @@
     <p:sldId id="267" r:id="rId15"/>
     <p:sldId id="268" r:id="rId16"/>
     <p:sldId id="269" r:id="rId17"/>
+    <p:sldId id="270" r:id="rId18"/>
+    <p:sldId id="271" r:id="rId19"/>
+    <p:sldId id="272" r:id="rId20"/>
   </p:sldIdLst>
   <p:sldSz cx="9144000" cy="5143500"/>
   <p:notesSz cx="5143500" cy="9144000"/>
@@ -275,7 +278,7 @@
       </p:grpSpPr>
       <p:sp>
         <p:nvSpPr>
-          <p:cNvPr id="457533653" name="Google Shape;3;n"/>
+          <p:cNvPr id="1213775099" name="Google Shape;3;n"/>
           <p:cNvSpPr txBox="1"/>
           <p:nvPr>
             <p:ph type="hdr" idx="2"/>
@@ -472,7 +475,7 @@
       </p:sp>
       <p:sp>
         <p:nvSpPr>
-          <p:cNvPr id="71646854" name="Google Shape;4;n"/>
+          <p:cNvPr id="989657474" name="Google Shape;4;n"/>
           <p:cNvSpPr txBox="1"/>
           <p:nvPr>
             <p:ph type="dt" idx="10"/>
@@ -669,7 +672,7 @@
       </p:sp>
       <p:sp>
         <p:nvSpPr>
-          <p:cNvPr id="212463376" name="Google Shape;5;n"/>
+          <p:cNvPr id="2095687309" name="Google Shape;5;n"/>
           <p:cNvSpPr/>
           <p:nvPr>
             <p:ph type="sldImg" idx="3"/>
@@ -718,7 +721,7 @@
       </p:sp>
       <p:sp>
         <p:nvSpPr>
-          <p:cNvPr id="2021270359" name="Google Shape;6;n"/>
+          <p:cNvPr id="260031949" name="Google Shape;6;n"/>
           <p:cNvSpPr txBox="1"/>
           <p:nvPr>
             <p:ph type="body" idx="1"/>
@@ -915,7 +918,7 @@
       </p:sp>
       <p:sp>
         <p:nvSpPr>
-          <p:cNvPr id="82239593" name="Google Shape;7;n"/>
+          <p:cNvPr id="1161699722" name="Google Shape;7;n"/>
           <p:cNvSpPr txBox="1"/>
           <p:nvPr>
             <p:ph type="ftr" idx="11"/>
@@ -1112,7 +1115,7 @@
       </p:sp>
       <p:sp>
         <p:nvSpPr>
-          <p:cNvPr id="1996432432" name="Google Shape;8;n"/>
+          <p:cNvPr id="237498089" name="Google Shape;8;n"/>
           <p:cNvSpPr txBox="1"/>
           <p:nvPr>
             <p:ph type="sldNum" idx="12"/>
@@ -1414,7 +1417,7 @@
       </p:grpSpPr>
       <p:sp>
         <p:nvSpPr>
-          <p:cNvPr id="467553153" name="Google Shape;37;g3d81e7673dc_0_0:notes"/>
+          <p:cNvPr id="577101434" name="Google Shape;37;g3d81e7673dc_0_0:notes"/>
           <p:cNvSpPr txBox="1"/>
           <p:nvPr>
             <p:ph type="body" idx="1"/>
@@ -1451,7 +1454,7 @@
       </p:sp>
       <p:sp>
         <p:nvSpPr>
-          <p:cNvPr id="1051826521" name="Google Shape;38;g3d81e7673dc_0_0:notes"/>
+          <p:cNvPr id="813241475" name="Google Shape;38;g3d81e7673dc_0_0:notes"/>
           <p:cNvSpPr/>
           <p:nvPr>
             <p:ph type="sldImg" idx="2"/>
@@ -1515,7 +1518,7 @@
       </p:grpSpPr>
       <p:sp>
         <p:nvSpPr>
-          <p:cNvPr id="989946341" name="Slide Image Placeholder 1"/>
+          <p:cNvPr id="1894794386" name="Slide Image Placeholder 1"/>
           <p:cNvSpPr>
             <a:spLocks noGrp="1"/>
           </p:cNvSpPr>
@@ -1527,7 +1530,7 @@
       </p:sp>
       <p:sp>
         <p:nvSpPr>
-          <p:cNvPr id="692455672" name="Notes Placeholder 2"/>
+          <p:cNvPr id="16290091" name="Notes Placeholder 2"/>
           <p:cNvSpPr>
             <a:spLocks noGrp="1"/>
           </p:cNvSpPr>
@@ -1549,7 +1552,7 @@
       </p:sp>
       <p:sp>
         <p:nvSpPr>
-          <p:cNvPr id="911514939" name="Slide Number Placeholder 3"/>
+          <p:cNvPr id="85331673" name="Slide Number Placeholder 3"/>
           <p:cNvSpPr>
             <a:spLocks noGrp="1"/>
           </p:cNvSpPr>
@@ -1568,6 +1571,219 @@
 </file>
 
 <file path=ppt/notesSlides/notesSlide11.xml><?xml version="1.0" encoding="utf-8"?>
+<p:notes xmlns:a="http://schemas.openxmlformats.org/drawingml/2006/main" xmlns:r="http://schemas.openxmlformats.org/officeDocument/2006/relationships" xmlns:p="http://schemas.openxmlformats.org/presentationml/2006/main" xmlns:m="http://schemas.openxmlformats.org/officeDocument/2006/math" xmlns:w="http://schemas.openxmlformats.org/wordprocessingml/2006/main">
+  <p:cSld name="">
+    <p:spTree>
+      <p:nvGrpSpPr>
+        <p:cNvPr id="1" name=""/>
+        <p:cNvGrpSpPr/>
+        <p:nvPr/>
+      </p:nvGrpSpPr>
+      <p:grpSpPr bwMode="auto">
+        <a:xfrm>
+          <a:off x="0" y="0"/>
+          <a:ext cx="0" cy="0"/>
+          <a:chOff x="0" y="0"/>
+          <a:chExt cx="0" cy="0"/>
+        </a:xfrm>
+      </p:grpSpPr>
+      <p:sp>
+        <p:nvSpPr>
+          <p:cNvPr id="304823062" name="Slide Image Placeholder 1"/>
+          <p:cNvSpPr>
+            <a:spLocks noGrp="1"/>
+          </p:cNvSpPr>
+          <p:nvPr>
+            <p:ph type="sldImg" idx="3"/>
+          </p:nvPr>
+        </p:nvSpPr>
+        <p:spPr bwMode="auto"/>
+      </p:sp>
+      <p:sp>
+        <p:nvSpPr>
+          <p:cNvPr id="1384529038" name="Notes Placeholder 2"/>
+          <p:cNvSpPr>
+            <a:spLocks noGrp="1"/>
+          </p:cNvSpPr>
+          <p:nvPr>
+            <p:ph type="body" idx="1"/>
+          </p:nvPr>
+        </p:nvSpPr>
+        <p:spPr bwMode="auto"/>
+        <p:txBody>
+          <a:bodyPr/>
+          <a:lstStyle/>
+          <a:p>
+            <a:pPr>
+              <a:defRPr/>
+            </a:pPr>
+            <a:endParaRPr/>
+          </a:p>
+        </p:txBody>
+      </p:sp>
+      <p:sp>
+        <p:nvSpPr>
+          <p:cNvPr id="1455987789" name="Slide Number Placeholder 3"/>
+          <p:cNvSpPr>
+            <a:spLocks noGrp="1"/>
+          </p:cNvSpPr>
+          <p:nvPr>
+            <p:ph type="sldNum" idx="12"/>
+          </p:nvPr>
+        </p:nvSpPr>
+        <p:spPr bwMode="auto"/>
+      </p:sp>
+    </p:spTree>
+  </p:cSld>
+  <p:clrMapOvr>
+    <a:masterClrMapping/>
+  </p:clrMapOvr>
+</p:notes>
+</file>
+
+<file path=ppt/notesSlides/notesSlide12.xml><?xml version="1.0" encoding="utf-8"?>
+<p:notes xmlns:a="http://schemas.openxmlformats.org/drawingml/2006/main" xmlns:r="http://schemas.openxmlformats.org/officeDocument/2006/relationships" xmlns:p="http://schemas.openxmlformats.org/presentationml/2006/main" xmlns:m="http://schemas.openxmlformats.org/officeDocument/2006/math" xmlns:w="http://schemas.openxmlformats.org/wordprocessingml/2006/main">
+  <p:cSld name="">
+    <p:spTree>
+      <p:nvGrpSpPr>
+        <p:cNvPr id="1" name=""/>
+        <p:cNvGrpSpPr/>
+        <p:nvPr/>
+      </p:nvGrpSpPr>
+      <p:grpSpPr bwMode="auto">
+        <a:xfrm>
+          <a:off x="0" y="0"/>
+          <a:ext cx="0" cy="0"/>
+          <a:chOff x="0" y="0"/>
+          <a:chExt cx="0" cy="0"/>
+        </a:xfrm>
+      </p:grpSpPr>
+      <p:sp>
+        <p:nvSpPr>
+          <p:cNvPr id="465115005" name="Slide Image Placeholder 1"/>
+          <p:cNvSpPr>
+            <a:spLocks noGrp="1"/>
+          </p:cNvSpPr>
+          <p:nvPr>
+            <p:ph type="sldImg" idx="3"/>
+          </p:nvPr>
+        </p:nvSpPr>
+        <p:spPr bwMode="auto"/>
+      </p:sp>
+      <p:sp>
+        <p:nvSpPr>
+          <p:cNvPr id="233114080" name="Notes Placeholder 2"/>
+          <p:cNvSpPr>
+            <a:spLocks noGrp="1"/>
+          </p:cNvSpPr>
+          <p:nvPr>
+            <p:ph type="body" idx="1"/>
+          </p:nvPr>
+        </p:nvSpPr>
+        <p:spPr bwMode="auto"/>
+        <p:txBody>
+          <a:bodyPr/>
+          <a:lstStyle/>
+          <a:p>
+            <a:pPr>
+              <a:defRPr/>
+            </a:pPr>
+            <a:endParaRPr/>
+          </a:p>
+        </p:txBody>
+      </p:sp>
+      <p:sp>
+        <p:nvSpPr>
+          <p:cNvPr id="624384720" name="Slide Number Placeholder 3"/>
+          <p:cNvSpPr>
+            <a:spLocks noGrp="1"/>
+          </p:cNvSpPr>
+          <p:nvPr>
+            <p:ph type="sldNum" idx="12"/>
+          </p:nvPr>
+        </p:nvSpPr>
+        <p:spPr bwMode="auto"/>
+      </p:sp>
+    </p:spTree>
+  </p:cSld>
+  <p:clrMapOvr>
+    <a:masterClrMapping/>
+  </p:clrMapOvr>
+</p:notes>
+</file>
+
+<file path=ppt/notesSlides/notesSlide13.xml><?xml version="1.0" encoding="utf-8"?>
+<p:notes xmlns:a="http://schemas.openxmlformats.org/drawingml/2006/main" xmlns:r="http://schemas.openxmlformats.org/officeDocument/2006/relationships" xmlns:p="http://schemas.openxmlformats.org/presentationml/2006/main" xmlns:m="http://schemas.openxmlformats.org/officeDocument/2006/math" xmlns:w="http://schemas.openxmlformats.org/wordprocessingml/2006/main">
+  <p:cSld name="">
+    <p:spTree>
+      <p:nvGrpSpPr>
+        <p:cNvPr id="1" name=""/>
+        <p:cNvGrpSpPr/>
+        <p:nvPr/>
+      </p:nvGrpSpPr>
+      <p:grpSpPr bwMode="auto">
+        <a:xfrm>
+          <a:off x="0" y="0"/>
+          <a:ext cx="0" cy="0"/>
+          <a:chOff x="0" y="0"/>
+          <a:chExt cx="0" cy="0"/>
+        </a:xfrm>
+      </p:grpSpPr>
+      <p:sp>
+        <p:nvSpPr>
+          <p:cNvPr id="1303613446" name="Slide Image Placeholder 1"/>
+          <p:cNvSpPr>
+            <a:spLocks noGrp="1"/>
+          </p:cNvSpPr>
+          <p:nvPr>
+            <p:ph type="sldImg" idx="3"/>
+          </p:nvPr>
+        </p:nvSpPr>
+        <p:spPr bwMode="auto"/>
+      </p:sp>
+      <p:sp>
+        <p:nvSpPr>
+          <p:cNvPr id="855756392" name="Notes Placeholder 2"/>
+          <p:cNvSpPr>
+            <a:spLocks noGrp="1"/>
+          </p:cNvSpPr>
+          <p:nvPr>
+            <p:ph type="body" idx="1"/>
+          </p:nvPr>
+        </p:nvSpPr>
+        <p:spPr bwMode="auto"/>
+        <p:txBody>
+          <a:bodyPr/>
+          <a:lstStyle/>
+          <a:p>
+            <a:pPr>
+              <a:defRPr/>
+            </a:pPr>
+            <a:endParaRPr/>
+          </a:p>
+        </p:txBody>
+      </p:sp>
+      <p:sp>
+        <p:nvSpPr>
+          <p:cNvPr id="1313722139" name="Slide Number Placeholder 3"/>
+          <p:cNvSpPr>
+            <a:spLocks noGrp="1"/>
+          </p:cNvSpPr>
+          <p:nvPr>
+            <p:ph type="sldNum" idx="12"/>
+          </p:nvPr>
+        </p:nvSpPr>
+        <p:spPr bwMode="auto"/>
+      </p:sp>
+    </p:spTree>
+  </p:cSld>
+  <p:clrMapOvr>
+    <a:masterClrMapping/>
+  </p:clrMapOvr>
+</p:notes>
+</file>
+
+<file path=ppt/notesSlides/notesSlide14.xml><?xml version="1.0" encoding="utf-8"?>
 <p:notes xmlns:a="http://schemas.openxmlformats.org/drawingml/2006/main" xmlns:r="http://schemas.openxmlformats.org/officeDocument/2006/relationships" xmlns:p="http://schemas.openxmlformats.org/presentationml/2006/main" xmlns:m="http://schemas.openxmlformats.org/officeDocument/2006/math" xmlns:w="http://schemas.openxmlformats.org/wordprocessingml/2006/main" showMasterPhAnim="0" showMasterSp="0">
   <p:cSld name="">
     <p:spTree>
@@ -1586,7 +1802,7 @@
       </p:grpSpPr>
       <p:sp>
         <p:nvSpPr>
-          <p:cNvPr id="1063788071" name="Google Shape;44;p3:notes"/>
+          <p:cNvPr id="703158739" name="Google Shape;44;p3:notes"/>
           <p:cNvSpPr/>
           <p:nvPr>
             <p:ph type="sldImg" idx="2"/>
@@ -1635,7 +1851,7 @@
       </p:sp>
       <p:sp>
         <p:nvSpPr>
-          <p:cNvPr id="2688835" name="Google Shape;45;p3:notes"/>
+          <p:cNvPr id="1497314241" name="Google Shape;45;p3:notes"/>
           <p:cNvSpPr txBox="1"/>
           <p:nvPr>
             <p:ph type="body" idx="1"/>
@@ -1655,7 +1871,7 @@
           </a:ln>
         </p:spPr>
         <p:txBody>
-          <a:bodyPr spcFirstLastPara="1" wrap="square" lIns="91425" tIns="45700" rIns="91425" bIns="45700" anchor="t" anchorCtr="0">
+          <a:bodyPr spcFirstLastPara="1" wrap="square" lIns="91424" tIns="45699" rIns="91424" bIns="45699" anchor="t" anchorCtr="0">
             <a:noAutofit/>
           </a:bodyPr>
           <a:lstStyle/>
@@ -1676,7 +1892,7 @@
       </p:sp>
       <p:sp>
         <p:nvSpPr>
-          <p:cNvPr id="1414509671" name="Google Shape;46;p3:notes"/>
+          <p:cNvPr id="2117367991" name="Google Shape;46;p3:notes"/>
           <p:cNvSpPr txBox="1"/>
           <p:nvPr>
             <p:ph type="sldNum" idx="12"/>
@@ -1684,8 +1900,8 @@
         </p:nvSpPr>
         <p:spPr bwMode="auto">
           <a:xfrm>
-            <a:off x="3884613" y="8685213"/>
-            <a:ext cx="2971800" cy="458787"/>
+            <a:off x="3884612" y="8685212"/>
+            <a:ext cx="2971800" cy="458786"/>
           </a:xfrm>
           <a:prstGeom prst="rect">
             <a:avLst/>
@@ -1696,7 +1912,7 @@
           </a:ln>
         </p:spPr>
         <p:txBody>
-          <a:bodyPr spcFirstLastPara="1" wrap="square" lIns="91425" tIns="45700" rIns="91425" bIns="45700" anchor="b" anchorCtr="0">
+          <a:bodyPr spcFirstLastPara="1" wrap="square" lIns="91424" tIns="45699" rIns="91424" bIns="45699" anchor="b" anchorCtr="0">
             <a:noAutofit/>
           </a:bodyPr>
           <a:lstStyle/>
@@ -1711,7 +1927,7 @@
               <a:buNone/>
               <a:defRPr/>
             </a:pPr>
-            <a:fld id="{00000000-1234-1234-1234-123412341234}" type="slidenum">
+            <a:fld id="{422466E8-E5BF-653A-C381-F3ED8EB6450D}" type="slidenum">
               <a:rPr lang="en-US"/>
               <a:t>‹#›</a:t>
             </a:fld>
@@ -1727,7 +1943,7 @@
 </p:notes>
 </file>
 
-<file path=ppt/notesSlides/notesSlide12.xml><?xml version="1.0" encoding="utf-8"?>
+<file path=ppt/notesSlides/notesSlide15.xml><?xml version="1.0" encoding="utf-8"?>
 <p:notes xmlns:a="http://schemas.openxmlformats.org/drawingml/2006/main" xmlns:r="http://schemas.openxmlformats.org/officeDocument/2006/relationships" xmlns:p="http://schemas.openxmlformats.org/presentationml/2006/main" xmlns:m="http://schemas.openxmlformats.org/officeDocument/2006/math" xmlns:w="http://schemas.openxmlformats.org/wordprocessingml/2006/main" showMasterPhAnim="0" showMasterSp="0">
   <p:cSld name="">
     <p:spTree>
@@ -1746,7 +1962,7 @@
       </p:grpSpPr>
       <p:sp>
         <p:nvSpPr>
-          <p:cNvPr id="287718923" name="Google Shape;224;p11:notes"/>
+          <p:cNvPr id="1846448852" name="Google Shape;224;p11:notes"/>
           <p:cNvSpPr/>
           <p:nvPr>
             <p:ph type="sldImg" idx="2"/>
@@ -1795,7 +2011,7 @@
       </p:sp>
       <p:sp>
         <p:nvSpPr>
-          <p:cNvPr id="372358961" name="Google Shape;225;p11:notes"/>
+          <p:cNvPr id="32882922" name="Google Shape;225;p11:notes"/>
           <p:cNvSpPr txBox="1"/>
           <p:nvPr>
             <p:ph type="body" idx="1"/>
@@ -1836,7 +2052,7 @@
       </p:sp>
       <p:sp>
         <p:nvSpPr>
-          <p:cNvPr id="1477779213" name="Google Shape;226;p11:notes"/>
+          <p:cNvPr id="1251951963" name="Google Shape;226;p11:notes"/>
           <p:cNvSpPr txBox="1"/>
           <p:nvPr>
             <p:ph type="sldNum" idx="12"/>
@@ -1887,7 +2103,7 @@
 </p:notes>
 </file>
 
-<file path=ppt/notesSlides/notesSlide13.xml><?xml version="1.0" encoding="utf-8"?>
+<file path=ppt/notesSlides/notesSlide16.xml><?xml version="1.0" encoding="utf-8"?>
 <p:notes xmlns:a="http://schemas.openxmlformats.org/drawingml/2006/main" xmlns:r="http://schemas.openxmlformats.org/officeDocument/2006/relationships" xmlns:p="http://schemas.openxmlformats.org/presentationml/2006/main" xmlns:m="http://schemas.openxmlformats.org/officeDocument/2006/math" xmlns:w="http://schemas.openxmlformats.org/wordprocessingml/2006/main" showMasterPhAnim="0" showMasterSp="0">
   <p:cSld name="">
     <p:spTree>
@@ -1906,7 +2122,7 @@
       </p:grpSpPr>
       <p:sp>
         <p:nvSpPr>
-          <p:cNvPr id="562840682" name="Google Shape;276;p13:notes"/>
+          <p:cNvPr id="677358629" name="Google Shape;276;p13:notes"/>
           <p:cNvSpPr/>
           <p:nvPr>
             <p:ph type="sldImg" idx="2"/>
@@ -1955,7 +2171,7 @@
       </p:sp>
       <p:sp>
         <p:nvSpPr>
-          <p:cNvPr id="1072463284" name="Google Shape;277;p13:notes"/>
+          <p:cNvPr id="310406661" name="Google Shape;277;p13:notes"/>
           <p:cNvSpPr txBox="1"/>
           <p:nvPr>
             <p:ph type="body" idx="1"/>
@@ -1996,7 +2212,7 @@
       </p:sp>
       <p:sp>
         <p:nvSpPr>
-          <p:cNvPr id="1216389466" name="Google Shape;278;p13:notes"/>
+          <p:cNvPr id="653551330" name="Google Shape;278;p13:notes"/>
           <p:cNvSpPr txBox="1"/>
           <p:nvPr>
             <p:ph type="sldNum" idx="12"/>
@@ -2047,7 +2263,7 @@
 </p:notes>
 </file>
 
-<file path=ppt/notesSlides/notesSlide14.xml><?xml version="1.0" encoding="utf-8"?>
+<file path=ppt/notesSlides/notesSlide17.xml><?xml version="1.0" encoding="utf-8"?>
 <p:notes xmlns:a="http://schemas.openxmlformats.org/drawingml/2006/main" xmlns:r="http://schemas.openxmlformats.org/officeDocument/2006/relationships" xmlns:p="http://schemas.openxmlformats.org/presentationml/2006/main" xmlns:m="http://schemas.openxmlformats.org/officeDocument/2006/math" xmlns:w="http://schemas.openxmlformats.org/wordprocessingml/2006/main" showMasterPhAnim="0" showMasterSp="0">
   <p:cSld name="">
     <p:spTree>
@@ -2066,7 +2282,7 @@
       </p:grpSpPr>
       <p:sp>
         <p:nvSpPr>
-          <p:cNvPr id="1592875427" name="Google Shape;306;g3d81e7673dc_0_110:notes"/>
+          <p:cNvPr id="1224822974" name="Google Shape;306;g3d81e7673dc_0_110:notes"/>
           <p:cNvSpPr txBox="1"/>
           <p:nvPr>
             <p:ph type="body" idx="1"/>
@@ -2103,7 +2319,7 @@
       </p:sp>
       <p:sp>
         <p:nvSpPr>
-          <p:cNvPr id="1521468991" name="Google Shape;307;g3d81e7673dc_0_110:notes"/>
+          <p:cNvPr id="1829250660" name="Google Shape;307;g3d81e7673dc_0_110:notes"/>
           <p:cNvSpPr/>
           <p:nvPr>
             <p:ph type="sldImg" idx="2"/>
@@ -2167,7 +2383,7 @@
       </p:grpSpPr>
       <p:sp>
         <p:nvSpPr>
-          <p:cNvPr id="1454949636" name="Slide Image Placeholder 1"/>
+          <p:cNvPr id="96190620" name="Slide Image Placeholder 1"/>
           <p:cNvSpPr>
             <a:spLocks noGrp="1"/>
           </p:cNvSpPr>
@@ -2179,7 +2395,7 @@
       </p:sp>
       <p:sp>
         <p:nvSpPr>
-          <p:cNvPr id="1345646728" name="Notes Placeholder 2"/>
+          <p:cNvPr id="928303608" name="Notes Placeholder 2"/>
           <p:cNvSpPr>
             <a:spLocks noGrp="1"/>
           </p:cNvSpPr>
@@ -2201,7 +2417,7 @@
       </p:sp>
       <p:sp>
         <p:nvSpPr>
-          <p:cNvPr id="840451870" name="Slide Number Placeholder 3"/>
+          <p:cNvPr id="1220821774" name="Slide Number Placeholder 3"/>
           <p:cNvSpPr>
             <a:spLocks noGrp="1"/>
           </p:cNvSpPr>
@@ -2238,7 +2454,7 @@
       </p:grpSpPr>
       <p:sp>
         <p:nvSpPr>
-          <p:cNvPr id="1775101114" name="Slide Image Placeholder 1"/>
+          <p:cNvPr id="1974551814" name="Slide Image Placeholder 1"/>
           <p:cNvSpPr>
             <a:spLocks noGrp="1"/>
           </p:cNvSpPr>
@@ -2250,7 +2466,7 @@
       </p:sp>
       <p:sp>
         <p:nvSpPr>
-          <p:cNvPr id="855969868" name="Notes Placeholder 2"/>
+          <p:cNvPr id="2006316835" name="Notes Placeholder 2"/>
           <p:cNvSpPr>
             <a:spLocks noGrp="1"/>
           </p:cNvSpPr>
@@ -2272,7 +2488,7 @@
       </p:sp>
       <p:sp>
         <p:nvSpPr>
-          <p:cNvPr id="741193713" name="Slide Number Placeholder 3"/>
+          <p:cNvPr id="2116684613" name="Slide Number Placeholder 3"/>
           <p:cNvSpPr>
             <a:spLocks noGrp="1"/>
           </p:cNvSpPr>
@@ -2309,7 +2525,7 @@
       </p:grpSpPr>
       <p:sp>
         <p:nvSpPr>
-          <p:cNvPr id="535195243" name="Slide Image Placeholder 1"/>
+          <p:cNvPr id="435822024" name="Slide Image Placeholder 1"/>
           <p:cNvSpPr>
             <a:spLocks noGrp="1"/>
           </p:cNvSpPr>
@@ -2321,7 +2537,7 @@
       </p:sp>
       <p:sp>
         <p:nvSpPr>
-          <p:cNvPr id="233415265" name="Notes Placeholder 2"/>
+          <p:cNvPr id="15550331" name="Notes Placeholder 2"/>
           <p:cNvSpPr>
             <a:spLocks noGrp="1"/>
           </p:cNvSpPr>
@@ -2343,7 +2559,7 @@
       </p:sp>
       <p:sp>
         <p:nvSpPr>
-          <p:cNvPr id="715037632" name="Slide Number Placeholder 3"/>
+          <p:cNvPr id="856331748" name="Slide Number Placeholder 3"/>
           <p:cNvSpPr>
             <a:spLocks noGrp="1"/>
           </p:cNvSpPr>
@@ -2380,7 +2596,7 @@
       </p:grpSpPr>
       <p:sp>
         <p:nvSpPr>
-          <p:cNvPr id="1040365857" name="Slide Image Placeholder 1"/>
+          <p:cNvPr id="11474105" name="Slide Image Placeholder 1"/>
           <p:cNvSpPr>
             <a:spLocks noGrp="1"/>
           </p:cNvSpPr>
@@ -2392,7 +2608,7 @@
       </p:sp>
       <p:sp>
         <p:nvSpPr>
-          <p:cNvPr id="1785640525" name="Notes Placeholder 2"/>
+          <p:cNvPr id="1387061480" name="Notes Placeholder 2"/>
           <p:cNvSpPr>
             <a:spLocks noGrp="1"/>
           </p:cNvSpPr>
@@ -2414,7 +2630,7 @@
       </p:sp>
       <p:sp>
         <p:nvSpPr>
-          <p:cNvPr id="2035784862" name="Slide Number Placeholder 3"/>
+          <p:cNvPr id="1320721796" name="Slide Number Placeholder 3"/>
           <p:cNvSpPr>
             <a:spLocks noGrp="1"/>
           </p:cNvSpPr>
@@ -2451,7 +2667,7 @@
       </p:grpSpPr>
       <p:sp>
         <p:nvSpPr>
-          <p:cNvPr id="1011476833" name="Slide Image Placeholder 1"/>
+          <p:cNvPr id="50426262" name="Slide Image Placeholder 1"/>
           <p:cNvSpPr>
             <a:spLocks noGrp="1"/>
           </p:cNvSpPr>
@@ -2463,7 +2679,7 @@
       </p:sp>
       <p:sp>
         <p:nvSpPr>
-          <p:cNvPr id="919508467" name="Notes Placeholder 2"/>
+          <p:cNvPr id="1591334976" name="Notes Placeholder 2"/>
           <p:cNvSpPr>
             <a:spLocks noGrp="1"/>
           </p:cNvSpPr>
@@ -2485,7 +2701,7 @@
       </p:sp>
       <p:sp>
         <p:nvSpPr>
-          <p:cNvPr id="1814667540" name="Slide Number Placeholder 3"/>
+          <p:cNvPr id="610219608" name="Slide Number Placeholder 3"/>
           <p:cNvSpPr>
             <a:spLocks noGrp="1"/>
           </p:cNvSpPr>
@@ -2522,7 +2738,7 @@
       </p:grpSpPr>
       <p:sp>
         <p:nvSpPr>
-          <p:cNvPr id="885102449" name="Slide Image Placeholder 1"/>
+          <p:cNvPr id="1715419591" name="Slide Image Placeholder 1"/>
           <p:cNvSpPr>
             <a:spLocks noGrp="1"/>
           </p:cNvSpPr>
@@ -2534,7 +2750,7 @@
       </p:sp>
       <p:sp>
         <p:nvSpPr>
-          <p:cNvPr id="1116360654" name="Notes Placeholder 2"/>
+          <p:cNvPr id="1137135269" name="Notes Placeholder 2"/>
           <p:cNvSpPr>
             <a:spLocks noGrp="1"/>
           </p:cNvSpPr>
@@ -2556,7 +2772,7 @@
       </p:sp>
       <p:sp>
         <p:nvSpPr>
-          <p:cNvPr id="498570506" name="Slide Number Placeholder 3"/>
+          <p:cNvPr id="1836255810" name="Slide Number Placeholder 3"/>
           <p:cNvSpPr>
             <a:spLocks noGrp="1"/>
           </p:cNvSpPr>
@@ -2593,7 +2809,7 @@
       </p:grpSpPr>
       <p:sp>
         <p:nvSpPr>
-          <p:cNvPr id="734393223" name="Slide Image Placeholder 1"/>
+          <p:cNvPr id="185088027" name="Slide Image Placeholder 1"/>
           <p:cNvSpPr>
             <a:spLocks noGrp="1"/>
           </p:cNvSpPr>
@@ -2605,7 +2821,7 @@
       </p:sp>
       <p:sp>
         <p:nvSpPr>
-          <p:cNvPr id="1485599751" name="Notes Placeholder 2"/>
+          <p:cNvPr id="2065629713" name="Notes Placeholder 2"/>
           <p:cNvSpPr>
             <a:spLocks noGrp="1"/>
           </p:cNvSpPr>
@@ -2627,7 +2843,7 @@
       </p:sp>
       <p:sp>
         <p:nvSpPr>
-          <p:cNvPr id="482544607" name="Slide Number Placeholder 3"/>
+          <p:cNvPr id="312085989" name="Slide Number Placeholder 3"/>
           <p:cNvSpPr>
             <a:spLocks noGrp="1"/>
           </p:cNvSpPr>
@@ -2664,7 +2880,7 @@
       </p:grpSpPr>
       <p:sp>
         <p:nvSpPr>
-          <p:cNvPr id="56081419" name="Slide Image Placeholder 1"/>
+          <p:cNvPr id="941554970" name="Slide Image Placeholder 1"/>
           <p:cNvSpPr>
             <a:spLocks noGrp="1"/>
           </p:cNvSpPr>
@@ -2676,7 +2892,7 @@
       </p:sp>
       <p:sp>
         <p:nvSpPr>
-          <p:cNvPr id="1981756883" name="Notes Placeholder 2"/>
+          <p:cNvPr id="1163041582" name="Notes Placeholder 2"/>
           <p:cNvSpPr>
             <a:spLocks noGrp="1"/>
           </p:cNvSpPr>
@@ -2698,7 +2914,7 @@
       </p:sp>
       <p:sp>
         <p:nvSpPr>
-          <p:cNvPr id="1755239241" name="Slide Number Placeholder 3"/>
+          <p:cNvPr id="1264402705" name="Slide Number Placeholder 3"/>
           <p:cNvSpPr>
             <a:spLocks noGrp="1"/>
           </p:cNvSpPr>
@@ -2777,7 +2993,7 @@
       </p:grpSpPr>
       <p:sp>
         <p:nvSpPr>
-          <p:cNvPr id="832290106" name="Google Shape;12;p3"/>
+          <p:cNvPr id="961178239" name="Google Shape;12;p3"/>
           <p:cNvSpPr txBox="1"/>
           <p:nvPr>
             <p:ph type="ctrTitle"/>
@@ -2922,7 +3138,7 @@
       </p:sp>
       <p:sp>
         <p:nvSpPr>
-          <p:cNvPr id="1885294531" name="Google Shape;13;p3"/>
+          <p:cNvPr id="1606170208" name="Google Shape;13;p3"/>
           <p:cNvSpPr txBox="1"/>
           <p:nvPr>
             <p:ph type="subTitle" idx="1"/>
@@ -3114,7 +3330,7 @@
       </p:sp>
       <p:sp>
         <p:nvSpPr>
-          <p:cNvPr id="900233619" name="Google Shape;14;p3"/>
+          <p:cNvPr id="445299952" name="Google Shape;14;p3"/>
           <p:cNvSpPr txBox="1"/>
           <p:nvPr>
             <p:ph type="body" idx="2"/>
@@ -3322,7 +3538,7 @@
       </p:sp>
       <p:sp>
         <p:nvSpPr>
-          <p:cNvPr id="67584568" name="Google Shape;15;p3"/>
+          <p:cNvPr id="388322394" name="Google Shape;15;p3"/>
           <p:cNvSpPr txBox="1"/>
           <p:nvPr>
             <p:ph type="body" idx="3"/>
@@ -3514,7 +3730,7 @@
       </p:sp>
       <p:pic>
         <p:nvPicPr>
-          <p:cNvPr id="1877694212" name="Google Shape;16;p3" descr="\\ad.pu.ru\RECTORAT\УСО\ДИЗАЙНЕРЫ\300 лет СПбГУ\300 лет логотипы все варианты\Logo 300 let classic white.png"/>
+          <p:cNvPr id="540414763" name="Google Shape;16;p3" descr="\\ad.pu.ru\RECTORAT\УСО\ДИЗАЙНЕРЫ\300 лет СПбГУ\300 лет логотипы все варианты\Logo 300 let classic white.png"/>
           <p:cNvPicPr/>
           <p:nvPr/>
         </p:nvPicPr>
@@ -3566,7 +3782,7 @@
       </p:grpSpPr>
       <p:pic>
         <p:nvPicPr>
-          <p:cNvPr id="1422323614" name="Google Shape;18;p4"/>
+          <p:cNvPr id="546011498" name="Google Shape;18;p4"/>
           <p:cNvPicPr/>
           <p:nvPr/>
         </p:nvPicPr>
@@ -3593,7 +3809,7 @@
       </p:pic>
       <p:sp>
         <p:nvSpPr>
-          <p:cNvPr id="945458401" name="Google Shape;19;p4"/>
+          <p:cNvPr id="170594963" name="Google Shape;19;p4"/>
           <p:cNvSpPr/>
           <p:nvPr/>
         </p:nvSpPr>
@@ -3641,7 +3857,7 @@
       </p:sp>
       <p:grpSp>
         <p:nvGrpSpPr>
-          <p:cNvPr id="926545948" name="Google Shape;20;p4"/>
+          <p:cNvPr id="407755037" name="Google Shape;20;p4"/>
           <p:cNvGrpSpPr/>
           <p:nvPr/>
         </p:nvGrpSpPr>
@@ -4196,7 +4412,7 @@
       </p:grpSp>
       <p:sp>
         <p:nvSpPr>
-          <p:cNvPr id="1567940037" name="Google Shape;31;p4"/>
+          <p:cNvPr id="1569145452" name="Google Shape;31;p4"/>
           <p:cNvSpPr txBox="1"/>
           <p:nvPr>
             <p:ph type="body" idx="1"/>
@@ -4404,7 +4620,7 @@
       </p:sp>
       <p:sp>
         <p:nvSpPr>
-          <p:cNvPr id="871918032" name="Google Shape;32;p4"/>
+          <p:cNvPr id="2101672656" name="Google Shape;32;p4"/>
           <p:cNvSpPr txBox="1"/>
           <p:nvPr/>
         </p:nvSpPr>
@@ -4469,7 +4685,7 @@
       </p:sp>
       <p:pic>
         <p:nvPicPr>
-          <p:cNvPr id="648509819" name="Google Shape;33;p4"/>
+          <p:cNvPr id="49268507" name="Google Shape;33;p4"/>
           <p:cNvPicPr/>
           <p:nvPr/>
         </p:nvPicPr>
@@ -4496,7 +4712,7 @@
       </p:pic>
       <p:sp>
         <p:nvSpPr>
-          <p:cNvPr id="1224308659" name="Google Shape;34;p4"/>
+          <p:cNvPr id="398796040" name="Google Shape;34;p4"/>
           <p:cNvSpPr txBox="1"/>
           <p:nvPr>
             <p:ph type="body" idx="2"/>
@@ -4704,7 +4920,7 @@
       </p:sp>
       <p:sp>
         <p:nvSpPr>
-          <p:cNvPr id="606277701" name="Google Shape;35;p4"/>
+          <p:cNvPr id="860537215" name="Google Shape;35;p4"/>
           <p:cNvSpPr/>
           <p:nvPr/>
         </p:nvSpPr>
@@ -5470,7 +5686,7 @@
       </p:grpSpPr>
       <p:sp>
         <p:nvSpPr>
-          <p:cNvPr id="634495206" name="Google Shape;40;p5"/>
+          <p:cNvPr id="494978986" name="Google Shape;40;p5"/>
           <p:cNvSpPr txBox="1"/>
           <p:nvPr>
             <p:ph type="ctrTitle"/>
@@ -5555,7 +5771,7 @@
       </p:sp>
       <p:sp>
         <p:nvSpPr>
-          <p:cNvPr id="1309950032" name="Google Shape;41;p5"/>
+          <p:cNvPr id="81019921" name="Google Shape;41;p5"/>
           <p:cNvSpPr txBox="1"/>
           <p:nvPr>
             <p:ph type="body" idx="2"/>
@@ -5678,7 +5894,7 @@
       </p:sp>
       <p:sp>
         <p:nvSpPr>
-          <p:cNvPr id="1070035386" name="Google Shape;42;p5"/>
+          <p:cNvPr id="526987999" name="Google Shape;42;p5"/>
           <p:cNvSpPr txBox="1"/>
           <p:nvPr>
             <p:ph type="body" idx="3"/>
@@ -5770,7 +5986,7 @@
       </p:grpSpPr>
       <p:pic>
         <p:nvPicPr>
-          <p:cNvPr id="121966309" name="Picture 1" descr="image12.png"/>
+          <p:cNvPr id="1763382726" name="Picture 1" descr="image12.png"/>
           <p:cNvPicPr>
             <a:picLocks noChangeAspect="1"/>
           </p:cNvPicPr>
@@ -5792,7 +6008,7 @@
       </p:pic>
       <p:sp>
         <p:nvSpPr>
-          <p:cNvPr id="546475986" name="Rectangle 2"/>
+          <p:cNvPr id="2117141450" name="Rectangle 2"/>
           <p:cNvSpPr/>
           <p:nvPr/>
         </p:nvSpPr>
@@ -5827,7 +6043,7 @@
       </p:sp>
       <p:sp>
         <p:nvSpPr>
-          <p:cNvPr id="775875140" name="TextBox 3"/>
+          <p:cNvPr id="1705417974" name="TextBox 3"/>
           <p:cNvSpPr txBox="1"/>
           <p:nvPr/>
         </p:nvSpPr>
@@ -5874,7 +6090,7 @@
       </p:sp>
       <p:sp>
         <p:nvSpPr>
-          <p:cNvPr id="2013004054" name="TextBox 4"/>
+          <p:cNvPr id="632945605" name="TextBox 4"/>
           <p:cNvSpPr txBox="1"/>
           <p:nvPr/>
         </p:nvSpPr>
@@ -5950,7 +6166,7 @@
       </p:sp>
       <p:sp>
         <p:nvSpPr>
-          <p:cNvPr id="1355156706" name="Rectangle 5"/>
+          <p:cNvPr id="1238395502" name="Rectangle 5"/>
           <p:cNvSpPr/>
           <p:nvPr/>
         </p:nvSpPr>
@@ -5985,7 +6201,7 @@
       </p:sp>
       <p:pic>
         <p:nvPicPr>
-          <p:cNvPr id="223958946" name=""/>
+          <p:cNvPr id="1165037193" name=""/>
           <p:cNvPicPr>
             <a:picLocks noChangeAspect="1"/>
           </p:cNvPicPr>
@@ -6007,7 +6223,7 @@
       </p:pic>
       <p:sp>
         <p:nvSpPr>
-          <p:cNvPr id="2132413112" name=""/>
+          <p:cNvPr id="130886670" name=""/>
           <p:cNvSpPr txBox="1"/>
           <p:nvPr/>
         </p:nvSpPr>
@@ -6119,15 +6335,14 @@
       </p:grpSpPr>
       <p:pic>
         <p:nvPicPr>
-          <p:cNvPr id="494317167" name="Google Shape;48;p6" descr="/home/claude/logo_300spbu.png"/>
-          <p:cNvPicPr/>
+          <p:cNvPr id="125575387" name="Picture 1" descr="image12.png"/>
+          <p:cNvPicPr>
+            <a:picLocks noChangeAspect="1"/>
+          </p:cNvPicPr>
           <p:nvPr/>
         </p:nvPicPr>
         <p:blipFill rotWithShape="1">
-          <a:blip r:embed="rId3">
-            <a:alphaModFix/>
-          </a:blip>
-          <a:srcRect l="0" t="0" r="0" b="0"/>
+          <a:blip r:embed="rId3"/>
           <a:stretch/>
         </p:blipFill>
         <p:spPr bwMode="auto">
@@ -6138,46 +6353,31 @@
           <a:prstGeom prst="rect">
             <a:avLst/>
           </a:prstGeom>
+        </p:spPr>
+      </p:pic>
+      <p:sp>
+        <p:nvSpPr>
+          <p:cNvPr id="1397227408" name="TextBox 3"/>
+          <p:cNvSpPr txBox="1"/>
+          <p:nvPr/>
+        </p:nvSpPr>
+        <p:spPr bwMode="auto">
+          <a:xfrm>
+            <a:off x="8641080" y="4800600"/>
+            <a:ext cx="365760" cy="228600"/>
+          </a:xfrm>
+          <a:prstGeom prst="rect">
+            <a:avLst/>
+          </a:prstGeom>
           <a:noFill/>
-          <a:ln>
-            <a:noFill/>
-          </a:ln>
-        </p:spPr>
-      </p:pic>
-      <p:sp>
-        <p:nvSpPr>
-          <p:cNvPr id="1461693437" name="Google Shape;49;p6"/>
-          <p:cNvSpPr/>
-          <p:nvPr/>
-        </p:nvSpPr>
-        <p:spPr bwMode="auto">
-          <a:xfrm>
-            <a:off x="8686800" y="4846320"/>
-            <a:ext cx="274320" cy="182880"/>
-          </a:xfrm>
-          <a:prstGeom prst="rect">
-            <a:avLst/>
-          </a:prstGeom>
-          <a:solidFill>
-            <a:srgbClr val="C0272D"/>
-          </a:solidFill>
-          <a:ln w="12700" cap="flat" cmpd="sng">
-            <a:solidFill>
-              <a:srgbClr val="C0272D"/>
-            </a:solidFill>
-            <a:prstDash val="solid"/>
-            <a:round/>
-            <a:headEnd type="none" w="sm" len="sm"/>
-            <a:tailEnd type="none" w="sm" len="sm"/>
-          </a:ln>
         </p:spPr>
         <p:txBody>
-          <a:bodyPr spcFirstLastPara="1" wrap="square" lIns="91425" tIns="91425" rIns="91425" bIns="91425" anchor="ctr" anchorCtr="0">
+          <a:bodyPr wrap="square" lIns="91422" tIns="45698" rIns="91422" bIns="45698" anchor="ctr">
             <a:noAutofit/>
           </a:bodyPr>
           <a:lstStyle/>
           <a:p>
-            <a:pPr marL="0" lvl="0" indent="0" algn="l" rtl="0">
+            <a:pPr marL="0" marR="0" indent="0" algn="ctr" rtl="0">
               <a:spcBef>
                 <a:spcPts val="0"/>
               </a:spcBef>
@@ -6187,52 +6387,8 @@
               <a:buNone/>
               <a:defRPr/>
             </a:pPr>
-            <a:endParaRPr/>
-          </a:p>
-        </p:txBody>
-      </p:sp>
-      <p:sp>
-        <p:nvSpPr>
-          <p:cNvPr id="535328658" name="Google Shape;50;p6"/>
-          <p:cNvSpPr/>
-          <p:nvPr/>
-        </p:nvSpPr>
-        <p:spPr bwMode="auto">
-          <a:xfrm>
-            <a:off x="8641080" y="4800600"/>
-            <a:ext cx="365760" cy="228600"/>
-          </a:xfrm>
-          <a:prstGeom prst="rect">
-            <a:avLst/>
-          </a:prstGeom>
-          <a:noFill/>
-          <a:ln>
-            <a:noFill/>
-          </a:ln>
-        </p:spPr>
-        <p:txBody>
-          <a:bodyPr spcFirstLastPara="1" wrap="square" lIns="0" tIns="0" rIns="0" bIns="0" anchor="ctr" anchorCtr="0">
-            <a:noAutofit/>
-          </a:bodyPr>
-          <a:lstStyle/>
-          <a:p>
-            <a:pPr marL="0" marR="0" lvl="0" indent="0" algn="ctr" rtl="0">
-              <a:spcBef>
-                <a:spcPts val="0"/>
-              </a:spcBef>
-              <a:spcAft>
-                <a:spcPts val="0"/>
-              </a:spcAft>
-              <a:buClr>
-                <a:srgbClr val="FFFFFF"/>
-              </a:buClr>
-              <a:buSzPts val="1000"/>
-              <a:buFont typeface="Calibri"/>
-              <a:buNone/>
-              <a:defRPr/>
-            </a:pPr>
-            <a:r>
-              <a:rPr lang="ru-RU" sz="1000" b="1" i="0" u="none" strike="noStrike" cap="none">
+            <a:r>
+              <a:rPr sz="1000" b="1" i="0">
                 <a:solidFill>
                   <a:srgbClr val="FFFFFF"/>
                 </a:solidFill>
@@ -6240,40 +6396,30 @@
                 <a:ea typeface="Calibri"/>
                 <a:cs typeface="Calibri"/>
               </a:rPr>
-              <a:t>5</a:t>
-            </a:r>
-            <a:endParaRPr sz="1000" b="0" i="0" u="none" strike="noStrike" cap="none">
-              <a:solidFill>
-                <a:schemeClr val="dk1"/>
-              </a:solidFill>
-              <a:latin typeface="Calibri"/>
-              <a:ea typeface="Calibri"/>
-              <a:cs typeface="Calibri"/>
-            </a:endParaRPr>
+              <a:t>2</a:t>
+            </a:r>
+            <a:endParaRPr/>
           </a:p>
         </p:txBody>
       </p:sp>
       <p:sp>
         <p:nvSpPr>
-          <p:cNvPr id="651458084" name="Google Shape;51;p6"/>
-          <p:cNvSpPr/>
+          <p:cNvPr id="1981537801" name="TextBox 4"/>
+          <p:cNvSpPr txBox="1"/>
           <p:nvPr/>
         </p:nvSpPr>
         <p:spPr bwMode="auto">
           <a:xfrm flipH="0" flipV="0">
-            <a:off x="530351" y="182880"/>
-            <a:ext cx="6784848" cy="502920"/>
+            <a:off x="322228" y="182880"/>
+            <a:ext cx="7907368" cy="502920"/>
           </a:xfrm>
           <a:prstGeom prst="rect">
             <a:avLst/>
           </a:prstGeom>
           <a:noFill/>
-          <a:ln>
-            <a:noFill/>
-          </a:ln>
         </p:spPr>
         <p:txBody>
-          <a:bodyPr spcFirstLastPara="1" wrap="square" lIns="91423" tIns="45699" rIns="91423" bIns="45699" anchor="ctr" anchorCtr="0">
+          <a:bodyPr wrap="square" lIns="91422" tIns="45696" rIns="91422" bIns="45696" anchor="ctr">
             <a:noAutofit/>
           </a:bodyPr>
           <a:lstStyle/>
@@ -6294,7 +6440,7 @@
               <a:defRPr/>
             </a:pPr>
             <a:r>
-              <a:rPr lang="ru-RU" sz="2800" b="1" i="0" u="none" strike="noStrike" cap="none">
+              <a:rPr lang="ru-RU" sz="2000" b="1" i="0" u="none" strike="noStrike" cap="none" spc="0">
                 <a:solidFill>
                   <a:srgbClr val="C0272D"/>
                 </a:solidFill>
@@ -6302,9 +6448,44 @@
                 <a:ea typeface="Open Sans"/>
                 <a:cs typeface="Open Sans"/>
               </a:rPr>
-              <a:t>Постановка задачи.</a:t>
-            </a:r>
-            <a:endParaRPr sz="2800" b="0" i="0" u="none" strike="noStrike" cap="none">
+              <a:t>Введение в хаотические бильярды </a:t>
+            </a:r>
+            <a:endParaRPr lang="ru-RU" sz="2000" b="1" i="0" u="none" strike="noStrike" cap="none" spc="0">
+              <a:solidFill>
+                <a:srgbClr val="C0272D"/>
+              </a:solidFill>
+              <a:latin typeface="Times New Roman"/>
+              <a:cs typeface="Times New Roman"/>
+            </a:endParaRPr>
+          </a:p>
+          <a:p>
+            <a:pPr marL="0" marR="0" lvl="0" indent="0" algn="l" rtl="0">
+              <a:spcBef>
+                <a:spcPts val="0"/>
+              </a:spcBef>
+              <a:spcAft>
+                <a:spcPts val="0"/>
+              </a:spcAft>
+              <a:buClr>
+                <a:srgbClr val="C0272D"/>
+              </a:buClr>
+              <a:buSzPts val="2800"/>
+              <a:buFont typeface="Calibri"/>
+              <a:buNone/>
+              <a:defRPr/>
+            </a:pPr>
+            <a:r>
+              <a:rPr lang="ru-RU" sz="2000" b="1" i="0" u="none" strike="noStrike" cap="none" spc="0">
+                <a:solidFill>
+                  <a:srgbClr val="C0272D"/>
+                </a:solidFill>
+                <a:latin typeface="Open Sans"/>
+                <a:ea typeface="Open Sans"/>
+                <a:cs typeface="Open Sans"/>
+              </a:rPr>
+              <a:t>на примере пинбольного автомата.</a:t>
+            </a:r>
+            <a:endParaRPr sz="2000" b="0" i="0" u="none" strike="noStrike" cap="none">
               <a:solidFill>
                 <a:schemeClr val="dk1"/>
               </a:solidFill>
@@ -6316,14 +6497,14 @@
       </p:sp>
       <p:sp>
         <p:nvSpPr>
-          <p:cNvPr id="680640562" name="Google Shape;52;p6"/>
+          <p:cNvPr id="293201032" name="Rectangle 5"/>
           <p:cNvSpPr/>
           <p:nvPr/>
         </p:nvSpPr>
         <p:spPr bwMode="auto">
-          <a:xfrm>
-            <a:off x="457200" y="201168"/>
-            <a:ext cx="73152" cy="457200"/>
+          <a:xfrm flipH="0" flipV="0">
+            <a:off x="249077" y="137160"/>
+            <a:ext cx="73152" cy="548639"/>
           </a:xfrm>
           <a:prstGeom prst="rect">
             <a:avLst/>
@@ -6331,30 +6512,18 @@
           <a:solidFill>
             <a:srgbClr val="C0272D"/>
           </a:solidFill>
-          <a:ln w="12700" cap="flat" cmpd="sng">
+          <a:ln w="12700">
             <a:solidFill>
               <a:srgbClr val="C0272D"/>
             </a:solidFill>
             <a:prstDash val="solid"/>
-            <a:round/>
-            <a:headEnd type="none" w="sm" len="sm"/>
-            <a:tailEnd type="none" w="sm" len="sm"/>
           </a:ln>
         </p:spPr>
         <p:txBody>
-          <a:bodyPr spcFirstLastPara="1" wrap="square" lIns="91425" tIns="91425" rIns="91425" bIns="91425" anchor="ctr" anchorCtr="0">
-            <a:noAutofit/>
-          </a:bodyPr>
+          <a:bodyPr rtlCol="0" anchor="ctr"/>
           <a:lstStyle/>
           <a:p>
-            <a:pPr marL="0" lvl="0" indent="0" algn="l" rtl="0">
-              <a:spcBef>
-                <a:spcPts val="0"/>
-              </a:spcBef>
-              <a:spcAft>
-                <a:spcPts val="0"/>
-              </a:spcAft>
-              <a:buNone/>
+            <a:pPr algn="ctr">
               <a:defRPr/>
             </a:pPr>
             <a:endParaRPr/>
@@ -6363,14 +6532,14 @@
       </p:sp>
       <p:sp>
         <p:nvSpPr>
-          <p:cNvPr id="1495874177" name="Google Shape;53;p6"/>
+          <p:cNvPr id="1915081348" name="Rectangle 6"/>
           <p:cNvSpPr/>
           <p:nvPr/>
         </p:nvSpPr>
         <p:spPr bwMode="auto">
           <a:xfrm flipH="0" flipV="0">
-            <a:off x="457200" y="754760"/>
-            <a:ext cx="8229600" cy="2731970"/>
+            <a:off x="249076" y="839556"/>
+            <a:ext cx="4210122" cy="4189641"/>
           </a:xfrm>
           <a:prstGeom prst="rect">
             <a:avLst/>
@@ -6378,30 +6547,18 @@
           <a:solidFill>
             <a:srgbClr val="E8D5D5"/>
           </a:solidFill>
-          <a:ln w="12700" cap="flat" cmpd="sng">
+          <a:ln w="12700">
             <a:solidFill>
               <a:srgbClr val="D8B8B8"/>
             </a:solidFill>
             <a:prstDash val="solid"/>
-            <a:round/>
-            <a:headEnd type="none" w="sm" len="sm"/>
-            <a:tailEnd type="none" w="sm" len="sm"/>
           </a:ln>
         </p:spPr>
         <p:txBody>
-          <a:bodyPr spcFirstLastPara="1" wrap="square" lIns="91423" tIns="91423" rIns="91423" bIns="91423" anchor="ctr" anchorCtr="0">
-            <a:noAutofit/>
-          </a:bodyPr>
+          <a:bodyPr rtlCol="0" anchor="ctr"/>
           <a:lstStyle/>
           <a:p>
-            <a:pPr marL="0" lvl="0" indent="0" algn="l" rtl="0">
-              <a:spcBef>
-                <a:spcPts val="0"/>
-              </a:spcBef>
-              <a:spcAft>
-                <a:spcPts val="0"/>
-              </a:spcAft>
-              <a:buNone/>
+            <a:pPr algn="ctr">
               <a:defRPr/>
             </a:pPr>
             <a:endParaRPr/>
@@ -6410,93 +6567,14 @@
       </p:sp>
       <p:sp>
         <p:nvSpPr>
-          <p:cNvPr id="825673187" name="Google Shape;57;p6"/>
-          <p:cNvSpPr/>
-          <p:nvPr/>
-        </p:nvSpPr>
-        <p:spPr bwMode="auto">
-          <a:xfrm>
-            <a:off x="457200" y="3749040"/>
-            <a:ext cx="8229600" cy="960120"/>
-          </a:xfrm>
-          <a:prstGeom prst="rect">
-            <a:avLst/>
-          </a:prstGeom>
-          <a:solidFill>
-            <a:srgbClr val="F5F5F5"/>
-          </a:solidFill>
-          <a:ln w="12700" cap="flat" cmpd="sng">
-            <a:solidFill>
-              <a:srgbClr val="DDDDDD"/>
-            </a:solidFill>
-            <a:prstDash val="solid"/>
-            <a:round/>
-            <a:headEnd type="none" w="sm" len="sm"/>
-            <a:tailEnd type="none" w="sm" len="sm"/>
-          </a:ln>
-        </p:spPr>
-        <p:txBody>
-          <a:bodyPr spcFirstLastPara="1" wrap="square" lIns="91425" tIns="91425" rIns="91425" bIns="91425" anchor="ctr" anchorCtr="0">
-            <a:noAutofit/>
-          </a:bodyPr>
-          <a:lstStyle/>
-          <a:p>
-            <a:pPr marL="0" lvl="0" indent="0" algn="l" rtl="0">
-              <a:spcBef>
-                <a:spcPts val="0"/>
-              </a:spcBef>
-              <a:spcAft>
-                <a:spcPts val="0"/>
-              </a:spcAft>
-              <a:buNone/>
-              <a:defRPr/>
-            </a:pPr>
-            <a:endParaRPr/>
-          </a:p>
-        </p:txBody>
-      </p:sp>
-      <p:sp>
-        <p:nvSpPr>
-          <p:cNvPr id="1136981423" name="Google Shape;58;p6"/>
-          <p:cNvSpPr/>
-          <p:nvPr/>
-        </p:nvSpPr>
-        <p:spPr bwMode="auto">
-          <a:xfrm flipH="0" flipV="0">
-            <a:off x="640080" y="3960394"/>
-            <a:ext cx="7772400" cy="657325"/>
-          </a:xfrm>
-          <a:prstGeom prst="rect">
-            <a:avLst/>
-          </a:prstGeom>
-          <a:noFill/>
-          <a:ln>
-            <a:noFill/>
-          </a:ln>
-        </p:spPr>
-        <p:txBody>
-          <a:bodyPr spcFirstLastPara="1" wrap="square" lIns="91423" tIns="45699" rIns="91423" bIns="45699" anchor="ctr" anchorCtr="0">
-            <a:noAutofit/>
-          </a:bodyPr>
-          <a:lstStyle/>
-          <a:p>
-            <a:pPr>
-              <a:defRPr/>
-            </a:pPr>
-            <a:endParaRPr/>
-          </a:p>
-        </p:txBody>
-      </p:sp>
-      <p:sp>
-        <p:nvSpPr>
-          <p:cNvPr id="8724826" name=""/>
+          <p:cNvPr id="2142340566" name=""/>
           <p:cNvSpPr txBox="1"/>
           <p:nvPr/>
         </p:nvSpPr>
         <p:spPr bwMode="auto">
           <a:xfrm rot="0" flipH="0" flipV="0">
-            <a:off x="457198" y="977563"/>
-            <a:ext cx="8267897" cy="305159"/>
+            <a:off x="249076" y="862416"/>
+            <a:ext cx="4282800" cy="4115159"/>
           </a:xfrm>
           <a:prstGeom prst="rect">
             <a:avLst/>
@@ -6508,15 +6586,337 @@
             <a:spAutoFit/>
           </a:bodyPr>
           <a:p>
-            <a:pPr indent="91440">
-              <a:defRPr/>
-            </a:pPr>
-            <a:endParaRPr lang="ru-RU" sz="1400" b="0" i="0" u="none" strike="noStrike" cap="none" spc="0">
+            <a:pPr indent="274319">
+              <a:defRPr/>
+            </a:pPr>
+            <a:r>
+              <a:rPr lang="ru-RU" sz="1200" b="0" i="0" u="none" strike="noStrike" cap="none" spc="0">
+                <a:solidFill>
+                  <a:srgbClr val="000000"/>
+                </a:solidFill>
+                <a:latin typeface="Open Sans"/>
+                <a:ea typeface="Open Sans"/>
+                <a:cs typeface="Open Sans"/>
+              </a:rPr>
+              <a:t>Представьте, что вы играете в пинбол. Маленький шарик вылетает из пушки в правом нижнем углу прямоугольного стола; затем он отскакивает от краев, пока либо не попадет в цель (тогда вы выигрываете), либо не упадет в отверстие внизу (тогда вы проигрываете). Целью может быть некий специальный объект на столе, который регистрирует попадание, когда шарик касается его. Чтобы предотвратить прямые попадания, предположим, что цель заслонена от пушки, а попадание в заслонку запрещено правилами. Значит, шарик должен отскочить от краев, прежде чем достигнет цели. Это довольно необычный автомат для пинбола, но он послужит хорошим начальным примером.</a:t>
+            </a:r>
+            <a:endParaRPr sz="1200" b="0" i="0" u="none" strike="noStrike" cap="none" spc="0">
               <a:solidFill>
                 <a:srgbClr val="000000"/>
               </a:solidFill>
-              <a:latin typeface="Arial"/>
-              <a:cs typeface="Arial"/>
+              <a:latin typeface="Open Sans"/>
+              <a:cs typeface="Open Sans"/>
+            </a:endParaRPr>
+          </a:p>
+          <a:p>
+            <a:pPr indent="274319">
+              <a:defRPr/>
+            </a:pPr>
+            <a:r>
+              <a:rPr lang="ru-RU" sz="1200" b="0" i="0" u="none" strike="noStrike" cap="none" spc="0">
+                <a:solidFill>
+                  <a:srgbClr val="000000"/>
+                </a:solidFill>
+                <a:latin typeface="Open Sans"/>
+                <a:ea typeface="Open Sans"/>
+                <a:cs typeface="Open Sans"/>
+              </a:rPr>
+              <a:t>Предположим, вы можете вращать пушку, чтобы изменить угол, под которым вылетает шарик. После одного промаха вы можете скорректировать угол стрельбы и отправить шарик в цель более точно. Это относительно простая задача, поскольку траектория шарика (в прямоугольном бильярде) очень проста и предсказуема. Кроме того, вам не нужно целиться с абсолютной точностью.</a:t>
+            </a:r>
+            <a:endParaRPr sz="1400" u="sng">
+              <a:latin typeface="Open Sans"/>
+              <a:cs typeface="Open Sans"/>
+            </a:endParaRPr>
+          </a:p>
+        </p:txBody>
+      </p:sp>
+      <p:sp>
+        <p:nvSpPr>
+          <p:cNvPr id="1445427568" name=""/>
+          <p:cNvSpPr txBox="1"/>
+          <p:nvPr/>
+        </p:nvSpPr>
+        <p:spPr bwMode="auto">
+          <a:xfrm rot="0" flipH="0" flipV="0">
+            <a:off x="4750623" y="873121"/>
+            <a:ext cx="4222802" cy="305158"/>
+          </a:xfrm>
+          <a:prstGeom prst="rect">
+            <a:avLst/>
+          </a:prstGeom>
+          <a:noFill/>
+        </p:spPr>
+        <p:txBody>
+          <a:bodyPr vertOverflow="overflow" horzOverflow="overflow" vert="horz" wrap="square" lIns="91440" tIns="45720" rIns="91440" bIns="45720" numCol="1" spcCol="0" rtlCol="0" fromWordArt="0" anchor="t" anchorCtr="0" forceAA="0" upright="0" compatLnSpc="0">
+            <a:spAutoFit/>
+          </a:bodyPr>
+          <a:p>
+            <a:pPr>
+              <a:defRPr/>
+            </a:pPr>
+            <a:endParaRPr/>
+          </a:p>
+        </p:txBody>
+      </p:sp>
+      <p:sp>
+        <p:nvSpPr>
+          <p:cNvPr id="143640114" name=""/>
+          <p:cNvSpPr txBox="1"/>
+          <p:nvPr/>
+        </p:nvSpPr>
+        <p:spPr bwMode="auto">
+          <a:xfrm rot="0" flipH="0" flipV="0">
+            <a:off x="4571997" y="846666"/>
+            <a:ext cx="4555947" cy="305159"/>
+          </a:xfrm>
+          <a:prstGeom prst="rect">
+            <a:avLst/>
+          </a:prstGeom>
+          <a:noFill/>
+        </p:spPr>
+        <p:txBody>
+          <a:bodyPr vertOverflow="overflow" horzOverflow="overflow" vert="horz" wrap="square" lIns="91440" tIns="45720" rIns="91440" bIns="45720" numCol="1" spcCol="0" rtlCol="0" fromWordArt="0" anchor="t" anchorCtr="0" forceAA="0" upright="0" compatLnSpc="0">
+            <a:spAutoFit/>
+          </a:bodyPr>
+          <a:p>
+            <a:pPr algn="ctr">
+              <a:defRPr/>
+            </a:pPr>
+            <a:r>
+              <a:rPr b="1">
+                <a:solidFill>
+                  <a:srgbClr val="C00000"/>
+                </a:solidFill>
+              </a:rPr>
+              <a:t>Визуализация описанного процесса</a:t>
+            </a:r>
+            <a:r>
+              <a:rPr b="1">
+                <a:solidFill>
+                  <a:srgbClr val="C00000"/>
+                </a:solidFill>
+              </a:rPr>
+              <a:t>:</a:t>
+            </a:r>
+            <a:endParaRPr b="1">
+              <a:solidFill>
+                <a:srgbClr val="C00000"/>
+              </a:solidFill>
+            </a:endParaRPr>
+          </a:p>
+        </p:txBody>
+      </p:sp>
+      <p:sp>
+        <p:nvSpPr>
+          <p:cNvPr id="1698946992" name="Rectangle 2"/>
+          <p:cNvSpPr/>
+          <p:nvPr/>
+        </p:nvSpPr>
+        <p:spPr bwMode="auto">
+          <a:xfrm>
+            <a:off x="8839198" y="4952998"/>
+            <a:ext cx="274320" cy="182880"/>
+          </a:xfrm>
+          <a:prstGeom prst="rect">
+            <a:avLst/>
+          </a:prstGeom>
+          <a:solidFill>
+            <a:srgbClr val="C0272D"/>
+          </a:solidFill>
+          <a:ln w="12700">
+            <a:solidFill>
+              <a:srgbClr val="C0272D"/>
+            </a:solidFill>
+            <a:prstDash val="solid"/>
+          </a:ln>
+        </p:spPr>
+        <p:txBody>
+          <a:bodyPr rtlCol="0" anchor="ctr"/>
+          <a:lstStyle/>
+          <a:p>
+            <a:pPr algn="ctr">
+              <a:defRPr/>
+            </a:pPr>
+            <a:endParaRPr/>
+          </a:p>
+        </p:txBody>
+      </p:sp>
+      <p:sp>
+        <p:nvSpPr>
+          <p:cNvPr id="280309128" name="TextBox 3"/>
+          <p:cNvSpPr txBox="1"/>
+          <p:nvPr/>
+        </p:nvSpPr>
+        <p:spPr bwMode="auto">
+          <a:xfrm>
+            <a:off x="8793478" y="4907278"/>
+            <a:ext cx="365760" cy="228600"/>
+          </a:xfrm>
+          <a:prstGeom prst="rect">
+            <a:avLst/>
+          </a:prstGeom>
+          <a:noFill/>
+        </p:spPr>
+        <p:txBody>
+          <a:bodyPr wrap="square" lIns="91422" tIns="45696" rIns="91422" bIns="45696" anchor="ctr">
+            <a:noAutofit/>
+          </a:bodyPr>
+          <a:lstStyle/>
+          <a:p>
+            <a:pPr marL="0" marR="0" indent="0" algn="ctr" rtl="0">
+              <a:spcBef>
+                <a:spcPts val="0"/>
+              </a:spcBef>
+              <a:spcAft>
+                <a:spcPts val="0"/>
+              </a:spcAft>
+              <a:buNone/>
+              <a:defRPr/>
+            </a:pPr>
+            <a:r>
+              <a:rPr sz="1000" b="1" i="0">
+                <a:solidFill>
+                  <a:srgbClr val="FFFFFF"/>
+                </a:solidFill>
+                <a:latin typeface="Calibri"/>
+                <a:ea typeface="Calibri"/>
+                <a:cs typeface="Calibri"/>
+              </a:rPr>
+              <a:t>3</a:t>
+            </a:r>
+            <a:endParaRPr/>
+          </a:p>
+        </p:txBody>
+      </p:sp>
+      <p:pic>
+        <p:nvPicPr>
+          <p:cNvPr id="577486275" name=""/>
+          <p:cNvPicPr>
+            <a:picLocks noChangeAspect="1"/>
+          </p:cNvPicPr>
+          <p:nvPr/>
+        </p:nvPicPr>
+        <p:blipFill rotWithShape="1">
+          <a:blip r:embed="rId4"/>
+          <a:stretch/>
+        </p:blipFill>
+        <p:spPr bwMode="auto">
+          <a:xfrm flipH="0" flipV="0">
+            <a:off x="4750623" y="1283308"/>
+            <a:ext cx="4120861" cy="2576883"/>
+          </a:xfrm>
+          <a:prstGeom prst="rect">
+            <a:avLst/>
+          </a:prstGeom>
+        </p:spPr>
+      </p:pic>
+      <p:sp>
+        <p:nvSpPr>
+          <p:cNvPr id="1588833402" name=""/>
+          <p:cNvSpPr txBox="1"/>
+          <p:nvPr/>
+        </p:nvSpPr>
+        <p:spPr bwMode="auto">
+          <a:xfrm rot="0" flipH="0" flipV="0">
+            <a:off x="4763620" y="4061810"/>
+            <a:ext cx="4309045" cy="823319"/>
+          </a:xfrm>
+          <a:prstGeom prst="rect">
+            <a:avLst/>
+          </a:prstGeom>
+          <a:noFill/>
+        </p:spPr>
+        <p:txBody>
+          <a:bodyPr vertOverflow="overflow" horzOverflow="overflow" vert="horz" wrap="square" lIns="91440" tIns="45720" rIns="91440" bIns="45720" numCol="1" spcCol="0" rtlCol="0" fromWordArt="0" anchor="t" anchorCtr="0" forceAA="0" upright="0" compatLnSpc="0">
+            <a:spAutoFit/>
+          </a:bodyPr>
+          <a:p>
+            <a:pPr>
+              <a:defRPr/>
+            </a:pPr>
+            <a:r>
+              <a:rPr sz="1200">
+                <a:highlight>
+                  <a:srgbClr val="FFFF00"/>
+                </a:highlight>
+                <a:latin typeface="Open Sans"/>
+                <a:ea typeface="Open Sans"/>
+                <a:cs typeface="Open Sans"/>
+              </a:rPr>
+              <a:t>Анимация пинбольного автомата. Пусть в первый выстрел шар попадёт в заслонку </a:t>
+            </a:r>
+            <a:r>
+              <a:rPr sz="1200">
+                <a:highlight>
+                  <a:srgbClr val="FFFF00"/>
+                </a:highlight>
+                <a:latin typeface="Open Sans"/>
+                <a:ea typeface="Open Sans"/>
+                <a:cs typeface="Open Sans"/>
+              </a:rPr>
+              <a:t>и растворится, во второй —</a:t>
+            </a:r>
+            <a:r>
+              <a:rPr lang="en-US" sz="1200">
+                <a:highlight>
+                  <a:srgbClr val="FFFF00"/>
+                </a:highlight>
+                <a:latin typeface="Open Sans"/>
+                <a:ea typeface="Open Sans"/>
+                <a:cs typeface="Open Sans"/>
+              </a:rPr>
+              <a:t> </a:t>
+            </a:r>
+            <a:r>
+              <a:rPr lang="ru-RU" sz="1200">
+                <a:highlight>
+                  <a:srgbClr val="FFFF00"/>
+                </a:highlight>
+                <a:latin typeface="Open Sans"/>
+                <a:ea typeface="Open Sans"/>
+                <a:cs typeface="Open Sans"/>
+              </a:rPr>
+              <a:t>улетит вниз (тут это тоже проигрыш), в третий —</a:t>
+            </a:r>
+            <a:r>
+              <a:rPr lang="en-US" sz="1200">
+                <a:highlight>
+                  <a:srgbClr val="FFFF00"/>
+                </a:highlight>
+                <a:latin typeface="Open Sans"/>
+                <a:ea typeface="Open Sans"/>
+                <a:cs typeface="Open Sans"/>
+              </a:rPr>
+              <a:t> </a:t>
+            </a:r>
+            <a:r>
+              <a:rPr lang="ru-RU" sz="1200">
+                <a:highlight>
+                  <a:srgbClr val="FFFF00"/>
+                </a:highlight>
+                <a:latin typeface="Open Sans"/>
+                <a:ea typeface="Open Sans"/>
+                <a:cs typeface="Open Sans"/>
+              </a:rPr>
+              <a:t>попадёт в цель.</a:t>
+            </a:r>
+            <a:r>
+              <a:rPr lang="ru-RU" sz="1200">
+                <a:highlight>
+                  <a:srgbClr val="FFFF00"/>
+                </a:highlight>
+                <a:latin typeface="Open Sans"/>
+                <a:ea typeface="Open Sans"/>
+                <a:cs typeface="Open Sans"/>
+              </a:rPr>
+              <a:t> </a:t>
+            </a:r>
+            <a:endParaRPr sz="1200">
+              <a:highlight>
+                <a:srgbClr val="FFFF00"/>
+              </a:highlight>
+              <a:latin typeface="Open Sans"/>
+              <a:cs typeface="Open Sans"/>
             </a:endParaRPr>
           </a:p>
         </p:txBody>
@@ -6563,15 +6963,14 @@
       </p:grpSpPr>
       <p:pic>
         <p:nvPicPr>
-          <p:cNvPr id="1829797135" name="Google Shape;228;p14" descr="/home/claude/logo_300spbu.png"/>
-          <p:cNvPicPr/>
+          <p:cNvPr id="258683814" name="Picture 1" descr="image12.png"/>
+          <p:cNvPicPr>
+            <a:picLocks noChangeAspect="1"/>
+          </p:cNvPicPr>
           <p:nvPr/>
         </p:nvPicPr>
         <p:blipFill rotWithShape="1">
-          <a:blip r:embed="rId3">
-            <a:alphaModFix/>
-          </a:blip>
-          <a:srcRect l="0" t="0" r="0" b="0"/>
+          <a:blip r:embed="rId3"/>
           <a:stretch/>
         </p:blipFill>
         <p:spPr bwMode="auto">
@@ -6582,22 +6981,158 @@
           <a:prstGeom prst="rect">
             <a:avLst/>
           </a:prstGeom>
+        </p:spPr>
+      </p:pic>
+      <p:sp>
+        <p:nvSpPr>
+          <p:cNvPr id="1922594189" name="TextBox 3"/>
+          <p:cNvSpPr txBox="1"/>
+          <p:nvPr/>
+        </p:nvSpPr>
+        <p:spPr bwMode="auto">
+          <a:xfrm>
+            <a:off x="8641080" y="4800600"/>
+            <a:ext cx="365760" cy="228600"/>
+          </a:xfrm>
+          <a:prstGeom prst="rect">
+            <a:avLst/>
+          </a:prstGeom>
           <a:noFill/>
-          <a:ln>
-            <a:noFill/>
-          </a:ln>
-        </p:spPr>
-      </p:pic>
-      <p:sp>
-        <p:nvSpPr>
-          <p:cNvPr id="170478203" name="Google Shape;229;p14"/>
+        </p:spPr>
+        <p:txBody>
+          <a:bodyPr wrap="square" lIns="91422" tIns="45698" rIns="91422" bIns="45698" anchor="ctr">
+            <a:noAutofit/>
+          </a:bodyPr>
+          <a:lstStyle/>
+          <a:p>
+            <a:pPr marL="0" marR="0" indent="0" algn="ctr" rtl="0">
+              <a:spcBef>
+                <a:spcPts val="0"/>
+              </a:spcBef>
+              <a:spcAft>
+                <a:spcPts val="0"/>
+              </a:spcAft>
+              <a:buNone/>
+              <a:defRPr/>
+            </a:pPr>
+            <a:r>
+              <a:rPr sz="1000" b="1" i="0">
+                <a:solidFill>
+                  <a:srgbClr val="FFFFFF"/>
+                </a:solidFill>
+                <a:latin typeface="Calibri"/>
+                <a:ea typeface="Calibri"/>
+                <a:cs typeface="Calibri"/>
+              </a:rPr>
+              <a:t>2</a:t>
+            </a:r>
+            <a:endParaRPr/>
+          </a:p>
+        </p:txBody>
+      </p:sp>
+      <p:sp>
+        <p:nvSpPr>
+          <p:cNvPr id="1943050255" name="TextBox 4"/>
+          <p:cNvSpPr txBox="1"/>
+          <p:nvPr/>
+        </p:nvSpPr>
+        <p:spPr bwMode="auto">
+          <a:xfrm flipH="0" flipV="0">
+            <a:off x="322228" y="182880"/>
+            <a:ext cx="7907368" cy="502920"/>
+          </a:xfrm>
+          <a:prstGeom prst="rect">
+            <a:avLst/>
+          </a:prstGeom>
+          <a:noFill/>
+        </p:spPr>
+        <p:txBody>
+          <a:bodyPr wrap="square" lIns="91422" tIns="45696" rIns="91422" bIns="45696" anchor="ctr">
+            <a:noAutofit/>
+          </a:bodyPr>
+          <a:lstStyle/>
+          <a:p>
+            <a:pPr marL="0" marR="0" lvl="0" indent="0" algn="l" rtl="0">
+              <a:spcBef>
+                <a:spcPts val="0"/>
+              </a:spcBef>
+              <a:spcAft>
+                <a:spcPts val="0"/>
+              </a:spcAft>
+              <a:buClr>
+                <a:srgbClr val="C0272D"/>
+              </a:buClr>
+              <a:buSzPts val="2800"/>
+              <a:buFont typeface="Calibri"/>
+              <a:buNone/>
+              <a:defRPr/>
+            </a:pPr>
+            <a:r>
+              <a:rPr lang="ru-RU" sz="2000" b="1" i="0" u="none" strike="noStrike" cap="none" spc="0">
+                <a:solidFill>
+                  <a:srgbClr val="C0272D"/>
+                </a:solidFill>
+                <a:latin typeface="Open Sans"/>
+                <a:ea typeface="Open Sans"/>
+                <a:cs typeface="Open Sans"/>
+              </a:rPr>
+              <a:t>Введение в хаотические бильярды </a:t>
+            </a:r>
+            <a:endParaRPr lang="ru-RU" sz="2000" b="1" i="0" u="none" strike="noStrike" cap="none" spc="0">
+              <a:solidFill>
+                <a:srgbClr val="C0272D"/>
+              </a:solidFill>
+              <a:latin typeface="Times New Roman"/>
+              <a:cs typeface="Times New Roman"/>
+            </a:endParaRPr>
+          </a:p>
+          <a:p>
+            <a:pPr marL="0" marR="0" lvl="0" indent="0" algn="l" rtl="0">
+              <a:spcBef>
+                <a:spcPts val="0"/>
+              </a:spcBef>
+              <a:spcAft>
+                <a:spcPts val="0"/>
+              </a:spcAft>
+              <a:buClr>
+                <a:srgbClr val="C0272D"/>
+              </a:buClr>
+              <a:buSzPts val="2800"/>
+              <a:buFont typeface="Calibri"/>
+              <a:buNone/>
+              <a:defRPr/>
+            </a:pPr>
+            <a:r>
+              <a:rPr lang="ru-RU" sz="2000" b="1" i="0" u="none" strike="noStrike" cap="none" spc="0">
+                <a:solidFill>
+                  <a:srgbClr val="C0272D"/>
+                </a:solidFill>
+                <a:latin typeface="Open Sans"/>
+                <a:ea typeface="Open Sans"/>
+                <a:cs typeface="Open Sans"/>
+              </a:rPr>
+              <a:t>на примере пинбольного автомата.</a:t>
+            </a:r>
+            <a:endParaRPr sz="2000" b="0" i="0" u="none" strike="noStrike" cap="none">
+              <a:solidFill>
+                <a:schemeClr val="dk1"/>
+              </a:solidFill>
+              <a:latin typeface="Open Sans"/>
+              <a:cs typeface="Open Sans"/>
+            </a:endParaRPr>
+          </a:p>
+        </p:txBody>
+      </p:sp>
+      <p:sp>
+        <p:nvSpPr>
+          <p:cNvPr id="1728332229" name="Rectangle 5"/>
           <p:cNvSpPr/>
           <p:nvPr/>
         </p:nvSpPr>
         <p:spPr bwMode="auto">
-          <a:xfrm>
-            <a:off x="8686800" y="4846320"/>
-            <a:ext cx="274320" cy="182880"/>
+          <a:xfrm flipH="0" flipV="0">
+            <a:off x="249077" y="137160"/>
+            <a:ext cx="73152" cy="548639"/>
           </a:xfrm>
           <a:prstGeom prst="rect">
             <a:avLst/>
@@ -6605,30 +7140,18 @@
           <a:solidFill>
             <a:srgbClr val="C0272D"/>
           </a:solidFill>
-          <a:ln w="12700" cap="flat" cmpd="sng">
+          <a:ln w="12700">
             <a:solidFill>
               <a:srgbClr val="C0272D"/>
             </a:solidFill>
             <a:prstDash val="solid"/>
-            <a:round/>
-            <a:headEnd type="none" w="sm" len="sm"/>
-            <a:tailEnd type="none" w="sm" len="sm"/>
           </a:ln>
         </p:spPr>
         <p:txBody>
-          <a:bodyPr spcFirstLastPara="1" wrap="square" lIns="91425" tIns="91425" rIns="91425" bIns="91425" anchor="ctr" anchorCtr="0">
-            <a:noAutofit/>
-          </a:bodyPr>
+          <a:bodyPr rtlCol="0" anchor="ctr"/>
           <a:lstStyle/>
           <a:p>
-            <a:pPr marL="0" lvl="0" indent="0" algn="l" rtl="0">
-              <a:spcBef>
-                <a:spcPts val="0"/>
-              </a:spcBef>
-              <a:spcAft>
-                <a:spcPts val="0"/>
-              </a:spcAft>
-              <a:buNone/>
+            <a:pPr algn="ctr">
               <a:defRPr/>
             </a:pPr>
             <a:endParaRPr/>
@@ -6637,149 +7160,216 @@
       </p:sp>
       <p:sp>
         <p:nvSpPr>
-          <p:cNvPr id="959816077" name="Google Shape;230;p14"/>
+          <p:cNvPr id="1211821753" name="Rectangle 6"/>
           <p:cNvSpPr/>
           <p:nvPr/>
         </p:nvSpPr>
         <p:spPr bwMode="auto">
-          <a:xfrm>
-            <a:off x="8641080" y="4800600"/>
-            <a:ext cx="365760" cy="228600"/>
+          <a:xfrm flipH="0" flipV="0">
+            <a:off x="249076" y="839556"/>
+            <a:ext cx="4210122" cy="4189641"/>
+          </a:xfrm>
+          <a:prstGeom prst="rect">
+            <a:avLst/>
+          </a:prstGeom>
+          <a:solidFill>
+            <a:srgbClr val="E8D5D5"/>
+          </a:solidFill>
+          <a:ln w="12700">
+            <a:solidFill>
+              <a:srgbClr val="D8B8B8"/>
+            </a:solidFill>
+            <a:prstDash val="solid"/>
+          </a:ln>
+        </p:spPr>
+        <p:txBody>
+          <a:bodyPr rtlCol="0" anchor="ctr"/>
+          <a:lstStyle/>
+          <a:p>
+            <a:pPr algn="ctr">
+              <a:defRPr/>
+            </a:pPr>
+            <a:endParaRPr/>
+          </a:p>
+        </p:txBody>
+      </p:sp>
+      <p:sp>
+        <p:nvSpPr>
+          <p:cNvPr id="122802014" name=""/>
+          <p:cNvSpPr txBox="1"/>
+          <p:nvPr/>
+        </p:nvSpPr>
+        <p:spPr bwMode="auto">
+          <a:xfrm rot="0" flipH="0" flipV="0">
+            <a:off x="249076" y="839556"/>
+            <a:ext cx="4211202" cy="4145639"/>
           </a:xfrm>
           <a:prstGeom prst="rect">
             <a:avLst/>
           </a:prstGeom>
           <a:noFill/>
-          <a:ln>
-            <a:noFill/>
-          </a:ln>
         </p:spPr>
         <p:txBody>
-          <a:bodyPr spcFirstLastPara="1" wrap="square" lIns="0" tIns="0" rIns="0" bIns="0" anchor="ctr" anchorCtr="0">
-            <a:noAutofit/>
+          <a:bodyPr vertOverflow="overflow" horzOverflow="overflow" vert="horz" wrap="square" lIns="91440" tIns="45720" rIns="91440" bIns="45720" numCol="1" spcCol="0" rtlCol="0" fromWordArt="0" anchor="t" anchorCtr="0" forceAA="0" upright="0" compatLnSpc="0">
+            <a:spAutoFit/>
           </a:bodyPr>
-          <a:lstStyle/>
-          <a:p>
-            <a:pPr marL="0" marR="0" lvl="0" indent="0" algn="ctr" rtl="0">
-              <a:spcBef>
-                <a:spcPts val="0"/>
-              </a:spcBef>
-              <a:spcAft>
-                <a:spcPts val="0"/>
-              </a:spcAft>
-              <a:buClr>
-                <a:srgbClr val="FFFFFF"/>
-              </a:buClr>
-              <a:buSzPts val="1000"/>
-              <a:buFont typeface="Calibri"/>
-              <a:buNone/>
-              <a:defRPr/>
-            </a:pPr>
-            <a:r>
-              <a:rPr lang="en-US" sz="1000" b="1" i="0" u="none" strike="noStrike" cap="none">
-                <a:solidFill>
-                  <a:srgbClr val="FFFFFF"/>
-                </a:solidFill>
-                <a:latin typeface="Calibri"/>
-                <a:ea typeface="Calibri"/>
-                <a:cs typeface="Calibri"/>
-              </a:rPr>
-              <a:t>11</a:t>
-            </a:r>
-            <a:endParaRPr sz="1000" b="0" i="0" u="none" strike="noStrike" cap="none">
+          <a:p>
+            <a:pPr indent="274319">
+              <a:defRPr/>
+            </a:pPr>
+            <a:r>
+              <a:rPr lang="ru-RU" sz="1400" b="0" i="0" u="none" strike="noStrike" cap="none" spc="0">
+                <a:solidFill>
+                  <a:srgbClr val="000000"/>
+                </a:solidFill>
+                <a:latin typeface="Open Sans"/>
+                <a:ea typeface="Open Sans"/>
+                <a:cs typeface="Open Sans"/>
+              </a:rPr>
+              <a:t>Теперь установим по всему столу несколько отбойников (круглых столбиков), так чтобы наш движущийся шарик отскакивал между ними на пути к цели.</a:t>
+            </a:r>
+            <a:endParaRPr sz="1400" b="0" i="0" u="none" strike="noStrike" cap="none" spc="0">
               <a:solidFill>
-                <a:schemeClr val="dk1"/>
+                <a:srgbClr val="000000"/>
               </a:solidFill>
-              <a:latin typeface="Calibri"/>
-              <a:ea typeface="Calibri"/>
-              <a:cs typeface="Calibri"/>
+              <a:latin typeface="Open Sans"/>
+              <a:cs typeface="Open Sans"/>
             </a:endParaRPr>
           </a:p>
+          <a:p>
+            <a:pPr indent="274319">
+              <a:defRPr/>
+            </a:pPr>
+            <a:r>
+              <a:rPr lang="ru-RU" sz="1400" b="0" i="0" u="none" strike="noStrike" cap="none" spc="0">
+                <a:solidFill>
+                  <a:srgbClr val="000000"/>
+                </a:solidFill>
+                <a:latin typeface="Open Sans"/>
+                <a:ea typeface="Open Sans"/>
+                <a:cs typeface="Open Sans"/>
+              </a:rPr>
+              <a:t>Будет ли легко настроить пушку на новом столе? Очевидно, нет. Маршрут шарика сложен и почти непредсказуем, так как он может отскакивать от разных отбойников. Даже поиск правильной последовательности отбойников, в которые шарику нужно попасть, прежде чем он достигнет цели, не является простой задачей.</a:t>
+            </a:r>
+            <a:endParaRPr sz="1400" b="0" i="0" u="none" strike="noStrike" cap="none" spc="0">
+              <a:solidFill>
+                <a:srgbClr val="000000"/>
+              </a:solidFill>
+              <a:latin typeface="Open Sans"/>
+              <a:cs typeface="Open Sans"/>
+            </a:endParaRPr>
+          </a:p>
+          <a:p>
+            <a:pPr indent="274319">
+              <a:defRPr/>
+            </a:pPr>
+            <a:r>
+              <a:rPr lang="ru-RU" sz="1400" b="0" i="0" u="none" strike="noStrike" cap="none" spc="0">
+                <a:solidFill>
+                  <a:srgbClr val="000000"/>
+                </a:solidFill>
+                <a:latin typeface="Open Sans"/>
+                <a:ea typeface="Open Sans"/>
+                <a:cs typeface="Open Sans"/>
+              </a:rPr>
+              <a:t>Более того, пушку необходимо наводить с почти абсолютной точностью, так как крошечная ошибка в угле стрельбы может заставить шарик покатиться по совершенно неправильному пути. Нестабильность движения шарика возрастает с каждым последующим отскоком от отбойника.</a:t>
+            </a:r>
+            <a:endParaRPr sz="1400" b="0" i="0" u="none" strike="noStrike" cap="none" spc="0">
+              <a:solidFill>
+                <a:srgbClr val="000000"/>
+              </a:solidFill>
+              <a:latin typeface="Open Sans"/>
+              <a:cs typeface="Open Sans"/>
+            </a:endParaRPr>
+          </a:p>
         </p:txBody>
       </p:sp>
       <p:sp>
         <p:nvSpPr>
-          <p:cNvPr id="40365102" name="Google Shape;231;p14"/>
+          <p:cNvPr id="971937298" name=""/>
+          <p:cNvSpPr txBox="1"/>
+          <p:nvPr/>
+        </p:nvSpPr>
+        <p:spPr bwMode="auto">
+          <a:xfrm rot="0" flipH="0" flipV="0">
+            <a:off x="4750623" y="873121"/>
+            <a:ext cx="4222802" cy="305158"/>
+          </a:xfrm>
+          <a:prstGeom prst="rect">
+            <a:avLst/>
+          </a:prstGeom>
+          <a:noFill/>
+        </p:spPr>
+        <p:txBody>
+          <a:bodyPr vertOverflow="overflow" horzOverflow="overflow" vert="horz" wrap="square" lIns="91440" tIns="45720" rIns="91440" bIns="45720" numCol="1" spcCol="0" rtlCol="0" fromWordArt="0" anchor="t" anchorCtr="0" forceAA="0" upright="0" compatLnSpc="0">
+            <a:spAutoFit/>
+          </a:bodyPr>
+          <a:p>
+            <a:pPr>
+              <a:defRPr/>
+            </a:pPr>
+            <a:endParaRPr/>
+          </a:p>
+        </p:txBody>
+      </p:sp>
+      <p:sp>
+        <p:nvSpPr>
+          <p:cNvPr id="1758395236" name=""/>
+          <p:cNvSpPr txBox="1"/>
+          <p:nvPr/>
+        </p:nvSpPr>
+        <p:spPr bwMode="auto">
+          <a:xfrm rot="0" flipH="0" flipV="0">
+            <a:off x="4571997" y="846666"/>
+            <a:ext cx="4555947" cy="305159"/>
+          </a:xfrm>
+          <a:prstGeom prst="rect">
+            <a:avLst/>
+          </a:prstGeom>
+          <a:noFill/>
+        </p:spPr>
+        <p:txBody>
+          <a:bodyPr vertOverflow="overflow" horzOverflow="overflow" vert="horz" wrap="square" lIns="91440" tIns="45720" rIns="91440" bIns="45720" numCol="1" spcCol="0" rtlCol="0" fromWordArt="0" anchor="t" anchorCtr="0" forceAA="0" upright="0" compatLnSpc="0">
+            <a:spAutoFit/>
+          </a:bodyPr>
+          <a:p>
+            <a:pPr algn="ctr">
+              <a:defRPr/>
+            </a:pPr>
+            <a:r>
+              <a:rPr b="1">
+                <a:solidFill>
+                  <a:srgbClr val="C00000"/>
+                </a:solidFill>
+              </a:rPr>
+              <a:t>Визуализация описанного процесса</a:t>
+            </a:r>
+            <a:r>
+              <a:rPr b="1">
+                <a:solidFill>
+                  <a:srgbClr val="C00000"/>
+                </a:solidFill>
+              </a:rPr>
+              <a:t>:</a:t>
+            </a:r>
+            <a:endParaRPr b="1">
+              <a:solidFill>
+                <a:srgbClr val="C00000"/>
+              </a:solidFill>
+            </a:endParaRPr>
+          </a:p>
+        </p:txBody>
+      </p:sp>
+      <p:sp>
+        <p:nvSpPr>
+          <p:cNvPr id="1148717369" name="Rectangle 2"/>
           <p:cNvSpPr/>
           <p:nvPr/>
         </p:nvSpPr>
         <p:spPr bwMode="auto">
           <a:xfrm>
-            <a:off x="594360" y="182880"/>
-            <a:ext cx="7315200" cy="502920"/>
-          </a:xfrm>
-          <a:prstGeom prst="rect">
-            <a:avLst/>
-          </a:prstGeom>
-          <a:noFill/>
-          <a:ln>
-            <a:noFill/>
-          </a:ln>
-        </p:spPr>
-        <p:txBody>
-          <a:bodyPr spcFirstLastPara="1" wrap="square" lIns="91425" tIns="45700" rIns="91425" bIns="45700" anchor="ctr" anchorCtr="0">
-            <a:noAutofit/>
-          </a:bodyPr>
-          <a:lstStyle/>
-          <a:p>
-            <a:pPr marL="0" marR="0" lvl="0" indent="0" algn="l" rtl="0">
-              <a:spcBef>
-                <a:spcPts val="0"/>
-              </a:spcBef>
-              <a:spcAft>
-                <a:spcPts val="0"/>
-              </a:spcAft>
-              <a:buClr>
-                <a:srgbClr val="C0272D"/>
-              </a:buClr>
-              <a:buSzPts val="2600"/>
-              <a:buFont typeface="Calibri"/>
-              <a:buNone/>
-              <a:defRPr/>
-            </a:pPr>
-            <a:r>
-              <a:rPr lang="en-US" sz="2600" b="1" i="0" u="none" strike="noStrike" cap="none">
-                <a:solidFill>
-                  <a:srgbClr val="C0272D"/>
-                </a:solidFill>
-                <a:latin typeface="Calibri"/>
-                <a:ea typeface="Calibri"/>
-                <a:cs typeface="Calibri"/>
-              </a:rPr>
-              <a:t>Обобщения и </a:t>
-            </a:r>
-            <a:r>
-              <a:rPr lang="ru-RU" sz="2600" b="1" i="0" u="none" strike="noStrike" cap="none">
-                <a:solidFill>
-                  <a:srgbClr val="C0272D"/>
-                </a:solidFill>
-                <a:latin typeface="Calibri"/>
-                <a:ea typeface="Calibri"/>
-                <a:cs typeface="Calibri"/>
-              </a:rPr>
-              <a:t>области применения</a:t>
-            </a:r>
-            <a:endParaRPr sz="2600" b="0" i="0" u="none" strike="noStrike" cap="none">
-              <a:solidFill>
-                <a:schemeClr val="dk1"/>
-              </a:solidFill>
-              <a:latin typeface="Calibri"/>
-              <a:ea typeface="Calibri"/>
-              <a:cs typeface="Calibri"/>
-            </a:endParaRPr>
-          </a:p>
-        </p:txBody>
-      </p:sp>
-      <p:sp>
-        <p:nvSpPr>
-          <p:cNvPr id="1834008665" name="Google Shape;232;p14"/>
-          <p:cNvSpPr/>
-          <p:nvPr/>
-        </p:nvSpPr>
-        <p:spPr bwMode="auto">
-          <a:xfrm>
-            <a:off x="457200" y="201168"/>
-            <a:ext cx="73152" cy="457200"/>
+            <a:off x="8839198" y="4952998"/>
+            <a:ext cx="274320" cy="182880"/>
           </a:xfrm>
           <a:prstGeom prst="rect">
             <a:avLst/>
@@ -6787,23 +7377,47 @@
           <a:solidFill>
             <a:srgbClr val="C0272D"/>
           </a:solidFill>
-          <a:ln w="12700" cap="flat" cmpd="sng">
+          <a:ln w="12700">
             <a:solidFill>
               <a:srgbClr val="C0272D"/>
             </a:solidFill>
             <a:prstDash val="solid"/>
-            <a:round/>
-            <a:headEnd type="none" w="sm" len="sm"/>
-            <a:tailEnd type="none" w="sm" len="sm"/>
           </a:ln>
         </p:spPr>
         <p:txBody>
-          <a:bodyPr spcFirstLastPara="1" wrap="square" lIns="91425" tIns="91425" rIns="91425" bIns="91425" anchor="ctr" anchorCtr="0">
+          <a:bodyPr rtlCol="0" anchor="ctr"/>
+          <a:lstStyle/>
+          <a:p>
+            <a:pPr algn="ctr">
+              <a:defRPr/>
+            </a:pPr>
+            <a:endParaRPr/>
+          </a:p>
+        </p:txBody>
+      </p:sp>
+      <p:sp>
+        <p:nvSpPr>
+          <p:cNvPr id="1727857967" name="TextBox 3"/>
+          <p:cNvSpPr txBox="1"/>
+          <p:nvPr/>
+        </p:nvSpPr>
+        <p:spPr bwMode="auto">
+          <a:xfrm>
+            <a:off x="8793478" y="4907278"/>
+            <a:ext cx="365760" cy="228600"/>
+          </a:xfrm>
+          <a:prstGeom prst="rect">
+            <a:avLst/>
+          </a:prstGeom>
+          <a:noFill/>
+        </p:spPr>
+        <p:txBody>
+          <a:bodyPr wrap="square" lIns="91422" tIns="45696" rIns="91422" bIns="45696" anchor="ctr">
             <a:noAutofit/>
           </a:bodyPr>
           <a:lstStyle/>
           <a:p>
-            <a:pPr marL="0" lvl="0" indent="0" algn="l" rtl="0">
+            <a:pPr marL="0" marR="0" indent="0" algn="ctr" rtl="0">
               <a:spcBef>
                 <a:spcPts val="0"/>
               </a:spcBef>
@@ -6813,840 +7427,110 @@
               <a:buNone/>
               <a:defRPr/>
             </a:pPr>
+            <a:r>
+              <a:rPr sz="1000" b="1" i="0">
+                <a:solidFill>
+                  <a:srgbClr val="FFFFFF"/>
+                </a:solidFill>
+                <a:latin typeface="Calibri"/>
+                <a:ea typeface="Calibri"/>
+                <a:cs typeface="Calibri"/>
+              </a:rPr>
+              <a:t>3</a:t>
+            </a:r>
             <a:endParaRPr/>
           </a:p>
         </p:txBody>
       </p:sp>
       <p:sp>
         <p:nvSpPr>
-          <p:cNvPr id="602283876" name="Google Shape;233;p14"/>
-          <p:cNvSpPr/>
+          <p:cNvPr id="196538275" name=""/>
+          <p:cNvSpPr txBox="1"/>
           <p:nvPr/>
         </p:nvSpPr>
         <p:spPr bwMode="auto">
-          <a:xfrm>
-            <a:off x="457200" y="804672"/>
-            <a:ext cx="3977640" cy="1325880"/>
-          </a:xfrm>
-          <a:prstGeom prst="rect">
-            <a:avLst/>
-          </a:prstGeom>
-          <a:solidFill>
-            <a:srgbClr val="F5F5F5"/>
-          </a:solidFill>
-          <a:ln w="12700" cap="flat" cmpd="sng">
-            <a:solidFill>
-              <a:srgbClr val="CCCCCC"/>
-            </a:solidFill>
-            <a:prstDash val="solid"/>
-            <a:round/>
-            <a:headEnd type="none" w="sm" len="sm"/>
-            <a:tailEnd type="none" w="sm" len="sm"/>
-          </a:ln>
-        </p:spPr>
-        <p:txBody>
-          <a:bodyPr spcFirstLastPara="1" wrap="square" lIns="91425" tIns="91425" rIns="91425" bIns="91425" anchor="ctr" anchorCtr="0">
-            <a:noAutofit/>
-          </a:bodyPr>
-          <a:lstStyle/>
-          <a:p>
-            <a:pPr marL="0" lvl="0" indent="0" algn="l" rtl="0">
-              <a:spcBef>
-                <a:spcPts val="0"/>
-              </a:spcBef>
-              <a:spcAft>
-                <a:spcPts val="0"/>
-              </a:spcAft>
-              <a:buNone/>
-              <a:defRPr/>
-            </a:pPr>
-            <a:endParaRPr/>
-          </a:p>
-        </p:txBody>
-      </p:sp>
-      <p:sp>
-        <p:nvSpPr>
-          <p:cNvPr id="1976897499" name="Google Shape;234;p14"/>
-          <p:cNvSpPr/>
-          <p:nvPr/>
-        </p:nvSpPr>
-        <p:spPr bwMode="auto">
-          <a:xfrm>
-            <a:off x="457200" y="804672"/>
-            <a:ext cx="54864" cy="1325880"/>
-          </a:xfrm>
-          <a:prstGeom prst="rect">
-            <a:avLst/>
-          </a:prstGeom>
-          <a:solidFill>
-            <a:srgbClr val="C0272D"/>
-          </a:solidFill>
-          <a:ln w="12700" cap="flat" cmpd="sng">
-            <a:solidFill>
-              <a:srgbClr val="C0272D"/>
-            </a:solidFill>
-            <a:prstDash val="solid"/>
-            <a:round/>
-            <a:headEnd type="none" w="sm" len="sm"/>
-            <a:tailEnd type="none" w="sm" len="sm"/>
-          </a:ln>
-        </p:spPr>
-        <p:txBody>
-          <a:bodyPr spcFirstLastPara="1" wrap="square" lIns="91425" tIns="91425" rIns="91425" bIns="91425" anchor="ctr" anchorCtr="0">
-            <a:noAutofit/>
-          </a:bodyPr>
-          <a:lstStyle/>
-          <a:p>
-            <a:pPr marL="0" lvl="0" indent="0" algn="l" rtl="0">
-              <a:spcBef>
-                <a:spcPts val="0"/>
-              </a:spcBef>
-              <a:spcAft>
-                <a:spcPts val="0"/>
-              </a:spcAft>
-              <a:buNone/>
-              <a:defRPr/>
-            </a:pPr>
-            <a:endParaRPr/>
-          </a:p>
-        </p:txBody>
-      </p:sp>
-      <p:sp>
-        <p:nvSpPr>
-          <p:cNvPr id="304236828" name="Google Shape;235;p14"/>
-          <p:cNvSpPr/>
-          <p:nvPr/>
-        </p:nvSpPr>
-        <p:spPr bwMode="auto">
-          <a:xfrm>
-            <a:off x="594360" y="877824"/>
-            <a:ext cx="3657600" cy="320040"/>
+          <a:xfrm rot="0" flipH="0" flipV="0">
+            <a:off x="4750623" y="3820948"/>
+            <a:ext cx="4338565" cy="640440"/>
           </a:xfrm>
           <a:prstGeom prst="rect">
             <a:avLst/>
           </a:prstGeom>
           <a:noFill/>
-          <a:ln>
-            <a:noFill/>
-          </a:ln>
         </p:spPr>
         <p:txBody>
-          <a:bodyPr spcFirstLastPara="1" wrap="square" lIns="91425" tIns="45700" rIns="91425" bIns="45700" anchor="ctr" anchorCtr="0">
-            <a:noAutofit/>
+          <a:bodyPr vertOverflow="overflow" horzOverflow="overflow" vert="horz" wrap="square" lIns="91440" tIns="45720" rIns="91440" bIns="45720" numCol="1" spcCol="0" rtlCol="0" fromWordArt="0" anchor="t" anchorCtr="0" forceAA="0" upright="0" compatLnSpc="0">
+            <a:spAutoFit/>
           </a:bodyPr>
-          <a:lstStyle/>
-          <a:p>
-            <a:pPr marL="0" marR="0" lvl="0" indent="0" algn="l" rtl="0">
-              <a:spcBef>
-                <a:spcPts val="0"/>
-              </a:spcBef>
-              <a:spcAft>
-                <a:spcPts val="0"/>
-              </a:spcAft>
-              <a:buClr>
-                <a:srgbClr val="C0272D"/>
-              </a:buClr>
-              <a:buSzPts val="1300"/>
-              <a:buFont typeface="Calibri"/>
-              <a:buNone/>
-              <a:defRPr/>
-            </a:pPr>
-            <a:endParaRPr sz="1300" b="0" i="0" u="none" strike="noStrike" cap="none">
-              <a:solidFill>
-                <a:schemeClr val="dk1"/>
-              </a:solidFill>
-              <a:latin typeface="Calibri"/>
-              <a:ea typeface="Calibri"/>
-              <a:cs typeface="Calibri"/>
+          <a:p>
+            <a:pPr>
+              <a:defRPr/>
+            </a:pPr>
+            <a:r>
+              <a:rPr sz="1200">
+                <a:highlight>
+                  <a:srgbClr val="FFFF00"/>
+                </a:highlight>
+                <a:latin typeface="Open Sans"/>
+                <a:ea typeface="Open Sans"/>
+                <a:cs typeface="Open Sans"/>
+              </a:rPr>
+              <a:t>Анимация пинбольного автомата с отбойниками. Пусть произойдёт несколько выстрелов перед тем, как шар попадёт в цель</a:t>
+            </a:r>
+            <a:r>
+              <a:rPr lang="ru-RU" sz="1200">
+                <a:highlight>
+                  <a:srgbClr val="FFFF00"/>
+                </a:highlight>
+                <a:latin typeface="Open Sans"/>
+                <a:ea typeface="Open Sans"/>
+                <a:cs typeface="Open Sans"/>
+              </a:rPr>
+              <a:t>.</a:t>
+            </a:r>
+            <a:r>
+              <a:rPr lang="ru-RU" sz="1200">
+                <a:highlight>
+                  <a:srgbClr val="FFFF00"/>
+                </a:highlight>
+                <a:latin typeface="Open Sans"/>
+                <a:ea typeface="Open Sans"/>
+                <a:cs typeface="Open Sans"/>
+              </a:rPr>
+              <a:t> </a:t>
+            </a:r>
+            <a:endParaRPr sz="1200">
+              <a:highlight>
+                <a:srgbClr val="FFFF00"/>
+              </a:highlight>
+              <a:latin typeface="Open Sans"/>
+              <a:cs typeface="Open Sans"/>
             </a:endParaRPr>
           </a:p>
         </p:txBody>
       </p:sp>
-      <p:sp>
-        <p:nvSpPr>
-          <p:cNvPr id="2010652807" name="Google Shape;236;p14"/>
-          <p:cNvSpPr/>
+      <p:pic>
+        <p:nvPicPr>
+          <p:cNvPr id="1200029988" name=""/>
+          <p:cNvPicPr>
+            <a:picLocks noChangeAspect="1"/>
+          </p:cNvPicPr>
           <p:nvPr/>
-        </p:nvSpPr>
-        <p:spPr bwMode="auto">
-          <a:xfrm>
-            <a:off x="594360" y="1216151"/>
-            <a:ext cx="3749040" cy="841248"/>
+        </p:nvPicPr>
+        <p:blipFill rotWithShape="1">
+          <a:blip r:embed="rId4"/>
+          <a:stretch/>
+        </p:blipFill>
+        <p:spPr bwMode="auto">
+          <a:xfrm flipH="0" flipV="0">
+            <a:off x="4810822" y="1265866"/>
+            <a:ext cx="4102402" cy="2367182"/>
           </a:xfrm>
           <a:prstGeom prst="rect">
             <a:avLst/>
           </a:prstGeom>
-          <a:noFill/>
-          <a:ln>
-            <a:noFill/>
-          </a:ln>
-        </p:spPr>
-        <p:txBody>
-          <a:bodyPr spcFirstLastPara="1" wrap="square" lIns="91425" tIns="45700" rIns="91425" bIns="45700" anchor="ctr" anchorCtr="0">
-            <a:noAutofit/>
-          </a:bodyPr>
-          <a:lstStyle/>
-          <a:p>
-            <a:pPr marL="0" marR="0" lvl="0" indent="0" algn="l" rtl="0">
-              <a:spcBef>
-                <a:spcPts val="0"/>
-              </a:spcBef>
-              <a:spcAft>
-                <a:spcPts val="0"/>
-              </a:spcAft>
-              <a:buClr>
-                <a:srgbClr val="1A1A1A"/>
-              </a:buClr>
-              <a:buSzPts val="1200"/>
-              <a:buFont typeface="Calibri"/>
-              <a:buNone/>
-              <a:defRPr/>
-            </a:pPr>
-            <a:endParaRPr sz="1200" b="0" i="0" u="none" strike="noStrike" cap="none">
-              <a:solidFill>
-                <a:schemeClr val="dk1"/>
-              </a:solidFill>
-              <a:latin typeface="Calibri"/>
-              <a:ea typeface="Calibri"/>
-              <a:cs typeface="Calibri"/>
-            </a:endParaRPr>
-          </a:p>
-        </p:txBody>
-      </p:sp>
-      <p:sp>
-        <p:nvSpPr>
-          <p:cNvPr id="276843977" name="Google Shape;237;p14"/>
-          <p:cNvSpPr/>
-          <p:nvPr/>
-        </p:nvSpPr>
-        <p:spPr bwMode="auto">
-          <a:xfrm>
-            <a:off x="4617720" y="804672"/>
-            <a:ext cx="3977640" cy="1325880"/>
-          </a:xfrm>
-          <a:prstGeom prst="rect">
-            <a:avLst/>
-          </a:prstGeom>
-          <a:solidFill>
-            <a:srgbClr val="E8D5D5"/>
-          </a:solidFill>
-          <a:ln w="12700" cap="flat" cmpd="sng">
-            <a:solidFill>
-              <a:srgbClr val="CCCCCC"/>
-            </a:solidFill>
-            <a:prstDash val="solid"/>
-            <a:round/>
-            <a:headEnd type="none" w="sm" len="sm"/>
-            <a:tailEnd type="none" w="sm" len="sm"/>
-          </a:ln>
-        </p:spPr>
-        <p:txBody>
-          <a:bodyPr spcFirstLastPara="1" wrap="square" lIns="91425" tIns="91425" rIns="91425" bIns="91425" anchor="ctr" anchorCtr="0">
-            <a:noAutofit/>
-          </a:bodyPr>
-          <a:lstStyle/>
-          <a:p>
-            <a:pPr marL="0" lvl="0" indent="0" algn="l" rtl="0">
-              <a:spcBef>
-                <a:spcPts val="0"/>
-              </a:spcBef>
-              <a:spcAft>
-                <a:spcPts val="0"/>
-              </a:spcAft>
-              <a:buNone/>
-              <a:defRPr/>
-            </a:pPr>
-            <a:endParaRPr/>
-          </a:p>
-        </p:txBody>
-      </p:sp>
-      <p:sp>
-        <p:nvSpPr>
-          <p:cNvPr id="1882363" name="Google Shape;238;p14"/>
-          <p:cNvSpPr/>
-          <p:nvPr/>
-        </p:nvSpPr>
-        <p:spPr bwMode="auto">
-          <a:xfrm>
-            <a:off x="4617720" y="804672"/>
-            <a:ext cx="54864" cy="1325880"/>
-          </a:xfrm>
-          <a:prstGeom prst="rect">
-            <a:avLst/>
-          </a:prstGeom>
-          <a:solidFill>
-            <a:srgbClr val="C0272D"/>
-          </a:solidFill>
-          <a:ln w="12700" cap="flat" cmpd="sng">
-            <a:solidFill>
-              <a:srgbClr val="C0272D"/>
-            </a:solidFill>
-            <a:prstDash val="solid"/>
-            <a:round/>
-            <a:headEnd type="none" w="sm" len="sm"/>
-            <a:tailEnd type="none" w="sm" len="sm"/>
-          </a:ln>
-        </p:spPr>
-        <p:txBody>
-          <a:bodyPr spcFirstLastPara="1" wrap="square" lIns="91425" tIns="91425" rIns="91425" bIns="91425" anchor="ctr" anchorCtr="0">
-            <a:noAutofit/>
-          </a:bodyPr>
-          <a:lstStyle/>
-          <a:p>
-            <a:pPr marL="0" lvl="0" indent="0" algn="l" rtl="0">
-              <a:spcBef>
-                <a:spcPts val="0"/>
-              </a:spcBef>
-              <a:spcAft>
-                <a:spcPts val="0"/>
-              </a:spcAft>
-              <a:buNone/>
-              <a:defRPr/>
-            </a:pPr>
-            <a:endParaRPr/>
-          </a:p>
-        </p:txBody>
-      </p:sp>
-      <p:sp>
-        <p:nvSpPr>
-          <p:cNvPr id="1031245771" name="Google Shape;239;p14"/>
-          <p:cNvSpPr/>
-          <p:nvPr/>
-        </p:nvSpPr>
-        <p:spPr bwMode="auto">
-          <a:xfrm>
-            <a:off x="4754880" y="877824"/>
-            <a:ext cx="3657600" cy="320040"/>
-          </a:xfrm>
-          <a:prstGeom prst="rect">
-            <a:avLst/>
-          </a:prstGeom>
-          <a:noFill/>
-          <a:ln>
-            <a:noFill/>
-          </a:ln>
-        </p:spPr>
-        <p:txBody>
-          <a:bodyPr spcFirstLastPara="1" wrap="square" lIns="91425" tIns="45700" rIns="91425" bIns="45700" anchor="ctr" anchorCtr="0">
-            <a:noAutofit/>
-          </a:bodyPr>
-          <a:lstStyle/>
-          <a:p>
-            <a:pPr marL="0" marR="0" lvl="0" indent="0" algn="l" rtl="0">
-              <a:spcBef>
-                <a:spcPts val="0"/>
-              </a:spcBef>
-              <a:spcAft>
-                <a:spcPts val="0"/>
-              </a:spcAft>
-              <a:buClr>
-                <a:srgbClr val="C0272D"/>
-              </a:buClr>
-              <a:buSzPts val="1300"/>
-              <a:buFont typeface="Calibri"/>
-              <a:buNone/>
-              <a:defRPr/>
-            </a:pPr>
-            <a:endParaRPr sz="1300" b="0" i="0" u="none" strike="noStrike" cap="none">
-              <a:solidFill>
-                <a:schemeClr val="dk1"/>
-              </a:solidFill>
-              <a:latin typeface="Calibri"/>
-              <a:ea typeface="Calibri"/>
-              <a:cs typeface="Calibri"/>
-            </a:endParaRPr>
-          </a:p>
-        </p:txBody>
-      </p:sp>
-      <p:sp>
-        <p:nvSpPr>
-          <p:cNvPr id="1802674102" name="Google Shape;240;p14"/>
-          <p:cNvSpPr/>
-          <p:nvPr/>
-        </p:nvSpPr>
-        <p:spPr bwMode="auto">
-          <a:xfrm>
-            <a:off x="4754880" y="1216151"/>
-            <a:ext cx="3749040" cy="841248"/>
-          </a:xfrm>
-          <a:prstGeom prst="rect">
-            <a:avLst/>
-          </a:prstGeom>
-          <a:noFill/>
-          <a:ln>
-            <a:noFill/>
-          </a:ln>
-        </p:spPr>
-        <p:txBody>
-          <a:bodyPr spcFirstLastPara="1" wrap="square" lIns="91425" tIns="45700" rIns="91425" bIns="45700" anchor="ctr" anchorCtr="0">
-            <a:noAutofit/>
-          </a:bodyPr>
-          <a:lstStyle/>
-          <a:p>
-            <a:pPr marL="0" marR="0" lvl="0" indent="0" algn="l" rtl="0">
-              <a:spcBef>
-                <a:spcPts val="0"/>
-              </a:spcBef>
-              <a:spcAft>
-                <a:spcPts val="0"/>
-              </a:spcAft>
-              <a:buClr>
-                <a:srgbClr val="1A1A1A"/>
-              </a:buClr>
-              <a:buSzPts val="1200"/>
-              <a:buFont typeface="Calibri"/>
-              <a:buNone/>
-              <a:defRPr/>
-            </a:pPr>
-            <a:endParaRPr sz="1200" b="0" i="0" u="none" strike="noStrike" cap="none">
-              <a:solidFill>
-                <a:schemeClr val="dk1"/>
-              </a:solidFill>
-              <a:latin typeface="Calibri"/>
-              <a:ea typeface="Calibri"/>
-              <a:cs typeface="Calibri"/>
-            </a:endParaRPr>
-          </a:p>
-        </p:txBody>
-      </p:sp>
-      <p:sp>
-        <p:nvSpPr>
-          <p:cNvPr id="1725132202" name="Google Shape;241;p14"/>
-          <p:cNvSpPr/>
-          <p:nvPr/>
-        </p:nvSpPr>
-        <p:spPr bwMode="auto">
-          <a:xfrm>
-            <a:off x="457200" y="2240280"/>
-            <a:ext cx="3977640" cy="1325880"/>
-          </a:xfrm>
-          <a:prstGeom prst="rect">
-            <a:avLst/>
-          </a:prstGeom>
-          <a:solidFill>
-            <a:srgbClr val="F5F5F5"/>
-          </a:solidFill>
-          <a:ln w="12700" cap="flat" cmpd="sng">
-            <a:solidFill>
-              <a:srgbClr val="CCCCCC"/>
-            </a:solidFill>
-            <a:prstDash val="solid"/>
-            <a:round/>
-            <a:headEnd type="none" w="sm" len="sm"/>
-            <a:tailEnd type="none" w="sm" len="sm"/>
-          </a:ln>
-        </p:spPr>
-        <p:txBody>
-          <a:bodyPr spcFirstLastPara="1" wrap="square" lIns="91425" tIns="91425" rIns="91425" bIns="91425" anchor="ctr" anchorCtr="0">
-            <a:noAutofit/>
-          </a:bodyPr>
-          <a:lstStyle/>
-          <a:p>
-            <a:pPr marL="0" lvl="0" indent="0" algn="l" rtl="0">
-              <a:spcBef>
-                <a:spcPts val="0"/>
-              </a:spcBef>
-              <a:spcAft>
-                <a:spcPts val="0"/>
-              </a:spcAft>
-              <a:buNone/>
-              <a:defRPr/>
-            </a:pPr>
-            <a:endParaRPr/>
-          </a:p>
-        </p:txBody>
-      </p:sp>
-      <p:sp>
-        <p:nvSpPr>
-          <p:cNvPr id="2096127599" name="Google Shape;242;p14"/>
-          <p:cNvSpPr/>
-          <p:nvPr/>
-        </p:nvSpPr>
-        <p:spPr bwMode="auto">
-          <a:xfrm>
-            <a:off x="457200" y="2240280"/>
-            <a:ext cx="54864" cy="1325880"/>
-          </a:xfrm>
-          <a:prstGeom prst="rect">
-            <a:avLst/>
-          </a:prstGeom>
-          <a:solidFill>
-            <a:srgbClr val="C0272D"/>
-          </a:solidFill>
-          <a:ln w="12700" cap="flat" cmpd="sng">
-            <a:solidFill>
-              <a:srgbClr val="C0272D"/>
-            </a:solidFill>
-            <a:prstDash val="solid"/>
-            <a:round/>
-            <a:headEnd type="none" w="sm" len="sm"/>
-            <a:tailEnd type="none" w="sm" len="sm"/>
-          </a:ln>
-        </p:spPr>
-        <p:txBody>
-          <a:bodyPr spcFirstLastPara="1" wrap="square" lIns="91425" tIns="91425" rIns="91425" bIns="91425" anchor="ctr" anchorCtr="0">
-            <a:noAutofit/>
-          </a:bodyPr>
-          <a:lstStyle/>
-          <a:p>
-            <a:pPr marL="0" lvl="0" indent="0" algn="l" rtl="0">
-              <a:spcBef>
-                <a:spcPts val="0"/>
-              </a:spcBef>
-              <a:spcAft>
-                <a:spcPts val="0"/>
-              </a:spcAft>
-              <a:buNone/>
-              <a:defRPr/>
-            </a:pPr>
-            <a:endParaRPr/>
-          </a:p>
-        </p:txBody>
-      </p:sp>
-      <p:sp>
-        <p:nvSpPr>
-          <p:cNvPr id="467010423" name="Google Shape;243;p14"/>
-          <p:cNvSpPr/>
-          <p:nvPr/>
-        </p:nvSpPr>
-        <p:spPr bwMode="auto">
-          <a:xfrm>
-            <a:off x="594360" y="2313432"/>
-            <a:ext cx="3657600" cy="320040"/>
-          </a:xfrm>
-          <a:prstGeom prst="rect">
-            <a:avLst/>
-          </a:prstGeom>
-          <a:noFill/>
-          <a:ln>
-            <a:noFill/>
-          </a:ln>
-        </p:spPr>
-        <p:txBody>
-          <a:bodyPr spcFirstLastPara="1" wrap="square" lIns="91425" tIns="45700" rIns="91425" bIns="45700" anchor="ctr" anchorCtr="0">
-            <a:noAutofit/>
-          </a:bodyPr>
-          <a:lstStyle/>
-          <a:p>
-            <a:pPr marL="0" marR="0" lvl="0" indent="0" algn="l" rtl="0">
-              <a:spcBef>
-                <a:spcPts val="0"/>
-              </a:spcBef>
-              <a:spcAft>
-                <a:spcPts val="0"/>
-              </a:spcAft>
-              <a:buClr>
-                <a:srgbClr val="C0272D"/>
-              </a:buClr>
-              <a:buSzPts val="1300"/>
-              <a:buFont typeface="Calibri"/>
-              <a:buNone/>
-              <a:defRPr/>
-            </a:pPr>
-            <a:endParaRPr sz="1300" b="0" i="0" u="none" strike="noStrike" cap="none">
-              <a:solidFill>
-                <a:schemeClr val="dk1"/>
-              </a:solidFill>
-              <a:latin typeface="Calibri"/>
-              <a:ea typeface="Calibri"/>
-              <a:cs typeface="Calibri"/>
-            </a:endParaRPr>
-          </a:p>
-        </p:txBody>
-      </p:sp>
-      <p:sp>
-        <p:nvSpPr>
-          <p:cNvPr id="1386682413" name="Google Shape;244;p14"/>
-          <p:cNvSpPr/>
-          <p:nvPr/>
-        </p:nvSpPr>
-        <p:spPr bwMode="auto">
-          <a:xfrm>
-            <a:off x="594360" y="2651760"/>
-            <a:ext cx="3749040" cy="841248"/>
-          </a:xfrm>
-          <a:prstGeom prst="rect">
-            <a:avLst/>
-          </a:prstGeom>
-          <a:noFill/>
-          <a:ln>
-            <a:noFill/>
-          </a:ln>
-        </p:spPr>
-        <p:txBody>
-          <a:bodyPr spcFirstLastPara="1" wrap="square" lIns="91425" tIns="45700" rIns="91425" bIns="45700" anchor="ctr" anchorCtr="0">
-            <a:noAutofit/>
-          </a:bodyPr>
-          <a:lstStyle/>
-          <a:p>
-            <a:pPr marL="0" marR="0" lvl="0" indent="0" algn="l" rtl="0">
-              <a:spcBef>
-                <a:spcPts val="0"/>
-              </a:spcBef>
-              <a:spcAft>
-                <a:spcPts val="0"/>
-              </a:spcAft>
-              <a:buClr>
-                <a:srgbClr val="1A1A1A"/>
-              </a:buClr>
-              <a:buSzPts val="1200"/>
-              <a:buFont typeface="Calibri"/>
-              <a:buNone/>
-              <a:defRPr/>
-            </a:pPr>
-            <a:endParaRPr sz="1200" b="0" i="0" u="none" strike="noStrike" cap="none">
-              <a:solidFill>
-                <a:schemeClr val="dk1"/>
-              </a:solidFill>
-              <a:latin typeface="Calibri"/>
-              <a:ea typeface="Calibri"/>
-              <a:cs typeface="Calibri"/>
-            </a:endParaRPr>
-          </a:p>
-        </p:txBody>
-      </p:sp>
-      <p:sp>
-        <p:nvSpPr>
-          <p:cNvPr id="581465433" name="Google Shape;245;p14"/>
-          <p:cNvSpPr/>
-          <p:nvPr/>
-        </p:nvSpPr>
-        <p:spPr bwMode="auto">
-          <a:xfrm>
-            <a:off x="4617720" y="2240280"/>
-            <a:ext cx="3977640" cy="1325880"/>
-          </a:xfrm>
-          <a:prstGeom prst="rect">
-            <a:avLst/>
-          </a:prstGeom>
-          <a:solidFill>
-            <a:srgbClr val="E8D5D5"/>
-          </a:solidFill>
-          <a:ln w="12700" cap="flat" cmpd="sng">
-            <a:solidFill>
-              <a:srgbClr val="CCCCCC"/>
-            </a:solidFill>
-            <a:prstDash val="solid"/>
-            <a:round/>
-            <a:headEnd type="none" w="sm" len="sm"/>
-            <a:tailEnd type="none" w="sm" len="sm"/>
-          </a:ln>
-        </p:spPr>
-        <p:txBody>
-          <a:bodyPr spcFirstLastPara="1" wrap="square" lIns="91425" tIns="91425" rIns="91425" bIns="91425" anchor="ctr" anchorCtr="0">
-            <a:noAutofit/>
-          </a:bodyPr>
-          <a:lstStyle/>
-          <a:p>
-            <a:pPr marL="0" lvl="0" indent="0" algn="l" rtl="0">
-              <a:spcBef>
-                <a:spcPts val="0"/>
-              </a:spcBef>
-              <a:spcAft>
-                <a:spcPts val="0"/>
-              </a:spcAft>
-              <a:buNone/>
-              <a:defRPr/>
-            </a:pPr>
-            <a:endParaRPr/>
-          </a:p>
-        </p:txBody>
-      </p:sp>
-      <p:sp>
-        <p:nvSpPr>
-          <p:cNvPr id="1301035326" name="Google Shape;246;p14"/>
-          <p:cNvSpPr/>
-          <p:nvPr/>
-        </p:nvSpPr>
-        <p:spPr bwMode="auto">
-          <a:xfrm>
-            <a:off x="4617720" y="2240280"/>
-            <a:ext cx="54864" cy="1325880"/>
-          </a:xfrm>
-          <a:prstGeom prst="rect">
-            <a:avLst/>
-          </a:prstGeom>
-          <a:solidFill>
-            <a:srgbClr val="C0272D"/>
-          </a:solidFill>
-          <a:ln w="12700" cap="flat" cmpd="sng">
-            <a:solidFill>
-              <a:srgbClr val="C0272D"/>
-            </a:solidFill>
-            <a:prstDash val="solid"/>
-            <a:round/>
-            <a:headEnd type="none" w="sm" len="sm"/>
-            <a:tailEnd type="none" w="sm" len="sm"/>
-          </a:ln>
-        </p:spPr>
-        <p:txBody>
-          <a:bodyPr spcFirstLastPara="1" wrap="square" lIns="91425" tIns="91425" rIns="91425" bIns="91425" anchor="ctr" anchorCtr="0">
-            <a:noAutofit/>
-          </a:bodyPr>
-          <a:lstStyle/>
-          <a:p>
-            <a:pPr marL="0" lvl="0" indent="0" algn="l" rtl="0">
-              <a:spcBef>
-                <a:spcPts val="0"/>
-              </a:spcBef>
-              <a:spcAft>
-                <a:spcPts val="0"/>
-              </a:spcAft>
-              <a:buNone/>
-              <a:defRPr/>
-            </a:pPr>
-            <a:endParaRPr/>
-          </a:p>
-        </p:txBody>
-      </p:sp>
-      <p:sp>
-        <p:nvSpPr>
-          <p:cNvPr id="769338388" name="Google Shape;247;p14"/>
-          <p:cNvSpPr/>
-          <p:nvPr/>
-        </p:nvSpPr>
-        <p:spPr bwMode="auto">
-          <a:xfrm>
-            <a:off x="4754880" y="2313432"/>
-            <a:ext cx="3657600" cy="320040"/>
-          </a:xfrm>
-          <a:prstGeom prst="rect">
-            <a:avLst/>
-          </a:prstGeom>
-          <a:noFill/>
-          <a:ln>
-            <a:noFill/>
-          </a:ln>
-        </p:spPr>
-        <p:txBody>
-          <a:bodyPr spcFirstLastPara="1" wrap="square" lIns="91425" tIns="45700" rIns="91425" bIns="45700" anchor="ctr" anchorCtr="0">
-            <a:noAutofit/>
-          </a:bodyPr>
-          <a:lstStyle/>
-          <a:p>
-            <a:pPr marL="0" marR="0" lvl="0" indent="0" algn="l" rtl="0">
-              <a:spcBef>
-                <a:spcPts val="0"/>
-              </a:spcBef>
-              <a:spcAft>
-                <a:spcPts val="0"/>
-              </a:spcAft>
-              <a:buClr>
-                <a:srgbClr val="C0272D"/>
-              </a:buClr>
-              <a:buSzPts val="1300"/>
-              <a:buFont typeface="Calibri"/>
-              <a:buNone/>
-              <a:defRPr/>
-            </a:pPr>
-            <a:endParaRPr sz="1300" b="0" i="0" u="none" strike="noStrike" cap="none">
-              <a:solidFill>
-                <a:schemeClr val="dk1"/>
-              </a:solidFill>
-              <a:latin typeface="Calibri"/>
-              <a:ea typeface="Calibri"/>
-              <a:cs typeface="Calibri"/>
-            </a:endParaRPr>
-          </a:p>
-        </p:txBody>
-      </p:sp>
-      <p:sp>
-        <p:nvSpPr>
-          <p:cNvPr id="430051126" name="Google Shape;248;p14"/>
-          <p:cNvSpPr/>
-          <p:nvPr/>
-        </p:nvSpPr>
-        <p:spPr bwMode="auto">
-          <a:xfrm>
-            <a:off x="4754880" y="2651760"/>
-            <a:ext cx="3749040" cy="841248"/>
-          </a:xfrm>
-          <a:prstGeom prst="rect">
-            <a:avLst/>
-          </a:prstGeom>
-          <a:noFill/>
-          <a:ln>
-            <a:noFill/>
-          </a:ln>
-        </p:spPr>
-        <p:txBody>
-          <a:bodyPr spcFirstLastPara="1" wrap="square" lIns="91425" tIns="45700" rIns="91425" bIns="45700" anchor="ctr" anchorCtr="0">
-            <a:noAutofit/>
-          </a:bodyPr>
-          <a:lstStyle/>
-          <a:p>
-            <a:pPr marL="0" marR="0" lvl="0" indent="0" algn="l" rtl="0">
-              <a:spcBef>
-                <a:spcPts val="0"/>
-              </a:spcBef>
-              <a:spcAft>
-                <a:spcPts val="0"/>
-              </a:spcAft>
-              <a:buClr>
-                <a:srgbClr val="1A1A1A"/>
-              </a:buClr>
-              <a:buSzPts val="1200"/>
-              <a:buFont typeface="Calibri"/>
-              <a:buNone/>
-              <a:defRPr/>
-            </a:pPr>
-            <a:endParaRPr sz="1200" b="0" i="0" u="none" strike="noStrike" cap="none">
-              <a:solidFill>
-                <a:schemeClr val="dk1"/>
-              </a:solidFill>
-              <a:latin typeface="Calibri"/>
-              <a:ea typeface="Calibri"/>
-              <a:cs typeface="Calibri"/>
-            </a:endParaRPr>
-          </a:p>
-        </p:txBody>
-      </p:sp>
-      <p:sp>
-        <p:nvSpPr>
-          <p:cNvPr id="46375997" name="Google Shape;200;p13"/>
-          <p:cNvSpPr/>
-          <p:nvPr/>
-        </p:nvSpPr>
-        <p:spPr bwMode="auto">
-          <a:xfrm flipH="0" flipV="0">
-            <a:off x="411479" y="3844847"/>
-            <a:ext cx="8229600" cy="1092912"/>
-          </a:xfrm>
-          <a:prstGeom prst="rect">
-            <a:avLst/>
-          </a:prstGeom>
-          <a:solidFill>
-            <a:srgbClr val="C0272D"/>
-          </a:solidFill>
-          <a:ln w="12700" cap="flat" cmpd="sng">
-            <a:solidFill>
-              <a:srgbClr val="C0272D"/>
-            </a:solidFill>
-            <a:prstDash val="solid"/>
-            <a:round/>
-            <a:headEnd type="none" w="sm" len="sm"/>
-            <a:tailEnd type="none" w="sm" len="sm"/>
-          </a:ln>
-        </p:spPr>
-        <p:txBody>
-          <a:bodyPr spcFirstLastPara="1" wrap="square" lIns="91423" tIns="91423" rIns="91423" bIns="91423" anchor="ctr" anchorCtr="0">
-            <a:noAutofit/>
-          </a:bodyPr>
-          <a:lstStyle/>
-          <a:p>
-            <a:pPr>
-              <a:defRPr/>
-            </a:pPr>
-            <a:endParaRPr lang="ru-RU" sz="1400" b="1" i="0" u="none" strike="noStrike" cap="none" spc="0">
-              <a:solidFill>
-                <a:srgbClr val="FFFFFF"/>
-              </a:solidFill>
-              <a:latin typeface="Calibri"/>
-              <a:cs typeface="Calibri"/>
-            </a:endParaRPr>
-          </a:p>
-        </p:txBody>
-      </p:sp>
+        </p:spPr>
+      </p:pic>
     </p:spTree>
   </p:cSld>
   <p:clrMapOvr>
@@ -7689,15 +7573,14 @@
       </p:grpSpPr>
       <p:pic>
         <p:nvPicPr>
-          <p:cNvPr id="1125489574" name="Google Shape;280;p16" descr="/home/claude/logo_300spbu.png"/>
-          <p:cNvPicPr/>
+          <p:cNvPr id="590198147" name="Picture 1" descr="image12.png"/>
+          <p:cNvPicPr>
+            <a:picLocks noChangeAspect="1"/>
+          </p:cNvPicPr>
           <p:nvPr/>
         </p:nvPicPr>
         <p:blipFill rotWithShape="1">
-          <a:blip r:embed="rId3">
-            <a:alphaModFix/>
-          </a:blip>
-          <a:srcRect l="0" t="0" r="0" b="0"/>
+          <a:blip r:embed="rId3"/>
           <a:stretch/>
         </p:blipFill>
         <p:spPr bwMode="auto">
@@ -7708,46 +7591,31 @@
           <a:prstGeom prst="rect">
             <a:avLst/>
           </a:prstGeom>
+        </p:spPr>
+      </p:pic>
+      <p:sp>
+        <p:nvSpPr>
+          <p:cNvPr id="603991207" name="TextBox 3"/>
+          <p:cNvSpPr txBox="1"/>
+          <p:nvPr/>
+        </p:nvSpPr>
+        <p:spPr bwMode="auto">
+          <a:xfrm>
+            <a:off x="8641080" y="4800600"/>
+            <a:ext cx="365760" cy="228600"/>
+          </a:xfrm>
+          <a:prstGeom prst="rect">
+            <a:avLst/>
+          </a:prstGeom>
           <a:noFill/>
-          <a:ln>
-            <a:noFill/>
-          </a:ln>
-        </p:spPr>
-      </p:pic>
-      <p:sp>
-        <p:nvSpPr>
-          <p:cNvPr id="62847711" name="Google Shape;281;p16"/>
-          <p:cNvSpPr/>
-          <p:nvPr/>
-        </p:nvSpPr>
-        <p:spPr bwMode="auto">
-          <a:xfrm>
-            <a:off x="8686800" y="4846320"/>
-            <a:ext cx="274320" cy="182880"/>
-          </a:xfrm>
-          <a:prstGeom prst="rect">
-            <a:avLst/>
-          </a:prstGeom>
-          <a:solidFill>
-            <a:srgbClr val="C0272D"/>
-          </a:solidFill>
-          <a:ln w="12700" cap="flat" cmpd="sng">
-            <a:solidFill>
-              <a:srgbClr val="C0272D"/>
-            </a:solidFill>
-            <a:prstDash val="solid"/>
-            <a:round/>
-            <a:headEnd type="none" w="sm" len="sm"/>
-            <a:tailEnd type="none" w="sm" len="sm"/>
-          </a:ln>
         </p:spPr>
         <p:txBody>
-          <a:bodyPr spcFirstLastPara="1" wrap="square" lIns="91425" tIns="91425" rIns="91425" bIns="91425" anchor="ctr" anchorCtr="0">
+          <a:bodyPr wrap="square" lIns="91422" tIns="45698" rIns="91422" bIns="45698" anchor="ctr">
             <a:noAutofit/>
           </a:bodyPr>
           <a:lstStyle/>
           <a:p>
-            <a:pPr marL="0" lvl="0" indent="0" algn="l" rtl="0">
+            <a:pPr marL="0" marR="0" indent="0" algn="ctr" rtl="0">
               <a:spcBef>
                 <a:spcPts val="0"/>
               </a:spcBef>
@@ -7757,39 +7625,44 @@
               <a:buNone/>
               <a:defRPr/>
             </a:pPr>
-            <a:endParaRPr>
-              <a:latin typeface="Open Sans"/>
-              <a:cs typeface="Open Sans"/>
-            </a:endParaRPr>
+            <a:r>
+              <a:rPr sz="1000" b="1" i="0">
+                <a:solidFill>
+                  <a:srgbClr val="FFFFFF"/>
+                </a:solidFill>
+                <a:latin typeface="Calibri"/>
+                <a:ea typeface="Calibri"/>
+                <a:cs typeface="Calibri"/>
+              </a:rPr>
+              <a:t>2</a:t>
+            </a:r>
+            <a:endParaRPr/>
           </a:p>
         </p:txBody>
       </p:sp>
       <p:sp>
         <p:nvSpPr>
-          <p:cNvPr id="608598764" name="Google Shape;282;p16"/>
-          <p:cNvSpPr/>
+          <p:cNvPr id="2124473544" name="TextBox 4"/>
+          <p:cNvSpPr txBox="1"/>
           <p:nvPr/>
         </p:nvSpPr>
         <p:spPr bwMode="auto">
-          <a:xfrm>
-            <a:off x="8641080" y="4800600"/>
-            <a:ext cx="365760" cy="228600"/>
+          <a:xfrm flipH="0" flipV="0">
+            <a:off x="322228" y="182880"/>
+            <a:ext cx="7907368" cy="502920"/>
           </a:xfrm>
           <a:prstGeom prst="rect">
             <a:avLst/>
           </a:prstGeom>
           <a:noFill/>
-          <a:ln>
-            <a:noFill/>
-          </a:ln>
         </p:spPr>
         <p:txBody>
-          <a:bodyPr spcFirstLastPara="1" wrap="square" lIns="0" tIns="0" rIns="0" bIns="0" anchor="ctr" anchorCtr="0">
+          <a:bodyPr wrap="square" lIns="91422" tIns="45696" rIns="91422" bIns="45696" anchor="ctr">
             <a:noAutofit/>
           </a:bodyPr>
           <a:lstStyle/>
           <a:p>
-            <a:pPr marL="0" marR="0" lvl="0" indent="0" algn="ctr" rtl="0">
+            <a:pPr marL="0" marR="0" lvl="0" indent="0" algn="l" rtl="0">
               <a:spcBef>
                 <a:spcPts val="0"/>
               </a:spcBef>
@@ -7797,36 +7670,60 @@
                 <a:spcPts val="0"/>
               </a:spcAft>
               <a:buClr>
-                <a:srgbClr val="FFFFFF"/>
+                <a:srgbClr val="C0272D"/>
               </a:buClr>
-              <a:buSzPts val="1000"/>
+              <a:buSzPts val="2800"/>
               <a:buFont typeface="Calibri"/>
               <a:buNone/>
               <a:defRPr/>
             </a:pPr>
             <a:r>
-              <a:rPr lang="en-US" sz="1000" b="1" i="0" u="none" strike="noStrike" cap="none">
-                <a:solidFill>
-                  <a:srgbClr val="FFFFFF"/>
-                </a:solidFill>
-                <a:latin typeface="Open Sans"/>
-                <a:ea typeface="Open Sans"/>
-                <a:cs typeface="Open Sans"/>
-              </a:rPr>
-              <a:t>1</a:t>
-            </a:r>
-            <a:r>
-              <a:rPr lang="ru-RU" sz="1000" b="1" i="0" u="none" strike="noStrike" cap="none">
-                <a:solidFill>
-                  <a:srgbClr val="FFFFFF"/>
-                </a:solidFill>
-                <a:latin typeface="Open Sans"/>
-                <a:ea typeface="Open Sans"/>
-                <a:cs typeface="Open Sans"/>
-              </a:rPr>
-              <a:t>2</a:t>
-            </a:r>
-            <a:endParaRPr sz="1000" b="0" i="0" u="none" strike="noStrike" cap="none">
+              <a:rPr lang="ru-RU" sz="2000" b="1" i="0" u="none" strike="noStrike" cap="none" spc="0">
+                <a:solidFill>
+                  <a:srgbClr val="C0272D"/>
+                </a:solidFill>
+                <a:latin typeface="Open Sans"/>
+                <a:ea typeface="Open Sans"/>
+                <a:cs typeface="Open Sans"/>
+              </a:rPr>
+              <a:t>Введение в хаотические бильярды </a:t>
+            </a:r>
+            <a:endParaRPr lang="ru-RU" sz="2000" b="1" i="0" u="none" strike="noStrike" cap="none" spc="0">
+              <a:solidFill>
+                <a:srgbClr val="C0272D"/>
+              </a:solidFill>
+              <a:latin typeface="Times New Roman"/>
+              <a:cs typeface="Times New Roman"/>
+            </a:endParaRPr>
+          </a:p>
+          <a:p>
+            <a:pPr marL="0" marR="0" lvl="0" indent="0" algn="l" rtl="0">
+              <a:spcBef>
+                <a:spcPts val="0"/>
+              </a:spcBef>
+              <a:spcAft>
+                <a:spcPts val="0"/>
+              </a:spcAft>
+              <a:buClr>
+                <a:srgbClr val="C0272D"/>
+              </a:buClr>
+              <a:buSzPts val="2800"/>
+              <a:buFont typeface="Calibri"/>
+              <a:buNone/>
+              <a:defRPr/>
+            </a:pPr>
+            <a:r>
+              <a:rPr lang="ru-RU" sz="2000" b="1" i="0" u="none" strike="noStrike" cap="none" spc="0">
+                <a:solidFill>
+                  <a:srgbClr val="C0272D"/>
+                </a:solidFill>
+                <a:latin typeface="Open Sans"/>
+                <a:ea typeface="Open Sans"/>
+                <a:cs typeface="Open Sans"/>
+              </a:rPr>
+              <a:t>на примере пинбольного автомата.</a:t>
+            </a:r>
+            <a:endParaRPr sz="2000" b="0" i="0" u="none" strike="noStrike" cap="none">
               <a:solidFill>
                 <a:schemeClr val="dk1"/>
               </a:solidFill>
@@ -7838,75 +7735,338 @@
       </p:sp>
       <p:sp>
         <p:nvSpPr>
-          <p:cNvPr id="98139894" name="Google Shape;283;p16"/>
+          <p:cNvPr id="1410676996" name="Rectangle 5"/>
           <p:cNvSpPr/>
           <p:nvPr/>
         </p:nvSpPr>
         <p:spPr bwMode="auto">
-          <a:xfrm>
-            <a:off x="594360" y="182880"/>
-            <a:ext cx="7315200" cy="502920"/>
+          <a:xfrm flipH="0" flipV="0">
+            <a:off x="249077" y="137160"/>
+            <a:ext cx="73152" cy="548639"/>
+          </a:xfrm>
+          <a:prstGeom prst="rect">
+            <a:avLst/>
+          </a:prstGeom>
+          <a:solidFill>
+            <a:srgbClr val="C0272D"/>
+          </a:solidFill>
+          <a:ln w="12700">
+            <a:solidFill>
+              <a:srgbClr val="C0272D"/>
+            </a:solidFill>
+            <a:prstDash val="solid"/>
+          </a:ln>
+        </p:spPr>
+        <p:txBody>
+          <a:bodyPr rtlCol="0" anchor="ctr"/>
+          <a:lstStyle/>
+          <a:p>
+            <a:pPr algn="ctr">
+              <a:defRPr/>
+            </a:pPr>
+            <a:endParaRPr/>
+          </a:p>
+        </p:txBody>
+      </p:sp>
+      <p:sp>
+        <p:nvSpPr>
+          <p:cNvPr id="978620904" name="Rectangle 6"/>
+          <p:cNvSpPr/>
+          <p:nvPr/>
+        </p:nvSpPr>
+        <p:spPr bwMode="auto">
+          <a:xfrm flipH="0" flipV="0">
+            <a:off x="249076" y="839556"/>
+            <a:ext cx="4383164" cy="4189641"/>
+          </a:xfrm>
+          <a:prstGeom prst="rect">
+            <a:avLst/>
+          </a:prstGeom>
+          <a:solidFill>
+            <a:srgbClr val="E8D5D5"/>
+          </a:solidFill>
+          <a:ln w="12700">
+            <a:solidFill>
+              <a:srgbClr val="D8B8B8"/>
+            </a:solidFill>
+            <a:prstDash val="solid"/>
+          </a:ln>
+        </p:spPr>
+        <p:txBody>
+          <a:bodyPr rtlCol="0" anchor="ctr"/>
+          <a:lstStyle/>
+          <a:p>
+            <a:pPr algn="ctr">
+              <a:defRPr/>
+            </a:pPr>
+            <a:endParaRPr/>
+          </a:p>
+        </p:txBody>
+      </p:sp>
+      <p:sp>
+        <p:nvSpPr>
+          <p:cNvPr id="612952404" name=""/>
+          <p:cNvSpPr txBox="1"/>
+          <p:nvPr/>
+        </p:nvSpPr>
+        <p:spPr bwMode="auto">
+          <a:xfrm rot="0" flipH="0" flipV="0">
+            <a:off x="249076" y="839556"/>
+            <a:ext cx="4383884" cy="4145639"/>
           </a:xfrm>
           <a:prstGeom prst="rect">
             <a:avLst/>
           </a:prstGeom>
           <a:noFill/>
-          <a:ln>
-            <a:noFill/>
-          </a:ln>
         </p:spPr>
         <p:txBody>
-          <a:bodyPr spcFirstLastPara="1" wrap="square" lIns="91425" tIns="45700" rIns="91425" bIns="45700" anchor="ctr" anchorCtr="0">
-            <a:noAutofit/>
+          <a:bodyPr vertOverflow="overflow" horzOverflow="overflow" vert="horz" wrap="square" lIns="91440" tIns="45720" rIns="91440" bIns="45720" numCol="1" spcCol="0" rtlCol="0" fromWordArt="0" anchor="t" anchorCtr="0" forceAA="0" upright="0" compatLnSpc="0">
+            <a:spAutoFit/>
           </a:bodyPr>
-          <a:lstStyle/>
-          <a:p>
-            <a:pPr marL="0" marR="0" lvl="0" indent="0" algn="l" rtl="0">
-              <a:spcBef>
-                <a:spcPts val="0"/>
-              </a:spcBef>
-              <a:spcAft>
-                <a:spcPts val="0"/>
-              </a:spcAft>
-              <a:buClr>
-                <a:srgbClr val="C0272D"/>
-              </a:buClr>
-              <a:buSzPts val="2600"/>
-              <a:buFont typeface="Calibri"/>
-              <a:buNone/>
-              <a:defRPr/>
-            </a:pPr>
-            <a:r>
-              <a:rPr lang="ru-RU" sz="2600" b="1" i="0" u="none" strike="noStrike" cap="none">
-                <a:solidFill>
-                  <a:srgbClr val="C0272D"/>
-                </a:solidFill>
-                <a:latin typeface="Open Sans"/>
-                <a:ea typeface="Open Sans"/>
-                <a:cs typeface="Open Sans"/>
-              </a:rPr>
-              <a:t>Выводы.</a:t>
-            </a:r>
-            <a:endParaRPr sz="2600" b="0" i="0" u="none" strike="noStrike" cap="none">
+          <a:p>
+            <a:pPr indent="274320">
+              <a:defRPr/>
+            </a:pPr>
+            <a:r>
+              <a:rPr lang="ru-RU" sz="1400" b="0" i="0" u="none" strike="noStrike" cap="none" spc="0">
+                <a:solidFill>
+                  <a:srgbClr val="000000"/>
+                </a:solidFill>
+                <a:latin typeface="Open Sans"/>
+                <a:ea typeface="Open Sans"/>
+                <a:cs typeface="Open Sans"/>
+              </a:rPr>
+              <a:t>Прямоугольный стол с установленными на нем круглыми отбойниками является классическим примером </a:t>
+            </a:r>
+            <a:r>
+              <a:rPr lang="ru-RU" sz="1400" b="1" i="0" u="none" strike="noStrike" cap="none" spc="0">
+                <a:solidFill>
+                  <a:srgbClr val="000000"/>
+                </a:solidFill>
+                <a:latin typeface="Open Sans"/>
+                <a:ea typeface="Open Sans"/>
+                <a:cs typeface="Open Sans"/>
+              </a:rPr>
+              <a:t>хаотического бильярда</a:t>
+            </a:r>
+            <a:r>
+              <a:rPr lang="ru-RU" sz="1400" b="0" i="0" u="none" strike="noStrike" cap="none" spc="0">
+                <a:solidFill>
+                  <a:srgbClr val="000000"/>
+                </a:solidFill>
+                <a:latin typeface="Open Sans"/>
+                <a:ea typeface="Open Sans"/>
+                <a:cs typeface="Open Sans"/>
+              </a:rPr>
+              <a:t>. Движение бильярдной частицы на таком столе </a:t>
+            </a:r>
+            <a:r>
+              <a:rPr lang="ru-RU" sz="1400" b="1" i="0" u="none" strike="noStrike" cap="none" spc="0">
+                <a:solidFill>
+                  <a:srgbClr val="000000"/>
+                </a:solidFill>
+                <a:latin typeface="Open Sans"/>
+                <a:ea typeface="Open Sans"/>
+                <a:cs typeface="Open Sans"/>
+              </a:rPr>
+              <a:t>сложно и непредсказуемо</a:t>
+            </a:r>
+            <a:r>
+              <a:rPr lang="ru-RU" sz="1400" b="0" i="0" u="none" strike="noStrike" cap="none" spc="0">
+                <a:solidFill>
+                  <a:srgbClr val="000000"/>
+                </a:solidFill>
+                <a:latin typeface="Open Sans"/>
+                <a:ea typeface="Open Sans"/>
+                <a:cs typeface="Open Sans"/>
+              </a:rPr>
+              <a:t>, что является характерной чертой хаотических бильярдов.</a:t>
+            </a:r>
+            <a:endParaRPr sz="1400" b="0" i="0" u="none" strike="noStrike" cap="none" spc="0">
               <a:solidFill>
-                <a:schemeClr val="dk1"/>
+                <a:srgbClr val="000000"/>
               </a:solidFill>
               <a:latin typeface="Open Sans"/>
               <a:cs typeface="Open Sans"/>
             </a:endParaRPr>
           </a:p>
+          <a:p>
+            <a:pPr indent="274320">
+              <a:defRPr/>
+            </a:pPr>
+            <a:r>
+              <a:rPr lang="ru-RU" sz="1400" b="0" i="0" u="none" strike="noStrike" cap="none" spc="0">
+                <a:solidFill>
+                  <a:srgbClr val="000000"/>
+                </a:solidFill>
+                <a:latin typeface="Open Sans"/>
+                <a:ea typeface="Open Sans"/>
+                <a:cs typeface="Open Sans"/>
+              </a:rPr>
+              <a:t>Кроме того, </a:t>
+            </a:r>
+            <a:r>
+              <a:rPr lang="ru-RU" sz="1400" b="1" i="0" u="none" strike="noStrike" cap="none" spc="0">
+                <a:solidFill>
+                  <a:srgbClr val="000000"/>
+                </a:solidFill>
+                <a:latin typeface="Open Sans"/>
+                <a:ea typeface="Open Sans"/>
+                <a:cs typeface="Open Sans"/>
+              </a:rPr>
+              <a:t>незначительные </a:t>
+            </a:r>
+            <a:r>
+              <a:rPr lang="ru-RU" sz="1400" b="0" i="0" u="none" strike="noStrike" cap="none" spc="0">
+                <a:solidFill>
+                  <a:srgbClr val="000000"/>
+                </a:solidFill>
+                <a:latin typeface="Open Sans"/>
+                <a:ea typeface="Open Sans"/>
+                <a:cs typeface="Open Sans"/>
+              </a:rPr>
+              <a:t>изменения начального положения и/или направления скорости частицы быстро приводят к </a:t>
+            </a:r>
+            <a:r>
+              <a:rPr lang="ru-RU" sz="1400" b="1" i="0" u="none" strike="noStrike" cap="none" spc="0">
+                <a:solidFill>
+                  <a:srgbClr val="000000"/>
+                </a:solidFill>
+                <a:latin typeface="Open Sans"/>
+                <a:ea typeface="Open Sans"/>
+                <a:cs typeface="Open Sans"/>
+              </a:rPr>
+              <a:t>большим отклонениям</a:t>
+            </a:r>
+            <a:r>
+              <a:rPr lang="ru-RU" sz="1400" b="0" i="0" u="none" strike="noStrike" cap="none" spc="0">
+                <a:solidFill>
+                  <a:srgbClr val="000000"/>
+                </a:solidFill>
+                <a:latin typeface="Open Sans"/>
+                <a:ea typeface="Open Sans"/>
+                <a:cs typeface="Open Sans"/>
+              </a:rPr>
+              <a:t>, поэтому всего после нескольких столкновений с отбойниками две траектории, изначально находившиеся очень близко друг к другу, разойдутся, как если бы они были не связаны. Эта нестабильность (также известная как </a:t>
+            </a:r>
+            <a:r>
+              <a:rPr lang="ru-RU" sz="1400" b="1" i="0" u="none" strike="noStrike" cap="none" spc="0">
+                <a:solidFill>
+                  <a:srgbClr val="000000"/>
+                </a:solidFill>
+                <a:latin typeface="Open Sans"/>
+                <a:ea typeface="Open Sans"/>
+                <a:cs typeface="Open Sans"/>
+              </a:rPr>
+              <a:t>чувствительность к начальным условиям</a:t>
+            </a:r>
+            <a:r>
+              <a:rPr lang="ru-RU" sz="1400" b="0" i="0" u="none" strike="noStrike" cap="none" spc="0">
+                <a:solidFill>
+                  <a:srgbClr val="000000"/>
+                </a:solidFill>
+                <a:latin typeface="Open Sans"/>
+                <a:ea typeface="Open Sans"/>
+                <a:cs typeface="Open Sans"/>
+              </a:rPr>
+              <a:t>) является еще одной характерной чертой хаотических бильярдов (и хаотической динамики в целом).</a:t>
+            </a:r>
+            <a:endParaRPr sz="1400" b="0" i="0" u="none" strike="noStrike" cap="none" spc="0">
+              <a:solidFill>
+                <a:srgbClr val="000000"/>
+              </a:solidFill>
+              <a:latin typeface="Open Sans"/>
+              <a:cs typeface="Open Sans"/>
+            </a:endParaRPr>
+          </a:p>
         </p:txBody>
       </p:sp>
       <p:sp>
         <p:nvSpPr>
-          <p:cNvPr id="2099121596" name="Google Shape;284;p16"/>
+          <p:cNvPr id="1990067053" name=""/>
+          <p:cNvSpPr txBox="1"/>
+          <p:nvPr/>
+        </p:nvSpPr>
+        <p:spPr bwMode="auto">
+          <a:xfrm rot="0" flipH="0" flipV="0">
+            <a:off x="4750623" y="873121"/>
+            <a:ext cx="4222802" cy="305158"/>
+          </a:xfrm>
+          <a:prstGeom prst="rect">
+            <a:avLst/>
+          </a:prstGeom>
+          <a:noFill/>
+        </p:spPr>
+        <p:txBody>
+          <a:bodyPr vertOverflow="overflow" horzOverflow="overflow" vert="horz" wrap="square" lIns="91440" tIns="45720" rIns="91440" bIns="45720" numCol="1" spcCol="0" rtlCol="0" fromWordArt="0" anchor="t" anchorCtr="0" forceAA="0" upright="0" compatLnSpc="0">
+            <a:spAutoFit/>
+          </a:bodyPr>
+          <a:p>
+            <a:pPr>
+              <a:defRPr/>
+            </a:pPr>
+            <a:endParaRPr/>
+          </a:p>
+        </p:txBody>
+      </p:sp>
+      <p:sp>
+        <p:nvSpPr>
+          <p:cNvPr id="1271068532" name=""/>
+          <p:cNvSpPr txBox="1"/>
+          <p:nvPr/>
+        </p:nvSpPr>
+        <p:spPr bwMode="auto">
+          <a:xfrm rot="0" flipH="0" flipV="0">
+            <a:off x="4571997" y="846666"/>
+            <a:ext cx="4563867" cy="305159"/>
+          </a:xfrm>
+          <a:prstGeom prst="rect">
+            <a:avLst/>
+          </a:prstGeom>
+          <a:noFill/>
+        </p:spPr>
+        <p:txBody>
+          <a:bodyPr vertOverflow="overflow" horzOverflow="overflow" vert="horz" wrap="square" lIns="91440" tIns="45720" rIns="91440" bIns="45720" numCol="1" spcCol="0" rtlCol="0" fromWordArt="0" anchor="t" anchorCtr="0" forceAA="0" upright="0" compatLnSpc="0">
+            <a:spAutoFit/>
+          </a:bodyPr>
+          <a:p>
+            <a:pPr algn="ctr">
+              <a:defRPr/>
+            </a:pPr>
+            <a:r>
+              <a:rPr b="1">
+                <a:solidFill>
+                  <a:srgbClr val="C00000"/>
+                </a:solidFill>
+              </a:rPr>
+              <a:t>Визуализация расхождения траекторий</a:t>
+            </a:r>
+            <a:r>
+              <a:rPr b="1">
+                <a:solidFill>
+                  <a:srgbClr val="C00000"/>
+                </a:solidFill>
+              </a:rPr>
+              <a:t>:</a:t>
+            </a:r>
+            <a:endParaRPr b="1">
+              <a:solidFill>
+                <a:srgbClr val="C00000"/>
+              </a:solidFill>
+            </a:endParaRPr>
+          </a:p>
+        </p:txBody>
+      </p:sp>
+      <p:sp>
+        <p:nvSpPr>
+          <p:cNvPr id="1493949735" name="Rectangle 2"/>
           <p:cNvSpPr/>
           <p:nvPr/>
         </p:nvSpPr>
         <p:spPr bwMode="auto">
           <a:xfrm>
-            <a:off x="457200" y="201168"/>
-            <a:ext cx="73152" cy="457200"/>
+            <a:off x="8839198" y="4952998"/>
+            <a:ext cx="274320" cy="182880"/>
           </a:xfrm>
           <a:prstGeom prst="rect">
             <a:avLst/>
@@ -7914,23 +8074,47 @@
           <a:solidFill>
             <a:srgbClr val="C0272D"/>
           </a:solidFill>
-          <a:ln w="12700" cap="flat" cmpd="sng">
+          <a:ln w="12700">
             <a:solidFill>
               <a:srgbClr val="C0272D"/>
             </a:solidFill>
             <a:prstDash val="solid"/>
-            <a:round/>
-            <a:headEnd type="none" w="sm" len="sm"/>
-            <a:tailEnd type="none" w="sm" len="sm"/>
           </a:ln>
         </p:spPr>
         <p:txBody>
-          <a:bodyPr spcFirstLastPara="1" wrap="square" lIns="91425" tIns="91425" rIns="91425" bIns="91425" anchor="ctr" anchorCtr="0">
+          <a:bodyPr rtlCol="0" anchor="ctr"/>
+          <a:lstStyle/>
+          <a:p>
+            <a:pPr algn="ctr">
+              <a:defRPr/>
+            </a:pPr>
+            <a:endParaRPr/>
+          </a:p>
+        </p:txBody>
+      </p:sp>
+      <p:sp>
+        <p:nvSpPr>
+          <p:cNvPr id="1576767613" name="TextBox 3"/>
+          <p:cNvSpPr txBox="1"/>
+          <p:nvPr/>
+        </p:nvSpPr>
+        <p:spPr bwMode="auto">
+          <a:xfrm>
+            <a:off x="8793478" y="4907278"/>
+            <a:ext cx="365760" cy="228600"/>
+          </a:xfrm>
+          <a:prstGeom prst="rect">
+            <a:avLst/>
+          </a:prstGeom>
+          <a:noFill/>
+        </p:spPr>
+        <p:txBody>
+          <a:bodyPr wrap="square" lIns="91422" tIns="45696" rIns="91422" bIns="45696" anchor="ctr">
             <a:noAutofit/>
           </a:bodyPr>
           <a:lstStyle/>
           <a:p>
-            <a:pPr marL="0" lvl="0" indent="0" algn="l" rtl="0">
+            <a:pPr marL="0" marR="0" indent="0" algn="ctr" rtl="0">
               <a:spcBef>
                 <a:spcPts val="0"/>
               </a:spcBef>
@@ -7940,918 +8124,110 @@
               <a:buNone/>
               <a:defRPr/>
             </a:pPr>
-            <a:endParaRPr>
+            <a:r>
+              <a:rPr sz="1000" b="1" i="0">
+                <a:solidFill>
+                  <a:srgbClr val="FFFFFF"/>
+                </a:solidFill>
+                <a:latin typeface="Calibri"/>
+                <a:ea typeface="Calibri"/>
+                <a:cs typeface="Calibri"/>
+              </a:rPr>
+              <a:t>3</a:t>
+            </a:r>
+            <a:endParaRPr/>
+          </a:p>
+        </p:txBody>
+      </p:sp>
+      <p:sp>
+        <p:nvSpPr>
+          <p:cNvPr id="1810244317" name=""/>
+          <p:cNvSpPr txBox="1"/>
+          <p:nvPr/>
+        </p:nvSpPr>
+        <p:spPr bwMode="auto">
+          <a:xfrm rot="0" flipH="0" flipV="0">
+            <a:off x="4763620" y="4061810"/>
+            <a:ext cx="4343965" cy="457559"/>
+          </a:xfrm>
+          <a:prstGeom prst="rect">
+            <a:avLst/>
+          </a:prstGeom>
+          <a:noFill/>
+        </p:spPr>
+        <p:txBody>
+          <a:bodyPr vertOverflow="overflow" horzOverflow="overflow" vert="horz" wrap="square" lIns="91440" tIns="45720" rIns="91440" bIns="45720" numCol="1" spcCol="0" rtlCol="0" fromWordArt="0" anchor="t" anchorCtr="0" forceAA="0" upright="0" compatLnSpc="0">
+            <a:spAutoFit/>
+          </a:bodyPr>
+          <a:p>
+            <a:pPr>
+              <a:defRPr/>
+            </a:pPr>
+            <a:r>
+              <a:rPr sz="1200">
+                <a:highlight>
+                  <a:srgbClr val="FFFF00"/>
+                </a:highlight>
+                <a:latin typeface="Open Sans"/>
+                <a:ea typeface="Open Sans"/>
+                <a:cs typeface="Open Sans"/>
+              </a:rPr>
+              <a:t>Анимация расхождения траекторий</a:t>
+            </a:r>
+            <a:r>
+              <a:rPr lang="ru-RU" sz="1200">
+                <a:highlight>
+                  <a:srgbClr val="FFFF00"/>
+                </a:highlight>
+                <a:latin typeface="Open Sans"/>
+                <a:ea typeface="Open Sans"/>
+                <a:cs typeface="Open Sans"/>
+              </a:rPr>
+              <a:t>. В</a:t>
+            </a:r>
+            <a:r>
+              <a:rPr sz="1200">
+                <a:highlight>
+                  <a:srgbClr val="FFFF00"/>
+                </a:highlight>
+                <a:latin typeface="Open Sans"/>
+                <a:ea typeface="Open Sans"/>
+                <a:cs typeface="Open Sans"/>
+              </a:rPr>
+              <a:t>роде похожие уже у есть, просто немного видоизменить надо</a:t>
+            </a:r>
+            <a:endParaRPr sz="1200">
+              <a:highlight>
+                <a:srgbClr val="FFFF00"/>
+              </a:highlight>
               <a:latin typeface="Open Sans"/>
               <a:cs typeface="Open Sans"/>
             </a:endParaRPr>
           </a:p>
         </p:txBody>
       </p:sp>
-      <p:sp>
-        <p:nvSpPr>
-          <p:cNvPr id="1623129105" name="Google Shape;285;p16"/>
-          <p:cNvSpPr/>
+      <p:pic>
+        <p:nvPicPr>
+          <p:cNvPr id="727094494" name=""/>
+          <p:cNvPicPr>
+            <a:picLocks noChangeAspect="1"/>
+          </p:cNvPicPr>
           <p:nvPr/>
-        </p:nvSpPr>
-        <p:spPr bwMode="auto">
-          <a:xfrm>
-            <a:off x="457200" y="822960"/>
-            <a:ext cx="8229600" cy="768096"/>
+        </p:nvPicPr>
+        <p:blipFill rotWithShape="1">
+          <a:blip r:embed="rId4"/>
+          <a:stretch/>
+        </p:blipFill>
+        <p:spPr bwMode="auto">
+          <a:xfrm flipH="0" flipV="0">
+            <a:off x="4991146" y="1280693"/>
+            <a:ext cx="3848052" cy="2582113"/>
           </a:xfrm>
           <a:prstGeom prst="rect">
             <a:avLst/>
           </a:prstGeom>
-          <a:solidFill>
-            <a:srgbClr val="F5F5F5"/>
-          </a:solidFill>
-          <a:ln w="12700" cap="flat" cmpd="sng">
-            <a:solidFill>
-              <a:srgbClr val="E0E0E0"/>
-            </a:solidFill>
-            <a:prstDash val="solid"/>
-            <a:round/>
-            <a:headEnd type="none" w="sm" len="sm"/>
-            <a:tailEnd type="none" w="sm" len="sm"/>
-          </a:ln>
-        </p:spPr>
-        <p:txBody>
-          <a:bodyPr spcFirstLastPara="1" wrap="square" lIns="91425" tIns="91425" rIns="91425" bIns="91425" anchor="ctr" anchorCtr="0">
-            <a:noAutofit/>
-          </a:bodyPr>
-          <a:lstStyle/>
-          <a:p>
-            <a:pPr marL="0" lvl="0" indent="0" algn="l" rtl="0">
-              <a:spcBef>
-                <a:spcPts val="0"/>
-              </a:spcBef>
-              <a:spcAft>
-                <a:spcPts val="0"/>
-              </a:spcAft>
-              <a:buNone/>
-              <a:defRPr/>
-            </a:pPr>
-            <a:endParaRPr>
-              <a:latin typeface="Open Sans"/>
-              <a:cs typeface="Open Sans"/>
-            </a:endParaRPr>
-          </a:p>
-        </p:txBody>
-      </p:sp>
-      <p:sp>
-        <p:nvSpPr>
-          <p:cNvPr id="748528525" name="Google Shape;286;p16"/>
-          <p:cNvSpPr/>
-          <p:nvPr/>
-        </p:nvSpPr>
-        <p:spPr bwMode="auto">
-          <a:xfrm>
-            <a:off x="457200" y="822960"/>
-            <a:ext cx="411480" cy="768096"/>
-          </a:xfrm>
-          <a:prstGeom prst="rect">
-            <a:avLst/>
-          </a:prstGeom>
-          <a:solidFill>
-            <a:srgbClr val="C0272D"/>
-          </a:solidFill>
-          <a:ln w="12700" cap="flat" cmpd="sng">
-            <a:solidFill>
-              <a:srgbClr val="C0272D"/>
-            </a:solidFill>
-            <a:prstDash val="solid"/>
-            <a:round/>
-            <a:headEnd type="none" w="sm" len="sm"/>
-            <a:tailEnd type="none" w="sm" len="sm"/>
-          </a:ln>
-        </p:spPr>
-        <p:txBody>
-          <a:bodyPr spcFirstLastPara="1" wrap="square" lIns="91425" tIns="91425" rIns="91425" bIns="91425" anchor="ctr" anchorCtr="0">
-            <a:noAutofit/>
-          </a:bodyPr>
-          <a:lstStyle/>
-          <a:p>
-            <a:pPr marL="0" lvl="0" indent="0" algn="l" rtl="0">
-              <a:spcBef>
-                <a:spcPts val="0"/>
-              </a:spcBef>
-              <a:spcAft>
-                <a:spcPts val="0"/>
-              </a:spcAft>
-              <a:buNone/>
-              <a:defRPr/>
-            </a:pPr>
-            <a:endParaRPr>
-              <a:latin typeface="Open Sans"/>
-              <a:cs typeface="Open Sans"/>
-            </a:endParaRPr>
-          </a:p>
-        </p:txBody>
-      </p:sp>
-      <p:sp>
-        <p:nvSpPr>
-          <p:cNvPr id="1196671453" name="Google Shape;287;p16"/>
-          <p:cNvSpPr/>
-          <p:nvPr/>
-        </p:nvSpPr>
-        <p:spPr bwMode="auto">
-          <a:xfrm>
-            <a:off x="457200" y="822960"/>
-            <a:ext cx="411480" cy="768096"/>
-          </a:xfrm>
-          <a:prstGeom prst="rect">
-            <a:avLst/>
-          </a:prstGeom>
-          <a:noFill/>
-          <a:ln>
-            <a:noFill/>
-          </a:ln>
-        </p:spPr>
-        <p:txBody>
-          <a:bodyPr spcFirstLastPara="1" wrap="square" lIns="91425" tIns="45700" rIns="91425" bIns="45700" anchor="ctr" anchorCtr="0">
-            <a:noAutofit/>
-          </a:bodyPr>
-          <a:lstStyle/>
-          <a:p>
-            <a:pPr marL="0" marR="0" lvl="0" indent="0" algn="ctr" rtl="0">
-              <a:spcBef>
-                <a:spcPts val="0"/>
-              </a:spcBef>
-              <a:spcAft>
-                <a:spcPts val="0"/>
-              </a:spcAft>
-              <a:buClr>
-                <a:srgbClr val="FFFFFF"/>
-              </a:buClr>
-              <a:buSzPts val="1600"/>
-              <a:buFont typeface="Calibri"/>
-              <a:buNone/>
-              <a:defRPr/>
-            </a:pPr>
-            <a:r>
-              <a:rPr lang="en-US" sz="1600" b="1" i="0" u="none" strike="noStrike" cap="none">
-                <a:solidFill>
-                  <a:srgbClr val="FFFFFF"/>
-                </a:solidFill>
-                <a:latin typeface="Open Sans"/>
-                <a:ea typeface="Open Sans"/>
-                <a:cs typeface="Open Sans"/>
-              </a:rPr>
-              <a:t>1</a:t>
-            </a:r>
-            <a:endParaRPr sz="1600" b="0" i="0" u="none" strike="noStrike" cap="none">
-              <a:solidFill>
-                <a:schemeClr val="dk1"/>
-              </a:solidFill>
-              <a:latin typeface="Open Sans"/>
-              <a:cs typeface="Open Sans"/>
-            </a:endParaRPr>
-          </a:p>
-        </p:txBody>
-      </p:sp>
-      <p:sp>
-        <p:nvSpPr>
-          <p:cNvPr id="937145458" name="Google Shape;288;p16"/>
-          <p:cNvSpPr/>
-          <p:nvPr/>
-        </p:nvSpPr>
-        <p:spPr bwMode="auto">
-          <a:xfrm>
-            <a:off x="960120" y="914400"/>
-            <a:ext cx="7589520" cy="594360"/>
-          </a:xfrm>
-          <a:prstGeom prst="rect">
-            <a:avLst/>
-          </a:prstGeom>
-          <a:noFill/>
-          <a:ln>
-            <a:noFill/>
-          </a:ln>
-        </p:spPr>
-        <p:txBody>
-          <a:bodyPr spcFirstLastPara="1" wrap="square" lIns="91425" tIns="45700" rIns="91425" bIns="45700" anchor="ctr" anchorCtr="0">
-            <a:noAutofit/>
-          </a:bodyPr>
-          <a:lstStyle/>
-          <a:p>
-            <a:pPr marL="0" marR="0" lvl="0" indent="0" algn="l" rtl="0">
-              <a:spcBef>
-                <a:spcPts val="0"/>
-              </a:spcBef>
-              <a:spcAft>
-                <a:spcPts val="0"/>
-              </a:spcAft>
-              <a:buClr>
-                <a:srgbClr val="1A1A1A"/>
-              </a:buClr>
-              <a:buSzPts val="1250"/>
-              <a:buFont typeface="Calibri"/>
-              <a:buNone/>
-              <a:defRPr/>
-            </a:pPr>
-            <a:endParaRPr sz="1250" b="0" i="0" u="none" strike="noStrike" cap="none">
-              <a:solidFill>
-                <a:schemeClr val="dk1"/>
-              </a:solidFill>
-              <a:latin typeface="Open Sans"/>
-              <a:cs typeface="Open Sans"/>
-            </a:endParaRPr>
-          </a:p>
-        </p:txBody>
-      </p:sp>
-      <p:sp>
-        <p:nvSpPr>
-          <p:cNvPr id="2134170547" name="Google Shape;289;p16"/>
-          <p:cNvSpPr/>
-          <p:nvPr/>
-        </p:nvSpPr>
-        <p:spPr bwMode="auto">
-          <a:xfrm>
-            <a:off x="457200" y="1664208"/>
-            <a:ext cx="8229600" cy="768096"/>
-          </a:xfrm>
-          <a:prstGeom prst="rect">
-            <a:avLst/>
-          </a:prstGeom>
-          <a:solidFill>
-            <a:srgbClr val="FFFFFF"/>
-          </a:solidFill>
-          <a:ln w="12700" cap="flat" cmpd="sng">
-            <a:solidFill>
-              <a:srgbClr val="E0E0E0"/>
-            </a:solidFill>
-            <a:prstDash val="solid"/>
-            <a:round/>
-            <a:headEnd type="none" w="sm" len="sm"/>
-            <a:tailEnd type="none" w="sm" len="sm"/>
-          </a:ln>
-        </p:spPr>
-        <p:txBody>
-          <a:bodyPr spcFirstLastPara="1" wrap="square" lIns="91425" tIns="91425" rIns="91425" bIns="91425" anchor="ctr" anchorCtr="0">
-            <a:noAutofit/>
-          </a:bodyPr>
-          <a:lstStyle/>
-          <a:p>
-            <a:pPr marL="0" lvl="0" indent="0" algn="l" rtl="0">
-              <a:spcBef>
-                <a:spcPts val="0"/>
-              </a:spcBef>
-              <a:spcAft>
-                <a:spcPts val="0"/>
-              </a:spcAft>
-              <a:buNone/>
-              <a:defRPr/>
-            </a:pPr>
-            <a:endParaRPr>
-              <a:latin typeface="Open Sans"/>
-              <a:cs typeface="Open Sans"/>
-            </a:endParaRPr>
-          </a:p>
-        </p:txBody>
-      </p:sp>
-      <p:sp>
-        <p:nvSpPr>
-          <p:cNvPr id="796931497" name="Google Shape;290;p16"/>
-          <p:cNvSpPr/>
-          <p:nvPr/>
-        </p:nvSpPr>
-        <p:spPr bwMode="auto">
-          <a:xfrm>
-            <a:off x="457200" y="1664208"/>
-            <a:ext cx="411480" cy="768096"/>
-          </a:xfrm>
-          <a:prstGeom prst="rect">
-            <a:avLst/>
-          </a:prstGeom>
-          <a:solidFill>
-            <a:srgbClr val="C0272D"/>
-          </a:solidFill>
-          <a:ln w="12700" cap="flat" cmpd="sng">
-            <a:solidFill>
-              <a:srgbClr val="C0272D"/>
-            </a:solidFill>
-            <a:prstDash val="solid"/>
-            <a:round/>
-            <a:headEnd type="none" w="sm" len="sm"/>
-            <a:tailEnd type="none" w="sm" len="sm"/>
-          </a:ln>
-        </p:spPr>
-        <p:txBody>
-          <a:bodyPr spcFirstLastPara="1" wrap="square" lIns="91425" tIns="91425" rIns="91425" bIns="91425" anchor="ctr" anchorCtr="0">
-            <a:noAutofit/>
-          </a:bodyPr>
-          <a:lstStyle/>
-          <a:p>
-            <a:pPr marL="0" lvl="0" indent="0" algn="l" rtl="0">
-              <a:spcBef>
-                <a:spcPts val="0"/>
-              </a:spcBef>
-              <a:spcAft>
-                <a:spcPts val="0"/>
-              </a:spcAft>
-              <a:buNone/>
-              <a:defRPr/>
-            </a:pPr>
-            <a:endParaRPr>
-              <a:latin typeface="Open Sans"/>
-              <a:cs typeface="Open Sans"/>
-            </a:endParaRPr>
-          </a:p>
-        </p:txBody>
-      </p:sp>
-      <p:sp>
-        <p:nvSpPr>
-          <p:cNvPr id="1569516820" name="Google Shape;291;p16"/>
-          <p:cNvSpPr/>
-          <p:nvPr/>
-        </p:nvSpPr>
-        <p:spPr bwMode="auto">
-          <a:xfrm>
-            <a:off x="457200" y="1664208"/>
-            <a:ext cx="411480" cy="768096"/>
-          </a:xfrm>
-          <a:prstGeom prst="rect">
-            <a:avLst/>
-          </a:prstGeom>
-          <a:noFill/>
-          <a:ln>
-            <a:noFill/>
-          </a:ln>
-        </p:spPr>
-        <p:txBody>
-          <a:bodyPr spcFirstLastPara="1" wrap="square" lIns="91425" tIns="45700" rIns="91425" bIns="45700" anchor="ctr" anchorCtr="0">
-            <a:noAutofit/>
-          </a:bodyPr>
-          <a:lstStyle/>
-          <a:p>
-            <a:pPr marL="0" marR="0" lvl="0" indent="0" algn="ctr" rtl="0">
-              <a:spcBef>
-                <a:spcPts val="0"/>
-              </a:spcBef>
-              <a:spcAft>
-                <a:spcPts val="0"/>
-              </a:spcAft>
-              <a:buClr>
-                <a:srgbClr val="FFFFFF"/>
-              </a:buClr>
-              <a:buSzPts val="1600"/>
-              <a:buFont typeface="Calibri"/>
-              <a:buNone/>
-              <a:defRPr/>
-            </a:pPr>
-            <a:r>
-              <a:rPr lang="en-US" sz="1600" b="1" i="0" u="none" strike="noStrike" cap="none">
-                <a:solidFill>
-                  <a:srgbClr val="FFFFFF"/>
-                </a:solidFill>
-                <a:latin typeface="Open Sans"/>
-                <a:ea typeface="Open Sans"/>
-                <a:cs typeface="Open Sans"/>
-              </a:rPr>
-              <a:t>2</a:t>
-            </a:r>
-            <a:endParaRPr sz="1600" b="0" i="0" u="none" strike="noStrike" cap="none">
-              <a:solidFill>
-                <a:schemeClr val="dk1"/>
-              </a:solidFill>
-              <a:latin typeface="Open Sans"/>
-              <a:cs typeface="Open Sans"/>
-            </a:endParaRPr>
-          </a:p>
-        </p:txBody>
-      </p:sp>
-      <p:sp>
-        <p:nvSpPr>
-          <p:cNvPr id="796144711" name="Google Shape;292;p16"/>
-          <p:cNvSpPr/>
-          <p:nvPr/>
-        </p:nvSpPr>
-        <p:spPr bwMode="auto">
-          <a:xfrm>
-            <a:off x="960120" y="1755648"/>
-            <a:ext cx="7589520" cy="594360"/>
-          </a:xfrm>
-          <a:prstGeom prst="rect">
-            <a:avLst/>
-          </a:prstGeom>
-          <a:noFill/>
-          <a:ln>
-            <a:noFill/>
-          </a:ln>
-        </p:spPr>
-        <p:txBody>
-          <a:bodyPr spcFirstLastPara="1" wrap="square" lIns="91425" tIns="45700" rIns="91425" bIns="45700" anchor="ctr" anchorCtr="0">
-            <a:noAutofit/>
-          </a:bodyPr>
-          <a:lstStyle/>
-          <a:p>
-            <a:pPr marL="0" marR="0" lvl="0" indent="0" algn="l" rtl="0">
-              <a:spcBef>
-                <a:spcPts val="0"/>
-              </a:spcBef>
-              <a:spcAft>
-                <a:spcPts val="0"/>
-              </a:spcAft>
-              <a:buClr>
-                <a:srgbClr val="1A1A1A"/>
-              </a:buClr>
-              <a:buSzPts val="1250"/>
-              <a:buFont typeface="Calibri"/>
-              <a:buNone/>
-              <a:defRPr/>
-            </a:pPr>
-            <a:endParaRPr sz="1250" b="0" i="0" u="none" strike="noStrike" cap="none">
-              <a:solidFill>
-                <a:schemeClr val="dk1"/>
-              </a:solidFill>
-              <a:latin typeface="Open Sans"/>
-              <a:cs typeface="Open Sans"/>
-            </a:endParaRPr>
-          </a:p>
-        </p:txBody>
-      </p:sp>
-      <p:sp>
-        <p:nvSpPr>
-          <p:cNvPr id="657493792" name="Google Shape;293;p16"/>
-          <p:cNvSpPr/>
-          <p:nvPr/>
-        </p:nvSpPr>
-        <p:spPr bwMode="auto">
-          <a:xfrm>
-            <a:off x="457200" y="2505456"/>
-            <a:ext cx="8229600" cy="768096"/>
-          </a:xfrm>
-          <a:prstGeom prst="rect">
-            <a:avLst/>
-          </a:prstGeom>
-          <a:solidFill>
-            <a:srgbClr val="F5F5F5"/>
-          </a:solidFill>
-          <a:ln w="12700" cap="flat" cmpd="sng">
-            <a:solidFill>
-              <a:srgbClr val="E0E0E0"/>
-            </a:solidFill>
-            <a:prstDash val="solid"/>
-            <a:round/>
-            <a:headEnd type="none" w="sm" len="sm"/>
-            <a:tailEnd type="none" w="sm" len="sm"/>
-          </a:ln>
-        </p:spPr>
-        <p:txBody>
-          <a:bodyPr spcFirstLastPara="1" wrap="square" lIns="91425" tIns="91425" rIns="91425" bIns="91425" anchor="ctr" anchorCtr="0">
-            <a:noAutofit/>
-          </a:bodyPr>
-          <a:lstStyle/>
-          <a:p>
-            <a:pPr marL="0" lvl="0" indent="0" algn="l" rtl="0">
-              <a:spcBef>
-                <a:spcPts val="0"/>
-              </a:spcBef>
-              <a:spcAft>
-                <a:spcPts val="0"/>
-              </a:spcAft>
-              <a:buNone/>
-              <a:defRPr/>
-            </a:pPr>
-            <a:endParaRPr>
-              <a:latin typeface="Open Sans"/>
-              <a:cs typeface="Open Sans"/>
-            </a:endParaRPr>
-          </a:p>
-        </p:txBody>
-      </p:sp>
-      <p:sp>
-        <p:nvSpPr>
-          <p:cNvPr id="1532146978" name="Google Shape;294;p16"/>
-          <p:cNvSpPr/>
-          <p:nvPr/>
-        </p:nvSpPr>
-        <p:spPr bwMode="auto">
-          <a:xfrm>
-            <a:off x="457200" y="2505456"/>
-            <a:ext cx="411480" cy="768096"/>
-          </a:xfrm>
-          <a:prstGeom prst="rect">
-            <a:avLst/>
-          </a:prstGeom>
-          <a:solidFill>
-            <a:srgbClr val="C0272D"/>
-          </a:solidFill>
-          <a:ln w="12700" cap="flat" cmpd="sng">
-            <a:solidFill>
-              <a:srgbClr val="C0272D"/>
-            </a:solidFill>
-            <a:prstDash val="solid"/>
-            <a:round/>
-            <a:headEnd type="none" w="sm" len="sm"/>
-            <a:tailEnd type="none" w="sm" len="sm"/>
-          </a:ln>
-        </p:spPr>
-        <p:txBody>
-          <a:bodyPr spcFirstLastPara="1" wrap="square" lIns="91425" tIns="91425" rIns="91425" bIns="91425" anchor="ctr" anchorCtr="0">
-            <a:noAutofit/>
-          </a:bodyPr>
-          <a:lstStyle/>
-          <a:p>
-            <a:pPr marL="0" lvl="0" indent="0" algn="l" rtl="0">
-              <a:spcBef>
-                <a:spcPts val="0"/>
-              </a:spcBef>
-              <a:spcAft>
-                <a:spcPts val="0"/>
-              </a:spcAft>
-              <a:buNone/>
-              <a:defRPr/>
-            </a:pPr>
-            <a:endParaRPr>
-              <a:latin typeface="Open Sans"/>
-              <a:cs typeface="Open Sans"/>
-            </a:endParaRPr>
-          </a:p>
-        </p:txBody>
-      </p:sp>
-      <p:sp>
-        <p:nvSpPr>
-          <p:cNvPr id="936128496" name="Google Shape;295;p16"/>
-          <p:cNvSpPr/>
-          <p:nvPr/>
-        </p:nvSpPr>
-        <p:spPr bwMode="auto">
-          <a:xfrm>
-            <a:off x="457200" y="2505456"/>
-            <a:ext cx="411480" cy="768096"/>
-          </a:xfrm>
-          <a:prstGeom prst="rect">
-            <a:avLst/>
-          </a:prstGeom>
-          <a:noFill/>
-          <a:ln>
-            <a:noFill/>
-          </a:ln>
-        </p:spPr>
-        <p:txBody>
-          <a:bodyPr spcFirstLastPara="1" wrap="square" lIns="91425" tIns="45700" rIns="91425" bIns="45700" anchor="ctr" anchorCtr="0">
-            <a:noAutofit/>
-          </a:bodyPr>
-          <a:lstStyle/>
-          <a:p>
-            <a:pPr marL="0" marR="0" lvl="0" indent="0" algn="ctr" rtl="0">
-              <a:spcBef>
-                <a:spcPts val="0"/>
-              </a:spcBef>
-              <a:spcAft>
-                <a:spcPts val="0"/>
-              </a:spcAft>
-              <a:buClr>
-                <a:srgbClr val="FFFFFF"/>
-              </a:buClr>
-              <a:buSzPts val="1600"/>
-              <a:buFont typeface="Calibri"/>
-              <a:buNone/>
-              <a:defRPr/>
-            </a:pPr>
-            <a:r>
-              <a:rPr lang="en-US" sz="1600" b="1" i="0" u="none" strike="noStrike" cap="none">
-                <a:solidFill>
-                  <a:srgbClr val="FFFFFF"/>
-                </a:solidFill>
-                <a:latin typeface="Open Sans"/>
-                <a:ea typeface="Open Sans"/>
-                <a:cs typeface="Open Sans"/>
-              </a:rPr>
-              <a:t>3</a:t>
-            </a:r>
-            <a:endParaRPr sz="1600" b="0" i="0" u="none" strike="noStrike" cap="none">
-              <a:solidFill>
-                <a:schemeClr val="dk1"/>
-              </a:solidFill>
-              <a:latin typeface="Open Sans"/>
-              <a:cs typeface="Open Sans"/>
-            </a:endParaRPr>
-          </a:p>
-        </p:txBody>
-      </p:sp>
-      <p:sp>
-        <p:nvSpPr>
-          <p:cNvPr id="967886629" name="Google Shape;296;p16"/>
-          <p:cNvSpPr/>
-          <p:nvPr/>
-        </p:nvSpPr>
-        <p:spPr bwMode="auto">
-          <a:xfrm>
-            <a:off x="960120" y="2596896"/>
-            <a:ext cx="7589520" cy="594360"/>
-          </a:xfrm>
-          <a:prstGeom prst="rect">
-            <a:avLst/>
-          </a:prstGeom>
-          <a:noFill/>
-          <a:ln>
-            <a:noFill/>
-          </a:ln>
-        </p:spPr>
-        <p:txBody>
-          <a:bodyPr spcFirstLastPara="1" wrap="square" lIns="91425" tIns="45700" rIns="91425" bIns="45700" anchor="ctr" anchorCtr="0">
-            <a:noAutofit/>
-          </a:bodyPr>
-          <a:lstStyle/>
-          <a:p>
-            <a:pPr marL="0" marR="0" lvl="0" indent="0" algn="l" rtl="0">
-              <a:spcBef>
-                <a:spcPts val="0"/>
-              </a:spcBef>
-              <a:spcAft>
-                <a:spcPts val="0"/>
-              </a:spcAft>
-              <a:buClr>
-                <a:srgbClr val="1A1A1A"/>
-              </a:buClr>
-              <a:buSzPts val="1250"/>
-              <a:buFont typeface="Calibri"/>
-              <a:buNone/>
-              <a:defRPr/>
-            </a:pPr>
-            <a:endParaRPr sz="1250" b="0" i="0" u="none" strike="noStrike" cap="none">
-              <a:solidFill>
-                <a:schemeClr val="dk1"/>
-              </a:solidFill>
-              <a:latin typeface="Open Sans"/>
-              <a:cs typeface="Open Sans"/>
-            </a:endParaRPr>
-          </a:p>
-        </p:txBody>
-      </p:sp>
-      <p:sp>
-        <p:nvSpPr>
-          <p:cNvPr id="1222837095" name="Google Shape;297;p16"/>
-          <p:cNvSpPr/>
-          <p:nvPr/>
-        </p:nvSpPr>
-        <p:spPr bwMode="auto">
-          <a:xfrm>
-            <a:off x="457200" y="3346704"/>
-            <a:ext cx="8229600" cy="768096"/>
-          </a:xfrm>
-          <a:prstGeom prst="rect">
-            <a:avLst/>
-          </a:prstGeom>
-          <a:solidFill>
-            <a:srgbClr val="FFFFFF"/>
-          </a:solidFill>
-          <a:ln w="12700" cap="flat" cmpd="sng">
-            <a:solidFill>
-              <a:srgbClr val="E0E0E0"/>
-            </a:solidFill>
-            <a:prstDash val="solid"/>
-            <a:round/>
-            <a:headEnd type="none" w="sm" len="sm"/>
-            <a:tailEnd type="none" w="sm" len="sm"/>
-          </a:ln>
-        </p:spPr>
-        <p:txBody>
-          <a:bodyPr spcFirstLastPara="1" wrap="square" lIns="91425" tIns="91425" rIns="91425" bIns="91425" anchor="ctr" anchorCtr="0">
-            <a:noAutofit/>
-          </a:bodyPr>
-          <a:lstStyle/>
-          <a:p>
-            <a:pPr marL="0" lvl="0" indent="0" algn="l" rtl="0">
-              <a:spcBef>
-                <a:spcPts val="0"/>
-              </a:spcBef>
-              <a:spcAft>
-                <a:spcPts val="0"/>
-              </a:spcAft>
-              <a:buNone/>
-              <a:defRPr/>
-            </a:pPr>
-            <a:endParaRPr>
-              <a:latin typeface="Open Sans"/>
-              <a:cs typeface="Open Sans"/>
-            </a:endParaRPr>
-          </a:p>
-        </p:txBody>
-      </p:sp>
-      <p:sp>
-        <p:nvSpPr>
-          <p:cNvPr id="1090979159" name="Google Shape;298;p16"/>
-          <p:cNvSpPr/>
-          <p:nvPr/>
-        </p:nvSpPr>
-        <p:spPr bwMode="auto">
-          <a:xfrm>
-            <a:off x="457200" y="3346704"/>
-            <a:ext cx="411480" cy="768096"/>
-          </a:xfrm>
-          <a:prstGeom prst="rect">
-            <a:avLst/>
-          </a:prstGeom>
-          <a:solidFill>
-            <a:srgbClr val="C0272D"/>
-          </a:solidFill>
-          <a:ln w="12700" cap="flat" cmpd="sng">
-            <a:solidFill>
-              <a:srgbClr val="C0272D"/>
-            </a:solidFill>
-            <a:prstDash val="solid"/>
-            <a:round/>
-            <a:headEnd type="none" w="sm" len="sm"/>
-            <a:tailEnd type="none" w="sm" len="sm"/>
-          </a:ln>
-        </p:spPr>
-        <p:txBody>
-          <a:bodyPr spcFirstLastPara="1" wrap="square" lIns="91425" tIns="91425" rIns="91425" bIns="91425" anchor="ctr" anchorCtr="0">
-            <a:noAutofit/>
-          </a:bodyPr>
-          <a:lstStyle/>
-          <a:p>
-            <a:pPr marL="0" lvl="0" indent="0" algn="l" rtl="0">
-              <a:spcBef>
-                <a:spcPts val="0"/>
-              </a:spcBef>
-              <a:spcAft>
-                <a:spcPts val="0"/>
-              </a:spcAft>
-              <a:buNone/>
-              <a:defRPr/>
-            </a:pPr>
-            <a:endParaRPr>
-              <a:latin typeface="Open Sans"/>
-              <a:cs typeface="Open Sans"/>
-            </a:endParaRPr>
-          </a:p>
-        </p:txBody>
-      </p:sp>
-      <p:sp>
-        <p:nvSpPr>
-          <p:cNvPr id="900082329" name="Google Shape;299;p16"/>
-          <p:cNvSpPr/>
-          <p:nvPr/>
-        </p:nvSpPr>
-        <p:spPr bwMode="auto">
-          <a:xfrm>
-            <a:off x="457200" y="3346704"/>
-            <a:ext cx="411480" cy="768096"/>
-          </a:xfrm>
-          <a:prstGeom prst="rect">
-            <a:avLst/>
-          </a:prstGeom>
-          <a:noFill/>
-          <a:ln>
-            <a:noFill/>
-          </a:ln>
-        </p:spPr>
-        <p:txBody>
-          <a:bodyPr spcFirstLastPara="1" wrap="square" lIns="91425" tIns="45700" rIns="91425" bIns="45700" anchor="ctr" anchorCtr="0">
-            <a:noAutofit/>
-          </a:bodyPr>
-          <a:lstStyle/>
-          <a:p>
-            <a:pPr marL="0" marR="0" lvl="0" indent="0" algn="ctr" rtl="0">
-              <a:spcBef>
-                <a:spcPts val="0"/>
-              </a:spcBef>
-              <a:spcAft>
-                <a:spcPts val="0"/>
-              </a:spcAft>
-              <a:buClr>
-                <a:srgbClr val="FFFFFF"/>
-              </a:buClr>
-              <a:buSzPts val="1600"/>
-              <a:buFont typeface="Calibri"/>
-              <a:buNone/>
-              <a:defRPr/>
-            </a:pPr>
-            <a:r>
-              <a:rPr lang="en-US" sz="1600" b="1" i="0" u="none" strike="noStrike" cap="none">
-                <a:solidFill>
-                  <a:srgbClr val="FFFFFF"/>
-                </a:solidFill>
-                <a:latin typeface="Open Sans"/>
-                <a:ea typeface="Open Sans"/>
-                <a:cs typeface="Open Sans"/>
-              </a:rPr>
-              <a:t>4</a:t>
-            </a:r>
-            <a:endParaRPr sz="1600" b="0" i="0" u="none" strike="noStrike" cap="none">
-              <a:solidFill>
-                <a:schemeClr val="dk1"/>
-              </a:solidFill>
-              <a:latin typeface="Open Sans"/>
-              <a:cs typeface="Open Sans"/>
-            </a:endParaRPr>
-          </a:p>
-        </p:txBody>
-      </p:sp>
-      <p:sp>
-        <p:nvSpPr>
-          <p:cNvPr id="1334602335" name="Google Shape;300;p16"/>
-          <p:cNvSpPr/>
-          <p:nvPr/>
-        </p:nvSpPr>
-        <p:spPr bwMode="auto">
-          <a:xfrm>
-            <a:off x="960120" y="3438144"/>
-            <a:ext cx="7589520" cy="594360"/>
-          </a:xfrm>
-          <a:prstGeom prst="rect">
-            <a:avLst/>
-          </a:prstGeom>
-          <a:noFill/>
-          <a:ln>
-            <a:noFill/>
-          </a:ln>
-        </p:spPr>
-        <p:txBody>
-          <a:bodyPr spcFirstLastPara="1" wrap="square" lIns="91425" tIns="45700" rIns="91425" bIns="45700" anchor="ctr" anchorCtr="0">
-            <a:noAutofit/>
-          </a:bodyPr>
-          <a:lstStyle/>
-          <a:p>
-            <a:pPr marL="0" marR="0" lvl="0" indent="0" algn="l" rtl="0">
-              <a:spcBef>
-                <a:spcPts val="0"/>
-              </a:spcBef>
-              <a:spcAft>
-                <a:spcPts val="0"/>
-              </a:spcAft>
-              <a:buClr>
-                <a:srgbClr val="1A1A1A"/>
-              </a:buClr>
-              <a:buSzPts val="1250"/>
-              <a:buFont typeface="Calibri"/>
-              <a:buNone/>
-              <a:defRPr/>
-            </a:pPr>
-            <a:endParaRPr sz="1250" b="0" i="0" u="none" strike="noStrike" cap="none">
-              <a:solidFill>
-                <a:schemeClr val="dk1"/>
-              </a:solidFill>
-              <a:latin typeface="Open Sans"/>
-              <a:cs typeface="Open Sans"/>
-            </a:endParaRPr>
-          </a:p>
-        </p:txBody>
-      </p:sp>
-      <p:sp>
-        <p:nvSpPr>
-          <p:cNvPr id="70679641" name="Google Shape;303;p16"/>
-          <p:cNvSpPr/>
-          <p:nvPr/>
-        </p:nvSpPr>
-        <p:spPr bwMode="auto">
-          <a:xfrm>
-            <a:off x="457200" y="4187952"/>
-            <a:ext cx="411480" cy="768096"/>
-          </a:xfrm>
-          <a:prstGeom prst="rect">
-            <a:avLst/>
-          </a:prstGeom>
-          <a:noFill/>
-          <a:ln>
-            <a:noFill/>
-          </a:ln>
-        </p:spPr>
-        <p:txBody>
-          <a:bodyPr spcFirstLastPara="1" wrap="square" lIns="91425" tIns="45700" rIns="91425" bIns="45700" anchor="ctr" anchorCtr="0">
-            <a:noAutofit/>
-          </a:bodyPr>
-          <a:lstStyle/>
-          <a:p>
-            <a:pPr marL="0" marR="0" lvl="0" indent="0" algn="ctr" rtl="0">
-              <a:spcBef>
-                <a:spcPts val="0"/>
-              </a:spcBef>
-              <a:spcAft>
-                <a:spcPts val="0"/>
-              </a:spcAft>
-              <a:buClr>
-                <a:srgbClr val="FFFFFF"/>
-              </a:buClr>
-              <a:buSzPts val="1600"/>
-              <a:buFont typeface="Calibri"/>
-              <a:buNone/>
-              <a:defRPr/>
-            </a:pPr>
-            <a:r>
-              <a:rPr lang="en-US" sz="1600" b="1" i="0" u="none" strike="noStrike" cap="none">
-                <a:solidFill>
-                  <a:srgbClr val="FFFFFF"/>
-                </a:solidFill>
-                <a:latin typeface="Open Sans"/>
-                <a:ea typeface="Open Sans"/>
-                <a:cs typeface="Open Sans"/>
-              </a:rPr>
-              <a:t>5</a:t>
-            </a:r>
-            <a:endParaRPr sz="1600" b="0" i="0" u="none" strike="noStrike" cap="none">
-              <a:solidFill>
-                <a:schemeClr val="dk1"/>
-              </a:solidFill>
-              <a:latin typeface="Open Sans"/>
-              <a:cs typeface="Open Sans"/>
-            </a:endParaRPr>
-          </a:p>
-        </p:txBody>
-      </p:sp>
+        </p:spPr>
+      </p:pic>
     </p:spTree>
   </p:cSld>
   <p:clrMapOvr>
@@ -8871,6 +8247,13 @@
 <file path=ppt/slides/slide14.xml><?xml version="1.0" encoding="utf-8"?>
 <p:sld xmlns:a="http://schemas.openxmlformats.org/drawingml/2006/main" xmlns:r="http://schemas.openxmlformats.org/officeDocument/2006/relationships" xmlns:p="http://schemas.openxmlformats.org/presentationml/2006/main" xmlns:m="http://schemas.openxmlformats.org/officeDocument/2006/math" xmlns:w="http://schemas.openxmlformats.org/wordprocessingml/2006/main" xmlns:mc="http://schemas.openxmlformats.org/markup-compatibility/2006" showMasterPhAnim="0" showMasterSp="1" show="1">
   <p:cSld name="">
+    <p:bg>
+      <p:bgPr shadeToTitle="0">
+        <a:solidFill>
+          <a:srgbClr val="FFFFFF"/>
+        </a:solidFill>
+      </p:bgPr>
+    </p:bg>
     <p:spTree>
       <p:nvGrpSpPr>
         <p:cNvPr id="1" name=""/>
@@ -8885,9 +8268,2777 @@
           <a:chExt cx="0" cy="0"/>
         </a:xfrm>
       </p:grpSpPr>
-      <p:sp>
-        <p:nvSpPr>
-          <p:cNvPr id="573010339" name="Google Shape;309;p17"/>
+      <p:pic>
+        <p:nvPicPr>
+          <p:cNvPr id="1998602811" name="Google Shape;48;p6" descr="/home/claude/logo_300spbu.png"/>
+          <p:cNvPicPr/>
+          <p:nvPr/>
+        </p:nvPicPr>
+        <p:blipFill rotWithShape="1">
+          <a:blip r:embed="rId3">
+            <a:alphaModFix/>
+          </a:blip>
+          <a:srcRect l="0" t="0" r="0" b="0"/>
+          <a:stretch/>
+        </p:blipFill>
+        <p:spPr bwMode="auto">
+          <a:xfrm>
+            <a:off x="7498080" y="137160"/>
+            <a:ext cx="1463040" cy="475488"/>
+          </a:xfrm>
+          <a:prstGeom prst="rect">
+            <a:avLst/>
+          </a:prstGeom>
+          <a:noFill/>
+          <a:ln>
+            <a:noFill/>
+          </a:ln>
+        </p:spPr>
+      </p:pic>
+      <p:sp>
+        <p:nvSpPr>
+          <p:cNvPr id="985913761" name="Google Shape;49;p6"/>
+          <p:cNvSpPr/>
+          <p:nvPr/>
+        </p:nvSpPr>
+        <p:spPr bwMode="auto">
+          <a:xfrm>
+            <a:off x="8686800" y="4846320"/>
+            <a:ext cx="274320" cy="182880"/>
+          </a:xfrm>
+          <a:prstGeom prst="rect">
+            <a:avLst/>
+          </a:prstGeom>
+          <a:solidFill>
+            <a:srgbClr val="C0272D"/>
+          </a:solidFill>
+          <a:ln w="12700" cap="flat" cmpd="sng">
+            <a:solidFill>
+              <a:srgbClr val="C0272D"/>
+            </a:solidFill>
+            <a:prstDash val="solid"/>
+            <a:round/>
+            <a:headEnd type="none" w="sm" len="sm"/>
+            <a:tailEnd type="none" w="sm" len="sm"/>
+          </a:ln>
+        </p:spPr>
+        <p:txBody>
+          <a:bodyPr spcFirstLastPara="1" wrap="square" lIns="91424" tIns="91424" rIns="91424" bIns="91424" anchor="ctr" anchorCtr="0">
+            <a:noAutofit/>
+          </a:bodyPr>
+          <a:lstStyle/>
+          <a:p>
+            <a:pPr marL="0" lvl="0" indent="0" algn="l" rtl="0">
+              <a:spcBef>
+                <a:spcPts val="0"/>
+              </a:spcBef>
+              <a:spcAft>
+                <a:spcPts val="0"/>
+              </a:spcAft>
+              <a:buNone/>
+              <a:defRPr/>
+            </a:pPr>
+            <a:endParaRPr/>
+          </a:p>
+        </p:txBody>
+      </p:sp>
+      <p:sp>
+        <p:nvSpPr>
+          <p:cNvPr id="1327649163" name="Google Shape;50;p6"/>
+          <p:cNvSpPr/>
+          <p:nvPr/>
+        </p:nvSpPr>
+        <p:spPr bwMode="auto">
+          <a:xfrm>
+            <a:off x="8641080" y="4800600"/>
+            <a:ext cx="365760" cy="228600"/>
+          </a:xfrm>
+          <a:prstGeom prst="rect">
+            <a:avLst/>
+          </a:prstGeom>
+          <a:noFill/>
+          <a:ln>
+            <a:noFill/>
+          </a:ln>
+        </p:spPr>
+        <p:txBody>
+          <a:bodyPr spcFirstLastPara="1" wrap="square" lIns="0" tIns="0" rIns="0" bIns="0" anchor="ctr" anchorCtr="0">
+            <a:noAutofit/>
+          </a:bodyPr>
+          <a:lstStyle/>
+          <a:p>
+            <a:pPr marL="0" marR="0" lvl="0" indent="0" algn="ctr" rtl="0">
+              <a:spcBef>
+                <a:spcPts val="0"/>
+              </a:spcBef>
+              <a:spcAft>
+                <a:spcPts val="0"/>
+              </a:spcAft>
+              <a:buClr>
+                <a:srgbClr val="FFFFFF"/>
+              </a:buClr>
+              <a:buSzPts val="1000"/>
+              <a:buFont typeface="Calibri"/>
+              <a:buNone/>
+              <a:defRPr/>
+            </a:pPr>
+            <a:r>
+              <a:rPr lang="ru-RU" sz="1000" b="1" i="0" u="none" strike="noStrike" cap="none">
+                <a:solidFill>
+                  <a:srgbClr val="FFFFFF"/>
+                </a:solidFill>
+                <a:latin typeface="Calibri"/>
+                <a:ea typeface="Calibri"/>
+                <a:cs typeface="Calibri"/>
+              </a:rPr>
+              <a:t>5</a:t>
+            </a:r>
+            <a:endParaRPr sz="1000" b="0" i="0" u="none" strike="noStrike" cap="none">
+              <a:solidFill>
+                <a:schemeClr val="dk1"/>
+              </a:solidFill>
+              <a:latin typeface="Calibri"/>
+              <a:ea typeface="Calibri"/>
+              <a:cs typeface="Calibri"/>
+            </a:endParaRPr>
+          </a:p>
+        </p:txBody>
+      </p:sp>
+      <p:sp>
+        <p:nvSpPr>
+          <p:cNvPr id="837079690" name="Google Shape;51;p6"/>
+          <p:cNvSpPr/>
+          <p:nvPr/>
+        </p:nvSpPr>
+        <p:spPr bwMode="auto">
+          <a:xfrm flipH="0" flipV="0">
+            <a:off x="530350" y="182880"/>
+            <a:ext cx="6784848" cy="502920"/>
+          </a:xfrm>
+          <a:prstGeom prst="rect">
+            <a:avLst/>
+          </a:prstGeom>
+          <a:noFill/>
+          <a:ln>
+            <a:noFill/>
+          </a:ln>
+        </p:spPr>
+        <p:txBody>
+          <a:bodyPr spcFirstLastPara="1" wrap="square" lIns="91422" tIns="45698" rIns="91422" bIns="45698" anchor="ctr" anchorCtr="0">
+            <a:noAutofit/>
+          </a:bodyPr>
+          <a:lstStyle/>
+          <a:p>
+            <a:pPr marL="0" marR="0" lvl="0" indent="0" algn="l" rtl="0">
+              <a:spcBef>
+                <a:spcPts val="0"/>
+              </a:spcBef>
+              <a:spcAft>
+                <a:spcPts val="0"/>
+              </a:spcAft>
+              <a:buClr>
+                <a:srgbClr val="C0272D"/>
+              </a:buClr>
+              <a:buSzPts val="2800"/>
+              <a:buFont typeface="Calibri"/>
+              <a:buNone/>
+              <a:defRPr/>
+            </a:pPr>
+            <a:r>
+              <a:rPr lang="ru-RU" sz="2600" b="1" i="0" u="none" strike="noStrike" cap="none">
+                <a:solidFill>
+                  <a:srgbClr val="C0272D"/>
+                </a:solidFill>
+                <a:latin typeface="Open Sans"/>
+                <a:ea typeface="Open Sans"/>
+                <a:cs typeface="Open Sans"/>
+              </a:rPr>
+              <a:t>Постановка задачи.</a:t>
+            </a:r>
+            <a:endParaRPr sz="2600" b="0" i="0" u="none" strike="noStrike" cap="none">
+              <a:solidFill>
+                <a:schemeClr val="dk1"/>
+              </a:solidFill>
+              <a:latin typeface="Open Sans"/>
+              <a:cs typeface="Open Sans"/>
+            </a:endParaRPr>
+          </a:p>
+        </p:txBody>
+      </p:sp>
+      <p:sp>
+        <p:nvSpPr>
+          <p:cNvPr id="1892124783" name="Google Shape;52;p6"/>
+          <p:cNvSpPr/>
+          <p:nvPr/>
+        </p:nvSpPr>
+        <p:spPr bwMode="auto">
+          <a:xfrm>
+            <a:off x="457200" y="201168"/>
+            <a:ext cx="73152" cy="457200"/>
+          </a:xfrm>
+          <a:prstGeom prst="rect">
+            <a:avLst/>
+          </a:prstGeom>
+          <a:solidFill>
+            <a:srgbClr val="C0272D"/>
+          </a:solidFill>
+          <a:ln w="12700" cap="flat" cmpd="sng">
+            <a:solidFill>
+              <a:srgbClr val="C0272D"/>
+            </a:solidFill>
+            <a:prstDash val="solid"/>
+            <a:round/>
+            <a:headEnd type="none" w="sm" len="sm"/>
+            <a:tailEnd type="none" w="sm" len="sm"/>
+          </a:ln>
+        </p:spPr>
+        <p:txBody>
+          <a:bodyPr spcFirstLastPara="1" wrap="square" lIns="91424" tIns="91424" rIns="91424" bIns="91424" anchor="ctr" anchorCtr="0">
+            <a:noAutofit/>
+          </a:bodyPr>
+          <a:lstStyle/>
+          <a:p>
+            <a:pPr marL="0" lvl="0" indent="0" algn="l" rtl="0">
+              <a:spcBef>
+                <a:spcPts val="0"/>
+              </a:spcBef>
+              <a:spcAft>
+                <a:spcPts val="0"/>
+              </a:spcAft>
+              <a:buNone/>
+              <a:defRPr/>
+            </a:pPr>
+            <a:endParaRPr/>
+          </a:p>
+        </p:txBody>
+      </p:sp>
+      <p:sp>
+        <p:nvSpPr>
+          <p:cNvPr id="1337851909" name="Google Shape;53;p6"/>
+          <p:cNvSpPr/>
+          <p:nvPr/>
+        </p:nvSpPr>
+        <p:spPr bwMode="auto">
+          <a:xfrm flipH="0" flipV="0">
+            <a:off x="476346" y="754759"/>
+            <a:ext cx="8229600" cy="2731969"/>
+          </a:xfrm>
+          <a:prstGeom prst="rect">
+            <a:avLst/>
+          </a:prstGeom>
+          <a:solidFill>
+            <a:srgbClr val="E8D5D5"/>
+          </a:solidFill>
+          <a:ln w="12700" cap="flat" cmpd="sng">
+            <a:solidFill>
+              <a:srgbClr val="D8B8B8"/>
+            </a:solidFill>
+            <a:prstDash val="solid"/>
+            <a:round/>
+            <a:headEnd type="none" w="sm" len="sm"/>
+            <a:tailEnd type="none" w="sm" len="sm"/>
+          </a:ln>
+        </p:spPr>
+        <p:txBody>
+          <a:bodyPr spcFirstLastPara="1" wrap="square" lIns="91422" tIns="91422" rIns="91422" bIns="91422" anchor="ctr" anchorCtr="0">
+            <a:noAutofit/>
+          </a:bodyPr>
+          <a:lstStyle/>
+          <a:p>
+            <a:pPr marL="0" lvl="0" indent="0" algn="l" rtl="0">
+              <a:spcBef>
+                <a:spcPts val="0"/>
+              </a:spcBef>
+              <a:spcAft>
+                <a:spcPts val="0"/>
+              </a:spcAft>
+              <a:buNone/>
+              <a:defRPr/>
+            </a:pPr>
+            <a:endParaRPr/>
+          </a:p>
+        </p:txBody>
+      </p:sp>
+      <p:sp>
+        <p:nvSpPr>
+          <p:cNvPr id="445193100" name="Google Shape;57;p6"/>
+          <p:cNvSpPr/>
+          <p:nvPr/>
+        </p:nvSpPr>
+        <p:spPr bwMode="auto">
+          <a:xfrm>
+            <a:off x="457200" y="3749040"/>
+            <a:ext cx="8229600" cy="960120"/>
+          </a:xfrm>
+          <a:prstGeom prst="rect">
+            <a:avLst/>
+          </a:prstGeom>
+          <a:solidFill>
+            <a:srgbClr val="F5F5F5"/>
+          </a:solidFill>
+          <a:ln w="12700" cap="flat" cmpd="sng">
+            <a:solidFill>
+              <a:srgbClr val="DDDDDD"/>
+            </a:solidFill>
+            <a:prstDash val="solid"/>
+            <a:round/>
+            <a:headEnd type="none" w="sm" len="sm"/>
+            <a:tailEnd type="none" w="sm" len="sm"/>
+          </a:ln>
+        </p:spPr>
+        <p:txBody>
+          <a:bodyPr spcFirstLastPara="1" wrap="square" lIns="91424" tIns="91424" rIns="91424" bIns="91424" anchor="ctr" anchorCtr="0">
+            <a:noAutofit/>
+          </a:bodyPr>
+          <a:lstStyle/>
+          <a:p>
+            <a:pPr marL="0" lvl="0" indent="0" algn="l" rtl="0">
+              <a:spcBef>
+                <a:spcPts val="0"/>
+              </a:spcBef>
+              <a:spcAft>
+                <a:spcPts val="0"/>
+              </a:spcAft>
+              <a:buNone/>
+              <a:defRPr/>
+            </a:pPr>
+            <a:endParaRPr/>
+          </a:p>
+        </p:txBody>
+      </p:sp>
+      <p:sp>
+        <p:nvSpPr>
+          <p:cNvPr id="1494168606" name="Google Shape;58;p6"/>
+          <p:cNvSpPr/>
+          <p:nvPr/>
+        </p:nvSpPr>
+        <p:spPr bwMode="auto">
+          <a:xfrm flipH="0" flipV="0">
+            <a:off x="640080" y="3960393"/>
+            <a:ext cx="7772400" cy="657324"/>
+          </a:xfrm>
+          <a:prstGeom prst="rect">
+            <a:avLst/>
+          </a:prstGeom>
+          <a:noFill/>
+          <a:ln>
+            <a:noFill/>
+          </a:ln>
+        </p:spPr>
+        <p:txBody>
+          <a:bodyPr spcFirstLastPara="1" wrap="square" lIns="91422" tIns="45698" rIns="91422" bIns="45698" anchor="ctr" anchorCtr="0">
+            <a:noAutofit/>
+          </a:bodyPr>
+          <a:lstStyle/>
+          <a:p>
+            <a:pPr>
+              <a:defRPr/>
+            </a:pPr>
+            <a:endParaRPr/>
+          </a:p>
+        </p:txBody>
+      </p:sp>
+      <p:sp>
+        <p:nvSpPr>
+          <p:cNvPr id="2049171588" name=""/>
+          <p:cNvSpPr txBox="1"/>
+          <p:nvPr/>
+        </p:nvSpPr>
+        <p:spPr bwMode="auto">
+          <a:xfrm rot="0" flipH="0" flipV="0">
+            <a:off x="457197" y="977562"/>
+            <a:ext cx="8267896" cy="305158"/>
+          </a:xfrm>
+          <a:prstGeom prst="rect">
+            <a:avLst/>
+          </a:prstGeom>
+          <a:noFill/>
+        </p:spPr>
+        <p:txBody>
+          <a:bodyPr vertOverflow="overflow" horzOverflow="overflow" vert="horz" wrap="square" lIns="91440" tIns="45720" rIns="91440" bIns="45720" numCol="1" spcCol="0" rtlCol="0" fromWordArt="0" anchor="t" anchorCtr="0" forceAA="0" upright="0" compatLnSpc="0">
+            <a:spAutoFit/>
+          </a:bodyPr>
+          <a:p>
+            <a:pPr indent="91440">
+              <a:defRPr/>
+            </a:pPr>
+            <a:endParaRPr lang="ru-RU" sz="1400" b="0" i="0" u="none" strike="noStrike" cap="none" spc="0">
+              <a:solidFill>
+                <a:srgbClr val="000000"/>
+              </a:solidFill>
+              <a:latin typeface="Arial"/>
+              <a:cs typeface="Arial"/>
+            </a:endParaRPr>
+          </a:p>
+        </p:txBody>
+      </p:sp>
+    </p:spTree>
+  </p:cSld>
+  <p:clrMapOvr>
+    <a:masterClrMapping/>
+  </p:clrMapOvr>
+  <mc:AlternateContent xmlns:mc="http://schemas.openxmlformats.org/markup-compatibility/2006">
+    <mc:Choice xmlns:p159="http://schemas.microsoft.com/office/powerpoint/2015/09/main" xmlns:p14="http://schemas.microsoft.com/office/powerpoint/2010/main" Requires="p159">
+      <p:transition p14:dur="500" advClick="1"/>
+    </mc:Choice>
+    <mc:Fallback>
+      <p:transition advClick="1"/>
+    </mc:Fallback>
+  </mc:AlternateContent>
+</p:sld>
+</file>
+
+<file path=ppt/slides/slide15.xml><?xml version="1.0" encoding="utf-8"?>
+<p:sld xmlns:a="http://schemas.openxmlformats.org/drawingml/2006/main" xmlns:r="http://schemas.openxmlformats.org/officeDocument/2006/relationships" xmlns:p="http://schemas.openxmlformats.org/presentationml/2006/main" xmlns:m="http://schemas.openxmlformats.org/officeDocument/2006/math" xmlns:w="http://schemas.openxmlformats.org/wordprocessingml/2006/main" xmlns:mc="http://schemas.openxmlformats.org/markup-compatibility/2006" showMasterPhAnim="0" showMasterSp="1" show="1">
+  <p:cSld name="">
+    <p:bg>
+      <p:bgPr shadeToTitle="0">
+        <a:solidFill>
+          <a:srgbClr val="FFFFFF"/>
+        </a:solidFill>
+      </p:bgPr>
+    </p:bg>
+    <p:spTree>
+      <p:nvGrpSpPr>
+        <p:cNvPr id="1" name=""/>
+        <p:cNvGrpSpPr/>
+        <p:nvPr/>
+      </p:nvGrpSpPr>
+      <p:grpSpPr bwMode="auto">
+        <a:xfrm>
+          <a:off x="0" y="0"/>
+          <a:ext cx="0" cy="0"/>
+          <a:chOff x="0" y="0"/>
+          <a:chExt cx="0" cy="0"/>
+        </a:xfrm>
+      </p:grpSpPr>
+      <p:pic>
+        <p:nvPicPr>
+          <p:cNvPr id="1694061587" name="Google Shape;228;p14" descr="/home/claude/logo_300spbu.png"/>
+          <p:cNvPicPr/>
+          <p:nvPr/>
+        </p:nvPicPr>
+        <p:blipFill rotWithShape="1">
+          <a:blip r:embed="rId3">
+            <a:alphaModFix/>
+          </a:blip>
+          <a:srcRect l="0" t="0" r="0" b="0"/>
+          <a:stretch/>
+        </p:blipFill>
+        <p:spPr bwMode="auto">
+          <a:xfrm>
+            <a:off x="7498080" y="137160"/>
+            <a:ext cx="1463040" cy="475488"/>
+          </a:xfrm>
+          <a:prstGeom prst="rect">
+            <a:avLst/>
+          </a:prstGeom>
+          <a:noFill/>
+          <a:ln>
+            <a:noFill/>
+          </a:ln>
+        </p:spPr>
+      </p:pic>
+      <p:sp>
+        <p:nvSpPr>
+          <p:cNvPr id="1295990428" name="Google Shape;229;p14"/>
+          <p:cNvSpPr/>
+          <p:nvPr/>
+        </p:nvSpPr>
+        <p:spPr bwMode="auto">
+          <a:xfrm>
+            <a:off x="8686800" y="4846320"/>
+            <a:ext cx="274320" cy="182880"/>
+          </a:xfrm>
+          <a:prstGeom prst="rect">
+            <a:avLst/>
+          </a:prstGeom>
+          <a:solidFill>
+            <a:srgbClr val="C0272D"/>
+          </a:solidFill>
+          <a:ln w="12700" cap="flat" cmpd="sng">
+            <a:solidFill>
+              <a:srgbClr val="C0272D"/>
+            </a:solidFill>
+            <a:prstDash val="solid"/>
+            <a:round/>
+            <a:headEnd type="none" w="sm" len="sm"/>
+            <a:tailEnd type="none" w="sm" len="sm"/>
+          </a:ln>
+        </p:spPr>
+        <p:txBody>
+          <a:bodyPr spcFirstLastPara="1" wrap="square" lIns="91425" tIns="91425" rIns="91425" bIns="91425" anchor="ctr" anchorCtr="0">
+            <a:noAutofit/>
+          </a:bodyPr>
+          <a:lstStyle/>
+          <a:p>
+            <a:pPr marL="0" lvl="0" indent="0" algn="l" rtl="0">
+              <a:spcBef>
+                <a:spcPts val="0"/>
+              </a:spcBef>
+              <a:spcAft>
+                <a:spcPts val="0"/>
+              </a:spcAft>
+              <a:buNone/>
+              <a:defRPr/>
+            </a:pPr>
+            <a:endParaRPr/>
+          </a:p>
+        </p:txBody>
+      </p:sp>
+      <p:sp>
+        <p:nvSpPr>
+          <p:cNvPr id="1698036106" name="Google Shape;230;p14"/>
+          <p:cNvSpPr/>
+          <p:nvPr/>
+        </p:nvSpPr>
+        <p:spPr bwMode="auto">
+          <a:xfrm>
+            <a:off x="8641080" y="4800600"/>
+            <a:ext cx="365760" cy="228600"/>
+          </a:xfrm>
+          <a:prstGeom prst="rect">
+            <a:avLst/>
+          </a:prstGeom>
+          <a:noFill/>
+          <a:ln>
+            <a:noFill/>
+          </a:ln>
+        </p:spPr>
+        <p:txBody>
+          <a:bodyPr spcFirstLastPara="1" wrap="square" lIns="0" tIns="0" rIns="0" bIns="0" anchor="ctr" anchorCtr="0">
+            <a:noAutofit/>
+          </a:bodyPr>
+          <a:lstStyle/>
+          <a:p>
+            <a:pPr marL="0" marR="0" lvl="0" indent="0" algn="ctr" rtl="0">
+              <a:spcBef>
+                <a:spcPts val="0"/>
+              </a:spcBef>
+              <a:spcAft>
+                <a:spcPts val="0"/>
+              </a:spcAft>
+              <a:buClr>
+                <a:srgbClr val="FFFFFF"/>
+              </a:buClr>
+              <a:buSzPts val="1000"/>
+              <a:buFont typeface="Calibri"/>
+              <a:buNone/>
+              <a:defRPr/>
+            </a:pPr>
+            <a:r>
+              <a:rPr lang="en-US" sz="1000" b="1" i="0" u="none" strike="noStrike" cap="none">
+                <a:solidFill>
+                  <a:srgbClr val="FFFFFF"/>
+                </a:solidFill>
+                <a:latin typeface="Calibri"/>
+                <a:ea typeface="Calibri"/>
+                <a:cs typeface="Calibri"/>
+              </a:rPr>
+              <a:t>11</a:t>
+            </a:r>
+            <a:endParaRPr sz="1000" b="0" i="0" u="none" strike="noStrike" cap="none">
+              <a:solidFill>
+                <a:schemeClr val="dk1"/>
+              </a:solidFill>
+              <a:latin typeface="Calibri"/>
+              <a:ea typeface="Calibri"/>
+              <a:cs typeface="Calibri"/>
+            </a:endParaRPr>
+          </a:p>
+        </p:txBody>
+      </p:sp>
+      <p:sp>
+        <p:nvSpPr>
+          <p:cNvPr id="1949060884" name="Google Shape;231;p14"/>
+          <p:cNvSpPr/>
+          <p:nvPr/>
+        </p:nvSpPr>
+        <p:spPr bwMode="auto">
+          <a:xfrm>
+            <a:off x="594360" y="182880"/>
+            <a:ext cx="7315200" cy="502920"/>
+          </a:xfrm>
+          <a:prstGeom prst="rect">
+            <a:avLst/>
+          </a:prstGeom>
+          <a:noFill/>
+          <a:ln>
+            <a:noFill/>
+          </a:ln>
+        </p:spPr>
+        <p:txBody>
+          <a:bodyPr spcFirstLastPara="1" wrap="square" lIns="91425" tIns="45700" rIns="91425" bIns="45700" anchor="ctr" anchorCtr="0">
+            <a:noAutofit/>
+          </a:bodyPr>
+          <a:lstStyle/>
+          <a:p>
+            <a:pPr marL="0" marR="0" lvl="0" indent="0" algn="l" rtl="0">
+              <a:spcBef>
+                <a:spcPts val="0"/>
+              </a:spcBef>
+              <a:spcAft>
+                <a:spcPts val="0"/>
+              </a:spcAft>
+              <a:buClr>
+                <a:srgbClr val="C0272D"/>
+              </a:buClr>
+              <a:buSzPts val="2600"/>
+              <a:buFont typeface="Calibri"/>
+              <a:buNone/>
+              <a:defRPr/>
+            </a:pPr>
+            <a:r>
+              <a:rPr lang="en-US" sz="2600" b="1" i="0" u="none" strike="noStrike" cap="none">
+                <a:solidFill>
+                  <a:srgbClr val="C0272D"/>
+                </a:solidFill>
+                <a:latin typeface="Calibri"/>
+                <a:ea typeface="Calibri"/>
+                <a:cs typeface="Calibri"/>
+              </a:rPr>
+              <a:t>Обобщения и </a:t>
+            </a:r>
+            <a:r>
+              <a:rPr lang="ru-RU" sz="2600" b="1" i="0" u="none" strike="noStrike" cap="none">
+                <a:solidFill>
+                  <a:srgbClr val="C0272D"/>
+                </a:solidFill>
+                <a:latin typeface="Calibri"/>
+                <a:ea typeface="Calibri"/>
+                <a:cs typeface="Calibri"/>
+              </a:rPr>
+              <a:t>области применения</a:t>
+            </a:r>
+            <a:endParaRPr sz="2600" b="0" i="0" u="none" strike="noStrike" cap="none">
+              <a:solidFill>
+                <a:schemeClr val="dk1"/>
+              </a:solidFill>
+              <a:latin typeface="Calibri"/>
+              <a:ea typeface="Calibri"/>
+              <a:cs typeface="Calibri"/>
+            </a:endParaRPr>
+          </a:p>
+        </p:txBody>
+      </p:sp>
+      <p:sp>
+        <p:nvSpPr>
+          <p:cNvPr id="377125360" name="Google Shape;232;p14"/>
+          <p:cNvSpPr/>
+          <p:nvPr/>
+        </p:nvSpPr>
+        <p:spPr bwMode="auto">
+          <a:xfrm>
+            <a:off x="457200" y="201168"/>
+            <a:ext cx="73152" cy="457200"/>
+          </a:xfrm>
+          <a:prstGeom prst="rect">
+            <a:avLst/>
+          </a:prstGeom>
+          <a:solidFill>
+            <a:srgbClr val="C0272D"/>
+          </a:solidFill>
+          <a:ln w="12700" cap="flat" cmpd="sng">
+            <a:solidFill>
+              <a:srgbClr val="C0272D"/>
+            </a:solidFill>
+            <a:prstDash val="solid"/>
+            <a:round/>
+            <a:headEnd type="none" w="sm" len="sm"/>
+            <a:tailEnd type="none" w="sm" len="sm"/>
+          </a:ln>
+        </p:spPr>
+        <p:txBody>
+          <a:bodyPr spcFirstLastPara="1" wrap="square" lIns="91425" tIns="91425" rIns="91425" bIns="91425" anchor="ctr" anchorCtr="0">
+            <a:noAutofit/>
+          </a:bodyPr>
+          <a:lstStyle/>
+          <a:p>
+            <a:pPr marL="0" lvl="0" indent="0" algn="l" rtl="0">
+              <a:spcBef>
+                <a:spcPts val="0"/>
+              </a:spcBef>
+              <a:spcAft>
+                <a:spcPts val="0"/>
+              </a:spcAft>
+              <a:buNone/>
+              <a:defRPr/>
+            </a:pPr>
+            <a:endParaRPr/>
+          </a:p>
+        </p:txBody>
+      </p:sp>
+      <p:sp>
+        <p:nvSpPr>
+          <p:cNvPr id="1368393788" name="Google Shape;233;p14"/>
+          <p:cNvSpPr/>
+          <p:nvPr/>
+        </p:nvSpPr>
+        <p:spPr bwMode="auto">
+          <a:xfrm>
+            <a:off x="457200" y="804672"/>
+            <a:ext cx="3977640" cy="1325880"/>
+          </a:xfrm>
+          <a:prstGeom prst="rect">
+            <a:avLst/>
+          </a:prstGeom>
+          <a:solidFill>
+            <a:srgbClr val="F5F5F5"/>
+          </a:solidFill>
+          <a:ln w="12700" cap="flat" cmpd="sng">
+            <a:solidFill>
+              <a:srgbClr val="CCCCCC"/>
+            </a:solidFill>
+            <a:prstDash val="solid"/>
+            <a:round/>
+            <a:headEnd type="none" w="sm" len="sm"/>
+            <a:tailEnd type="none" w="sm" len="sm"/>
+          </a:ln>
+        </p:spPr>
+        <p:txBody>
+          <a:bodyPr spcFirstLastPara="1" wrap="square" lIns="91425" tIns="91425" rIns="91425" bIns="91425" anchor="ctr" anchorCtr="0">
+            <a:noAutofit/>
+          </a:bodyPr>
+          <a:lstStyle/>
+          <a:p>
+            <a:pPr marL="0" lvl="0" indent="0" algn="l" rtl="0">
+              <a:spcBef>
+                <a:spcPts val="0"/>
+              </a:spcBef>
+              <a:spcAft>
+                <a:spcPts val="0"/>
+              </a:spcAft>
+              <a:buNone/>
+              <a:defRPr/>
+            </a:pPr>
+            <a:endParaRPr/>
+          </a:p>
+        </p:txBody>
+      </p:sp>
+      <p:sp>
+        <p:nvSpPr>
+          <p:cNvPr id="959929753" name="Google Shape;234;p14"/>
+          <p:cNvSpPr/>
+          <p:nvPr/>
+        </p:nvSpPr>
+        <p:spPr bwMode="auto">
+          <a:xfrm>
+            <a:off x="457200" y="804672"/>
+            <a:ext cx="54864" cy="1325880"/>
+          </a:xfrm>
+          <a:prstGeom prst="rect">
+            <a:avLst/>
+          </a:prstGeom>
+          <a:solidFill>
+            <a:srgbClr val="C0272D"/>
+          </a:solidFill>
+          <a:ln w="12700" cap="flat" cmpd="sng">
+            <a:solidFill>
+              <a:srgbClr val="C0272D"/>
+            </a:solidFill>
+            <a:prstDash val="solid"/>
+            <a:round/>
+            <a:headEnd type="none" w="sm" len="sm"/>
+            <a:tailEnd type="none" w="sm" len="sm"/>
+          </a:ln>
+        </p:spPr>
+        <p:txBody>
+          <a:bodyPr spcFirstLastPara="1" wrap="square" lIns="91425" tIns="91425" rIns="91425" bIns="91425" anchor="ctr" anchorCtr="0">
+            <a:noAutofit/>
+          </a:bodyPr>
+          <a:lstStyle/>
+          <a:p>
+            <a:pPr marL="0" lvl="0" indent="0" algn="l" rtl="0">
+              <a:spcBef>
+                <a:spcPts val="0"/>
+              </a:spcBef>
+              <a:spcAft>
+                <a:spcPts val="0"/>
+              </a:spcAft>
+              <a:buNone/>
+              <a:defRPr/>
+            </a:pPr>
+            <a:endParaRPr/>
+          </a:p>
+        </p:txBody>
+      </p:sp>
+      <p:sp>
+        <p:nvSpPr>
+          <p:cNvPr id="1254124681" name="Google Shape;235;p14"/>
+          <p:cNvSpPr/>
+          <p:nvPr/>
+        </p:nvSpPr>
+        <p:spPr bwMode="auto">
+          <a:xfrm>
+            <a:off x="594360" y="877824"/>
+            <a:ext cx="3657600" cy="320040"/>
+          </a:xfrm>
+          <a:prstGeom prst="rect">
+            <a:avLst/>
+          </a:prstGeom>
+          <a:noFill/>
+          <a:ln>
+            <a:noFill/>
+          </a:ln>
+        </p:spPr>
+        <p:txBody>
+          <a:bodyPr spcFirstLastPara="1" wrap="square" lIns="91425" tIns="45700" rIns="91425" bIns="45700" anchor="ctr" anchorCtr="0">
+            <a:noAutofit/>
+          </a:bodyPr>
+          <a:lstStyle/>
+          <a:p>
+            <a:pPr marL="0" marR="0" lvl="0" indent="0" algn="l" rtl="0">
+              <a:spcBef>
+                <a:spcPts val="0"/>
+              </a:spcBef>
+              <a:spcAft>
+                <a:spcPts val="0"/>
+              </a:spcAft>
+              <a:buClr>
+                <a:srgbClr val="C0272D"/>
+              </a:buClr>
+              <a:buSzPts val="1300"/>
+              <a:buFont typeface="Calibri"/>
+              <a:buNone/>
+              <a:defRPr/>
+            </a:pPr>
+            <a:endParaRPr sz="1300" b="0" i="0" u="none" strike="noStrike" cap="none">
+              <a:solidFill>
+                <a:schemeClr val="dk1"/>
+              </a:solidFill>
+              <a:latin typeface="Calibri"/>
+              <a:ea typeface="Calibri"/>
+              <a:cs typeface="Calibri"/>
+            </a:endParaRPr>
+          </a:p>
+        </p:txBody>
+      </p:sp>
+      <p:sp>
+        <p:nvSpPr>
+          <p:cNvPr id="1420438427" name="Google Shape;236;p14"/>
+          <p:cNvSpPr/>
+          <p:nvPr/>
+        </p:nvSpPr>
+        <p:spPr bwMode="auto">
+          <a:xfrm>
+            <a:off x="594360" y="1216151"/>
+            <a:ext cx="3749040" cy="841248"/>
+          </a:xfrm>
+          <a:prstGeom prst="rect">
+            <a:avLst/>
+          </a:prstGeom>
+          <a:noFill/>
+          <a:ln>
+            <a:noFill/>
+          </a:ln>
+        </p:spPr>
+        <p:txBody>
+          <a:bodyPr spcFirstLastPara="1" wrap="square" lIns="91425" tIns="45700" rIns="91425" bIns="45700" anchor="ctr" anchorCtr="0">
+            <a:noAutofit/>
+          </a:bodyPr>
+          <a:lstStyle/>
+          <a:p>
+            <a:pPr marL="0" marR="0" lvl="0" indent="0" algn="l" rtl="0">
+              <a:spcBef>
+                <a:spcPts val="0"/>
+              </a:spcBef>
+              <a:spcAft>
+                <a:spcPts val="0"/>
+              </a:spcAft>
+              <a:buClr>
+                <a:srgbClr val="1A1A1A"/>
+              </a:buClr>
+              <a:buSzPts val="1200"/>
+              <a:buFont typeface="Calibri"/>
+              <a:buNone/>
+              <a:defRPr/>
+            </a:pPr>
+            <a:endParaRPr sz="1200" b="0" i="0" u="none" strike="noStrike" cap="none">
+              <a:solidFill>
+                <a:schemeClr val="dk1"/>
+              </a:solidFill>
+              <a:latin typeface="Calibri"/>
+              <a:ea typeface="Calibri"/>
+              <a:cs typeface="Calibri"/>
+            </a:endParaRPr>
+          </a:p>
+        </p:txBody>
+      </p:sp>
+      <p:sp>
+        <p:nvSpPr>
+          <p:cNvPr id="2046030692" name="Google Shape;237;p14"/>
+          <p:cNvSpPr/>
+          <p:nvPr/>
+        </p:nvSpPr>
+        <p:spPr bwMode="auto">
+          <a:xfrm>
+            <a:off x="4617720" y="804672"/>
+            <a:ext cx="3977640" cy="1325880"/>
+          </a:xfrm>
+          <a:prstGeom prst="rect">
+            <a:avLst/>
+          </a:prstGeom>
+          <a:solidFill>
+            <a:srgbClr val="E8D5D5"/>
+          </a:solidFill>
+          <a:ln w="12700" cap="flat" cmpd="sng">
+            <a:solidFill>
+              <a:srgbClr val="CCCCCC"/>
+            </a:solidFill>
+            <a:prstDash val="solid"/>
+            <a:round/>
+            <a:headEnd type="none" w="sm" len="sm"/>
+            <a:tailEnd type="none" w="sm" len="sm"/>
+          </a:ln>
+        </p:spPr>
+        <p:txBody>
+          <a:bodyPr spcFirstLastPara="1" wrap="square" lIns="91425" tIns="91425" rIns="91425" bIns="91425" anchor="ctr" anchorCtr="0">
+            <a:noAutofit/>
+          </a:bodyPr>
+          <a:lstStyle/>
+          <a:p>
+            <a:pPr marL="0" lvl="0" indent="0" algn="l" rtl="0">
+              <a:spcBef>
+                <a:spcPts val="0"/>
+              </a:spcBef>
+              <a:spcAft>
+                <a:spcPts val="0"/>
+              </a:spcAft>
+              <a:buNone/>
+              <a:defRPr/>
+            </a:pPr>
+            <a:endParaRPr/>
+          </a:p>
+        </p:txBody>
+      </p:sp>
+      <p:sp>
+        <p:nvSpPr>
+          <p:cNvPr id="663714303" name="Google Shape;238;p14"/>
+          <p:cNvSpPr/>
+          <p:nvPr/>
+        </p:nvSpPr>
+        <p:spPr bwMode="auto">
+          <a:xfrm>
+            <a:off x="4617720" y="804672"/>
+            <a:ext cx="54864" cy="1325880"/>
+          </a:xfrm>
+          <a:prstGeom prst="rect">
+            <a:avLst/>
+          </a:prstGeom>
+          <a:solidFill>
+            <a:srgbClr val="C0272D"/>
+          </a:solidFill>
+          <a:ln w="12700" cap="flat" cmpd="sng">
+            <a:solidFill>
+              <a:srgbClr val="C0272D"/>
+            </a:solidFill>
+            <a:prstDash val="solid"/>
+            <a:round/>
+            <a:headEnd type="none" w="sm" len="sm"/>
+            <a:tailEnd type="none" w="sm" len="sm"/>
+          </a:ln>
+        </p:spPr>
+        <p:txBody>
+          <a:bodyPr spcFirstLastPara="1" wrap="square" lIns="91425" tIns="91425" rIns="91425" bIns="91425" anchor="ctr" anchorCtr="0">
+            <a:noAutofit/>
+          </a:bodyPr>
+          <a:lstStyle/>
+          <a:p>
+            <a:pPr marL="0" lvl="0" indent="0" algn="l" rtl="0">
+              <a:spcBef>
+                <a:spcPts val="0"/>
+              </a:spcBef>
+              <a:spcAft>
+                <a:spcPts val="0"/>
+              </a:spcAft>
+              <a:buNone/>
+              <a:defRPr/>
+            </a:pPr>
+            <a:endParaRPr/>
+          </a:p>
+        </p:txBody>
+      </p:sp>
+      <p:sp>
+        <p:nvSpPr>
+          <p:cNvPr id="654337346" name="Google Shape;239;p14"/>
+          <p:cNvSpPr/>
+          <p:nvPr/>
+        </p:nvSpPr>
+        <p:spPr bwMode="auto">
+          <a:xfrm>
+            <a:off x="4754880" y="877824"/>
+            <a:ext cx="3657600" cy="320040"/>
+          </a:xfrm>
+          <a:prstGeom prst="rect">
+            <a:avLst/>
+          </a:prstGeom>
+          <a:noFill/>
+          <a:ln>
+            <a:noFill/>
+          </a:ln>
+        </p:spPr>
+        <p:txBody>
+          <a:bodyPr spcFirstLastPara="1" wrap="square" lIns="91425" tIns="45700" rIns="91425" bIns="45700" anchor="ctr" anchorCtr="0">
+            <a:noAutofit/>
+          </a:bodyPr>
+          <a:lstStyle/>
+          <a:p>
+            <a:pPr marL="0" marR="0" lvl="0" indent="0" algn="l" rtl="0">
+              <a:spcBef>
+                <a:spcPts val="0"/>
+              </a:spcBef>
+              <a:spcAft>
+                <a:spcPts val="0"/>
+              </a:spcAft>
+              <a:buClr>
+                <a:srgbClr val="C0272D"/>
+              </a:buClr>
+              <a:buSzPts val="1300"/>
+              <a:buFont typeface="Calibri"/>
+              <a:buNone/>
+              <a:defRPr/>
+            </a:pPr>
+            <a:endParaRPr sz="1300" b="0" i="0" u="none" strike="noStrike" cap="none">
+              <a:solidFill>
+                <a:schemeClr val="dk1"/>
+              </a:solidFill>
+              <a:latin typeface="Calibri"/>
+              <a:ea typeface="Calibri"/>
+              <a:cs typeface="Calibri"/>
+            </a:endParaRPr>
+          </a:p>
+        </p:txBody>
+      </p:sp>
+      <p:sp>
+        <p:nvSpPr>
+          <p:cNvPr id="1431977147" name="Google Shape;240;p14"/>
+          <p:cNvSpPr/>
+          <p:nvPr/>
+        </p:nvSpPr>
+        <p:spPr bwMode="auto">
+          <a:xfrm>
+            <a:off x="4754880" y="1216151"/>
+            <a:ext cx="3749040" cy="841248"/>
+          </a:xfrm>
+          <a:prstGeom prst="rect">
+            <a:avLst/>
+          </a:prstGeom>
+          <a:noFill/>
+          <a:ln>
+            <a:noFill/>
+          </a:ln>
+        </p:spPr>
+        <p:txBody>
+          <a:bodyPr spcFirstLastPara="1" wrap="square" lIns="91425" tIns="45700" rIns="91425" bIns="45700" anchor="ctr" anchorCtr="0">
+            <a:noAutofit/>
+          </a:bodyPr>
+          <a:lstStyle/>
+          <a:p>
+            <a:pPr marL="0" marR="0" lvl="0" indent="0" algn="l" rtl="0">
+              <a:spcBef>
+                <a:spcPts val="0"/>
+              </a:spcBef>
+              <a:spcAft>
+                <a:spcPts val="0"/>
+              </a:spcAft>
+              <a:buClr>
+                <a:srgbClr val="1A1A1A"/>
+              </a:buClr>
+              <a:buSzPts val="1200"/>
+              <a:buFont typeface="Calibri"/>
+              <a:buNone/>
+              <a:defRPr/>
+            </a:pPr>
+            <a:endParaRPr sz="1200" b="0" i="0" u="none" strike="noStrike" cap="none">
+              <a:solidFill>
+                <a:schemeClr val="dk1"/>
+              </a:solidFill>
+              <a:latin typeface="Calibri"/>
+              <a:ea typeface="Calibri"/>
+              <a:cs typeface="Calibri"/>
+            </a:endParaRPr>
+          </a:p>
+        </p:txBody>
+      </p:sp>
+      <p:sp>
+        <p:nvSpPr>
+          <p:cNvPr id="1291467132" name="Google Shape;241;p14"/>
+          <p:cNvSpPr/>
+          <p:nvPr/>
+        </p:nvSpPr>
+        <p:spPr bwMode="auto">
+          <a:xfrm>
+            <a:off x="457200" y="2240280"/>
+            <a:ext cx="3977640" cy="1325880"/>
+          </a:xfrm>
+          <a:prstGeom prst="rect">
+            <a:avLst/>
+          </a:prstGeom>
+          <a:solidFill>
+            <a:srgbClr val="F5F5F5"/>
+          </a:solidFill>
+          <a:ln w="12700" cap="flat" cmpd="sng">
+            <a:solidFill>
+              <a:srgbClr val="CCCCCC"/>
+            </a:solidFill>
+            <a:prstDash val="solid"/>
+            <a:round/>
+            <a:headEnd type="none" w="sm" len="sm"/>
+            <a:tailEnd type="none" w="sm" len="sm"/>
+          </a:ln>
+        </p:spPr>
+        <p:txBody>
+          <a:bodyPr spcFirstLastPara="1" wrap="square" lIns="91425" tIns="91425" rIns="91425" bIns="91425" anchor="ctr" anchorCtr="0">
+            <a:noAutofit/>
+          </a:bodyPr>
+          <a:lstStyle/>
+          <a:p>
+            <a:pPr marL="0" lvl="0" indent="0" algn="l" rtl="0">
+              <a:spcBef>
+                <a:spcPts val="0"/>
+              </a:spcBef>
+              <a:spcAft>
+                <a:spcPts val="0"/>
+              </a:spcAft>
+              <a:buNone/>
+              <a:defRPr/>
+            </a:pPr>
+            <a:endParaRPr/>
+          </a:p>
+        </p:txBody>
+      </p:sp>
+      <p:sp>
+        <p:nvSpPr>
+          <p:cNvPr id="2083711207" name="Google Shape;242;p14"/>
+          <p:cNvSpPr/>
+          <p:nvPr/>
+        </p:nvSpPr>
+        <p:spPr bwMode="auto">
+          <a:xfrm>
+            <a:off x="457200" y="2240280"/>
+            <a:ext cx="54864" cy="1325880"/>
+          </a:xfrm>
+          <a:prstGeom prst="rect">
+            <a:avLst/>
+          </a:prstGeom>
+          <a:solidFill>
+            <a:srgbClr val="C0272D"/>
+          </a:solidFill>
+          <a:ln w="12700" cap="flat" cmpd="sng">
+            <a:solidFill>
+              <a:srgbClr val="C0272D"/>
+            </a:solidFill>
+            <a:prstDash val="solid"/>
+            <a:round/>
+            <a:headEnd type="none" w="sm" len="sm"/>
+            <a:tailEnd type="none" w="sm" len="sm"/>
+          </a:ln>
+        </p:spPr>
+        <p:txBody>
+          <a:bodyPr spcFirstLastPara="1" wrap="square" lIns="91425" tIns="91425" rIns="91425" bIns="91425" anchor="ctr" anchorCtr="0">
+            <a:noAutofit/>
+          </a:bodyPr>
+          <a:lstStyle/>
+          <a:p>
+            <a:pPr marL="0" lvl="0" indent="0" algn="l" rtl="0">
+              <a:spcBef>
+                <a:spcPts val="0"/>
+              </a:spcBef>
+              <a:spcAft>
+                <a:spcPts val="0"/>
+              </a:spcAft>
+              <a:buNone/>
+              <a:defRPr/>
+            </a:pPr>
+            <a:endParaRPr/>
+          </a:p>
+        </p:txBody>
+      </p:sp>
+      <p:sp>
+        <p:nvSpPr>
+          <p:cNvPr id="574253549" name="Google Shape;243;p14"/>
+          <p:cNvSpPr/>
+          <p:nvPr/>
+        </p:nvSpPr>
+        <p:spPr bwMode="auto">
+          <a:xfrm>
+            <a:off x="594360" y="2313432"/>
+            <a:ext cx="3657600" cy="320040"/>
+          </a:xfrm>
+          <a:prstGeom prst="rect">
+            <a:avLst/>
+          </a:prstGeom>
+          <a:noFill/>
+          <a:ln>
+            <a:noFill/>
+          </a:ln>
+        </p:spPr>
+        <p:txBody>
+          <a:bodyPr spcFirstLastPara="1" wrap="square" lIns="91425" tIns="45700" rIns="91425" bIns="45700" anchor="ctr" anchorCtr="0">
+            <a:noAutofit/>
+          </a:bodyPr>
+          <a:lstStyle/>
+          <a:p>
+            <a:pPr marL="0" marR="0" lvl="0" indent="0" algn="l" rtl="0">
+              <a:spcBef>
+                <a:spcPts val="0"/>
+              </a:spcBef>
+              <a:spcAft>
+                <a:spcPts val="0"/>
+              </a:spcAft>
+              <a:buClr>
+                <a:srgbClr val="C0272D"/>
+              </a:buClr>
+              <a:buSzPts val="1300"/>
+              <a:buFont typeface="Calibri"/>
+              <a:buNone/>
+              <a:defRPr/>
+            </a:pPr>
+            <a:endParaRPr sz="1300" b="0" i="0" u="none" strike="noStrike" cap="none">
+              <a:solidFill>
+                <a:schemeClr val="dk1"/>
+              </a:solidFill>
+              <a:latin typeface="Calibri"/>
+              <a:ea typeface="Calibri"/>
+              <a:cs typeface="Calibri"/>
+            </a:endParaRPr>
+          </a:p>
+        </p:txBody>
+      </p:sp>
+      <p:sp>
+        <p:nvSpPr>
+          <p:cNvPr id="863757126" name="Google Shape;244;p14"/>
+          <p:cNvSpPr/>
+          <p:nvPr/>
+        </p:nvSpPr>
+        <p:spPr bwMode="auto">
+          <a:xfrm>
+            <a:off x="594360" y="2651760"/>
+            <a:ext cx="3749040" cy="841248"/>
+          </a:xfrm>
+          <a:prstGeom prst="rect">
+            <a:avLst/>
+          </a:prstGeom>
+          <a:noFill/>
+          <a:ln>
+            <a:noFill/>
+          </a:ln>
+        </p:spPr>
+        <p:txBody>
+          <a:bodyPr spcFirstLastPara="1" wrap="square" lIns="91425" tIns="45700" rIns="91425" bIns="45700" anchor="ctr" anchorCtr="0">
+            <a:noAutofit/>
+          </a:bodyPr>
+          <a:lstStyle/>
+          <a:p>
+            <a:pPr marL="0" marR="0" lvl="0" indent="0" algn="l" rtl="0">
+              <a:spcBef>
+                <a:spcPts val="0"/>
+              </a:spcBef>
+              <a:spcAft>
+                <a:spcPts val="0"/>
+              </a:spcAft>
+              <a:buClr>
+                <a:srgbClr val="1A1A1A"/>
+              </a:buClr>
+              <a:buSzPts val="1200"/>
+              <a:buFont typeface="Calibri"/>
+              <a:buNone/>
+              <a:defRPr/>
+            </a:pPr>
+            <a:endParaRPr sz="1200" b="0" i="0" u="none" strike="noStrike" cap="none">
+              <a:solidFill>
+                <a:schemeClr val="dk1"/>
+              </a:solidFill>
+              <a:latin typeface="Calibri"/>
+              <a:ea typeface="Calibri"/>
+              <a:cs typeface="Calibri"/>
+            </a:endParaRPr>
+          </a:p>
+        </p:txBody>
+      </p:sp>
+      <p:sp>
+        <p:nvSpPr>
+          <p:cNvPr id="1844858504" name="Google Shape;245;p14"/>
+          <p:cNvSpPr/>
+          <p:nvPr/>
+        </p:nvSpPr>
+        <p:spPr bwMode="auto">
+          <a:xfrm>
+            <a:off x="4617720" y="2240280"/>
+            <a:ext cx="3977640" cy="1325880"/>
+          </a:xfrm>
+          <a:prstGeom prst="rect">
+            <a:avLst/>
+          </a:prstGeom>
+          <a:solidFill>
+            <a:srgbClr val="E8D5D5"/>
+          </a:solidFill>
+          <a:ln w="12700" cap="flat" cmpd="sng">
+            <a:solidFill>
+              <a:srgbClr val="CCCCCC"/>
+            </a:solidFill>
+            <a:prstDash val="solid"/>
+            <a:round/>
+            <a:headEnd type="none" w="sm" len="sm"/>
+            <a:tailEnd type="none" w="sm" len="sm"/>
+          </a:ln>
+        </p:spPr>
+        <p:txBody>
+          <a:bodyPr spcFirstLastPara="1" wrap="square" lIns="91425" tIns="91425" rIns="91425" bIns="91425" anchor="ctr" anchorCtr="0">
+            <a:noAutofit/>
+          </a:bodyPr>
+          <a:lstStyle/>
+          <a:p>
+            <a:pPr marL="0" lvl="0" indent="0" algn="l" rtl="0">
+              <a:spcBef>
+                <a:spcPts val="0"/>
+              </a:spcBef>
+              <a:spcAft>
+                <a:spcPts val="0"/>
+              </a:spcAft>
+              <a:buNone/>
+              <a:defRPr/>
+            </a:pPr>
+            <a:endParaRPr/>
+          </a:p>
+        </p:txBody>
+      </p:sp>
+      <p:sp>
+        <p:nvSpPr>
+          <p:cNvPr id="1026467360" name="Google Shape;246;p14"/>
+          <p:cNvSpPr/>
+          <p:nvPr/>
+        </p:nvSpPr>
+        <p:spPr bwMode="auto">
+          <a:xfrm>
+            <a:off x="4617720" y="2240280"/>
+            <a:ext cx="54864" cy="1325880"/>
+          </a:xfrm>
+          <a:prstGeom prst="rect">
+            <a:avLst/>
+          </a:prstGeom>
+          <a:solidFill>
+            <a:srgbClr val="C0272D"/>
+          </a:solidFill>
+          <a:ln w="12700" cap="flat" cmpd="sng">
+            <a:solidFill>
+              <a:srgbClr val="C0272D"/>
+            </a:solidFill>
+            <a:prstDash val="solid"/>
+            <a:round/>
+            <a:headEnd type="none" w="sm" len="sm"/>
+            <a:tailEnd type="none" w="sm" len="sm"/>
+          </a:ln>
+        </p:spPr>
+        <p:txBody>
+          <a:bodyPr spcFirstLastPara="1" wrap="square" lIns="91425" tIns="91425" rIns="91425" bIns="91425" anchor="ctr" anchorCtr="0">
+            <a:noAutofit/>
+          </a:bodyPr>
+          <a:lstStyle/>
+          <a:p>
+            <a:pPr marL="0" lvl="0" indent="0" algn="l" rtl="0">
+              <a:spcBef>
+                <a:spcPts val="0"/>
+              </a:spcBef>
+              <a:spcAft>
+                <a:spcPts val="0"/>
+              </a:spcAft>
+              <a:buNone/>
+              <a:defRPr/>
+            </a:pPr>
+            <a:endParaRPr/>
+          </a:p>
+        </p:txBody>
+      </p:sp>
+      <p:sp>
+        <p:nvSpPr>
+          <p:cNvPr id="1396163480" name="Google Shape;247;p14"/>
+          <p:cNvSpPr/>
+          <p:nvPr/>
+        </p:nvSpPr>
+        <p:spPr bwMode="auto">
+          <a:xfrm>
+            <a:off x="4754880" y="2313432"/>
+            <a:ext cx="3657600" cy="320040"/>
+          </a:xfrm>
+          <a:prstGeom prst="rect">
+            <a:avLst/>
+          </a:prstGeom>
+          <a:noFill/>
+          <a:ln>
+            <a:noFill/>
+          </a:ln>
+        </p:spPr>
+        <p:txBody>
+          <a:bodyPr spcFirstLastPara="1" wrap="square" lIns="91425" tIns="45700" rIns="91425" bIns="45700" anchor="ctr" anchorCtr="0">
+            <a:noAutofit/>
+          </a:bodyPr>
+          <a:lstStyle/>
+          <a:p>
+            <a:pPr marL="0" marR="0" lvl="0" indent="0" algn="l" rtl="0">
+              <a:spcBef>
+                <a:spcPts val="0"/>
+              </a:spcBef>
+              <a:spcAft>
+                <a:spcPts val="0"/>
+              </a:spcAft>
+              <a:buClr>
+                <a:srgbClr val="C0272D"/>
+              </a:buClr>
+              <a:buSzPts val="1300"/>
+              <a:buFont typeface="Calibri"/>
+              <a:buNone/>
+              <a:defRPr/>
+            </a:pPr>
+            <a:endParaRPr sz="1300" b="0" i="0" u="none" strike="noStrike" cap="none">
+              <a:solidFill>
+                <a:schemeClr val="dk1"/>
+              </a:solidFill>
+              <a:latin typeface="Calibri"/>
+              <a:ea typeface="Calibri"/>
+              <a:cs typeface="Calibri"/>
+            </a:endParaRPr>
+          </a:p>
+        </p:txBody>
+      </p:sp>
+      <p:sp>
+        <p:nvSpPr>
+          <p:cNvPr id="1679277714" name="Google Shape;248;p14"/>
+          <p:cNvSpPr/>
+          <p:nvPr/>
+        </p:nvSpPr>
+        <p:spPr bwMode="auto">
+          <a:xfrm>
+            <a:off x="4754880" y="2651760"/>
+            <a:ext cx="3749040" cy="841248"/>
+          </a:xfrm>
+          <a:prstGeom prst="rect">
+            <a:avLst/>
+          </a:prstGeom>
+          <a:noFill/>
+          <a:ln>
+            <a:noFill/>
+          </a:ln>
+        </p:spPr>
+        <p:txBody>
+          <a:bodyPr spcFirstLastPara="1" wrap="square" lIns="91425" tIns="45700" rIns="91425" bIns="45700" anchor="ctr" anchorCtr="0">
+            <a:noAutofit/>
+          </a:bodyPr>
+          <a:lstStyle/>
+          <a:p>
+            <a:pPr marL="0" marR="0" lvl="0" indent="0" algn="l" rtl="0">
+              <a:spcBef>
+                <a:spcPts val="0"/>
+              </a:spcBef>
+              <a:spcAft>
+                <a:spcPts val="0"/>
+              </a:spcAft>
+              <a:buClr>
+                <a:srgbClr val="1A1A1A"/>
+              </a:buClr>
+              <a:buSzPts val="1200"/>
+              <a:buFont typeface="Calibri"/>
+              <a:buNone/>
+              <a:defRPr/>
+            </a:pPr>
+            <a:endParaRPr sz="1200" b="0" i="0" u="none" strike="noStrike" cap="none">
+              <a:solidFill>
+                <a:schemeClr val="dk1"/>
+              </a:solidFill>
+              <a:latin typeface="Calibri"/>
+              <a:ea typeface="Calibri"/>
+              <a:cs typeface="Calibri"/>
+            </a:endParaRPr>
+          </a:p>
+        </p:txBody>
+      </p:sp>
+      <p:sp>
+        <p:nvSpPr>
+          <p:cNvPr id="939920740" name="Google Shape;200;p13"/>
+          <p:cNvSpPr/>
+          <p:nvPr/>
+        </p:nvSpPr>
+        <p:spPr bwMode="auto">
+          <a:xfrm flipH="0" flipV="0">
+            <a:off x="411479" y="3844847"/>
+            <a:ext cx="8229600" cy="1092912"/>
+          </a:xfrm>
+          <a:prstGeom prst="rect">
+            <a:avLst/>
+          </a:prstGeom>
+          <a:solidFill>
+            <a:srgbClr val="C0272D"/>
+          </a:solidFill>
+          <a:ln w="12700" cap="flat" cmpd="sng">
+            <a:solidFill>
+              <a:srgbClr val="C0272D"/>
+            </a:solidFill>
+            <a:prstDash val="solid"/>
+            <a:round/>
+            <a:headEnd type="none" w="sm" len="sm"/>
+            <a:tailEnd type="none" w="sm" len="sm"/>
+          </a:ln>
+        </p:spPr>
+        <p:txBody>
+          <a:bodyPr spcFirstLastPara="1" wrap="square" lIns="91423" tIns="91423" rIns="91423" bIns="91423" anchor="ctr" anchorCtr="0">
+            <a:noAutofit/>
+          </a:bodyPr>
+          <a:lstStyle/>
+          <a:p>
+            <a:pPr>
+              <a:defRPr/>
+            </a:pPr>
+            <a:endParaRPr lang="ru-RU" sz="1400" b="1" i="0" u="none" strike="noStrike" cap="none" spc="0">
+              <a:solidFill>
+                <a:srgbClr val="FFFFFF"/>
+              </a:solidFill>
+              <a:latin typeface="Calibri"/>
+              <a:cs typeface="Calibri"/>
+            </a:endParaRPr>
+          </a:p>
+        </p:txBody>
+      </p:sp>
+    </p:spTree>
+  </p:cSld>
+  <p:clrMapOvr>
+    <a:masterClrMapping/>
+  </p:clrMapOvr>
+  <mc:AlternateContent xmlns:mc="http://schemas.openxmlformats.org/markup-compatibility/2006">
+    <mc:Choice xmlns:p159="http://schemas.microsoft.com/office/powerpoint/2015/09/main" xmlns:p14="http://schemas.microsoft.com/office/powerpoint/2010/main" Requires="p159">
+      <p:transition p14:dur="500" advClick="1"/>
+    </mc:Choice>
+    <mc:Fallback>
+      <p:transition advClick="1"/>
+    </mc:Fallback>
+  </mc:AlternateContent>
+</p:sld>
+</file>
+
+<file path=ppt/slides/slide16.xml><?xml version="1.0" encoding="utf-8"?>
+<p:sld xmlns:a="http://schemas.openxmlformats.org/drawingml/2006/main" xmlns:r="http://schemas.openxmlformats.org/officeDocument/2006/relationships" xmlns:p="http://schemas.openxmlformats.org/presentationml/2006/main" xmlns:m="http://schemas.openxmlformats.org/officeDocument/2006/math" xmlns:w="http://schemas.openxmlformats.org/wordprocessingml/2006/main" xmlns:mc="http://schemas.openxmlformats.org/markup-compatibility/2006" showMasterPhAnim="0" showMasterSp="1" show="1">
+  <p:cSld name="">
+    <p:bg>
+      <p:bgPr shadeToTitle="0">
+        <a:solidFill>
+          <a:srgbClr val="FFFFFF"/>
+        </a:solidFill>
+      </p:bgPr>
+    </p:bg>
+    <p:spTree>
+      <p:nvGrpSpPr>
+        <p:cNvPr id="1" name=""/>
+        <p:cNvGrpSpPr/>
+        <p:nvPr/>
+      </p:nvGrpSpPr>
+      <p:grpSpPr bwMode="auto">
+        <a:xfrm>
+          <a:off x="0" y="0"/>
+          <a:ext cx="0" cy="0"/>
+          <a:chOff x="0" y="0"/>
+          <a:chExt cx="0" cy="0"/>
+        </a:xfrm>
+      </p:grpSpPr>
+      <p:pic>
+        <p:nvPicPr>
+          <p:cNvPr id="1434506623" name="Google Shape;280;p16" descr="/home/claude/logo_300spbu.png"/>
+          <p:cNvPicPr/>
+          <p:nvPr/>
+        </p:nvPicPr>
+        <p:blipFill rotWithShape="1">
+          <a:blip r:embed="rId3">
+            <a:alphaModFix/>
+          </a:blip>
+          <a:srcRect l="0" t="0" r="0" b="0"/>
+          <a:stretch/>
+        </p:blipFill>
+        <p:spPr bwMode="auto">
+          <a:xfrm>
+            <a:off x="7498080" y="137160"/>
+            <a:ext cx="1463040" cy="475488"/>
+          </a:xfrm>
+          <a:prstGeom prst="rect">
+            <a:avLst/>
+          </a:prstGeom>
+          <a:noFill/>
+          <a:ln>
+            <a:noFill/>
+          </a:ln>
+        </p:spPr>
+      </p:pic>
+      <p:sp>
+        <p:nvSpPr>
+          <p:cNvPr id="589775469" name="Google Shape;281;p16"/>
+          <p:cNvSpPr/>
+          <p:nvPr/>
+        </p:nvSpPr>
+        <p:spPr bwMode="auto">
+          <a:xfrm>
+            <a:off x="8686800" y="4846320"/>
+            <a:ext cx="274320" cy="182880"/>
+          </a:xfrm>
+          <a:prstGeom prst="rect">
+            <a:avLst/>
+          </a:prstGeom>
+          <a:solidFill>
+            <a:srgbClr val="C0272D"/>
+          </a:solidFill>
+          <a:ln w="12700" cap="flat" cmpd="sng">
+            <a:solidFill>
+              <a:srgbClr val="C0272D"/>
+            </a:solidFill>
+            <a:prstDash val="solid"/>
+            <a:round/>
+            <a:headEnd type="none" w="sm" len="sm"/>
+            <a:tailEnd type="none" w="sm" len="sm"/>
+          </a:ln>
+        </p:spPr>
+        <p:txBody>
+          <a:bodyPr spcFirstLastPara="1" wrap="square" lIns="91425" tIns="91425" rIns="91425" bIns="91425" anchor="ctr" anchorCtr="0">
+            <a:noAutofit/>
+          </a:bodyPr>
+          <a:lstStyle/>
+          <a:p>
+            <a:pPr marL="0" lvl="0" indent="0" algn="l" rtl="0">
+              <a:spcBef>
+                <a:spcPts val="0"/>
+              </a:spcBef>
+              <a:spcAft>
+                <a:spcPts val="0"/>
+              </a:spcAft>
+              <a:buNone/>
+              <a:defRPr/>
+            </a:pPr>
+            <a:endParaRPr>
+              <a:latin typeface="Open Sans"/>
+              <a:cs typeface="Open Sans"/>
+            </a:endParaRPr>
+          </a:p>
+        </p:txBody>
+      </p:sp>
+      <p:sp>
+        <p:nvSpPr>
+          <p:cNvPr id="289803866" name="Google Shape;282;p16"/>
+          <p:cNvSpPr/>
+          <p:nvPr/>
+        </p:nvSpPr>
+        <p:spPr bwMode="auto">
+          <a:xfrm>
+            <a:off x="8641080" y="4800600"/>
+            <a:ext cx="365760" cy="228600"/>
+          </a:xfrm>
+          <a:prstGeom prst="rect">
+            <a:avLst/>
+          </a:prstGeom>
+          <a:noFill/>
+          <a:ln>
+            <a:noFill/>
+          </a:ln>
+        </p:spPr>
+        <p:txBody>
+          <a:bodyPr spcFirstLastPara="1" wrap="square" lIns="0" tIns="0" rIns="0" bIns="0" anchor="ctr" anchorCtr="0">
+            <a:noAutofit/>
+          </a:bodyPr>
+          <a:lstStyle/>
+          <a:p>
+            <a:pPr marL="0" marR="0" lvl="0" indent="0" algn="ctr" rtl="0">
+              <a:spcBef>
+                <a:spcPts val="0"/>
+              </a:spcBef>
+              <a:spcAft>
+                <a:spcPts val="0"/>
+              </a:spcAft>
+              <a:buClr>
+                <a:srgbClr val="FFFFFF"/>
+              </a:buClr>
+              <a:buSzPts val="1000"/>
+              <a:buFont typeface="Calibri"/>
+              <a:buNone/>
+              <a:defRPr/>
+            </a:pPr>
+            <a:r>
+              <a:rPr lang="en-US" sz="1000" b="1" i="0" u="none" strike="noStrike" cap="none">
+                <a:solidFill>
+                  <a:srgbClr val="FFFFFF"/>
+                </a:solidFill>
+                <a:latin typeface="Open Sans"/>
+                <a:ea typeface="Open Sans"/>
+                <a:cs typeface="Open Sans"/>
+              </a:rPr>
+              <a:t>1</a:t>
+            </a:r>
+            <a:r>
+              <a:rPr lang="ru-RU" sz="1000" b="1" i="0" u="none" strike="noStrike" cap="none">
+                <a:solidFill>
+                  <a:srgbClr val="FFFFFF"/>
+                </a:solidFill>
+                <a:latin typeface="Open Sans"/>
+                <a:ea typeface="Open Sans"/>
+                <a:cs typeface="Open Sans"/>
+              </a:rPr>
+              <a:t>2</a:t>
+            </a:r>
+            <a:endParaRPr sz="1000" b="0" i="0" u="none" strike="noStrike" cap="none">
+              <a:solidFill>
+                <a:schemeClr val="dk1"/>
+              </a:solidFill>
+              <a:latin typeface="Open Sans"/>
+              <a:cs typeface="Open Sans"/>
+            </a:endParaRPr>
+          </a:p>
+        </p:txBody>
+      </p:sp>
+      <p:sp>
+        <p:nvSpPr>
+          <p:cNvPr id="1132647821" name="Google Shape;283;p16"/>
+          <p:cNvSpPr/>
+          <p:nvPr/>
+        </p:nvSpPr>
+        <p:spPr bwMode="auto">
+          <a:xfrm>
+            <a:off x="594360" y="182880"/>
+            <a:ext cx="7315200" cy="502920"/>
+          </a:xfrm>
+          <a:prstGeom prst="rect">
+            <a:avLst/>
+          </a:prstGeom>
+          <a:noFill/>
+          <a:ln>
+            <a:noFill/>
+          </a:ln>
+        </p:spPr>
+        <p:txBody>
+          <a:bodyPr spcFirstLastPara="1" wrap="square" lIns="91425" tIns="45700" rIns="91425" bIns="45700" anchor="ctr" anchorCtr="0">
+            <a:noAutofit/>
+          </a:bodyPr>
+          <a:lstStyle/>
+          <a:p>
+            <a:pPr marL="0" marR="0" lvl="0" indent="0" algn="l" rtl="0">
+              <a:spcBef>
+                <a:spcPts val="0"/>
+              </a:spcBef>
+              <a:spcAft>
+                <a:spcPts val="0"/>
+              </a:spcAft>
+              <a:buClr>
+                <a:srgbClr val="C0272D"/>
+              </a:buClr>
+              <a:buSzPts val="2600"/>
+              <a:buFont typeface="Calibri"/>
+              <a:buNone/>
+              <a:defRPr/>
+            </a:pPr>
+            <a:r>
+              <a:rPr lang="ru-RU" sz="2600" b="1" i="0" u="none" strike="noStrike" cap="none">
+                <a:solidFill>
+                  <a:srgbClr val="C0272D"/>
+                </a:solidFill>
+                <a:latin typeface="Open Sans"/>
+                <a:ea typeface="Open Sans"/>
+                <a:cs typeface="Open Sans"/>
+              </a:rPr>
+              <a:t>Выводы.</a:t>
+            </a:r>
+            <a:endParaRPr sz="2600" b="0" i="0" u="none" strike="noStrike" cap="none">
+              <a:solidFill>
+                <a:schemeClr val="dk1"/>
+              </a:solidFill>
+              <a:latin typeface="Open Sans"/>
+              <a:cs typeface="Open Sans"/>
+            </a:endParaRPr>
+          </a:p>
+        </p:txBody>
+      </p:sp>
+      <p:sp>
+        <p:nvSpPr>
+          <p:cNvPr id="1298554476" name="Google Shape;284;p16"/>
+          <p:cNvSpPr/>
+          <p:nvPr/>
+        </p:nvSpPr>
+        <p:spPr bwMode="auto">
+          <a:xfrm>
+            <a:off x="457200" y="201168"/>
+            <a:ext cx="73152" cy="457200"/>
+          </a:xfrm>
+          <a:prstGeom prst="rect">
+            <a:avLst/>
+          </a:prstGeom>
+          <a:solidFill>
+            <a:srgbClr val="C0272D"/>
+          </a:solidFill>
+          <a:ln w="12700" cap="flat" cmpd="sng">
+            <a:solidFill>
+              <a:srgbClr val="C0272D"/>
+            </a:solidFill>
+            <a:prstDash val="solid"/>
+            <a:round/>
+            <a:headEnd type="none" w="sm" len="sm"/>
+            <a:tailEnd type="none" w="sm" len="sm"/>
+          </a:ln>
+        </p:spPr>
+        <p:txBody>
+          <a:bodyPr spcFirstLastPara="1" wrap="square" lIns="91425" tIns="91425" rIns="91425" bIns="91425" anchor="ctr" anchorCtr="0">
+            <a:noAutofit/>
+          </a:bodyPr>
+          <a:lstStyle/>
+          <a:p>
+            <a:pPr marL="0" lvl="0" indent="0" algn="l" rtl="0">
+              <a:spcBef>
+                <a:spcPts val="0"/>
+              </a:spcBef>
+              <a:spcAft>
+                <a:spcPts val="0"/>
+              </a:spcAft>
+              <a:buNone/>
+              <a:defRPr/>
+            </a:pPr>
+            <a:endParaRPr>
+              <a:latin typeface="Open Sans"/>
+              <a:cs typeface="Open Sans"/>
+            </a:endParaRPr>
+          </a:p>
+        </p:txBody>
+      </p:sp>
+      <p:sp>
+        <p:nvSpPr>
+          <p:cNvPr id="609276143" name="Google Shape;285;p16"/>
+          <p:cNvSpPr/>
+          <p:nvPr/>
+        </p:nvSpPr>
+        <p:spPr bwMode="auto">
+          <a:xfrm>
+            <a:off x="457200" y="822960"/>
+            <a:ext cx="8229600" cy="768096"/>
+          </a:xfrm>
+          <a:prstGeom prst="rect">
+            <a:avLst/>
+          </a:prstGeom>
+          <a:solidFill>
+            <a:srgbClr val="F5F5F5"/>
+          </a:solidFill>
+          <a:ln w="12700" cap="flat" cmpd="sng">
+            <a:solidFill>
+              <a:srgbClr val="E0E0E0"/>
+            </a:solidFill>
+            <a:prstDash val="solid"/>
+            <a:round/>
+            <a:headEnd type="none" w="sm" len="sm"/>
+            <a:tailEnd type="none" w="sm" len="sm"/>
+          </a:ln>
+        </p:spPr>
+        <p:txBody>
+          <a:bodyPr spcFirstLastPara="1" wrap="square" lIns="91425" tIns="91425" rIns="91425" bIns="91425" anchor="ctr" anchorCtr="0">
+            <a:noAutofit/>
+          </a:bodyPr>
+          <a:lstStyle/>
+          <a:p>
+            <a:pPr marL="0" lvl="0" indent="0" algn="l" rtl="0">
+              <a:spcBef>
+                <a:spcPts val="0"/>
+              </a:spcBef>
+              <a:spcAft>
+                <a:spcPts val="0"/>
+              </a:spcAft>
+              <a:buNone/>
+              <a:defRPr/>
+            </a:pPr>
+            <a:endParaRPr>
+              <a:latin typeface="Open Sans"/>
+              <a:cs typeface="Open Sans"/>
+            </a:endParaRPr>
+          </a:p>
+        </p:txBody>
+      </p:sp>
+      <p:sp>
+        <p:nvSpPr>
+          <p:cNvPr id="1316365784" name="Google Shape;286;p16"/>
+          <p:cNvSpPr/>
+          <p:nvPr/>
+        </p:nvSpPr>
+        <p:spPr bwMode="auto">
+          <a:xfrm>
+            <a:off x="457200" y="822960"/>
+            <a:ext cx="411480" cy="768096"/>
+          </a:xfrm>
+          <a:prstGeom prst="rect">
+            <a:avLst/>
+          </a:prstGeom>
+          <a:solidFill>
+            <a:srgbClr val="C0272D"/>
+          </a:solidFill>
+          <a:ln w="12700" cap="flat" cmpd="sng">
+            <a:solidFill>
+              <a:srgbClr val="C0272D"/>
+            </a:solidFill>
+            <a:prstDash val="solid"/>
+            <a:round/>
+            <a:headEnd type="none" w="sm" len="sm"/>
+            <a:tailEnd type="none" w="sm" len="sm"/>
+          </a:ln>
+        </p:spPr>
+        <p:txBody>
+          <a:bodyPr spcFirstLastPara="1" wrap="square" lIns="91425" tIns="91425" rIns="91425" bIns="91425" anchor="ctr" anchorCtr="0">
+            <a:noAutofit/>
+          </a:bodyPr>
+          <a:lstStyle/>
+          <a:p>
+            <a:pPr marL="0" lvl="0" indent="0" algn="l" rtl="0">
+              <a:spcBef>
+                <a:spcPts val="0"/>
+              </a:spcBef>
+              <a:spcAft>
+                <a:spcPts val="0"/>
+              </a:spcAft>
+              <a:buNone/>
+              <a:defRPr/>
+            </a:pPr>
+            <a:endParaRPr>
+              <a:latin typeface="Open Sans"/>
+              <a:cs typeface="Open Sans"/>
+            </a:endParaRPr>
+          </a:p>
+        </p:txBody>
+      </p:sp>
+      <p:sp>
+        <p:nvSpPr>
+          <p:cNvPr id="1046438866" name="Google Shape;287;p16"/>
+          <p:cNvSpPr/>
+          <p:nvPr/>
+        </p:nvSpPr>
+        <p:spPr bwMode="auto">
+          <a:xfrm>
+            <a:off x="457200" y="822960"/>
+            <a:ext cx="411480" cy="768096"/>
+          </a:xfrm>
+          <a:prstGeom prst="rect">
+            <a:avLst/>
+          </a:prstGeom>
+          <a:noFill/>
+          <a:ln>
+            <a:noFill/>
+          </a:ln>
+        </p:spPr>
+        <p:txBody>
+          <a:bodyPr spcFirstLastPara="1" wrap="square" lIns="91425" tIns="45700" rIns="91425" bIns="45700" anchor="ctr" anchorCtr="0">
+            <a:noAutofit/>
+          </a:bodyPr>
+          <a:lstStyle/>
+          <a:p>
+            <a:pPr marL="0" marR="0" lvl="0" indent="0" algn="ctr" rtl="0">
+              <a:spcBef>
+                <a:spcPts val="0"/>
+              </a:spcBef>
+              <a:spcAft>
+                <a:spcPts val="0"/>
+              </a:spcAft>
+              <a:buClr>
+                <a:srgbClr val="FFFFFF"/>
+              </a:buClr>
+              <a:buSzPts val="1600"/>
+              <a:buFont typeface="Calibri"/>
+              <a:buNone/>
+              <a:defRPr/>
+            </a:pPr>
+            <a:r>
+              <a:rPr lang="en-US" sz="1600" b="1" i="0" u="none" strike="noStrike" cap="none">
+                <a:solidFill>
+                  <a:srgbClr val="FFFFFF"/>
+                </a:solidFill>
+                <a:latin typeface="Open Sans"/>
+                <a:ea typeface="Open Sans"/>
+                <a:cs typeface="Open Sans"/>
+              </a:rPr>
+              <a:t>1</a:t>
+            </a:r>
+            <a:endParaRPr sz="1600" b="0" i="0" u="none" strike="noStrike" cap="none">
+              <a:solidFill>
+                <a:schemeClr val="dk1"/>
+              </a:solidFill>
+              <a:latin typeface="Open Sans"/>
+              <a:cs typeface="Open Sans"/>
+            </a:endParaRPr>
+          </a:p>
+        </p:txBody>
+      </p:sp>
+      <p:sp>
+        <p:nvSpPr>
+          <p:cNvPr id="624715871" name="Google Shape;288;p16"/>
+          <p:cNvSpPr/>
+          <p:nvPr/>
+        </p:nvSpPr>
+        <p:spPr bwMode="auto">
+          <a:xfrm>
+            <a:off x="960120" y="914400"/>
+            <a:ext cx="7589520" cy="594360"/>
+          </a:xfrm>
+          <a:prstGeom prst="rect">
+            <a:avLst/>
+          </a:prstGeom>
+          <a:noFill/>
+          <a:ln>
+            <a:noFill/>
+          </a:ln>
+        </p:spPr>
+        <p:txBody>
+          <a:bodyPr spcFirstLastPara="1" wrap="square" lIns="91425" tIns="45700" rIns="91425" bIns="45700" anchor="ctr" anchorCtr="0">
+            <a:noAutofit/>
+          </a:bodyPr>
+          <a:lstStyle/>
+          <a:p>
+            <a:pPr marL="0" marR="0" lvl="0" indent="0" algn="l" rtl="0">
+              <a:spcBef>
+                <a:spcPts val="0"/>
+              </a:spcBef>
+              <a:spcAft>
+                <a:spcPts val="0"/>
+              </a:spcAft>
+              <a:buClr>
+                <a:srgbClr val="1A1A1A"/>
+              </a:buClr>
+              <a:buSzPts val="1250"/>
+              <a:buFont typeface="Calibri"/>
+              <a:buNone/>
+              <a:defRPr/>
+            </a:pPr>
+            <a:endParaRPr sz="1250" b="0" i="0" u="none" strike="noStrike" cap="none">
+              <a:solidFill>
+                <a:schemeClr val="dk1"/>
+              </a:solidFill>
+              <a:latin typeface="Open Sans"/>
+              <a:cs typeface="Open Sans"/>
+            </a:endParaRPr>
+          </a:p>
+        </p:txBody>
+      </p:sp>
+      <p:sp>
+        <p:nvSpPr>
+          <p:cNvPr id="1162121357" name="Google Shape;289;p16"/>
+          <p:cNvSpPr/>
+          <p:nvPr/>
+        </p:nvSpPr>
+        <p:spPr bwMode="auto">
+          <a:xfrm>
+            <a:off x="457200" y="1664208"/>
+            <a:ext cx="8229600" cy="768096"/>
+          </a:xfrm>
+          <a:prstGeom prst="rect">
+            <a:avLst/>
+          </a:prstGeom>
+          <a:solidFill>
+            <a:srgbClr val="FFFFFF"/>
+          </a:solidFill>
+          <a:ln w="12700" cap="flat" cmpd="sng">
+            <a:solidFill>
+              <a:srgbClr val="E0E0E0"/>
+            </a:solidFill>
+            <a:prstDash val="solid"/>
+            <a:round/>
+            <a:headEnd type="none" w="sm" len="sm"/>
+            <a:tailEnd type="none" w="sm" len="sm"/>
+          </a:ln>
+        </p:spPr>
+        <p:txBody>
+          <a:bodyPr spcFirstLastPara="1" wrap="square" lIns="91425" tIns="91425" rIns="91425" bIns="91425" anchor="ctr" anchorCtr="0">
+            <a:noAutofit/>
+          </a:bodyPr>
+          <a:lstStyle/>
+          <a:p>
+            <a:pPr marL="0" lvl="0" indent="0" algn="l" rtl="0">
+              <a:spcBef>
+                <a:spcPts val="0"/>
+              </a:spcBef>
+              <a:spcAft>
+                <a:spcPts val="0"/>
+              </a:spcAft>
+              <a:buNone/>
+              <a:defRPr/>
+            </a:pPr>
+            <a:endParaRPr>
+              <a:latin typeface="Open Sans"/>
+              <a:cs typeface="Open Sans"/>
+            </a:endParaRPr>
+          </a:p>
+        </p:txBody>
+      </p:sp>
+      <p:sp>
+        <p:nvSpPr>
+          <p:cNvPr id="803347447" name="Google Shape;290;p16"/>
+          <p:cNvSpPr/>
+          <p:nvPr/>
+        </p:nvSpPr>
+        <p:spPr bwMode="auto">
+          <a:xfrm>
+            <a:off x="457200" y="1664208"/>
+            <a:ext cx="411480" cy="768096"/>
+          </a:xfrm>
+          <a:prstGeom prst="rect">
+            <a:avLst/>
+          </a:prstGeom>
+          <a:solidFill>
+            <a:srgbClr val="C0272D"/>
+          </a:solidFill>
+          <a:ln w="12700" cap="flat" cmpd="sng">
+            <a:solidFill>
+              <a:srgbClr val="C0272D"/>
+            </a:solidFill>
+            <a:prstDash val="solid"/>
+            <a:round/>
+            <a:headEnd type="none" w="sm" len="sm"/>
+            <a:tailEnd type="none" w="sm" len="sm"/>
+          </a:ln>
+        </p:spPr>
+        <p:txBody>
+          <a:bodyPr spcFirstLastPara="1" wrap="square" lIns="91425" tIns="91425" rIns="91425" bIns="91425" anchor="ctr" anchorCtr="0">
+            <a:noAutofit/>
+          </a:bodyPr>
+          <a:lstStyle/>
+          <a:p>
+            <a:pPr marL="0" lvl="0" indent="0" algn="l" rtl="0">
+              <a:spcBef>
+                <a:spcPts val="0"/>
+              </a:spcBef>
+              <a:spcAft>
+                <a:spcPts val="0"/>
+              </a:spcAft>
+              <a:buNone/>
+              <a:defRPr/>
+            </a:pPr>
+            <a:endParaRPr>
+              <a:latin typeface="Open Sans"/>
+              <a:cs typeface="Open Sans"/>
+            </a:endParaRPr>
+          </a:p>
+        </p:txBody>
+      </p:sp>
+      <p:sp>
+        <p:nvSpPr>
+          <p:cNvPr id="900993886" name="Google Shape;291;p16"/>
+          <p:cNvSpPr/>
+          <p:nvPr/>
+        </p:nvSpPr>
+        <p:spPr bwMode="auto">
+          <a:xfrm>
+            <a:off x="457200" y="1664208"/>
+            <a:ext cx="411480" cy="768096"/>
+          </a:xfrm>
+          <a:prstGeom prst="rect">
+            <a:avLst/>
+          </a:prstGeom>
+          <a:noFill/>
+          <a:ln>
+            <a:noFill/>
+          </a:ln>
+        </p:spPr>
+        <p:txBody>
+          <a:bodyPr spcFirstLastPara="1" wrap="square" lIns="91425" tIns="45700" rIns="91425" bIns="45700" anchor="ctr" anchorCtr="0">
+            <a:noAutofit/>
+          </a:bodyPr>
+          <a:lstStyle/>
+          <a:p>
+            <a:pPr marL="0" marR="0" lvl="0" indent="0" algn="ctr" rtl="0">
+              <a:spcBef>
+                <a:spcPts val="0"/>
+              </a:spcBef>
+              <a:spcAft>
+                <a:spcPts val="0"/>
+              </a:spcAft>
+              <a:buClr>
+                <a:srgbClr val="FFFFFF"/>
+              </a:buClr>
+              <a:buSzPts val="1600"/>
+              <a:buFont typeface="Calibri"/>
+              <a:buNone/>
+              <a:defRPr/>
+            </a:pPr>
+            <a:r>
+              <a:rPr lang="en-US" sz="1600" b="1" i="0" u="none" strike="noStrike" cap="none">
+                <a:solidFill>
+                  <a:srgbClr val="FFFFFF"/>
+                </a:solidFill>
+                <a:latin typeface="Open Sans"/>
+                <a:ea typeface="Open Sans"/>
+                <a:cs typeface="Open Sans"/>
+              </a:rPr>
+              <a:t>2</a:t>
+            </a:r>
+            <a:endParaRPr sz="1600" b="0" i="0" u="none" strike="noStrike" cap="none">
+              <a:solidFill>
+                <a:schemeClr val="dk1"/>
+              </a:solidFill>
+              <a:latin typeface="Open Sans"/>
+              <a:cs typeface="Open Sans"/>
+            </a:endParaRPr>
+          </a:p>
+        </p:txBody>
+      </p:sp>
+      <p:sp>
+        <p:nvSpPr>
+          <p:cNvPr id="890629779" name="Google Shape;292;p16"/>
+          <p:cNvSpPr/>
+          <p:nvPr/>
+        </p:nvSpPr>
+        <p:spPr bwMode="auto">
+          <a:xfrm>
+            <a:off x="960120" y="1755648"/>
+            <a:ext cx="7589520" cy="594360"/>
+          </a:xfrm>
+          <a:prstGeom prst="rect">
+            <a:avLst/>
+          </a:prstGeom>
+          <a:noFill/>
+          <a:ln>
+            <a:noFill/>
+          </a:ln>
+        </p:spPr>
+        <p:txBody>
+          <a:bodyPr spcFirstLastPara="1" wrap="square" lIns="91425" tIns="45700" rIns="91425" bIns="45700" anchor="ctr" anchorCtr="0">
+            <a:noAutofit/>
+          </a:bodyPr>
+          <a:lstStyle/>
+          <a:p>
+            <a:pPr marL="0" marR="0" lvl="0" indent="0" algn="l" rtl="0">
+              <a:spcBef>
+                <a:spcPts val="0"/>
+              </a:spcBef>
+              <a:spcAft>
+                <a:spcPts val="0"/>
+              </a:spcAft>
+              <a:buClr>
+                <a:srgbClr val="1A1A1A"/>
+              </a:buClr>
+              <a:buSzPts val="1250"/>
+              <a:buFont typeface="Calibri"/>
+              <a:buNone/>
+              <a:defRPr/>
+            </a:pPr>
+            <a:endParaRPr sz="1250" b="0" i="0" u="none" strike="noStrike" cap="none">
+              <a:solidFill>
+                <a:schemeClr val="dk1"/>
+              </a:solidFill>
+              <a:latin typeface="Open Sans"/>
+              <a:cs typeface="Open Sans"/>
+            </a:endParaRPr>
+          </a:p>
+        </p:txBody>
+      </p:sp>
+      <p:sp>
+        <p:nvSpPr>
+          <p:cNvPr id="192254352" name="Google Shape;293;p16"/>
+          <p:cNvSpPr/>
+          <p:nvPr/>
+        </p:nvSpPr>
+        <p:spPr bwMode="auto">
+          <a:xfrm>
+            <a:off x="457200" y="2505456"/>
+            <a:ext cx="8229600" cy="768096"/>
+          </a:xfrm>
+          <a:prstGeom prst="rect">
+            <a:avLst/>
+          </a:prstGeom>
+          <a:solidFill>
+            <a:srgbClr val="F5F5F5"/>
+          </a:solidFill>
+          <a:ln w="12700" cap="flat" cmpd="sng">
+            <a:solidFill>
+              <a:srgbClr val="E0E0E0"/>
+            </a:solidFill>
+            <a:prstDash val="solid"/>
+            <a:round/>
+            <a:headEnd type="none" w="sm" len="sm"/>
+            <a:tailEnd type="none" w="sm" len="sm"/>
+          </a:ln>
+        </p:spPr>
+        <p:txBody>
+          <a:bodyPr spcFirstLastPara="1" wrap="square" lIns="91425" tIns="91425" rIns="91425" bIns="91425" anchor="ctr" anchorCtr="0">
+            <a:noAutofit/>
+          </a:bodyPr>
+          <a:lstStyle/>
+          <a:p>
+            <a:pPr marL="0" lvl="0" indent="0" algn="l" rtl="0">
+              <a:spcBef>
+                <a:spcPts val="0"/>
+              </a:spcBef>
+              <a:spcAft>
+                <a:spcPts val="0"/>
+              </a:spcAft>
+              <a:buNone/>
+              <a:defRPr/>
+            </a:pPr>
+            <a:endParaRPr>
+              <a:latin typeface="Open Sans"/>
+              <a:cs typeface="Open Sans"/>
+            </a:endParaRPr>
+          </a:p>
+        </p:txBody>
+      </p:sp>
+      <p:sp>
+        <p:nvSpPr>
+          <p:cNvPr id="184785162" name="Google Shape;294;p16"/>
+          <p:cNvSpPr/>
+          <p:nvPr/>
+        </p:nvSpPr>
+        <p:spPr bwMode="auto">
+          <a:xfrm>
+            <a:off x="457200" y="2505456"/>
+            <a:ext cx="411480" cy="768096"/>
+          </a:xfrm>
+          <a:prstGeom prst="rect">
+            <a:avLst/>
+          </a:prstGeom>
+          <a:solidFill>
+            <a:srgbClr val="C0272D"/>
+          </a:solidFill>
+          <a:ln w="12700" cap="flat" cmpd="sng">
+            <a:solidFill>
+              <a:srgbClr val="C0272D"/>
+            </a:solidFill>
+            <a:prstDash val="solid"/>
+            <a:round/>
+            <a:headEnd type="none" w="sm" len="sm"/>
+            <a:tailEnd type="none" w="sm" len="sm"/>
+          </a:ln>
+        </p:spPr>
+        <p:txBody>
+          <a:bodyPr spcFirstLastPara="1" wrap="square" lIns="91425" tIns="91425" rIns="91425" bIns="91425" anchor="ctr" anchorCtr="0">
+            <a:noAutofit/>
+          </a:bodyPr>
+          <a:lstStyle/>
+          <a:p>
+            <a:pPr marL="0" lvl="0" indent="0" algn="l" rtl="0">
+              <a:spcBef>
+                <a:spcPts val="0"/>
+              </a:spcBef>
+              <a:spcAft>
+                <a:spcPts val="0"/>
+              </a:spcAft>
+              <a:buNone/>
+              <a:defRPr/>
+            </a:pPr>
+            <a:endParaRPr>
+              <a:latin typeface="Open Sans"/>
+              <a:cs typeface="Open Sans"/>
+            </a:endParaRPr>
+          </a:p>
+        </p:txBody>
+      </p:sp>
+      <p:sp>
+        <p:nvSpPr>
+          <p:cNvPr id="610983175" name="Google Shape;295;p16"/>
+          <p:cNvSpPr/>
+          <p:nvPr/>
+        </p:nvSpPr>
+        <p:spPr bwMode="auto">
+          <a:xfrm>
+            <a:off x="457200" y="2505456"/>
+            <a:ext cx="411480" cy="768096"/>
+          </a:xfrm>
+          <a:prstGeom prst="rect">
+            <a:avLst/>
+          </a:prstGeom>
+          <a:noFill/>
+          <a:ln>
+            <a:noFill/>
+          </a:ln>
+        </p:spPr>
+        <p:txBody>
+          <a:bodyPr spcFirstLastPara="1" wrap="square" lIns="91425" tIns="45700" rIns="91425" bIns="45700" anchor="ctr" anchorCtr="0">
+            <a:noAutofit/>
+          </a:bodyPr>
+          <a:lstStyle/>
+          <a:p>
+            <a:pPr marL="0" marR="0" lvl="0" indent="0" algn="ctr" rtl="0">
+              <a:spcBef>
+                <a:spcPts val="0"/>
+              </a:spcBef>
+              <a:spcAft>
+                <a:spcPts val="0"/>
+              </a:spcAft>
+              <a:buClr>
+                <a:srgbClr val="FFFFFF"/>
+              </a:buClr>
+              <a:buSzPts val="1600"/>
+              <a:buFont typeface="Calibri"/>
+              <a:buNone/>
+              <a:defRPr/>
+            </a:pPr>
+            <a:r>
+              <a:rPr lang="en-US" sz="1600" b="1" i="0" u="none" strike="noStrike" cap="none">
+                <a:solidFill>
+                  <a:srgbClr val="FFFFFF"/>
+                </a:solidFill>
+                <a:latin typeface="Open Sans"/>
+                <a:ea typeface="Open Sans"/>
+                <a:cs typeface="Open Sans"/>
+              </a:rPr>
+              <a:t>3</a:t>
+            </a:r>
+            <a:endParaRPr sz="1600" b="0" i="0" u="none" strike="noStrike" cap="none">
+              <a:solidFill>
+                <a:schemeClr val="dk1"/>
+              </a:solidFill>
+              <a:latin typeface="Open Sans"/>
+              <a:cs typeface="Open Sans"/>
+            </a:endParaRPr>
+          </a:p>
+        </p:txBody>
+      </p:sp>
+      <p:sp>
+        <p:nvSpPr>
+          <p:cNvPr id="1357106490" name="Google Shape;296;p16"/>
+          <p:cNvSpPr/>
+          <p:nvPr/>
+        </p:nvSpPr>
+        <p:spPr bwMode="auto">
+          <a:xfrm>
+            <a:off x="960120" y="2596896"/>
+            <a:ext cx="7589520" cy="594360"/>
+          </a:xfrm>
+          <a:prstGeom prst="rect">
+            <a:avLst/>
+          </a:prstGeom>
+          <a:noFill/>
+          <a:ln>
+            <a:noFill/>
+          </a:ln>
+        </p:spPr>
+        <p:txBody>
+          <a:bodyPr spcFirstLastPara="1" wrap="square" lIns="91425" tIns="45700" rIns="91425" bIns="45700" anchor="ctr" anchorCtr="0">
+            <a:noAutofit/>
+          </a:bodyPr>
+          <a:lstStyle/>
+          <a:p>
+            <a:pPr marL="0" marR="0" lvl="0" indent="0" algn="l" rtl="0">
+              <a:spcBef>
+                <a:spcPts val="0"/>
+              </a:spcBef>
+              <a:spcAft>
+                <a:spcPts val="0"/>
+              </a:spcAft>
+              <a:buClr>
+                <a:srgbClr val="1A1A1A"/>
+              </a:buClr>
+              <a:buSzPts val="1250"/>
+              <a:buFont typeface="Calibri"/>
+              <a:buNone/>
+              <a:defRPr/>
+            </a:pPr>
+            <a:endParaRPr sz="1250" b="0" i="0" u="none" strike="noStrike" cap="none">
+              <a:solidFill>
+                <a:schemeClr val="dk1"/>
+              </a:solidFill>
+              <a:latin typeface="Open Sans"/>
+              <a:cs typeface="Open Sans"/>
+            </a:endParaRPr>
+          </a:p>
+        </p:txBody>
+      </p:sp>
+      <p:sp>
+        <p:nvSpPr>
+          <p:cNvPr id="1471247798" name="Google Shape;297;p16"/>
+          <p:cNvSpPr/>
+          <p:nvPr/>
+        </p:nvSpPr>
+        <p:spPr bwMode="auto">
+          <a:xfrm>
+            <a:off x="457200" y="3346704"/>
+            <a:ext cx="8229600" cy="768096"/>
+          </a:xfrm>
+          <a:prstGeom prst="rect">
+            <a:avLst/>
+          </a:prstGeom>
+          <a:solidFill>
+            <a:srgbClr val="FFFFFF"/>
+          </a:solidFill>
+          <a:ln w="12700" cap="flat" cmpd="sng">
+            <a:solidFill>
+              <a:srgbClr val="E0E0E0"/>
+            </a:solidFill>
+            <a:prstDash val="solid"/>
+            <a:round/>
+            <a:headEnd type="none" w="sm" len="sm"/>
+            <a:tailEnd type="none" w="sm" len="sm"/>
+          </a:ln>
+        </p:spPr>
+        <p:txBody>
+          <a:bodyPr spcFirstLastPara="1" wrap="square" lIns="91425" tIns="91425" rIns="91425" bIns="91425" anchor="ctr" anchorCtr="0">
+            <a:noAutofit/>
+          </a:bodyPr>
+          <a:lstStyle/>
+          <a:p>
+            <a:pPr marL="0" lvl="0" indent="0" algn="l" rtl="0">
+              <a:spcBef>
+                <a:spcPts val="0"/>
+              </a:spcBef>
+              <a:spcAft>
+                <a:spcPts val="0"/>
+              </a:spcAft>
+              <a:buNone/>
+              <a:defRPr/>
+            </a:pPr>
+            <a:endParaRPr>
+              <a:latin typeface="Open Sans"/>
+              <a:cs typeface="Open Sans"/>
+            </a:endParaRPr>
+          </a:p>
+        </p:txBody>
+      </p:sp>
+      <p:sp>
+        <p:nvSpPr>
+          <p:cNvPr id="1772032582" name="Google Shape;298;p16"/>
+          <p:cNvSpPr/>
+          <p:nvPr/>
+        </p:nvSpPr>
+        <p:spPr bwMode="auto">
+          <a:xfrm>
+            <a:off x="457200" y="3346704"/>
+            <a:ext cx="411480" cy="768096"/>
+          </a:xfrm>
+          <a:prstGeom prst="rect">
+            <a:avLst/>
+          </a:prstGeom>
+          <a:solidFill>
+            <a:srgbClr val="C0272D"/>
+          </a:solidFill>
+          <a:ln w="12700" cap="flat" cmpd="sng">
+            <a:solidFill>
+              <a:srgbClr val="C0272D"/>
+            </a:solidFill>
+            <a:prstDash val="solid"/>
+            <a:round/>
+            <a:headEnd type="none" w="sm" len="sm"/>
+            <a:tailEnd type="none" w="sm" len="sm"/>
+          </a:ln>
+        </p:spPr>
+        <p:txBody>
+          <a:bodyPr spcFirstLastPara="1" wrap="square" lIns="91425" tIns="91425" rIns="91425" bIns="91425" anchor="ctr" anchorCtr="0">
+            <a:noAutofit/>
+          </a:bodyPr>
+          <a:lstStyle/>
+          <a:p>
+            <a:pPr marL="0" lvl="0" indent="0" algn="l" rtl="0">
+              <a:spcBef>
+                <a:spcPts val="0"/>
+              </a:spcBef>
+              <a:spcAft>
+                <a:spcPts val="0"/>
+              </a:spcAft>
+              <a:buNone/>
+              <a:defRPr/>
+            </a:pPr>
+            <a:endParaRPr>
+              <a:latin typeface="Open Sans"/>
+              <a:cs typeface="Open Sans"/>
+            </a:endParaRPr>
+          </a:p>
+        </p:txBody>
+      </p:sp>
+      <p:sp>
+        <p:nvSpPr>
+          <p:cNvPr id="1623820699" name="Google Shape;299;p16"/>
+          <p:cNvSpPr/>
+          <p:nvPr/>
+        </p:nvSpPr>
+        <p:spPr bwMode="auto">
+          <a:xfrm>
+            <a:off x="457200" y="3346704"/>
+            <a:ext cx="411480" cy="768096"/>
+          </a:xfrm>
+          <a:prstGeom prst="rect">
+            <a:avLst/>
+          </a:prstGeom>
+          <a:noFill/>
+          <a:ln>
+            <a:noFill/>
+          </a:ln>
+        </p:spPr>
+        <p:txBody>
+          <a:bodyPr spcFirstLastPara="1" wrap="square" lIns="91425" tIns="45700" rIns="91425" bIns="45700" anchor="ctr" anchorCtr="0">
+            <a:noAutofit/>
+          </a:bodyPr>
+          <a:lstStyle/>
+          <a:p>
+            <a:pPr marL="0" marR="0" lvl="0" indent="0" algn="ctr" rtl="0">
+              <a:spcBef>
+                <a:spcPts val="0"/>
+              </a:spcBef>
+              <a:spcAft>
+                <a:spcPts val="0"/>
+              </a:spcAft>
+              <a:buClr>
+                <a:srgbClr val="FFFFFF"/>
+              </a:buClr>
+              <a:buSzPts val="1600"/>
+              <a:buFont typeface="Calibri"/>
+              <a:buNone/>
+              <a:defRPr/>
+            </a:pPr>
+            <a:r>
+              <a:rPr lang="en-US" sz="1600" b="1" i="0" u="none" strike="noStrike" cap="none">
+                <a:solidFill>
+                  <a:srgbClr val="FFFFFF"/>
+                </a:solidFill>
+                <a:latin typeface="Open Sans"/>
+                <a:ea typeface="Open Sans"/>
+                <a:cs typeface="Open Sans"/>
+              </a:rPr>
+              <a:t>4</a:t>
+            </a:r>
+            <a:endParaRPr sz="1600" b="0" i="0" u="none" strike="noStrike" cap="none">
+              <a:solidFill>
+                <a:schemeClr val="dk1"/>
+              </a:solidFill>
+              <a:latin typeface="Open Sans"/>
+              <a:cs typeface="Open Sans"/>
+            </a:endParaRPr>
+          </a:p>
+        </p:txBody>
+      </p:sp>
+      <p:sp>
+        <p:nvSpPr>
+          <p:cNvPr id="149098351" name="Google Shape;300;p16"/>
+          <p:cNvSpPr/>
+          <p:nvPr/>
+        </p:nvSpPr>
+        <p:spPr bwMode="auto">
+          <a:xfrm>
+            <a:off x="960120" y="3438144"/>
+            <a:ext cx="7589520" cy="594360"/>
+          </a:xfrm>
+          <a:prstGeom prst="rect">
+            <a:avLst/>
+          </a:prstGeom>
+          <a:noFill/>
+          <a:ln>
+            <a:noFill/>
+          </a:ln>
+        </p:spPr>
+        <p:txBody>
+          <a:bodyPr spcFirstLastPara="1" wrap="square" lIns="91425" tIns="45700" rIns="91425" bIns="45700" anchor="ctr" anchorCtr="0">
+            <a:noAutofit/>
+          </a:bodyPr>
+          <a:lstStyle/>
+          <a:p>
+            <a:pPr marL="0" marR="0" lvl="0" indent="0" algn="l" rtl="0">
+              <a:spcBef>
+                <a:spcPts val="0"/>
+              </a:spcBef>
+              <a:spcAft>
+                <a:spcPts val="0"/>
+              </a:spcAft>
+              <a:buClr>
+                <a:srgbClr val="1A1A1A"/>
+              </a:buClr>
+              <a:buSzPts val="1250"/>
+              <a:buFont typeface="Calibri"/>
+              <a:buNone/>
+              <a:defRPr/>
+            </a:pPr>
+            <a:endParaRPr sz="1250" b="0" i="0" u="none" strike="noStrike" cap="none">
+              <a:solidFill>
+                <a:schemeClr val="dk1"/>
+              </a:solidFill>
+              <a:latin typeface="Open Sans"/>
+              <a:cs typeface="Open Sans"/>
+            </a:endParaRPr>
+          </a:p>
+        </p:txBody>
+      </p:sp>
+      <p:sp>
+        <p:nvSpPr>
+          <p:cNvPr id="979937926" name="Google Shape;303;p16"/>
+          <p:cNvSpPr/>
+          <p:nvPr/>
+        </p:nvSpPr>
+        <p:spPr bwMode="auto">
+          <a:xfrm>
+            <a:off x="457200" y="4187952"/>
+            <a:ext cx="411480" cy="768096"/>
+          </a:xfrm>
+          <a:prstGeom prst="rect">
+            <a:avLst/>
+          </a:prstGeom>
+          <a:noFill/>
+          <a:ln>
+            <a:noFill/>
+          </a:ln>
+        </p:spPr>
+        <p:txBody>
+          <a:bodyPr spcFirstLastPara="1" wrap="square" lIns="91425" tIns="45700" rIns="91425" bIns="45700" anchor="ctr" anchorCtr="0">
+            <a:noAutofit/>
+          </a:bodyPr>
+          <a:lstStyle/>
+          <a:p>
+            <a:pPr marL="0" marR="0" lvl="0" indent="0" algn="ctr" rtl="0">
+              <a:spcBef>
+                <a:spcPts val="0"/>
+              </a:spcBef>
+              <a:spcAft>
+                <a:spcPts val="0"/>
+              </a:spcAft>
+              <a:buClr>
+                <a:srgbClr val="FFFFFF"/>
+              </a:buClr>
+              <a:buSzPts val="1600"/>
+              <a:buFont typeface="Calibri"/>
+              <a:buNone/>
+              <a:defRPr/>
+            </a:pPr>
+            <a:r>
+              <a:rPr lang="en-US" sz="1600" b="1" i="0" u="none" strike="noStrike" cap="none">
+                <a:solidFill>
+                  <a:srgbClr val="FFFFFF"/>
+                </a:solidFill>
+                <a:latin typeface="Open Sans"/>
+                <a:ea typeface="Open Sans"/>
+                <a:cs typeface="Open Sans"/>
+              </a:rPr>
+              <a:t>5</a:t>
+            </a:r>
+            <a:endParaRPr sz="1600" b="0" i="0" u="none" strike="noStrike" cap="none">
+              <a:solidFill>
+                <a:schemeClr val="dk1"/>
+              </a:solidFill>
+              <a:latin typeface="Open Sans"/>
+              <a:cs typeface="Open Sans"/>
+            </a:endParaRPr>
+          </a:p>
+        </p:txBody>
+      </p:sp>
+    </p:spTree>
+  </p:cSld>
+  <p:clrMapOvr>
+    <a:masterClrMapping/>
+  </p:clrMapOvr>
+  <mc:AlternateContent xmlns:mc="http://schemas.openxmlformats.org/markup-compatibility/2006">
+    <mc:Choice xmlns:p159="http://schemas.microsoft.com/office/powerpoint/2015/09/main" xmlns:p14="http://schemas.microsoft.com/office/powerpoint/2010/main" Requires="p159">
+      <p:transition p14:dur="500" advClick="1"/>
+    </mc:Choice>
+    <mc:Fallback>
+      <p:transition advClick="1"/>
+    </mc:Fallback>
+  </mc:AlternateContent>
+</p:sld>
+</file>
+
+<file path=ppt/slides/slide17.xml><?xml version="1.0" encoding="utf-8"?>
+<p:sld xmlns:a="http://schemas.openxmlformats.org/drawingml/2006/main" xmlns:r="http://schemas.openxmlformats.org/officeDocument/2006/relationships" xmlns:p="http://schemas.openxmlformats.org/presentationml/2006/main" xmlns:m="http://schemas.openxmlformats.org/officeDocument/2006/math" xmlns:w="http://schemas.openxmlformats.org/wordprocessingml/2006/main" xmlns:mc="http://schemas.openxmlformats.org/markup-compatibility/2006" showMasterPhAnim="0" showMasterSp="1" show="1">
+  <p:cSld name="">
+    <p:spTree>
+      <p:nvGrpSpPr>
+        <p:cNvPr id="1" name=""/>
+        <p:cNvGrpSpPr/>
+        <p:nvPr/>
+      </p:nvGrpSpPr>
+      <p:grpSpPr bwMode="auto">
+        <a:xfrm>
+          <a:off x="0" y="0"/>
+          <a:ext cx="0" cy="0"/>
+          <a:chOff x="0" y="0"/>
+          <a:chExt cx="0" cy="0"/>
+        </a:xfrm>
+      </p:grpSpPr>
+      <p:sp>
+        <p:nvSpPr>
+          <p:cNvPr id="155361785" name="Google Shape;309;p17"/>
           <p:cNvSpPr txBox="1"/>
           <p:nvPr>
             <p:ph type="body" idx="1"/>
@@ -8973,7 +11124,7 @@
       </p:sp>
       <p:sp>
         <p:nvSpPr>
-          <p:cNvPr id="863595271" name="Google Shape;310;p17"/>
+          <p:cNvPr id="609666926" name="Google Shape;310;p17"/>
           <p:cNvSpPr/>
           <p:nvPr/>
         </p:nvSpPr>
@@ -9014,7 +11165,7 @@
       </p:sp>
       <p:pic>
         <p:nvPicPr>
-          <p:cNvPr id="828981318" name=""/>
+          <p:cNvPr id="29480628" name=""/>
           <p:cNvPicPr>
             <a:picLocks noChangeAspect="1"/>
           </p:cNvPicPr>
@@ -9076,7 +11227,7 @@
       </p:grpSpPr>
       <p:pic>
         <p:nvPicPr>
-          <p:cNvPr id="664229349" name="Picture 1" descr="image12.png"/>
+          <p:cNvPr id="189643107" name="Picture 1" descr="image12.png"/>
           <p:cNvPicPr>
             <a:picLocks noChangeAspect="1"/>
           </p:cNvPicPr>
@@ -9098,7 +11249,7 @@
       </p:pic>
       <p:sp>
         <p:nvSpPr>
-          <p:cNvPr id="23685616" name="TextBox 3"/>
+          <p:cNvPr id="2072277682" name="TextBox 3"/>
           <p:cNvSpPr txBox="1"/>
           <p:nvPr/>
         </p:nvSpPr>
@@ -9145,7 +11296,7 @@
       </p:sp>
       <p:sp>
         <p:nvSpPr>
-          <p:cNvPr id="97326590" name="TextBox 4"/>
+          <p:cNvPr id="522946158" name="TextBox 4"/>
           <p:cNvSpPr txBox="1"/>
           <p:nvPr/>
         </p:nvSpPr>
@@ -9195,7 +11346,7 @@
       </p:sp>
       <p:sp>
         <p:nvSpPr>
-          <p:cNvPr id="1788318092" name="Rectangle 5"/>
+          <p:cNvPr id="630280677" name="Rectangle 5"/>
           <p:cNvSpPr/>
           <p:nvPr/>
         </p:nvSpPr>
@@ -9230,7 +11381,7 @@
       </p:sp>
       <p:sp>
         <p:nvSpPr>
-          <p:cNvPr id="403406501" name="Rectangle 6"/>
+          <p:cNvPr id="89107809" name="Rectangle 6"/>
           <p:cNvSpPr/>
           <p:nvPr/>
         </p:nvSpPr>
@@ -9265,7 +11416,7 @@
       </p:sp>
       <p:sp>
         <p:nvSpPr>
-          <p:cNvPr id="1641838369" name=""/>
+          <p:cNvPr id="1968950429" name=""/>
           <p:cNvSpPr txBox="1"/>
           <p:nvPr/>
         </p:nvSpPr>
@@ -9617,7 +11768,7 @@
       </p:sp>
       <p:sp>
         <p:nvSpPr>
-          <p:cNvPr id="1676317598" name=""/>
+          <p:cNvPr id="655389492" name=""/>
           <p:cNvSpPr txBox="1"/>
           <p:nvPr/>
         </p:nvSpPr>
@@ -9645,7 +11796,7 @@
       </p:sp>
       <p:sp>
         <p:nvSpPr>
-          <p:cNvPr id="1196956379" name=""/>
+          <p:cNvPr id="245982235" name=""/>
           <p:cNvSpPr txBox="1"/>
           <p:nvPr/>
         </p:nvSpPr>
@@ -9693,7 +11844,7 @@
       </p:sp>
       <p:pic>
         <p:nvPicPr>
-          <p:cNvPr id="267243538" name="">
+          <p:cNvPr id="226009406" name="">
             <a:hlinkClick r:id="" action="ppaction://media"/>
           </p:cNvPr>
           <p:cNvPicPr>
@@ -9724,7 +11875,7 @@
       </p:pic>
       <p:sp>
         <p:nvSpPr>
-          <p:cNvPr id="1135675737" name="Rectangle 2"/>
+          <p:cNvPr id="1542382471" name="Rectangle 2"/>
           <p:cNvSpPr/>
           <p:nvPr/>
         </p:nvSpPr>
@@ -9759,7 +11910,7 @@
       </p:sp>
       <p:sp>
         <p:nvSpPr>
-          <p:cNvPr id="1254392417" name="TextBox 3"/>
+          <p:cNvPr id="1713897152" name="TextBox 3"/>
           <p:cNvSpPr txBox="1"/>
           <p:nvPr/>
         </p:nvSpPr>
@@ -9846,7 +11997,7 @@
       </p:grpSpPr>
       <p:pic>
         <p:nvPicPr>
-          <p:cNvPr id="437258324" name="Picture 1" descr="image12.png"/>
+          <p:cNvPr id="184764243" name="Picture 1" descr="image12.png"/>
           <p:cNvPicPr>
             <a:picLocks noChangeAspect="1"/>
           </p:cNvPicPr>
@@ -9868,7 +12019,7 @@
       </p:pic>
       <p:sp>
         <p:nvSpPr>
-          <p:cNvPr id="46604145" name="Rectangle 2"/>
+          <p:cNvPr id="2109875363" name="Rectangle 2"/>
           <p:cNvSpPr/>
           <p:nvPr/>
         </p:nvSpPr>
@@ -9903,7 +12054,7 @@
       </p:sp>
       <p:sp>
         <p:nvSpPr>
-          <p:cNvPr id="367172349" name="TextBox 3"/>
+          <p:cNvPr id="832062632" name="TextBox 3"/>
           <p:cNvSpPr txBox="1"/>
           <p:nvPr/>
         </p:nvSpPr>
@@ -9950,7 +12101,7 @@
       </p:sp>
       <p:sp>
         <p:nvSpPr>
-          <p:cNvPr id="100037290" name="TextBox 4"/>
+          <p:cNvPr id="1951455948" name="TextBox 4"/>
           <p:cNvSpPr txBox="1"/>
           <p:nvPr/>
         </p:nvSpPr>
@@ -10000,7 +12151,7 @@
       </p:sp>
       <p:sp>
         <p:nvSpPr>
-          <p:cNvPr id="209351681" name="Rectangle 5"/>
+          <p:cNvPr id="1639486772" name="Rectangle 5"/>
           <p:cNvSpPr/>
           <p:nvPr/>
         </p:nvSpPr>
@@ -10035,7 +12186,7 @@
       </p:sp>
       <p:sp>
         <p:nvSpPr>
-          <p:cNvPr id="797796972" name="Rectangle 6"/>
+          <p:cNvPr id="326614242" name="Rectangle 6"/>
           <p:cNvSpPr/>
           <p:nvPr/>
         </p:nvSpPr>
@@ -10070,14 +12221,14 @@
       </p:sp>
       <p:sp>
         <p:nvSpPr>
-          <p:cNvPr id="1159864539" name=""/>
+          <p:cNvPr id="1565076847" name=""/>
           <p:cNvSpPr txBox="1"/>
           <p:nvPr/>
         </p:nvSpPr>
         <p:spPr bwMode="auto">
           <a:xfrm rot="0" flipH="0" flipV="0">
-            <a:off x="457199" y="848355"/>
-            <a:ext cx="8509675" cy="3831406"/>
+            <a:off x="457198" y="848354"/>
+            <a:ext cx="8510754" cy="3831406"/>
           </a:xfrm>
           <a:prstGeom prst="rect">
             <a:avLst/>
@@ -10468,17 +12619,6 @@
                 <a:cs typeface="Open Sans"/>
               </a:rPr>
               <a:t>)</a:t>
-            </a:r>
-            <a:r>
-              <a:rPr lang="ru-RU" sz="1300" b="0" i="0" u="none">
-                <a:solidFill>
-                  <a:srgbClr val="000000"/>
-                </a:solidFill>
-                <a:latin typeface="Open Sans"/>
-                <a:ea typeface="Open Sans"/>
-                <a:cs typeface="Open Sans"/>
-              </a:rPr>
-              <a:t>. </a:t>
             </a:r>
             <a:r>
               <a:rPr sz="1300" b="0" i="0" u="none">
@@ -10816,7 +12956,29 @@
                 <a:ea typeface="Open Sans"/>
                 <a:cs typeface="Open Sans"/>
               </a:rPr>
-              <a:t>любая точка вернется в исходное положение ровно через n шагов. Траектория замыкается, образуя правильный многоугольник.</a:t>
+              <a:t>любая точка вернется в исходное положение ровно через </a:t>
+            </a:r>
+            <a:r>
+              <a:rPr lang="ru-RU" sz="1300" b="0" i="1" u="none" strike="noStrike" cap="none" spc="0">
+                <a:solidFill>
+                  <a:srgbClr val="000000"/>
+                </a:solidFill>
+                <a:latin typeface="Open Sans"/>
+                <a:ea typeface="Open Sans"/>
+                <a:cs typeface="Open Sans"/>
+              </a:rPr>
+              <a:t>n</a:t>
+            </a:r>
+            <a:r>
+              <a:rPr lang="ru-RU" sz="1300" b="0" i="0" u="none" strike="noStrike" cap="none" spc="0">
+                <a:solidFill>
+                  <a:srgbClr val="000000"/>
+                </a:solidFill>
+                <a:latin typeface="Open Sans"/>
+                <a:ea typeface="Open Sans"/>
+                <a:cs typeface="Open Sans"/>
+              </a:rPr>
+              <a:t> шагов. Траектория замыкается, образуя правильный многоугольник.</a:t>
             </a:r>
             <a:endParaRPr sz="1300" b="0" i="0" u="none">
               <a:solidFill>
@@ -11042,7 +13204,7 @@
       </p:grpSpPr>
       <p:pic>
         <p:nvPicPr>
-          <p:cNvPr id="1729571170" name="Picture 1" descr="image12.png"/>
+          <p:cNvPr id="703649806" name="Picture 1" descr="image12.png"/>
           <p:cNvPicPr>
             <a:picLocks noChangeAspect="1"/>
           </p:cNvPicPr>
@@ -11064,7 +13226,7 @@
       </p:pic>
       <p:sp>
         <p:nvSpPr>
-          <p:cNvPr id="2055626685" name="Rectangle 2"/>
+          <p:cNvPr id="1994635181" name="Rectangle 2"/>
           <p:cNvSpPr/>
           <p:nvPr/>
         </p:nvSpPr>
@@ -11099,7 +13261,7 @@
       </p:sp>
       <p:sp>
         <p:nvSpPr>
-          <p:cNvPr id="444696141" name="TextBox 3"/>
+          <p:cNvPr id="1387231661" name="TextBox 3"/>
           <p:cNvSpPr txBox="1"/>
           <p:nvPr/>
         </p:nvSpPr>
@@ -11146,7 +13308,7 @@
       </p:sp>
       <p:sp>
         <p:nvSpPr>
-          <p:cNvPr id="1801016742" name="TextBox 4"/>
+          <p:cNvPr id="236839702" name="TextBox 4"/>
           <p:cNvSpPr txBox="1"/>
           <p:nvPr/>
         </p:nvSpPr>
@@ -11231,7 +13393,7 @@
       </p:sp>
       <p:sp>
         <p:nvSpPr>
-          <p:cNvPr id="197540814" name="Rectangle 5"/>
+          <p:cNvPr id="770093589" name="Rectangle 5"/>
           <p:cNvSpPr/>
           <p:nvPr/>
         </p:nvSpPr>
@@ -11266,7 +13428,7 @@
       </p:sp>
       <p:pic>
         <p:nvPicPr>
-          <p:cNvPr id="1166059753" name="">
+          <p:cNvPr id="763198790" name="">
             <a:hlinkClick r:id="" action="ppaction://media"/>
           </p:cNvPr>
           <p:cNvPicPr>
@@ -11297,7 +13459,7 @@
       </p:pic>
       <p:pic>
         <p:nvPicPr>
-          <p:cNvPr id="1766268990" name="">
+          <p:cNvPr id="1065930691" name="">
             <a:hlinkClick r:id="" action="ppaction://media"/>
           </p:cNvPr>
           <p:cNvPicPr>
@@ -11368,7 +13530,7 @@
       </p:grpSpPr>
       <p:pic>
         <p:nvPicPr>
-          <p:cNvPr id="2147396203" name="Picture 1" descr="image12.png"/>
+          <p:cNvPr id="1221955564" name="Picture 1" descr="image12.png"/>
           <p:cNvPicPr>
             <a:picLocks noChangeAspect="1"/>
           </p:cNvPicPr>
@@ -11390,7 +13552,7 @@
       </p:pic>
       <p:sp>
         <p:nvSpPr>
-          <p:cNvPr id="390831490" name="Rectangle 2"/>
+          <p:cNvPr id="1658933049" name="Rectangle 2"/>
           <p:cNvSpPr/>
           <p:nvPr/>
         </p:nvSpPr>
@@ -11425,7 +13587,7 @@
       </p:sp>
       <p:sp>
         <p:nvSpPr>
-          <p:cNvPr id="780854415" name="TextBox 3"/>
+          <p:cNvPr id="2112204404" name="TextBox 3"/>
           <p:cNvSpPr txBox="1"/>
           <p:nvPr/>
         </p:nvSpPr>
@@ -11472,7 +13634,7 @@
       </p:sp>
       <p:sp>
         <p:nvSpPr>
-          <p:cNvPr id="15899865" name="TextBox 4"/>
+          <p:cNvPr id="1547737119" name="TextBox 4"/>
           <p:cNvSpPr txBox="1"/>
           <p:nvPr/>
         </p:nvSpPr>
@@ -11522,7 +13684,7 @@
       </p:sp>
       <p:sp>
         <p:nvSpPr>
-          <p:cNvPr id="1471704956" name="Rectangle 5"/>
+          <p:cNvPr id="569357510" name="Rectangle 5"/>
           <p:cNvSpPr/>
           <p:nvPr/>
         </p:nvSpPr>
@@ -11557,7 +13719,7 @@
       </p:sp>
       <p:sp>
         <p:nvSpPr>
-          <p:cNvPr id="1262614948" name="Rectangle 6"/>
+          <p:cNvPr id="1703601339" name="Rectangle 6"/>
           <p:cNvSpPr/>
           <p:nvPr/>
         </p:nvSpPr>
@@ -11592,14 +13754,14 @@
       </p:sp>
       <p:sp>
         <p:nvSpPr>
-          <p:cNvPr id="1787413275" name=""/>
+          <p:cNvPr id="922244623" name=""/>
           <p:cNvSpPr txBox="1"/>
           <p:nvPr/>
         </p:nvSpPr>
         <p:spPr bwMode="auto">
           <a:xfrm rot="0" flipH="0" flipV="0">
-            <a:off x="422815" y="848355"/>
-            <a:ext cx="8634779" cy="3745422"/>
+            <a:off x="422814" y="848354"/>
+            <a:ext cx="8640178" cy="3745422"/>
           </a:xfrm>
           <a:prstGeom prst="rect">
             <a:avLst/>
@@ -11806,7 +13968,7 @@
               <a:t>обозначает вектор скорости частицы в момент времени </a:t>
             </a:r>
             <a:r>
-              <a:rPr sz="1200" b="0" i="0" u="none">
+              <a:rPr sz="1200" b="0" i="1" u="none">
                 <a:solidFill>
                   <a:srgbClr val="000000"/>
                 </a:solidFill>
@@ -12473,6 +14635,17 @@
               <a:t>где </a:t>
             </a:r>
             <a:r>
+              <a:rPr lang="en-US" sz="1200" b="0" i="1" u="none">
+                <a:solidFill>
+                  <a:srgbClr val="000000"/>
+                </a:solidFill>
+                <a:latin typeface="Open Sans"/>
+                <a:ea typeface="Open Sans"/>
+                <a:cs typeface="Open Sans"/>
+              </a:rPr>
+              <a:t>m</a:t>
+            </a:r>
+            <a:r>
               <a:rPr lang="en-US" sz="1200" b="0" i="0" u="none">
                 <a:solidFill>
                   <a:srgbClr val="000000"/>
@@ -12481,7 +14654,7 @@
                 <a:ea typeface="Open Sans"/>
                 <a:cs typeface="Open Sans"/>
               </a:rPr>
-              <a:t>m </a:t>
+              <a:t> </a:t>
             </a:r>
             <a:r>
               <a:rPr lang="ru-RU" sz="1200" b="0" i="0" u="none">
@@ -12495,7 +14668,7 @@
               <a:t>и </a:t>
             </a:r>
             <a:r>
-              <a:rPr lang="en-US" sz="1200" b="0" i="0" u="none">
+              <a:rPr lang="en-US" sz="1200" b="0" i="1" u="none">
                 <a:solidFill>
                   <a:srgbClr val="000000"/>
                 </a:solidFill>
@@ -12517,7 +14690,7 @@
               <a:t>— количество столкновений с вертикальными и горизонтальными стенками соответственно за интервал времени </a:t>
             </a:r>
             <a:r>
-              <a:rPr lang="en-US" sz="1200">
+              <a:rPr lang="en-US" sz="1200" i="1">
                 <a:latin typeface="Open Sans"/>
                 <a:ea typeface="Open Sans"/>
                 <a:cs typeface="Open Sans"/>
@@ -12743,7 +14916,194 @@
                 <a:ea typeface="Open Sans"/>
                 <a:cs typeface="Open Sans"/>
               </a:rPr>
-              <a:t>вместо того чтобы отражать траекторию частицы от стороны </a:t>
+              <a:t>вместо того чтобы </a:t>
+            </a:r>
+            <a:r>
+              <a:rPr lang="ru-RU" sz="1200" b="0" i="0" u="none" strike="noStrike" cap="none" spc="0">
+                <a:solidFill>
+                  <a:srgbClr val="000000"/>
+                </a:solidFill>
+                <a:latin typeface="Open Sans"/>
+                <a:ea typeface="Open Sans"/>
+                <a:cs typeface="Open Sans"/>
+              </a:rPr>
+              <a:t>отражать</a:t>
+            </a:r>
+            <a:r>
+              <a:rPr lang="ru-RU" sz="1200" b="0" i="0" u="none" strike="noStrike" cap="none" spc="0">
+                <a:solidFill>
+                  <a:srgbClr val="000000"/>
+                </a:solidFill>
+                <a:latin typeface="Open Sans"/>
+                <a:ea typeface="Open Sans"/>
+                <a:cs typeface="Open Sans"/>
+              </a:rPr>
+              <a:t> </a:t>
+            </a:r>
+            <a:r>
+              <a:rPr lang="ru-RU" sz="1200" b="0" i="0" u="none" strike="noStrike" cap="none" spc="0">
+                <a:solidFill>
+                  <a:srgbClr val="000000"/>
+                </a:solidFill>
+                <a:latin typeface="Open Sans"/>
+                <a:ea typeface="Open Sans"/>
+                <a:cs typeface="Open Sans"/>
+              </a:rPr>
+              <a:t>траекторию частицы от </a:t>
+            </a:r>
+            <a:r>
+              <a:rPr lang="ru-RU" sz="1200" b="1" i="0" u="none" strike="noStrike" cap="none" spc="0">
+                <a:solidFill>
+                  <a:srgbClr val="000000"/>
+                </a:solidFill>
+                <a:latin typeface="Open Sans"/>
+                <a:ea typeface="Open Sans"/>
+                <a:cs typeface="Open Sans"/>
+              </a:rPr>
+              <a:t>стороны </a:t>
+            </a:r>
+            <a:r>
+              <a:rPr lang="ru-RU" sz="1200" b="1" i="1" u="none" strike="noStrike" cap="none" spc="0">
+                <a:solidFill>
+                  <a:srgbClr val="000000"/>
+                </a:solidFill>
+                <a:latin typeface="Open Sans"/>
+                <a:ea typeface="Open Sans"/>
+                <a:cs typeface="Open Sans"/>
+              </a:rPr>
+              <a:t>∂D</a:t>
+            </a:r>
+            <a:r>
+              <a:rPr lang="ru-RU" sz="1200" b="0" i="0" u="none" strike="noStrike" cap="none" spc="0">
+                <a:solidFill>
+                  <a:srgbClr val="000000"/>
+                </a:solidFill>
+                <a:latin typeface="Open Sans"/>
+                <a:ea typeface="Open Sans"/>
+                <a:cs typeface="Open Sans"/>
+              </a:rPr>
+              <a:t>, мы отражаем сам квадрат </a:t>
+            </a:r>
+            <a:r>
+              <a:rPr lang="ru-RU" sz="1200" b="1" i="1" u="none" strike="noStrike" cap="none" spc="0">
+                <a:solidFill>
+                  <a:srgbClr val="000000"/>
+                </a:solidFill>
+                <a:latin typeface="Open Sans"/>
+                <a:ea typeface="Open Sans"/>
+                <a:cs typeface="Open Sans"/>
+              </a:rPr>
+              <a:t>D</a:t>
+            </a:r>
+            <a:r>
+              <a:rPr lang="ru-RU" sz="1200" b="1" i="0" u="none" strike="noStrike" cap="none" spc="0">
+                <a:solidFill>
+                  <a:srgbClr val="000000"/>
+                </a:solidFill>
+                <a:latin typeface="Open Sans"/>
+                <a:ea typeface="Open Sans"/>
+                <a:cs typeface="Open Sans"/>
+              </a:rPr>
+              <a:t> </a:t>
+            </a:r>
+            <a:r>
+              <a:rPr lang="ru-RU" sz="1200" b="0" i="0" u="none" strike="noStrike" cap="none" spc="0">
+                <a:solidFill>
+                  <a:srgbClr val="000000"/>
+                </a:solidFill>
+                <a:latin typeface="Open Sans"/>
+                <a:ea typeface="Open Sans"/>
+                <a:cs typeface="Open Sans"/>
+              </a:rPr>
+              <a:t>относительно этой стороны и позволяем частице двигаться прямолинейно в </a:t>
+            </a:r>
+            <a:r>
+              <a:rPr lang="ru-RU" sz="1200" b="1" i="0" u="none" strike="noStrike" cap="none" spc="0">
+                <a:solidFill>
+                  <a:srgbClr val="000000"/>
+                </a:solidFill>
+                <a:latin typeface="Open Sans"/>
+                <a:ea typeface="Open Sans"/>
+                <a:cs typeface="Open Sans"/>
+              </a:rPr>
+              <a:t>зеркальное отображение </a:t>
+            </a:r>
+            <a:r>
+              <a:rPr lang="ru-RU" sz="1200" b="1" i="1" u="none" strike="noStrike" cap="none" spc="0">
+                <a:solidFill>
+                  <a:srgbClr val="000000"/>
+                </a:solidFill>
+                <a:latin typeface="Open Sans"/>
+                <a:ea typeface="Open Sans"/>
+                <a:cs typeface="Open Sans"/>
+              </a:rPr>
+              <a:t>D</a:t>
+            </a:r>
+            <a:r>
+              <a:rPr lang="ru-RU" sz="1200" b="0" i="0" u="none" strike="noStrike" cap="none" spc="0">
+                <a:solidFill>
+                  <a:srgbClr val="000000"/>
+                </a:solidFill>
+                <a:latin typeface="Open Sans"/>
+                <a:ea typeface="Open Sans"/>
+                <a:cs typeface="Open Sans"/>
+              </a:rPr>
+              <a:t>. Если продолжать делать это при каждом столкновении, наша частица будет двигаться вдоль прямой линии сквозь </a:t>
+            </a:r>
+            <a:r>
+              <a:rPr lang="ru-RU" sz="1200" b="1" i="0" u="none" strike="noStrike" cap="none" spc="0">
+                <a:solidFill>
+                  <a:srgbClr val="000000"/>
+                </a:solidFill>
+                <a:latin typeface="Open Sans"/>
+                <a:ea typeface="Open Sans"/>
+                <a:cs typeface="Open Sans"/>
+              </a:rPr>
+              <a:t>множество копий </a:t>
+            </a:r>
+            <a:r>
+              <a:rPr lang="ru-RU" sz="1200" b="1" i="1" u="none" strike="noStrike" cap="none" spc="0">
+                <a:solidFill>
+                  <a:srgbClr val="000000"/>
+                </a:solidFill>
+                <a:latin typeface="Open Sans"/>
+                <a:ea typeface="Open Sans"/>
+                <a:cs typeface="Open Sans"/>
+              </a:rPr>
+              <a:t>D</a:t>
+            </a:r>
+            <a:r>
+              <a:rPr lang="ru-RU" sz="1200" b="0" i="0" u="none" strike="noStrike" cap="none" spc="0">
+                <a:solidFill>
+                  <a:srgbClr val="000000"/>
+                </a:solidFill>
+                <a:latin typeface="Open Sans"/>
+                <a:ea typeface="Open Sans"/>
+                <a:cs typeface="Open Sans"/>
+              </a:rPr>
+              <a:t>, полученных последовательными отражениями. Эта конструкция называется </a:t>
+            </a:r>
+            <a:r>
+              <a:rPr lang="ru-RU" sz="1200" b="1" i="0" u="none" strike="noStrike" cap="none" spc="0">
+                <a:solidFill>
+                  <a:srgbClr val="000000"/>
+                </a:solidFill>
+                <a:latin typeface="Open Sans"/>
+                <a:ea typeface="Open Sans"/>
+                <a:cs typeface="Open Sans"/>
+              </a:rPr>
+              <a:t>разверткой </a:t>
+            </a:r>
+            <a:r>
+              <a:rPr lang="ru-RU" sz="1200" b="0" i="0" u="none" strike="noStrike" cap="none" spc="0">
+                <a:solidFill>
+                  <a:srgbClr val="000000"/>
+                </a:solidFill>
+                <a:latin typeface="Open Sans"/>
+                <a:ea typeface="Open Sans"/>
+                <a:cs typeface="Open Sans"/>
+              </a:rPr>
+              <a:t>(</a:t>
             </a:r>
             <a:r>
               <a:rPr lang="ru-RU" sz="1200" b="0" i="1" u="none" strike="noStrike" cap="none" spc="0">
@@ -12754,7 +15114,7 @@
                 <a:ea typeface="Open Sans"/>
                 <a:cs typeface="Open Sans"/>
               </a:rPr>
-              <a:t>∂D</a:t>
+              <a:t>unfolding</a:t>
             </a:r>
             <a:r>
               <a:rPr lang="ru-RU" sz="1200" b="0" i="0" u="none" strike="noStrike" cap="none" spc="0">
@@ -12765,10 +15125,10 @@
                 <a:ea typeface="Open Sans"/>
                 <a:cs typeface="Open Sans"/>
               </a:rPr>
-              <a:t>, мы отражаем сам квадрат </a:t>
-            </a:r>
-            <a:r>
-              <a:rPr lang="ru-RU" sz="1200" b="0" i="1" u="none" strike="noStrike" cap="none" spc="0">
+              <a:t>) бильярдной траектории. Чтобы восстановить исходную траекторию в </a:t>
+            </a:r>
+            <a:r>
+              <a:rPr lang="ru-RU" sz="1200" b="1" i="1" u="none" strike="noStrike" cap="none" spc="0">
                 <a:solidFill>
                   <a:srgbClr val="000000"/>
                 </a:solidFill>
@@ -12787,10 +15147,21 @@
                 <a:ea typeface="Open Sans"/>
                 <a:cs typeface="Open Sans"/>
               </a:rPr>
-              <a:t> относительно этой стороны и позволяем частице двигаться прямолинейно в зеркальное отображение </a:t>
-            </a:r>
-            <a:r>
-              <a:rPr lang="ru-RU" sz="1200" b="0" i="1" u="none" strike="noStrike" cap="none" spc="0">
+              <a:t>, нужно «сложить» полученную цепочку </a:t>
+            </a:r>
+            <a:r>
+              <a:rPr lang="ru-RU" sz="1200" b="1" i="0" u="none" strike="noStrike" cap="none" spc="0">
+                <a:solidFill>
+                  <a:srgbClr val="000000"/>
+                </a:solidFill>
+                <a:latin typeface="Open Sans"/>
+                <a:ea typeface="Open Sans"/>
+                <a:cs typeface="Open Sans"/>
+              </a:rPr>
+              <a:t>соседних копий </a:t>
+            </a:r>
+            <a:r>
+              <a:rPr lang="ru-RU" sz="1200" b="1" i="1" u="none" strike="noStrike" cap="none" spc="0">
                 <a:solidFill>
                   <a:srgbClr val="000000"/>
                 </a:solidFill>
@@ -12809,98 +15180,10 @@
                 <a:ea typeface="Open Sans"/>
                 <a:cs typeface="Open Sans"/>
               </a:rPr>
-              <a:t>. Если продолжать делать это при каждом столкновении, наша частица будет двигаться вдоль прямой линии сквозь множество копий </a:t>
-            </a:r>
-            <a:r>
-              <a:rPr lang="ru-RU" sz="1200" b="0" i="1" u="none" strike="noStrike" cap="none" spc="0">
-                <a:solidFill>
-                  <a:srgbClr val="000000"/>
-                </a:solidFill>
-                <a:latin typeface="Open Sans"/>
-                <a:ea typeface="Open Sans"/>
-                <a:cs typeface="Open Sans"/>
-              </a:rPr>
-              <a:t>D</a:t>
-            </a:r>
-            <a:r>
-              <a:rPr lang="ru-RU" sz="1200" b="0" i="0" u="none" strike="noStrike" cap="none" spc="0">
-                <a:solidFill>
-                  <a:srgbClr val="000000"/>
-                </a:solidFill>
-                <a:latin typeface="Open Sans"/>
-                <a:ea typeface="Open Sans"/>
-                <a:cs typeface="Open Sans"/>
-              </a:rPr>
-              <a:t>, полученных последовательными отражениями. Эта конструкция называется разверткой (</a:t>
-            </a:r>
-            <a:r>
-              <a:rPr lang="ru-RU" sz="1200" b="0" i="1" u="none" strike="noStrike" cap="none" spc="0">
-                <a:solidFill>
-                  <a:srgbClr val="000000"/>
-                </a:solidFill>
-                <a:latin typeface="Open Sans"/>
-                <a:ea typeface="Open Sans"/>
-                <a:cs typeface="Open Sans"/>
-              </a:rPr>
-              <a:t>unfolding</a:t>
-            </a:r>
-            <a:r>
-              <a:rPr lang="ru-RU" sz="1200" b="0" i="0" u="none" strike="noStrike" cap="none" spc="0">
-                <a:solidFill>
-                  <a:srgbClr val="000000"/>
-                </a:solidFill>
-                <a:latin typeface="Open Sans"/>
-                <a:ea typeface="Open Sans"/>
-                <a:cs typeface="Open Sans"/>
-              </a:rPr>
-              <a:t>) бильярдной траектории. Чтобы восстановить исходную траекторию в </a:t>
-            </a:r>
-            <a:r>
-              <a:rPr lang="ru-RU" sz="1200" b="0" i="1" u="none" strike="noStrike" cap="none" spc="0">
-                <a:solidFill>
-                  <a:srgbClr val="000000"/>
-                </a:solidFill>
-                <a:latin typeface="Open Sans"/>
-                <a:ea typeface="Open Sans"/>
-                <a:cs typeface="Open Sans"/>
-              </a:rPr>
-              <a:t>D</a:t>
-            </a:r>
-            <a:r>
-              <a:rPr lang="ru-RU" sz="1200" b="0" i="0" u="none" strike="noStrike" cap="none" spc="0">
-                <a:solidFill>
-                  <a:srgbClr val="000000"/>
-                </a:solidFill>
-                <a:latin typeface="Open Sans"/>
-                <a:ea typeface="Open Sans"/>
-                <a:cs typeface="Open Sans"/>
-              </a:rPr>
-              <a:t>, нужно «сложить» полученную цепочку соседних копий </a:t>
-            </a:r>
-            <a:r>
-              <a:rPr lang="ru-RU" sz="1200" b="0" i="1" u="none" strike="noStrike" cap="none" spc="0">
-                <a:solidFill>
-                  <a:srgbClr val="000000"/>
-                </a:solidFill>
-                <a:latin typeface="Open Sans"/>
-                <a:ea typeface="Open Sans"/>
-                <a:cs typeface="Open Sans"/>
-              </a:rPr>
-              <a:t>D</a:t>
-            </a:r>
-            <a:r>
-              <a:rPr lang="ru-RU" sz="1200" b="0" i="0" u="none" strike="noStrike" cap="none" spc="0">
-                <a:solidFill>
-                  <a:srgbClr val="000000"/>
-                </a:solidFill>
-                <a:latin typeface="Open Sans"/>
-                <a:ea typeface="Open Sans"/>
-                <a:cs typeface="Open Sans"/>
-              </a:rPr>
               <a:t> обратно в </a:t>
             </a:r>
             <a:r>
-              <a:rPr lang="ru-RU" sz="1200" b="0" i="1" u="none" strike="noStrike" cap="none" spc="0">
+              <a:rPr lang="ru-RU" sz="1200" b="1" i="1" u="none" strike="noStrike" cap="none" spc="0">
                 <a:solidFill>
                   <a:srgbClr val="000000"/>
                 </a:solidFill>
@@ -12970,7 +15253,7 @@
       </p:grpSpPr>
       <p:pic>
         <p:nvPicPr>
-          <p:cNvPr id="947206334" name="Picture 1" descr="image12.png"/>
+          <p:cNvPr id="1527951567" name="Picture 1" descr="image12.png"/>
           <p:cNvPicPr>
             <a:picLocks noChangeAspect="1"/>
           </p:cNvPicPr>
@@ -12992,7 +15275,7 @@
       </p:pic>
       <p:sp>
         <p:nvSpPr>
-          <p:cNvPr id="982614563" name="Rectangle 2"/>
+          <p:cNvPr id="1907198284" name="Rectangle 2"/>
           <p:cNvSpPr/>
           <p:nvPr/>
         </p:nvSpPr>
@@ -13027,7 +15310,7 @@
       </p:sp>
       <p:sp>
         <p:nvSpPr>
-          <p:cNvPr id="228412901" name="TextBox 3"/>
+          <p:cNvPr id="535522680" name="TextBox 3"/>
           <p:cNvSpPr txBox="1"/>
           <p:nvPr/>
         </p:nvSpPr>
@@ -13074,7 +15357,7 @@
       </p:sp>
       <p:sp>
         <p:nvSpPr>
-          <p:cNvPr id="1633681786" name="TextBox 4"/>
+          <p:cNvPr id="1992617880" name="TextBox 4"/>
           <p:cNvSpPr txBox="1"/>
           <p:nvPr/>
         </p:nvSpPr>
@@ -13155,7 +15438,7 @@
       </p:sp>
       <p:sp>
         <p:nvSpPr>
-          <p:cNvPr id="1040424614" name="Rectangle 5"/>
+          <p:cNvPr id="1627907755" name="Rectangle 5"/>
           <p:cNvSpPr/>
           <p:nvPr/>
         </p:nvSpPr>
@@ -13190,7 +15473,7 @@
       </p:sp>
       <p:pic>
         <p:nvPicPr>
-          <p:cNvPr id="1408105242" name="">
+          <p:cNvPr id="1325038003" name="">
             <a:hlinkClick r:id="" action="ppaction://media"/>
           </p:cNvPr>
           <p:cNvPicPr>
@@ -13261,7 +15544,7 @@
       </p:grpSpPr>
       <p:pic>
         <p:nvPicPr>
-          <p:cNvPr id="945263057" name="Picture 1" descr="image12.png"/>
+          <p:cNvPr id="837397425" name="Picture 1" descr="image12.png"/>
           <p:cNvPicPr>
             <a:picLocks noChangeAspect="1"/>
           </p:cNvPicPr>
@@ -13283,7 +15566,7 @@
       </p:pic>
       <p:sp>
         <p:nvSpPr>
-          <p:cNvPr id="113082008" name="Rectangle 2"/>
+          <p:cNvPr id="893428739" name="Rectangle 2"/>
           <p:cNvSpPr/>
           <p:nvPr/>
         </p:nvSpPr>
@@ -13318,7 +15601,7 @@
       </p:sp>
       <p:sp>
         <p:nvSpPr>
-          <p:cNvPr id="1926905726" name="TextBox 3"/>
+          <p:cNvPr id="142909611" name="TextBox 3"/>
           <p:cNvSpPr txBox="1"/>
           <p:nvPr/>
         </p:nvSpPr>
@@ -13365,7 +15648,7 @@
       </p:sp>
       <p:sp>
         <p:nvSpPr>
-          <p:cNvPr id="2115938319" name="TextBox 4"/>
+          <p:cNvPr id="2059679649" name="TextBox 4"/>
           <p:cNvSpPr txBox="1"/>
           <p:nvPr/>
         </p:nvSpPr>
@@ -13437,7 +15720,7 @@
       </p:sp>
       <p:sp>
         <p:nvSpPr>
-          <p:cNvPr id="981376346" name="Rectangle 5"/>
+          <p:cNvPr id="1535427219" name="Rectangle 5"/>
           <p:cNvSpPr/>
           <p:nvPr/>
         </p:nvSpPr>
@@ -13472,7 +15755,7 @@
       </p:sp>
       <p:sp>
         <p:nvSpPr>
-          <p:cNvPr id="334713314" name="Rectangle 6"/>
+          <p:cNvPr id="663880317" name="Rectangle 6"/>
           <p:cNvSpPr/>
           <p:nvPr/>
         </p:nvSpPr>
@@ -13507,14 +15790,14 @@
       </p:sp>
       <p:sp>
         <p:nvSpPr>
-          <p:cNvPr id="872421013" name=""/>
+          <p:cNvPr id="906110639" name=""/>
           <p:cNvSpPr txBox="1"/>
           <p:nvPr/>
         </p:nvSpPr>
         <p:spPr bwMode="auto">
           <a:xfrm rot="0" flipH="0" flipV="0">
-            <a:off x="422815" y="755430"/>
-            <a:ext cx="8540463" cy="4365399"/>
+            <a:off x="422814" y="755429"/>
+            <a:ext cx="8550542" cy="4213000"/>
           </a:xfrm>
           <a:prstGeom prst="rect">
             <a:avLst/>
@@ -13541,7 +15824,7 @@
               <a:t>В результате последовательного отражения квадрата </a:t>
             </a:r>
             <a:r>
-              <a:rPr lang="ru-RU" sz="1200" b="0" i="1" u="none" strike="noStrike" cap="none" spc="0">
+              <a:rPr lang="ru-RU" sz="1200" b="1" i="1" u="none" strike="noStrike" cap="none" spc="0">
                 <a:solidFill>
                   <a:srgbClr val="000000"/>
                 </a:solidFill>
@@ -13552,6 +15835,17 @@
               <a:t>D</a:t>
             </a:r>
             <a:r>
+              <a:rPr lang="ru-RU" sz="1200" b="1" i="0" u="none" strike="noStrike" cap="none" spc="0">
+                <a:solidFill>
+                  <a:srgbClr val="000000"/>
+                </a:solidFill>
+                <a:latin typeface="Open Sans"/>
+                <a:ea typeface="Open Sans"/>
+                <a:cs typeface="Open Sans"/>
+              </a:rPr>
+              <a:t> </a:t>
+            </a:r>
+            <a:r>
               <a:rPr lang="ru-RU" sz="1200" b="0" i="0" u="none" strike="noStrike" cap="none" spc="0">
                 <a:solidFill>
                   <a:srgbClr val="000000"/>
@@ -13560,7 +15854,29 @@
                 <a:ea typeface="Open Sans"/>
                 <a:cs typeface="Open Sans"/>
               </a:rPr>
-              <a:t> возникает бесконечная периодическая структура, состоящая из его зеркальных копий. Каждая копия получается отражением исходного квадрата относительно одной из сторон соседней копии.</a:t>
+              <a:t>возникает бесконечная </a:t>
+            </a:r>
+            <a:r>
+              <a:rPr lang="ru-RU" sz="1200" b="1" i="0" u="none" strike="noStrike" cap="none" spc="0">
+                <a:solidFill>
+                  <a:srgbClr val="000000"/>
+                </a:solidFill>
+                <a:latin typeface="Open Sans"/>
+                <a:ea typeface="Open Sans"/>
+                <a:cs typeface="Open Sans"/>
+              </a:rPr>
+              <a:t>периодическая структура</a:t>
+            </a:r>
+            <a:r>
+              <a:rPr lang="ru-RU" sz="1200" b="0" i="0" u="none" strike="noStrike" cap="none" spc="0">
+                <a:solidFill>
+                  <a:srgbClr val="000000"/>
+                </a:solidFill>
+                <a:latin typeface="Open Sans"/>
+                <a:ea typeface="Open Sans"/>
+                <a:cs typeface="Open Sans"/>
+              </a:rPr>
+              <a:t>, состоящая из его зеркальных копий. Каждая копия получается отражением исходного квадрата относительно одной из сторон соседней копии.</a:t>
             </a:r>
             <a:endParaRPr sz="1200" b="0" i="0" u="none" strike="noStrike" cap="none" spc="0">
               <a:solidFill>
@@ -13809,7 +16125,29 @@
                 <a:ea typeface="Open Sans"/>
                 <a:cs typeface="Open Sans"/>
               </a:rPr>
-              <a:t>служит фундаментальной областью: вся плоскость покрывается его параллельными переносами.</a:t>
+              <a:t>служит </a:t>
+            </a:r>
+            <a:r>
+              <a:rPr lang="ru-RU" sz="1200" b="1" i="0" u="none" strike="noStrike" cap="none" spc="0">
+                <a:solidFill>
+                  <a:srgbClr val="000000"/>
+                </a:solidFill>
+                <a:latin typeface="Open Sans"/>
+                <a:ea typeface="Open Sans"/>
+                <a:cs typeface="Open Sans"/>
+              </a:rPr>
+              <a:t>фундаментальной областью</a:t>
+            </a:r>
+            <a:r>
+              <a:rPr lang="ru-RU" sz="1200" b="0" i="0" u="none" strike="noStrike" cap="none" spc="0">
+                <a:solidFill>
+                  <a:srgbClr val="000000"/>
+                </a:solidFill>
+                <a:latin typeface="Open Sans"/>
+                <a:ea typeface="Open Sans"/>
+                <a:cs typeface="Open Sans"/>
+              </a:rPr>
+              <a:t>: вся плоскость покрывается его параллельными переносами.</a:t>
             </a:r>
             <a:endParaRPr sz="1200" b="0" i="0" u="none" strike="noStrike" cap="none" spc="0">
               <a:solidFill>
@@ -13854,7 +16192,7 @@
                 <a:ea typeface="Open Sans"/>
                 <a:cs typeface="Open Sans"/>
               </a:rPr>
-              <a:t>, а затем отождествить его противоположные стороны. Полученная поверхность называется </a:t>
+              <a:t>, а затем отождествить его противоположные стороны. Такая поверхность называется </a:t>
             </a:r>
             <a:r>
               <a:rPr lang="ru-RU" sz="1200" b="1" i="0" u="none" strike="noStrike" cap="none" spc="0">
@@ -14130,10 +16468,21 @@
                 <a:ea typeface="Open Sans"/>
                 <a:cs typeface="Open Sans"/>
               </a:rPr>
-              <a:t>(она движется вдоль замкнутой геодезической</a:t>
-            </a:r>
-            <a:r>
-              <a:rPr lang="en-US" sz="1200" b="0" i="0" u="none" strike="noStrike" cap="none" spc="0">
+              <a:t>(движется вдоль замкнутой </a:t>
+            </a:r>
+            <a:r>
+              <a:rPr lang="ru-RU" sz="1200" b="0" i="0" u="sng" strike="noStrike" cap="none" spc="0">
+                <a:solidFill>
+                  <a:srgbClr val="000000"/>
+                </a:solidFill>
+                <a:latin typeface="Open Sans"/>
+                <a:ea typeface="Open Sans"/>
+                <a:cs typeface="Open Sans"/>
+              </a:rPr>
+              <a:t>геодезической</a:t>
+            </a:r>
+            <a:r>
+              <a:rPr lang="en-US" sz="1200" b="0" i="0" u="sng" strike="noStrike" cap="none" spc="0">
                 <a:solidFill>
                   <a:srgbClr val="000000"/>
                 </a:solidFill>
@@ -14144,7 +16493,7 @@
               <a:t> </a:t>
             </a:r>
             <a:r>
-              <a:rPr lang="ru-RU" sz="1200" b="0" i="0" u="none" strike="noStrike" cap="none" spc="0">
+              <a:rPr lang="ru-RU" sz="1200" b="0" i="0" u="sng" strike="noStrike" cap="none" spc="0">
                 <a:solidFill>
                   <a:srgbClr val="000000"/>
                 </a:solidFill>
@@ -14386,6 +16735,17 @@
               <a:t> </a:t>
             </a:r>
             <a:r>
+              <a:rPr lang="en-US" sz="1200" b="0" i="1" u="none" strike="noStrike" cap="none" spc="0">
+                <a:solidFill>
+                  <a:srgbClr val="000000"/>
+                </a:solidFill>
+                <a:latin typeface="Open Sans"/>
+                <a:ea typeface="Open Sans"/>
+                <a:cs typeface="Open Sans"/>
+              </a:rPr>
+              <a:t>a</a:t>
+            </a:r>
+            <a:r>
               <a:rPr lang="en-US" sz="1200" b="0" i="0" u="none" strike="noStrike" cap="none" spc="0">
                 <a:solidFill>
                   <a:srgbClr val="000000"/>
@@ -14394,7 +16754,7 @@
                 <a:ea typeface="Open Sans"/>
                 <a:cs typeface="Open Sans"/>
               </a:rPr>
-              <a:t>a </a:t>
+              <a:t> </a:t>
             </a:r>
             <a:r>
               <a:rPr lang="ru-RU" sz="1200" b="0" i="0" u="none" strike="noStrike" cap="none" spc="0">
@@ -14405,7 +16765,40 @@
                 <a:ea typeface="Open Sans"/>
                 <a:cs typeface="Open Sans"/>
               </a:rPr>
-              <a:t>и </a:t>
+              <a:t>и</a:t>
+            </a:r>
+            <a:r>
+              <a:rPr lang="ru-RU" sz="1200" b="0" i="1" u="none" strike="noStrike" cap="none" spc="0">
+                <a:solidFill>
+                  <a:srgbClr val="000000"/>
+                </a:solidFill>
+                <a:latin typeface="Open Sans"/>
+                <a:ea typeface="Open Sans"/>
+                <a:cs typeface="Open Sans"/>
+              </a:rPr>
+              <a:t> </a:t>
+            </a:r>
+            <a:r>
+              <a:rPr lang="en-US" sz="1200" b="0" i="1" u="none" strike="noStrike" cap="none" spc="0">
+                <a:solidFill>
+                  <a:srgbClr val="000000"/>
+                </a:solidFill>
+                <a:latin typeface="Open Sans"/>
+                <a:ea typeface="Open Sans"/>
+                <a:cs typeface="Open Sans"/>
+              </a:rPr>
+              <a:t>b</a:t>
+            </a:r>
+            <a:r>
+              <a:rPr lang="ru-RU" sz="1200" b="0" i="0" u="none" strike="noStrike" cap="none" spc="0">
+                <a:solidFill>
+                  <a:srgbClr val="000000"/>
+                </a:solidFill>
+                <a:latin typeface="Open Sans"/>
+                <a:ea typeface="Open Sans"/>
+                <a:cs typeface="Open Sans"/>
+              </a:rPr>
+              <a:t> можно преобразовать в единичный квадрат с помощью масштабирования координат:</a:t>
             </a:r>
             <a:r>
               <a:rPr lang="en-US" sz="1200" b="0" i="0" u="none" strike="noStrike" cap="none" spc="0">
@@ -14416,30 +16809,30 @@
                 <a:ea typeface="Open Sans"/>
                 <a:cs typeface="Open Sans"/>
               </a:rPr>
-              <a:t>b</a:t>
-            </a:r>
-            <a:r>
-              <a:rPr lang="ru-RU" sz="1200" b="0" i="0" u="none" strike="noStrike" cap="none" spc="0">
-                <a:solidFill>
-                  <a:srgbClr val="000000"/>
-                </a:solidFill>
-                <a:latin typeface="Open Sans"/>
-                <a:ea typeface="Open Sans"/>
-                <a:cs typeface="Open Sans"/>
-              </a:rPr>
-              <a:t> можно преобразовать в единичный квадрат с помощью масштабирования координат:</a:t>
-            </a:r>
-            <a:r>
-              <a:rPr lang="en-US" sz="1200" b="0" i="0" u="none" strike="noStrike" cap="none" spc="0">
-                <a:solidFill>
-                  <a:srgbClr val="000000"/>
-                </a:solidFill>
-                <a:latin typeface="Open Sans"/>
-                <a:ea typeface="Open Sans"/>
-                <a:cs typeface="Open Sans"/>
-              </a:rPr>
               <a:t> </a:t>
             </a:r>
+            <a:endParaRPr sz="1200">
+              <a:latin typeface="Open Sans"/>
+              <a:cs typeface="Open Sans"/>
+            </a:endParaRPr>
+          </a:p>
+          <a:p>
+            <a:pPr indent="274320" algn="just">
+              <a:defRPr/>
+            </a:pPr>
+            <a:endParaRPr lang="en-US" sz="200" b="0" i="0" u="none" strike="noStrike" cap="none" spc="0">
+              <a:solidFill>
+                <a:srgbClr val="000000"/>
+              </a:solidFill>
+              <a:latin typeface="Open Sans"/>
+              <a:ea typeface="Open Sans"/>
+              <a:cs typeface="Open Sans"/>
+            </a:endParaRPr>
+          </a:p>
+          <a:p>
+            <a:pPr indent="274320" algn="ctr">
+              <a:defRPr/>
+            </a:pPr>
             <a:r>
               <a:rPr lang="en-US" sz="1200" b="0" i="1" u="none" strike="noStrike" cap="none" spc="0">
                 <a:solidFill>
@@ -14553,7 +16946,7 @@
       </p:grpSpPr>
       <p:pic>
         <p:nvPicPr>
-          <p:cNvPr id="258086538" name="Picture 1" descr="image12.png"/>
+          <p:cNvPr id="1585975334" name="Picture 1" descr="image12.png"/>
           <p:cNvPicPr>
             <a:picLocks noChangeAspect="1"/>
           </p:cNvPicPr>
@@ -14575,7 +16968,7 @@
       </p:pic>
       <p:sp>
         <p:nvSpPr>
-          <p:cNvPr id="1425321247" name="Rectangle 2"/>
+          <p:cNvPr id="1743762080" name="Rectangle 2"/>
           <p:cNvSpPr/>
           <p:nvPr/>
         </p:nvSpPr>
@@ -14610,7 +17003,7 @@
       </p:sp>
       <p:sp>
         <p:nvSpPr>
-          <p:cNvPr id="1741492031" name="TextBox 3"/>
+          <p:cNvPr id="36284719" name="TextBox 3"/>
           <p:cNvSpPr txBox="1"/>
           <p:nvPr/>
         </p:nvSpPr>
@@ -14657,7 +17050,7 @@
       </p:sp>
       <p:sp>
         <p:nvSpPr>
-          <p:cNvPr id="2112748510" name="TextBox 4"/>
+          <p:cNvPr id="2127544787" name="TextBox 4"/>
           <p:cNvSpPr txBox="1"/>
           <p:nvPr/>
         </p:nvSpPr>
@@ -14755,7 +17148,7 @@
       </p:sp>
       <p:sp>
         <p:nvSpPr>
-          <p:cNvPr id="343663942" name="Rectangle 5"/>
+          <p:cNvPr id="1756131432" name="Rectangle 5"/>
           <p:cNvSpPr/>
           <p:nvPr/>
         </p:nvSpPr>
@@ -14830,7 +17223,7 @@
       </p:grpSpPr>
       <p:pic>
         <p:nvPicPr>
-          <p:cNvPr id="1989238988" name="Picture 1" descr="image12.png"/>
+          <p:cNvPr id="1276884677" name="Picture 1" descr="image12.png"/>
           <p:cNvPicPr>
             <a:picLocks noChangeAspect="1"/>
           </p:cNvPicPr>
@@ -14852,7 +17245,7 @@
       </p:pic>
       <p:sp>
         <p:nvSpPr>
-          <p:cNvPr id="1324793416" name="Rectangle 2"/>
+          <p:cNvPr id="1420169737" name="Rectangle 2"/>
           <p:cNvSpPr/>
           <p:nvPr/>
         </p:nvSpPr>
@@ -14887,7 +17280,7 @@
       </p:sp>
       <p:sp>
         <p:nvSpPr>
-          <p:cNvPr id="340947693" name="TextBox 3"/>
+          <p:cNvPr id="1403159289" name="TextBox 3"/>
           <p:cNvSpPr txBox="1"/>
           <p:nvPr/>
         </p:nvSpPr>
@@ -14934,7 +17327,7 @@
       </p:sp>
       <p:sp>
         <p:nvSpPr>
-          <p:cNvPr id="219443036" name="TextBox 4"/>
+          <p:cNvPr id="897725235" name="TextBox 4"/>
           <p:cNvSpPr txBox="1"/>
           <p:nvPr/>
         </p:nvSpPr>
@@ -14984,7 +17377,7 @@
       </p:sp>
       <p:sp>
         <p:nvSpPr>
-          <p:cNvPr id="1789183496" name="Rectangle 5"/>
+          <p:cNvPr id="1638160582" name="Rectangle 5"/>
           <p:cNvSpPr/>
           <p:nvPr/>
         </p:nvSpPr>
@@ -15019,7 +17412,7 @@
       </p:sp>
       <p:sp>
         <p:nvSpPr>
-          <p:cNvPr id="887908528" name="Rectangle 6"/>
+          <p:cNvPr id="396282813" name="Rectangle 6"/>
           <p:cNvSpPr/>
           <p:nvPr/>
         </p:nvSpPr>
@@ -15054,7 +17447,7 @@
       </p:sp>
       <p:sp>
         <p:nvSpPr>
-          <p:cNvPr id="977390533" name=""/>
+          <p:cNvPr id="360542481" name=""/>
           <p:cNvSpPr txBox="1"/>
           <p:nvPr/>
         </p:nvSpPr>
@@ -15082,14 +17475,14 @@
       </p:sp>
       <p:sp>
         <p:nvSpPr>
-          <p:cNvPr id="1734859550" name=""/>
+          <p:cNvPr id="924759688" name=""/>
           <p:cNvSpPr txBox="1"/>
           <p:nvPr/>
         </p:nvSpPr>
         <p:spPr bwMode="auto">
           <a:xfrm rot="0" flipH="0" flipV="0">
-            <a:off x="474045" y="848353"/>
-            <a:ext cx="8556912" cy="3487219"/>
+            <a:off x="474044" y="848352"/>
+            <a:ext cx="8572391" cy="3487219"/>
           </a:xfrm>
           <a:prstGeom prst="rect">
             <a:avLst/>
@@ -15610,7 +18003,7 @@
               <a:t>Имеет место быть геометрическое свойство границы (</a:t>
             </a:r>
             <a:r>
-              <a:rPr sz="1200" b="0" i="0" u="sng">
+              <a:rPr sz="1200" b="0" i="1" u="none">
                 <a:solidFill>
                   <a:srgbClr val="000000"/>
                 </a:solidFill>
@@ -15643,7 +18036,7 @@
               <a:t>Отсюда вытекает главная особенность траекторий: если частица пролетает через один фокус, то после отражения от границы она обязательно пройдет через второй фокус. Такие траектории образуют особое </a:t>
             </a:r>
             <a:r>
-              <a:rPr sz="1200" b="0" i="0" u="none">
+              <a:rPr sz="1200" b="1" i="0" u="none">
                 <a:solidFill>
                   <a:srgbClr val="000000"/>
                 </a:solidFill>
@@ -15868,7 +18261,29 @@
                 <a:ea typeface="Open Sans"/>
                 <a:cs typeface="Open Sans"/>
               </a:rPr>
-              <a:t>(огибающих кривых). Оказывается, что для любого типа траекторий существует некая софокусная (имеющая те же фокусы </a:t>
+              <a:t>(</a:t>
+            </a:r>
+            <a:r>
+              <a:rPr sz="1200" b="0" i="1" u="none">
+                <a:solidFill>
+                  <a:srgbClr val="000000"/>
+                </a:solidFill>
+                <a:latin typeface="Open Sans"/>
+                <a:ea typeface="Open Sans"/>
+                <a:cs typeface="Open Sans"/>
+              </a:rPr>
+              <a:t>огибающих кривых</a:t>
+            </a:r>
+            <a:r>
+              <a:rPr sz="1200" b="0" i="0" u="none">
+                <a:solidFill>
+                  <a:srgbClr val="000000"/>
+                </a:solidFill>
+                <a:latin typeface="Open Sans"/>
+                <a:ea typeface="Open Sans"/>
+                <a:cs typeface="Open Sans"/>
+              </a:rPr>
+              <a:t>). Оказывается, что для любого типа траекторий существует некая софокусная (имеющая те же фокусы </a:t>
             </a:r>
             <mc:AlternateContent xmlns:mc="http://schemas.openxmlformats.org/markup-compatibility/2006" xmlns:m="http://schemas.openxmlformats.org/officeDocument/2006/math">
               <mc:Choice xmlns:a14="http://schemas.microsoft.com/office/drawing/2010/main" Requires="a14">
@@ -16035,7 +18450,7 @@
                 <a:ea typeface="Open Sans"/>
                 <a:cs typeface="Open Sans"/>
               </a:rPr>
-              <a:t>, а как бы «наматываются» на них.</a:t>
+              <a:t>, но касаются их.</a:t>
             </a:r>
             <a:endParaRPr>
               <a:latin typeface="Open Sans"/>
@@ -16055,7 +18470,29 @@
                 <a:ea typeface="Open Sans"/>
                 <a:cs typeface="Open Sans"/>
               </a:rPr>
-              <a:t>В терминах теории динамических систем это означает, что фазовое пространство (пространство столкновений) полностью расслоено на </a:t>
+              <a:t>В терминах теории динамических систем это означает, что </a:t>
+            </a:r>
+            <a:r>
+              <a:rPr sz="1200" b="1" i="0" u="none">
+                <a:solidFill>
+                  <a:srgbClr val="000000"/>
+                </a:solidFill>
+                <a:latin typeface="Open Sans"/>
+                <a:ea typeface="Open Sans"/>
+                <a:cs typeface="Open Sans"/>
+              </a:rPr>
+              <a:t>фазовое пространство</a:t>
+            </a:r>
+            <a:r>
+              <a:rPr sz="1200" b="0" i="0" u="none">
+                <a:solidFill>
+                  <a:srgbClr val="000000"/>
+                </a:solidFill>
+                <a:latin typeface="Open Sans"/>
+                <a:ea typeface="Open Sans"/>
+                <a:cs typeface="Open Sans"/>
+              </a:rPr>
+              <a:t> (пространство столкновений) полностью расслоено на </a:t>
             </a:r>
             <a:r>
               <a:rPr sz="1200" b="1" i="0" u="none">
